--- a/paper/midterm_slides.pptx
+++ b/paper/midterm_slides.pptx
@@ -19,6 +19,8 @@
     <p:sldId id="267" r:id="rId18"/>
     <p:sldId id="268" r:id="rId19"/>
     <p:sldId id="269" r:id="rId20"/>
+    <p:sldId id="270" r:id="rId21"/>
+    <p:sldId id="271" r:id="rId22"/>
   </p:sldIdLst>
   <p:sldSz cx="12191695" cy="6858000" type="screen4x3"/>
   <p:notesSz cx="6858000" cy="9144000"/>
@@ -4434,7 +4436,7 @@
                 <a:ea typeface="Malgun Gothic"/>
                 <a:latin typeface="Malgun Gothic"/>
               </a:rPr>
-              <a:t>11. 종합 — 본 연구의 가치 3가지</a:t>
+              <a:t>11. ★ Step 2-A — 100명 표본에서도 환각 0%</a:t>
             </a:r>
           </a:p>
         </p:txBody>
@@ -4469,7 +4471,7 @@
                 <a:ea typeface="Malgun Gothic"/>
                 <a:latin typeface="Malgun Gothic"/>
               </a:rPr>
-              <a:t>Step 1 (8일 작업) 마무리</a:t>
+              <a:t>Step 1의 약점(표본 10명) 해소 + 통계적 안정성 입증</a:t>
             </a:r>
           </a:p>
         </p:txBody>
@@ -4519,70 +4521,35 @@
       </p:sp>
       <p:sp>
         <p:nvSpPr>
-          <p:cNvPr id="6" name="Rounded Rectangle 5"/>
-          <p:cNvSpPr/>
-          <p:nvPr/>
-        </p:nvSpPr>
-        <p:spPr>
-          <a:xfrm>
-            <a:off x="605847" y="1260000"/>
-            <a:ext cx="3420000" cy="3060000"/>
-          </a:xfrm>
-          <a:prstGeom prst="roundRect">
-            <a:avLst/>
-          </a:prstGeom>
-          <a:solidFill>
-            <a:srgbClr val="4C72B0"/>
-          </a:solidFill>
-          <a:ln>
-            <a:noFill/>
-          </a:ln>
-        </p:spPr>
-        <p:style>
-          <a:lnRef idx="1">
-            <a:schemeClr val="accent1"/>
-          </a:lnRef>
-          <a:fillRef idx="3">
-            <a:schemeClr val="accent1"/>
-          </a:fillRef>
-          <a:effectRef idx="2">
-            <a:schemeClr val="accent1"/>
-          </a:effectRef>
-          <a:fontRef idx="minor">
-            <a:schemeClr val="lt1"/>
-          </a:fontRef>
-        </p:style>
-        <p:txBody>
-          <a:bodyPr rtlCol="0" anchor="ctr" lIns="216000" rIns="216000" tIns="216000"/>
-          <a:lstStyle/>
-          <a:p>
-            <a:pPr algn="ctr"/>
-            <a:r>
-              <a:rPr sz="2200" b="1">
-                <a:solidFill>
-                  <a:srgbClr val="FFFFFF"/>
-                </a:solidFill>
-                <a:ea typeface="Malgun Gothic"/>
-                <a:latin typeface="Malgun Gothic"/>
-              </a:rPr>
-              <a:t>예측 성능</a:t>
-            </a:r>
-          </a:p>
-          <a:p>
-            <a:pPr algn="ctr"/>
-            <a:r>
-              <a:rPr sz="1200" b="0">
-                <a:solidFill>
-                  <a:srgbClr val="FFFFFF"/>
-                </a:solidFill>
-                <a:ea typeface="Malgun Gothic"/>
-                <a:latin typeface="Malgun Gothic"/>
-              </a:rPr>
-              <a:t>
-XGBoost AUROC 0.7587 ± 0.0008
-5-fold 안정적 우위
-TabNet 0.7518 — 비슷한 성능 +
-어텐션 해석성 추가</a:t>
+          <p:cNvPr id="6" name="TextBox 5"/>
+          <p:cNvSpPr txBox="1"/>
+          <p:nvPr/>
+        </p:nvSpPr>
+        <p:spPr>
+          <a:xfrm>
+            <a:off x="360000" y="1152000"/>
+            <a:ext cx="5400000" cy="360000"/>
+          </a:xfrm>
+          <a:prstGeom prst="rect">
+            <a:avLst/>
+          </a:prstGeom>
+          <a:noFill/>
+        </p:spPr>
+        <p:txBody>
+          <a:bodyPr wrap="square">
+            <a:spAutoFit/>
+          </a:bodyPr>
+          <a:lstStyle/>
+          <a:p>
+            <a:r>
+              <a:rPr sz="1800" b="1">
+                <a:solidFill>
+                  <a:srgbClr val="1F3A68"/>
+                </a:solidFill>
+                <a:ea typeface="Malgun Gothic"/>
+                <a:latin typeface="Malgun Gothic"/>
+              </a:rPr>
+              <a:t>표본 10배 확장 후 결과</a:t>
             </a:r>
           </a:p>
         </p:txBody>
@@ -4595,8 +4562,8 @@
         </p:nvSpPr>
         <p:spPr>
           <a:xfrm>
-            <a:off x="4385847" y="1260000"/>
-            <a:ext cx="3420000" cy="3060000"/>
+            <a:off x="360000" y="1548000"/>
+            <a:ext cx="5400000" cy="2520000"/>
           </a:xfrm>
           <a:prstGeom prst="roundRect">
             <a:avLst/>
@@ -4623,21 +4590,142 @@
           </a:fontRef>
         </p:style>
         <p:txBody>
-          <a:bodyPr rtlCol="0" anchor="ctr" lIns="216000" rIns="216000" tIns="216000"/>
-          <a:lstStyle/>
-          <a:p>
-            <a:pPr algn="ctr"/>
-            <a:r>
-              <a:rPr sz="2200" b="1">
+          <a:bodyPr rtlCol="0" anchor="ctr"/>
+          <a:lstStyle/>
+          <a:p>
+            <a:pPr algn="ctr"/>
+          </a:p>
+        </p:txBody>
+      </p:sp>
+      <p:sp>
+        <p:nvSpPr>
+          <p:cNvPr id="8" name="TextBox 7"/>
+          <p:cNvSpPr txBox="1"/>
+          <p:nvPr/>
+        </p:nvSpPr>
+        <p:spPr>
+          <a:xfrm>
+            <a:off x="540000" y="1800000"/>
+            <a:ext cx="5040000" cy="360000"/>
+          </a:xfrm>
+          <a:prstGeom prst="rect">
+            <a:avLst/>
+          </a:prstGeom>
+          <a:noFill/>
+        </p:spPr>
+        <p:txBody>
+          <a:bodyPr wrap="square">
+            <a:spAutoFit/>
+          </a:bodyPr>
+          <a:lstStyle/>
+          <a:p>
+            <a:pPr algn="ctr"/>
+            <a:r>
+              <a:rPr sz="1600" b="0">
                 <a:solidFill>
                   <a:srgbClr val="FFFFFF"/>
                 </a:solidFill>
                 <a:ea typeface="Malgun Gothic"/>
                 <a:latin typeface="Malgun Gothic"/>
               </a:rPr>
-              <a:t>해석 일관성</a:t>
-            </a:r>
-          </a:p>
+              <a:t>Hallucination Rate</a:t>
+            </a:r>
+          </a:p>
+        </p:txBody>
+      </p:sp>
+      <p:sp>
+        <p:nvSpPr>
+          <p:cNvPr id="9" name="TextBox 8"/>
+          <p:cNvSpPr txBox="1"/>
+          <p:nvPr/>
+        </p:nvSpPr>
+        <p:spPr>
+          <a:xfrm>
+            <a:off x="540000" y="2232000"/>
+            <a:ext cx="5040000" cy="900000"/>
+          </a:xfrm>
+          <a:prstGeom prst="rect">
+            <a:avLst/>
+          </a:prstGeom>
+          <a:noFill/>
+        </p:spPr>
+        <p:txBody>
+          <a:bodyPr wrap="square">
+            <a:spAutoFit/>
+          </a:bodyPr>
+          <a:lstStyle/>
+          <a:p>
+            <a:pPr algn="ctr"/>
+            <a:r>
+              <a:rPr sz="5600" b="1">
+                <a:solidFill>
+                  <a:srgbClr val="FFFFFF"/>
+                </a:solidFill>
+                <a:ea typeface="Malgun Gothic"/>
+                <a:latin typeface="Malgun Gothic"/>
+              </a:rPr>
+              <a:t>0.000 / 100</a:t>
+            </a:r>
+          </a:p>
+        </p:txBody>
+      </p:sp>
+      <p:sp>
+        <p:nvSpPr>
+          <p:cNvPr id="10" name="TextBox 9"/>
+          <p:cNvSpPr txBox="1"/>
+          <p:nvPr/>
+        </p:nvSpPr>
+        <p:spPr>
+          <a:xfrm>
+            <a:off x="540000" y="3240000"/>
+            <a:ext cx="5040000" cy="360000"/>
+          </a:xfrm>
+          <a:prstGeom prst="rect">
+            <a:avLst/>
+          </a:prstGeom>
+          <a:noFill/>
+        </p:spPr>
+        <p:txBody>
+          <a:bodyPr wrap="square">
+            <a:spAutoFit/>
+          </a:bodyPr>
+          <a:lstStyle/>
+          <a:p>
+            <a:pPr algn="ctr"/>
+            <a:r>
+              <a:rPr sz="1400" b="0">
+                <a:solidFill>
+                  <a:srgbClr val="FFFFFF"/>
+                </a:solidFill>
+                <a:ea typeface="Malgun Gothic"/>
+                <a:latin typeface="Malgun Gothic"/>
+              </a:rPr>
+              <a:t>Gemini 100건 + Claude 100건</a:t>
+            </a:r>
+          </a:p>
+        </p:txBody>
+      </p:sp>
+      <p:sp>
+        <p:nvSpPr>
+          <p:cNvPr id="11" name="TextBox 10"/>
+          <p:cNvSpPr txBox="1"/>
+          <p:nvPr/>
+        </p:nvSpPr>
+        <p:spPr>
+          <a:xfrm>
+            <a:off x="540000" y="3600000"/>
+            <a:ext cx="5040000" cy="360000"/>
+          </a:xfrm>
+          <a:prstGeom prst="rect">
+            <a:avLst/>
+          </a:prstGeom>
+          <a:noFill/>
+        </p:spPr>
+        <p:txBody>
+          <a:bodyPr wrap="square">
+            <a:spAutoFit/>
+          </a:bodyPr>
+          <a:lstStyle/>
           <a:p>
             <a:pPr algn="ctr"/>
             <a:r>
@@ -4648,34 +4736,67 @@
                 <a:ea typeface="Malgun Gothic"/>
                 <a:latin typeface="Malgun Gothic"/>
               </a:rPr>
-              <a:t>
-Spearman ρ 0.117 (전체)
-−0.195 (Top-50)
-어텐션 ↔ SHAP의
-부분 일관 + 부분 상보 정량 검증</a:t>
-            </a:r>
-          </a:p>
-        </p:txBody>
-      </p:sp>
-      <p:sp>
-        <p:nvSpPr>
-          <p:cNvPr id="8" name="Rounded Rectangle 7"/>
+              <a:t>Step 1 (10건) 결과가 견고함을 통계로 입증</a:t>
+            </a:r>
+          </a:p>
+        </p:txBody>
+      </p:sp>
+      <p:sp>
+        <p:nvSpPr>
+          <p:cNvPr id="12" name="TextBox 11"/>
+          <p:cNvSpPr txBox="1"/>
+          <p:nvPr/>
+        </p:nvSpPr>
+        <p:spPr>
+          <a:xfrm>
+            <a:off x="6120000" y="1152000"/>
+            <a:ext cx="5400000" cy="360000"/>
+          </a:xfrm>
+          <a:prstGeom prst="rect">
+            <a:avLst/>
+          </a:prstGeom>
+          <a:noFill/>
+        </p:spPr>
+        <p:txBody>
+          <a:bodyPr wrap="square">
+            <a:spAutoFit/>
+          </a:bodyPr>
+          <a:lstStyle/>
+          <a:p>
+            <a:r>
+              <a:rPr sz="1800" b="1">
+                <a:solidFill>
+                  <a:srgbClr val="1F3A68"/>
+                </a:solidFill>
+                <a:ea typeface="Malgun Gothic"/>
+                <a:latin typeface="Malgun Gothic"/>
+              </a:rPr>
+              <a:t>Cross-LLM G-Eval (self-bias 우회)</a:t>
+            </a:r>
+          </a:p>
+        </p:txBody>
+      </p:sp>
+      <p:sp>
+        <p:nvSpPr>
+          <p:cNvPr id="13" name="Rectangle 12"/>
           <p:cNvSpPr/>
           <p:nvPr/>
         </p:nvSpPr>
         <p:spPr>
           <a:xfrm>
-            <a:off x="8165847" y="1260000"/>
-            <a:ext cx="3420000" cy="3060000"/>
-          </a:xfrm>
-          <a:prstGeom prst="roundRect">
+            <a:off x="6120000" y="1620000"/>
+            <a:ext cx="1620000" cy="360000"/>
+          </a:xfrm>
+          <a:prstGeom prst="rect">
             <a:avLst/>
           </a:prstGeom>
           <a:solidFill>
-            <a:srgbClr val="C44E52"/>
+            <a:srgbClr val="1F3A68"/>
           </a:solidFill>
           <a:ln>
-            <a:noFill/>
+            <a:solidFill>
+              <a:srgbClr val="CCCCCC"/>
+            </a:solidFill>
           </a:ln>
         </p:spPr>
         <p:style>
@@ -4693,50 +4814,638 @@
           </a:fontRef>
         </p:style>
         <p:txBody>
-          <a:bodyPr rtlCol="0" anchor="ctr" lIns="216000" rIns="216000" tIns="216000"/>
-          <a:lstStyle/>
-          <a:p>
-            <a:pPr algn="ctr"/>
-            <a:r>
-              <a:rPr sz="2200" b="1">
+          <a:bodyPr rtlCol="0" anchor="ctr" lIns="72000"/>
+          <a:lstStyle/>
+          <a:p>
+            <a:pPr algn="ctr"/>
+            <a:r>
+              <a:rPr sz="1100" b="1">
                 <a:solidFill>
                   <a:srgbClr val="FFFFFF"/>
                 </a:solidFill>
                 <a:ea typeface="Malgun Gothic"/>
                 <a:latin typeface="Malgun Gothic"/>
               </a:rPr>
-              <a:t>환각 차단</a:t>
-            </a:r>
-          </a:p>
-          <a:p>
-            <a:pPr algn="ctr"/>
-            <a:r>
-              <a:rPr sz="1200" b="0">
+              <a:t>Judge → Target</a:t>
+            </a:r>
+          </a:p>
+        </p:txBody>
+      </p:sp>
+      <p:sp>
+        <p:nvSpPr>
+          <p:cNvPr id="14" name="Rectangle 13"/>
+          <p:cNvSpPr/>
+          <p:nvPr/>
+        </p:nvSpPr>
+        <p:spPr>
+          <a:xfrm>
+            <a:off x="7740000" y="1620000"/>
+            <a:ext cx="1260000" cy="360000"/>
+          </a:xfrm>
+          <a:prstGeom prst="rect">
+            <a:avLst/>
+          </a:prstGeom>
+          <a:solidFill>
+            <a:srgbClr val="1F3A68"/>
+          </a:solidFill>
+          <a:ln>
+            <a:solidFill>
+              <a:srgbClr val="CCCCCC"/>
+            </a:solidFill>
+          </a:ln>
+        </p:spPr>
+        <p:style>
+          <a:lnRef idx="1">
+            <a:schemeClr val="accent1"/>
+          </a:lnRef>
+          <a:fillRef idx="3">
+            <a:schemeClr val="accent1"/>
+          </a:fillRef>
+          <a:effectRef idx="2">
+            <a:schemeClr val="accent1"/>
+          </a:effectRef>
+          <a:fontRef idx="minor">
+            <a:schemeClr val="lt1"/>
+          </a:fontRef>
+        </p:style>
+        <p:txBody>
+          <a:bodyPr rtlCol="0" anchor="ctr" lIns="72000"/>
+          <a:lstStyle/>
+          <a:p>
+            <a:pPr algn="ctr"/>
+            <a:r>
+              <a:rPr sz="1100" b="1">
                 <a:solidFill>
                   <a:srgbClr val="FFFFFF"/>
                 </a:solidFill>
                 <a:ea typeface="Malgun Gothic"/>
                 <a:latin typeface="Malgun Gothic"/>
               </a:rPr>
-              <a:t>
-Hallucination Rate 0.000
-(두 LLM 모두)
-Baseline 45.5% vs XAI-RAG 0%
-→ SHAP 컨텍스트의 직접 효과 입증</a:t>
-            </a:r>
-          </a:p>
-        </p:txBody>
-      </p:sp>
-      <p:sp>
-        <p:nvSpPr>
-          <p:cNvPr id="9" name="TextBox 8"/>
+              <a:t>Factual</a:t>
+            </a:r>
+          </a:p>
+        </p:txBody>
+      </p:sp>
+      <p:sp>
+        <p:nvSpPr>
+          <p:cNvPr id="15" name="Rectangle 14"/>
+          <p:cNvSpPr/>
+          <p:nvPr/>
+        </p:nvSpPr>
+        <p:spPr>
+          <a:xfrm>
+            <a:off x="9000000" y="1620000"/>
+            <a:ext cx="1260000" cy="360000"/>
+          </a:xfrm>
+          <a:prstGeom prst="rect">
+            <a:avLst/>
+          </a:prstGeom>
+          <a:solidFill>
+            <a:srgbClr val="1F3A68"/>
+          </a:solidFill>
+          <a:ln>
+            <a:solidFill>
+              <a:srgbClr val="CCCCCC"/>
+            </a:solidFill>
+          </a:ln>
+        </p:spPr>
+        <p:style>
+          <a:lnRef idx="1">
+            <a:schemeClr val="accent1"/>
+          </a:lnRef>
+          <a:fillRef idx="3">
+            <a:schemeClr val="accent1"/>
+          </a:fillRef>
+          <a:effectRef idx="2">
+            <a:schemeClr val="accent1"/>
+          </a:effectRef>
+          <a:fontRef idx="minor">
+            <a:schemeClr val="lt1"/>
+          </a:fontRef>
+        </p:style>
+        <p:txBody>
+          <a:bodyPr rtlCol="0" anchor="ctr" lIns="72000"/>
+          <a:lstStyle/>
+          <a:p>
+            <a:pPr algn="ctr"/>
+            <a:r>
+              <a:rPr sz="1100" b="1">
+                <a:solidFill>
+                  <a:srgbClr val="FFFFFF"/>
+                </a:solidFill>
+                <a:ea typeface="Malgun Gothic"/>
+                <a:latin typeface="Malgun Gothic"/>
+              </a:rPr>
+              <a:t>Sensitive</a:t>
+            </a:r>
+          </a:p>
+        </p:txBody>
+      </p:sp>
+      <p:sp>
+        <p:nvSpPr>
+          <p:cNvPr id="16" name="Rectangle 15"/>
+          <p:cNvSpPr/>
+          <p:nvPr/>
+        </p:nvSpPr>
+        <p:spPr>
+          <a:xfrm>
+            <a:off x="10260000" y="1620000"/>
+            <a:ext cx="1260000" cy="360000"/>
+          </a:xfrm>
+          <a:prstGeom prst="rect">
+            <a:avLst/>
+          </a:prstGeom>
+          <a:solidFill>
+            <a:srgbClr val="1F3A68"/>
+          </a:solidFill>
+          <a:ln>
+            <a:solidFill>
+              <a:srgbClr val="CCCCCC"/>
+            </a:solidFill>
+          </a:ln>
+        </p:spPr>
+        <p:style>
+          <a:lnRef idx="1">
+            <a:schemeClr val="accent1"/>
+          </a:lnRef>
+          <a:fillRef idx="3">
+            <a:schemeClr val="accent1"/>
+          </a:fillRef>
+          <a:effectRef idx="2">
+            <a:schemeClr val="accent1"/>
+          </a:effectRef>
+          <a:fontRef idx="minor">
+            <a:schemeClr val="lt1"/>
+          </a:fontRef>
+        </p:style>
+        <p:txBody>
+          <a:bodyPr rtlCol="0" anchor="ctr" lIns="72000"/>
+          <a:lstStyle/>
+          <a:p>
+            <a:pPr algn="ctr"/>
+            <a:r>
+              <a:rPr sz="1100" b="1">
+                <a:solidFill>
+                  <a:srgbClr val="FFFFFF"/>
+                </a:solidFill>
+                <a:ea typeface="Malgun Gothic"/>
+                <a:latin typeface="Malgun Gothic"/>
+              </a:rPr>
+              <a:t>Style</a:t>
+            </a:r>
+          </a:p>
+        </p:txBody>
+      </p:sp>
+      <p:sp>
+        <p:nvSpPr>
+          <p:cNvPr id="17" name="Rectangle 16"/>
+          <p:cNvSpPr/>
+          <p:nvPr/>
+        </p:nvSpPr>
+        <p:spPr>
+          <a:xfrm>
+            <a:off x="6120000" y="1980000"/>
+            <a:ext cx="1620000" cy="360000"/>
+          </a:xfrm>
+          <a:prstGeom prst="rect">
+            <a:avLst/>
+          </a:prstGeom>
+          <a:solidFill>
+            <a:srgbClr val="F4F6FA"/>
+          </a:solidFill>
+          <a:ln>
+            <a:solidFill>
+              <a:srgbClr val="CCCCCC"/>
+            </a:solidFill>
+          </a:ln>
+        </p:spPr>
+        <p:style>
+          <a:lnRef idx="1">
+            <a:schemeClr val="accent1"/>
+          </a:lnRef>
+          <a:fillRef idx="3">
+            <a:schemeClr val="accent1"/>
+          </a:fillRef>
+          <a:effectRef idx="2">
+            <a:schemeClr val="accent1"/>
+          </a:effectRef>
+          <a:fontRef idx="minor">
+            <a:schemeClr val="lt1"/>
+          </a:fontRef>
+        </p:style>
+        <p:txBody>
+          <a:bodyPr rtlCol="0" anchor="ctr" lIns="72000"/>
+          <a:lstStyle/>
+          <a:p>
+            <a:pPr algn="ctr"/>
+            <a:r>
+              <a:rPr sz="1100" b="0">
+                <a:solidFill>
+                  <a:srgbClr val="222222"/>
+                </a:solidFill>
+                <a:ea typeface="Malgun Gothic"/>
+                <a:latin typeface="Malgun Gothic"/>
+              </a:rPr>
+              <a:t>Claude → Gemini</a:t>
+            </a:r>
+          </a:p>
+        </p:txBody>
+      </p:sp>
+      <p:sp>
+        <p:nvSpPr>
+          <p:cNvPr id="18" name="Rectangle 17"/>
+          <p:cNvSpPr/>
+          <p:nvPr/>
+        </p:nvSpPr>
+        <p:spPr>
+          <a:xfrm>
+            <a:off x="7740000" y="1980000"/>
+            <a:ext cx="1260000" cy="360000"/>
+          </a:xfrm>
+          <a:prstGeom prst="rect">
+            <a:avLst/>
+          </a:prstGeom>
+          <a:solidFill>
+            <a:srgbClr val="F4F6FA"/>
+          </a:solidFill>
+          <a:ln>
+            <a:solidFill>
+              <a:srgbClr val="CCCCCC"/>
+            </a:solidFill>
+          </a:ln>
+        </p:spPr>
+        <p:style>
+          <a:lnRef idx="1">
+            <a:schemeClr val="accent1"/>
+          </a:lnRef>
+          <a:fillRef idx="3">
+            <a:schemeClr val="accent1"/>
+          </a:fillRef>
+          <a:effectRef idx="2">
+            <a:schemeClr val="accent1"/>
+          </a:effectRef>
+          <a:fontRef idx="minor">
+            <a:schemeClr val="lt1"/>
+          </a:fontRef>
+        </p:style>
+        <p:txBody>
+          <a:bodyPr rtlCol="0" anchor="ctr" lIns="72000"/>
+          <a:lstStyle/>
+          <a:p>
+            <a:pPr algn="ctr"/>
+            <a:r>
+              <a:rPr sz="1100" b="0">
+                <a:solidFill>
+                  <a:srgbClr val="222222"/>
+                </a:solidFill>
+                <a:ea typeface="Malgun Gothic"/>
+                <a:latin typeface="Malgun Gothic"/>
+              </a:rPr>
+              <a:t>4.87</a:t>
+            </a:r>
+          </a:p>
+        </p:txBody>
+      </p:sp>
+      <p:sp>
+        <p:nvSpPr>
+          <p:cNvPr id="19" name="Rectangle 18"/>
+          <p:cNvSpPr/>
+          <p:nvPr/>
+        </p:nvSpPr>
+        <p:spPr>
+          <a:xfrm>
+            <a:off x="9000000" y="1980000"/>
+            <a:ext cx="1260000" cy="360000"/>
+          </a:xfrm>
+          <a:prstGeom prst="rect">
+            <a:avLst/>
+          </a:prstGeom>
+          <a:solidFill>
+            <a:srgbClr val="F4F6FA"/>
+          </a:solidFill>
+          <a:ln>
+            <a:solidFill>
+              <a:srgbClr val="CCCCCC"/>
+            </a:solidFill>
+          </a:ln>
+        </p:spPr>
+        <p:style>
+          <a:lnRef idx="1">
+            <a:schemeClr val="accent1"/>
+          </a:lnRef>
+          <a:fillRef idx="3">
+            <a:schemeClr val="accent1"/>
+          </a:fillRef>
+          <a:effectRef idx="2">
+            <a:schemeClr val="accent1"/>
+          </a:effectRef>
+          <a:fontRef idx="minor">
+            <a:schemeClr val="lt1"/>
+          </a:fontRef>
+        </p:style>
+        <p:txBody>
+          <a:bodyPr rtlCol="0" anchor="ctr" lIns="72000"/>
+          <a:lstStyle/>
+          <a:p>
+            <a:pPr algn="ctr"/>
+            <a:r>
+              <a:rPr sz="1100" b="0">
+                <a:solidFill>
+                  <a:srgbClr val="222222"/>
+                </a:solidFill>
+                <a:ea typeface="Malgun Gothic"/>
+                <a:latin typeface="Malgun Gothic"/>
+              </a:rPr>
+              <a:t>5.00</a:t>
+            </a:r>
+          </a:p>
+        </p:txBody>
+      </p:sp>
+      <p:sp>
+        <p:nvSpPr>
+          <p:cNvPr id="20" name="Rectangle 19"/>
+          <p:cNvSpPr/>
+          <p:nvPr/>
+        </p:nvSpPr>
+        <p:spPr>
+          <a:xfrm>
+            <a:off x="10260000" y="1980000"/>
+            <a:ext cx="1260000" cy="360000"/>
+          </a:xfrm>
+          <a:prstGeom prst="rect">
+            <a:avLst/>
+          </a:prstGeom>
+          <a:solidFill>
+            <a:srgbClr val="F4F6FA"/>
+          </a:solidFill>
+          <a:ln>
+            <a:solidFill>
+              <a:srgbClr val="CCCCCC"/>
+            </a:solidFill>
+          </a:ln>
+        </p:spPr>
+        <p:style>
+          <a:lnRef idx="1">
+            <a:schemeClr val="accent1"/>
+          </a:lnRef>
+          <a:fillRef idx="3">
+            <a:schemeClr val="accent1"/>
+          </a:fillRef>
+          <a:effectRef idx="2">
+            <a:schemeClr val="accent1"/>
+          </a:effectRef>
+          <a:fontRef idx="minor">
+            <a:schemeClr val="lt1"/>
+          </a:fontRef>
+        </p:style>
+        <p:txBody>
+          <a:bodyPr rtlCol="0" anchor="ctr" lIns="72000"/>
+          <a:lstStyle/>
+          <a:p>
+            <a:pPr algn="ctr"/>
+            <a:r>
+              <a:rPr sz="1100" b="0">
+                <a:solidFill>
+                  <a:srgbClr val="222222"/>
+                </a:solidFill>
+                <a:ea typeface="Malgun Gothic"/>
+                <a:latin typeface="Malgun Gothic"/>
+              </a:rPr>
+              <a:t>4.97</a:t>
+            </a:r>
+          </a:p>
+        </p:txBody>
+      </p:sp>
+      <p:sp>
+        <p:nvSpPr>
+          <p:cNvPr id="21" name="Rectangle 20"/>
+          <p:cNvSpPr/>
+          <p:nvPr/>
+        </p:nvSpPr>
+        <p:spPr>
+          <a:xfrm>
+            <a:off x="6120000" y="2340000"/>
+            <a:ext cx="1620000" cy="360000"/>
+          </a:xfrm>
+          <a:prstGeom prst="rect">
+            <a:avLst/>
+          </a:prstGeom>
+          <a:solidFill>
+            <a:srgbClr val="FFFFFF"/>
+          </a:solidFill>
+          <a:ln>
+            <a:solidFill>
+              <a:srgbClr val="CCCCCC"/>
+            </a:solidFill>
+          </a:ln>
+        </p:spPr>
+        <p:style>
+          <a:lnRef idx="1">
+            <a:schemeClr val="accent1"/>
+          </a:lnRef>
+          <a:fillRef idx="3">
+            <a:schemeClr val="accent1"/>
+          </a:fillRef>
+          <a:effectRef idx="2">
+            <a:schemeClr val="accent1"/>
+          </a:effectRef>
+          <a:fontRef idx="minor">
+            <a:schemeClr val="lt1"/>
+          </a:fontRef>
+        </p:style>
+        <p:txBody>
+          <a:bodyPr rtlCol="0" anchor="ctr" lIns="72000"/>
+          <a:lstStyle/>
+          <a:p>
+            <a:pPr algn="ctr"/>
+            <a:r>
+              <a:rPr sz="1100" b="0">
+                <a:solidFill>
+                  <a:srgbClr val="222222"/>
+                </a:solidFill>
+                <a:ea typeface="Malgun Gothic"/>
+                <a:latin typeface="Malgun Gothic"/>
+              </a:rPr>
+              <a:t>Gemini → Claude</a:t>
+            </a:r>
+          </a:p>
+        </p:txBody>
+      </p:sp>
+      <p:sp>
+        <p:nvSpPr>
+          <p:cNvPr id="22" name="Rectangle 21"/>
+          <p:cNvSpPr/>
+          <p:nvPr/>
+        </p:nvSpPr>
+        <p:spPr>
+          <a:xfrm>
+            <a:off x="7740000" y="2340000"/>
+            <a:ext cx="1260000" cy="360000"/>
+          </a:xfrm>
+          <a:prstGeom prst="rect">
+            <a:avLst/>
+          </a:prstGeom>
+          <a:solidFill>
+            <a:srgbClr val="FFFFFF"/>
+          </a:solidFill>
+          <a:ln>
+            <a:solidFill>
+              <a:srgbClr val="CCCCCC"/>
+            </a:solidFill>
+          </a:ln>
+        </p:spPr>
+        <p:style>
+          <a:lnRef idx="1">
+            <a:schemeClr val="accent1"/>
+          </a:lnRef>
+          <a:fillRef idx="3">
+            <a:schemeClr val="accent1"/>
+          </a:fillRef>
+          <a:effectRef idx="2">
+            <a:schemeClr val="accent1"/>
+          </a:effectRef>
+          <a:fontRef idx="minor">
+            <a:schemeClr val="lt1"/>
+          </a:fontRef>
+        </p:style>
+        <p:txBody>
+          <a:bodyPr rtlCol="0" anchor="ctr" lIns="72000"/>
+          <a:lstStyle/>
+          <a:p>
+            <a:pPr algn="ctr"/>
+            <a:r>
+              <a:rPr sz="1100" b="0">
+                <a:solidFill>
+                  <a:srgbClr val="222222"/>
+                </a:solidFill>
+                <a:ea typeface="Malgun Gothic"/>
+                <a:latin typeface="Malgun Gothic"/>
+              </a:rPr>
+              <a:t>4.60</a:t>
+            </a:r>
+          </a:p>
+        </p:txBody>
+      </p:sp>
+      <p:sp>
+        <p:nvSpPr>
+          <p:cNvPr id="23" name="Rectangle 22"/>
+          <p:cNvSpPr/>
+          <p:nvPr/>
+        </p:nvSpPr>
+        <p:spPr>
+          <a:xfrm>
+            <a:off x="9000000" y="2340000"/>
+            <a:ext cx="1260000" cy="360000"/>
+          </a:xfrm>
+          <a:prstGeom prst="rect">
+            <a:avLst/>
+          </a:prstGeom>
+          <a:solidFill>
+            <a:srgbClr val="FFFFFF"/>
+          </a:solidFill>
+          <a:ln>
+            <a:solidFill>
+              <a:srgbClr val="CCCCCC"/>
+            </a:solidFill>
+          </a:ln>
+        </p:spPr>
+        <p:style>
+          <a:lnRef idx="1">
+            <a:schemeClr val="accent1"/>
+          </a:lnRef>
+          <a:fillRef idx="3">
+            <a:schemeClr val="accent1"/>
+          </a:fillRef>
+          <a:effectRef idx="2">
+            <a:schemeClr val="accent1"/>
+          </a:effectRef>
+          <a:fontRef idx="minor">
+            <a:schemeClr val="lt1"/>
+          </a:fontRef>
+        </p:style>
+        <p:txBody>
+          <a:bodyPr rtlCol="0" anchor="ctr" lIns="72000"/>
+          <a:lstStyle/>
+          <a:p>
+            <a:pPr algn="ctr"/>
+            <a:r>
+              <a:rPr sz="1100" b="0">
+                <a:solidFill>
+                  <a:srgbClr val="222222"/>
+                </a:solidFill>
+                <a:ea typeface="Malgun Gothic"/>
+                <a:latin typeface="Malgun Gothic"/>
+              </a:rPr>
+              <a:t>5.00</a:t>
+            </a:r>
+          </a:p>
+        </p:txBody>
+      </p:sp>
+      <p:sp>
+        <p:nvSpPr>
+          <p:cNvPr id="24" name="Rectangle 23"/>
+          <p:cNvSpPr/>
+          <p:nvPr/>
+        </p:nvSpPr>
+        <p:spPr>
+          <a:xfrm>
+            <a:off x="10260000" y="2340000"/>
+            <a:ext cx="1260000" cy="360000"/>
+          </a:xfrm>
+          <a:prstGeom prst="rect">
+            <a:avLst/>
+          </a:prstGeom>
+          <a:solidFill>
+            <a:srgbClr val="FFFFFF"/>
+          </a:solidFill>
+          <a:ln>
+            <a:solidFill>
+              <a:srgbClr val="CCCCCC"/>
+            </a:solidFill>
+          </a:ln>
+        </p:spPr>
+        <p:style>
+          <a:lnRef idx="1">
+            <a:schemeClr val="accent1"/>
+          </a:lnRef>
+          <a:fillRef idx="3">
+            <a:schemeClr val="accent1"/>
+          </a:fillRef>
+          <a:effectRef idx="2">
+            <a:schemeClr val="accent1"/>
+          </a:effectRef>
+          <a:fontRef idx="minor">
+            <a:schemeClr val="lt1"/>
+          </a:fontRef>
+        </p:style>
+        <p:txBody>
+          <a:bodyPr rtlCol="0" anchor="ctr" lIns="72000"/>
+          <a:lstStyle/>
+          <a:p>
+            <a:pPr algn="ctr"/>
+            <a:r>
+              <a:rPr sz="1100" b="0">
+                <a:solidFill>
+                  <a:srgbClr val="222222"/>
+                </a:solidFill>
+                <a:ea typeface="Malgun Gothic"/>
+                <a:latin typeface="Malgun Gothic"/>
+              </a:rPr>
+              <a:t>5.00</a:t>
+            </a:r>
+          </a:p>
+        </p:txBody>
+      </p:sp>
+      <p:sp>
+        <p:nvSpPr>
+          <p:cNvPr id="25" name="TextBox 24"/>
           <p:cNvSpPr txBox="1"/>
           <p:nvPr/>
         </p:nvSpPr>
         <p:spPr>
           <a:xfrm>
-            <a:off x="360000" y="4680000"/>
-            <a:ext cx="11160000" cy="540000"/>
+            <a:off x="6120000" y="3060000"/>
+            <a:ext cx="5400000" cy="2880000"/>
           </a:xfrm>
           <a:prstGeom prst="rect">
             <a:avLst/>
@@ -4749,53 +5458,33 @@
           </a:bodyPr>
           <a:lstStyle/>
           <a:p>
-            <a:pPr algn="ctr"/>
-            <a:r>
-              <a:rPr sz="1600" b="1">
-                <a:solidFill>
-                  <a:srgbClr val="1F3A68"/>
-                </a:solidFill>
-                <a:ea typeface="Malgun Gothic"/>
-                <a:latin typeface="Malgun Gothic"/>
-              </a:rPr>
-              <a:t>한 줄 메시지</a:t>
-            </a:r>
-          </a:p>
-        </p:txBody>
-      </p:sp>
-      <p:sp>
-        <p:nvSpPr>
-          <p:cNvPr id="10" name="TextBox 9"/>
-          <p:cNvSpPr txBox="1"/>
-          <p:nvPr/>
-        </p:nvSpPr>
-        <p:spPr>
-          <a:xfrm>
-            <a:off x="360000" y="5220000"/>
-            <a:ext cx="11160000" cy="720000"/>
-          </a:xfrm>
-          <a:prstGeom prst="rect">
-            <a:avLst/>
-          </a:prstGeom>
-          <a:noFill/>
-        </p:spPr>
-        <p:txBody>
-          <a:bodyPr wrap="square">
-            <a:spAutoFit/>
-          </a:bodyPr>
-          <a:lstStyle/>
-          <a:p>
-            <a:pPr algn="ctr"/>
-            <a:r>
-              <a:rPr sz="1800" b="1">
-                <a:solidFill>
-                  <a:srgbClr val="222222"/>
-                </a:solidFill>
-                <a:ea typeface="Malgun Gothic"/>
-                <a:latin typeface="Malgun Gothic"/>
-              </a:rPr>
-              <a:t>"SHAP 컨텍스트를 LLM의 검색된 근거로 재정의하면,
-LLM 종속성 없이 환각이 0이 되는 자연어 설명을 생성할 수 있다."</a:t>
+            <a:pPr algn="l"/>
+            <a:r>
+              <a:rPr sz="1200" b="0">
+                <a:ea typeface="Malgun Gothic"/>
+                <a:latin typeface="Malgun Gothic"/>
+              </a:rPr>
+              <a:t>•  양 LLM 모두 factual ≥ 4.6/5</a:t>
+            </a:r>
+          </a:p>
+          <a:p>
+            <a:pPr algn="l"/>
+            <a:r>
+              <a:rPr sz="1200" b="0">
+                <a:ea typeface="Malgun Gothic"/>
+                <a:latin typeface="Malgun Gothic"/>
+              </a:rPr>
+              <a:t>•  sensitive_leak 5.0/5 만점 (양방향)</a:t>
+            </a:r>
+          </a:p>
+          <a:p>
+            <a:pPr algn="l"/>
+            <a:r>
+              <a:rPr sz="1200" b="0">
+                <a:ea typeface="Malgun Gothic"/>
+                <a:latin typeface="Malgun Gothic"/>
+              </a:rPr>
+              <a:t>•  Gemini self-bias가 자기 비판 방향</a:t>
             </a:r>
           </a:p>
         </p:txBody>
@@ -4891,7 +5580,7 @@
                 <a:ea typeface="Malgun Gothic"/>
                 <a:latin typeface="Malgun Gothic"/>
               </a:rPr>
-              <a:t>12. 한계와 향후 계획</a:t>
+              <a:t>12. ★ Step 2-A — Counterfactual + Robustness</a:t>
             </a:r>
           </a:p>
         </p:txBody>
@@ -4926,7 +5615,7 @@
                 <a:ea typeface="Malgun Gothic"/>
                 <a:latin typeface="Malgun Gothic"/>
               </a:rPr>
-              <a:t>Step 2 ~ Step 3 — 본 논문 확장</a:t>
+              <a:t>LLM이 컨텍스트에 의존하는가? 프롬프트 변형에 강건한가?</a:t>
             </a:r>
           </a:p>
         </p:txBody>
@@ -4999,12 +5688,12 @@
             <a:r>
               <a:rPr sz="1600" b="1">
                 <a:solidFill>
-                  <a:srgbClr val="C44E52"/>
-                </a:solidFill>
-                <a:ea typeface="Malgun Gothic"/>
-                <a:latin typeface="Malgun Gothic"/>
-              </a:rPr>
-              <a:t>현재 한계</a:t>
+                  <a:srgbClr val="1F3A68"/>
+                </a:solidFill>
+                <a:ea typeface="Malgun Gothic"/>
+                <a:latin typeface="Malgun Gothic"/>
+              </a:rPr>
+              <a:t>Counterfactual Test (top driver 1개 제거)</a:t>
             </a:r>
           </a:p>
         </p:txBody>
@@ -5017,8 +5706,8 @@
         </p:nvSpPr>
         <p:spPr>
           <a:xfrm>
-            <a:off x="540000" y="1440000"/>
-            <a:ext cx="5400000" cy="4680000"/>
+            <a:off x="360000" y="1440000"/>
+            <a:ext cx="5400000" cy="360000"/>
           </a:xfrm>
           <a:prstGeom prst="rect">
             <a:avLst/>
@@ -5031,67 +5720,524 @@
           </a:bodyPr>
           <a:lstStyle/>
           <a:p>
-            <a:pPr algn="l"/>
-            <a:r>
-              <a:rPr sz="1300" b="0">
-                <a:ea typeface="Malgun Gothic"/>
-                <a:latin typeface="Malgun Gothic"/>
-              </a:rPr>
-              <a:t>•  평가 표본 10명 — 100~500명으로 확장 필요</a:t>
-            </a:r>
-          </a:p>
-          <a:p>
-            <a:pPr algn="l"/>
-            <a:r>
-              <a:rPr sz="1300" b="0">
-                <a:ea typeface="Malgun Gothic"/>
-                <a:latin typeface="Malgun Gothic"/>
-              </a:rPr>
-              <a:t>•  보조 테이블 미사용 — bureau, previous_application 등</a:t>
-            </a:r>
-          </a:p>
-          <a:p>
-            <a:pPr algn="l"/>
-            <a:r>
-              <a:rPr sz="1300" b="0">
-                <a:ea typeface="Malgun Gothic"/>
-                <a:latin typeface="Malgun Gothic"/>
-              </a:rPr>
-              <a:t>•  G-Eval self-bias — Gemini가 자기 출력 평가</a:t>
-            </a:r>
-          </a:p>
-          <a:p>
-            <a:pPr algn="l"/>
-            <a:r>
-              <a:rPr sz="1300" b="0">
-                <a:ea typeface="Malgun Gothic"/>
-                <a:latin typeface="Malgun Gothic"/>
-              </a:rPr>
-              <a:t>•  Counterfactual 정량화 미수행 (정성 비교만)</a:t>
-            </a:r>
-          </a:p>
-          <a:p>
-            <a:pPr algn="l"/>
-            <a:r>
-              <a:rPr sz="1300" b="0">
-                <a:ea typeface="Malgun Gothic"/>
-                <a:latin typeface="Malgun Gothic"/>
-              </a:rPr>
-              <a:t>•  Robustness 평가 (프롬프트 변형) 미수행</a:t>
-            </a:r>
-          </a:p>
-        </p:txBody>
-      </p:sp>
-      <p:sp>
-        <p:nvSpPr>
-          <p:cNvPr id="8" name="TextBox 7"/>
+            <a:r>
+              <a:rPr sz="1100" b="0">
+                <a:solidFill>
+                  <a:srgbClr val="555555"/>
+                </a:solidFill>
+                <a:ea typeface="Malgun Gothic"/>
+                <a:latin typeface="Malgun Gothic"/>
+              </a:rPr>
+              <a:t>원본 vs 변경 컨텍스트 출력 비교 (n=30)</a:t>
+            </a:r>
+          </a:p>
+        </p:txBody>
+      </p:sp>
+      <p:sp>
+        <p:nvSpPr>
+          <p:cNvPr id="8" name="Rectangle 7"/>
+          <p:cNvSpPr/>
+          <p:nvPr/>
+        </p:nvSpPr>
+        <p:spPr>
+          <a:xfrm>
+            <a:off x="360000" y="1800000"/>
+            <a:ext cx="1980000" cy="360000"/>
+          </a:xfrm>
+          <a:prstGeom prst="rect">
+            <a:avLst/>
+          </a:prstGeom>
+          <a:solidFill>
+            <a:srgbClr val="1F3A68"/>
+          </a:solidFill>
+          <a:ln>
+            <a:solidFill>
+              <a:srgbClr val="CCCCCC"/>
+            </a:solidFill>
+          </a:ln>
+        </p:spPr>
+        <p:style>
+          <a:lnRef idx="1">
+            <a:schemeClr val="accent1"/>
+          </a:lnRef>
+          <a:fillRef idx="3">
+            <a:schemeClr val="accent1"/>
+          </a:fillRef>
+          <a:effectRef idx="2">
+            <a:schemeClr val="accent1"/>
+          </a:effectRef>
+          <a:fontRef idx="minor">
+            <a:schemeClr val="lt1"/>
+          </a:fontRef>
+        </p:style>
+        <p:txBody>
+          <a:bodyPr rtlCol="0" anchor="ctr" lIns="72000"/>
+          <a:lstStyle/>
+          <a:p>
+            <a:pPr algn="ctr"/>
+            <a:r>
+              <a:rPr sz="1100" b="1">
+                <a:solidFill>
+                  <a:srgbClr val="FFFFFF"/>
+                </a:solidFill>
+                <a:ea typeface="Malgun Gothic"/>
+                <a:latin typeface="Malgun Gothic"/>
+              </a:rPr>
+              <a:t>LLM</a:t>
+            </a:r>
+          </a:p>
+        </p:txBody>
+      </p:sp>
+      <p:sp>
+        <p:nvSpPr>
+          <p:cNvPr id="9" name="Rectangle 8"/>
+          <p:cNvSpPr/>
+          <p:nvPr/>
+        </p:nvSpPr>
+        <p:spPr>
+          <a:xfrm>
+            <a:off x="2340000" y="1800000"/>
+            <a:ext cx="1800000" cy="360000"/>
+          </a:xfrm>
+          <a:prstGeom prst="rect">
+            <a:avLst/>
+          </a:prstGeom>
+          <a:solidFill>
+            <a:srgbClr val="1F3A68"/>
+          </a:solidFill>
+          <a:ln>
+            <a:solidFill>
+              <a:srgbClr val="CCCCCC"/>
+            </a:solidFill>
+          </a:ln>
+        </p:spPr>
+        <p:style>
+          <a:lnRef idx="1">
+            <a:schemeClr val="accent1"/>
+          </a:lnRef>
+          <a:fillRef idx="3">
+            <a:schemeClr val="accent1"/>
+          </a:fillRef>
+          <a:effectRef idx="2">
+            <a:schemeClr val="accent1"/>
+          </a:effectRef>
+          <a:fontRef idx="minor">
+            <a:schemeClr val="lt1"/>
+          </a:fontRef>
+        </p:style>
+        <p:txBody>
+          <a:bodyPr rtlCol="0" anchor="ctr" lIns="72000"/>
+          <a:lstStyle/>
+          <a:p>
+            <a:pPr algn="ctr"/>
+            <a:r>
+              <a:rPr sz="1100" b="1">
+                <a:solidFill>
+                  <a:srgbClr val="FFFFFF"/>
+                </a:solidFill>
+                <a:ea typeface="Malgun Gothic"/>
+                <a:latin typeface="Malgun Gothic"/>
+              </a:rPr>
+              <a:t>Cosine sim</a:t>
+            </a:r>
+          </a:p>
+        </p:txBody>
+      </p:sp>
+      <p:sp>
+        <p:nvSpPr>
+          <p:cNvPr id="10" name="Rectangle 9"/>
+          <p:cNvSpPr/>
+          <p:nvPr/>
+        </p:nvSpPr>
+        <p:spPr>
+          <a:xfrm>
+            <a:off x="4140000" y="1800000"/>
+            <a:ext cx="1620000" cy="360000"/>
+          </a:xfrm>
+          <a:prstGeom prst="rect">
+            <a:avLst/>
+          </a:prstGeom>
+          <a:solidFill>
+            <a:srgbClr val="1F3A68"/>
+          </a:solidFill>
+          <a:ln>
+            <a:solidFill>
+              <a:srgbClr val="CCCCCC"/>
+            </a:solidFill>
+          </a:ln>
+        </p:spPr>
+        <p:style>
+          <a:lnRef idx="1">
+            <a:schemeClr val="accent1"/>
+          </a:lnRef>
+          <a:fillRef idx="3">
+            <a:schemeClr val="accent1"/>
+          </a:fillRef>
+          <a:effectRef idx="2">
+            <a:schemeClr val="accent1"/>
+          </a:effectRef>
+          <a:fontRef idx="minor">
+            <a:schemeClr val="lt1"/>
+          </a:fontRef>
+        </p:style>
+        <p:txBody>
+          <a:bodyPr rtlCol="0" anchor="ctr" lIns="72000"/>
+          <a:lstStyle/>
+          <a:p>
+            <a:pPr algn="ctr"/>
+            <a:r>
+              <a:rPr sz="1100" b="1">
+                <a:solidFill>
+                  <a:srgbClr val="FFFFFF"/>
+                </a:solidFill>
+                <a:ea typeface="Malgun Gothic"/>
+                <a:latin typeface="Malgun Gothic"/>
+              </a:rPr>
+              <a:t>ROUGE-L</a:t>
+            </a:r>
+          </a:p>
+        </p:txBody>
+      </p:sp>
+      <p:sp>
+        <p:nvSpPr>
+          <p:cNvPr id="11" name="Rectangle 10"/>
+          <p:cNvSpPr/>
+          <p:nvPr/>
+        </p:nvSpPr>
+        <p:spPr>
+          <a:xfrm>
+            <a:off x="360000" y="2160000"/>
+            <a:ext cx="1980000" cy="360000"/>
+          </a:xfrm>
+          <a:prstGeom prst="rect">
+            <a:avLst/>
+          </a:prstGeom>
+          <a:solidFill>
+            <a:srgbClr val="F4F6FA"/>
+          </a:solidFill>
+          <a:ln>
+            <a:solidFill>
+              <a:srgbClr val="CCCCCC"/>
+            </a:solidFill>
+          </a:ln>
+        </p:spPr>
+        <p:style>
+          <a:lnRef idx="1">
+            <a:schemeClr val="accent1"/>
+          </a:lnRef>
+          <a:fillRef idx="3">
+            <a:schemeClr val="accent1"/>
+          </a:fillRef>
+          <a:effectRef idx="2">
+            <a:schemeClr val="accent1"/>
+          </a:effectRef>
+          <a:fontRef idx="minor">
+            <a:schemeClr val="lt1"/>
+          </a:fontRef>
+        </p:style>
+        <p:txBody>
+          <a:bodyPr rtlCol="0" anchor="ctr" lIns="72000"/>
+          <a:lstStyle/>
+          <a:p>
+            <a:pPr algn="ctr"/>
+            <a:r>
+              <a:rPr sz="1100" b="0">
+                <a:solidFill>
+                  <a:srgbClr val="222222"/>
+                </a:solidFill>
+                <a:ea typeface="Malgun Gothic"/>
+                <a:latin typeface="Malgun Gothic"/>
+              </a:rPr>
+              <a:t>Claude Sonnet 4.5</a:t>
+            </a:r>
+          </a:p>
+        </p:txBody>
+      </p:sp>
+      <p:sp>
+        <p:nvSpPr>
+          <p:cNvPr id="12" name="Rectangle 11"/>
+          <p:cNvSpPr/>
+          <p:nvPr/>
+        </p:nvSpPr>
+        <p:spPr>
+          <a:xfrm>
+            <a:off x="2340000" y="2160000"/>
+            <a:ext cx="1800000" cy="360000"/>
+          </a:xfrm>
+          <a:prstGeom prst="rect">
+            <a:avLst/>
+          </a:prstGeom>
+          <a:solidFill>
+            <a:srgbClr val="F4F6FA"/>
+          </a:solidFill>
+          <a:ln>
+            <a:solidFill>
+              <a:srgbClr val="CCCCCC"/>
+            </a:solidFill>
+          </a:ln>
+        </p:spPr>
+        <p:style>
+          <a:lnRef idx="1">
+            <a:schemeClr val="accent1"/>
+          </a:lnRef>
+          <a:fillRef idx="3">
+            <a:schemeClr val="accent1"/>
+          </a:fillRef>
+          <a:effectRef idx="2">
+            <a:schemeClr val="accent1"/>
+          </a:effectRef>
+          <a:fontRef idx="minor">
+            <a:schemeClr val="lt1"/>
+          </a:fontRef>
+        </p:style>
+        <p:txBody>
+          <a:bodyPr rtlCol="0" anchor="ctr" lIns="72000"/>
+          <a:lstStyle/>
+          <a:p>
+            <a:pPr algn="ctr"/>
+            <a:r>
+              <a:rPr sz="1100" b="0">
+                <a:solidFill>
+                  <a:srgbClr val="222222"/>
+                </a:solidFill>
+                <a:ea typeface="Malgun Gothic"/>
+                <a:latin typeface="Malgun Gothic"/>
+              </a:rPr>
+              <a:t>0.909 ± 0.069</a:t>
+            </a:r>
+          </a:p>
+        </p:txBody>
+      </p:sp>
+      <p:sp>
+        <p:nvSpPr>
+          <p:cNvPr id="13" name="Rectangle 12"/>
+          <p:cNvSpPr/>
+          <p:nvPr/>
+        </p:nvSpPr>
+        <p:spPr>
+          <a:xfrm>
+            <a:off x="4140000" y="2160000"/>
+            <a:ext cx="1620000" cy="360000"/>
+          </a:xfrm>
+          <a:prstGeom prst="rect">
+            <a:avLst/>
+          </a:prstGeom>
+          <a:solidFill>
+            <a:srgbClr val="F4F6FA"/>
+          </a:solidFill>
+          <a:ln>
+            <a:solidFill>
+              <a:srgbClr val="CCCCCC"/>
+            </a:solidFill>
+          </a:ln>
+        </p:spPr>
+        <p:style>
+          <a:lnRef idx="1">
+            <a:schemeClr val="accent1"/>
+          </a:lnRef>
+          <a:fillRef idx="3">
+            <a:schemeClr val="accent1"/>
+          </a:fillRef>
+          <a:effectRef idx="2">
+            <a:schemeClr val="accent1"/>
+          </a:effectRef>
+          <a:fontRef idx="minor">
+            <a:schemeClr val="lt1"/>
+          </a:fontRef>
+        </p:style>
+        <p:txBody>
+          <a:bodyPr rtlCol="0" anchor="ctr" lIns="72000"/>
+          <a:lstStyle/>
+          <a:p>
+            <a:pPr algn="ctr"/>
+            <a:r>
+              <a:rPr sz="1100" b="0">
+                <a:solidFill>
+                  <a:srgbClr val="222222"/>
+                </a:solidFill>
+                <a:ea typeface="Malgun Gothic"/>
+                <a:latin typeface="Malgun Gothic"/>
+              </a:rPr>
+              <a:t>0.747</a:t>
+            </a:r>
+          </a:p>
+        </p:txBody>
+      </p:sp>
+      <p:sp>
+        <p:nvSpPr>
+          <p:cNvPr id="14" name="Rectangle 13"/>
+          <p:cNvSpPr/>
+          <p:nvPr/>
+        </p:nvSpPr>
+        <p:spPr>
+          <a:xfrm>
+            <a:off x="360000" y="2520000"/>
+            <a:ext cx="1980000" cy="360000"/>
+          </a:xfrm>
+          <a:prstGeom prst="rect">
+            <a:avLst/>
+          </a:prstGeom>
+          <a:solidFill>
+            <a:srgbClr val="F4F6FA"/>
+          </a:solidFill>
+          <a:ln>
+            <a:solidFill>
+              <a:srgbClr val="CCCCCC"/>
+            </a:solidFill>
+          </a:ln>
+        </p:spPr>
+        <p:style>
+          <a:lnRef idx="1">
+            <a:schemeClr val="accent1"/>
+          </a:lnRef>
+          <a:fillRef idx="3">
+            <a:schemeClr val="accent1"/>
+          </a:fillRef>
+          <a:effectRef idx="2">
+            <a:schemeClr val="accent1"/>
+          </a:effectRef>
+          <a:fontRef idx="minor">
+            <a:schemeClr val="lt1"/>
+          </a:fontRef>
+        </p:style>
+        <p:txBody>
+          <a:bodyPr rtlCol="0" anchor="ctr" lIns="72000"/>
+          <a:lstStyle/>
+          <a:p>
+            <a:pPr algn="ctr"/>
+            <a:r>
+              <a:rPr sz="1100" b="0">
+                <a:solidFill>
+                  <a:srgbClr val="222222"/>
+                </a:solidFill>
+                <a:ea typeface="Malgun Gothic"/>
+                <a:latin typeface="Malgun Gothic"/>
+              </a:rPr>
+              <a:t>Gemini 2.5 Flash</a:t>
+            </a:r>
+          </a:p>
+        </p:txBody>
+      </p:sp>
+      <p:sp>
+        <p:nvSpPr>
+          <p:cNvPr id="15" name="Rectangle 14"/>
+          <p:cNvSpPr/>
+          <p:nvPr/>
+        </p:nvSpPr>
+        <p:spPr>
+          <a:xfrm>
+            <a:off x="2340000" y="2520000"/>
+            <a:ext cx="1800000" cy="360000"/>
+          </a:xfrm>
+          <a:prstGeom prst="rect">
+            <a:avLst/>
+          </a:prstGeom>
+          <a:solidFill>
+            <a:srgbClr val="F4F6FA"/>
+          </a:solidFill>
+          <a:ln>
+            <a:solidFill>
+              <a:srgbClr val="CCCCCC"/>
+            </a:solidFill>
+          </a:ln>
+        </p:spPr>
+        <p:style>
+          <a:lnRef idx="1">
+            <a:schemeClr val="accent1"/>
+          </a:lnRef>
+          <a:fillRef idx="3">
+            <a:schemeClr val="accent1"/>
+          </a:fillRef>
+          <a:effectRef idx="2">
+            <a:schemeClr val="accent1"/>
+          </a:effectRef>
+          <a:fontRef idx="minor">
+            <a:schemeClr val="lt1"/>
+          </a:fontRef>
+        </p:style>
+        <p:txBody>
+          <a:bodyPr rtlCol="0" anchor="ctr" lIns="72000"/>
+          <a:lstStyle/>
+          <a:p>
+            <a:pPr algn="ctr"/>
+            <a:r>
+              <a:rPr sz="1100" b="0">
+                <a:solidFill>
+                  <a:srgbClr val="222222"/>
+                </a:solidFill>
+                <a:ea typeface="Malgun Gothic"/>
+                <a:latin typeface="Malgun Gothic"/>
+              </a:rPr>
+              <a:t>0.920 ± 0.040</a:t>
+            </a:r>
+          </a:p>
+        </p:txBody>
+      </p:sp>
+      <p:sp>
+        <p:nvSpPr>
+          <p:cNvPr id="16" name="Rectangle 15"/>
+          <p:cNvSpPr/>
+          <p:nvPr/>
+        </p:nvSpPr>
+        <p:spPr>
+          <a:xfrm>
+            <a:off x="4140000" y="2520000"/>
+            <a:ext cx="1620000" cy="360000"/>
+          </a:xfrm>
+          <a:prstGeom prst="rect">
+            <a:avLst/>
+          </a:prstGeom>
+          <a:solidFill>
+            <a:srgbClr val="F4F6FA"/>
+          </a:solidFill>
+          <a:ln>
+            <a:solidFill>
+              <a:srgbClr val="CCCCCC"/>
+            </a:solidFill>
+          </a:ln>
+        </p:spPr>
+        <p:style>
+          <a:lnRef idx="1">
+            <a:schemeClr val="accent1"/>
+          </a:lnRef>
+          <a:fillRef idx="3">
+            <a:schemeClr val="accent1"/>
+          </a:fillRef>
+          <a:effectRef idx="2">
+            <a:schemeClr val="accent1"/>
+          </a:effectRef>
+          <a:fontRef idx="minor">
+            <a:schemeClr val="lt1"/>
+          </a:fontRef>
+        </p:style>
+        <p:txBody>
+          <a:bodyPr rtlCol="0" anchor="ctr" lIns="72000"/>
+          <a:lstStyle/>
+          <a:p>
+            <a:pPr algn="ctr"/>
+            <a:r>
+              <a:rPr sz="1100" b="0">
+                <a:solidFill>
+                  <a:srgbClr val="222222"/>
+                </a:solidFill>
+                <a:ea typeface="Malgun Gothic"/>
+                <a:latin typeface="Malgun Gothic"/>
+              </a:rPr>
+              <a:t>0.750</a:t>
+            </a:r>
+          </a:p>
+        </p:txBody>
+      </p:sp>
+      <p:sp>
+        <p:nvSpPr>
+          <p:cNvPr id="17" name="TextBox 16"/>
           <p:cNvSpPr txBox="1"/>
           <p:nvPr/>
         </p:nvSpPr>
         <p:spPr>
           <a:xfrm>
-            <a:off x="6120000" y="1080000"/>
-            <a:ext cx="5400000" cy="360000"/>
+            <a:off x="360000" y="3060000"/>
+            <a:ext cx="5400000" cy="2880000"/>
           </a:xfrm>
           <a:prstGeom prst="rect">
             <a:avLst/>
@@ -5104,29 +6250,47 @@
           </a:bodyPr>
           <a:lstStyle/>
           <a:p>
-            <a:r>
-              <a:rPr sz="1600" b="1">
-                <a:solidFill>
-                  <a:srgbClr val="55A868"/>
-                </a:solidFill>
-                <a:ea typeface="Malgun Gothic"/>
-                <a:latin typeface="Malgun Gothic"/>
-              </a:rPr>
-              <a:t>향후 계획</a:t>
-            </a:r>
-          </a:p>
-        </p:txBody>
-      </p:sp>
-      <p:sp>
-        <p:nvSpPr>
-          <p:cNvPr id="9" name="TextBox 8"/>
+            <a:pPr algn="l"/>
+            <a:r>
+              <a:rPr sz="1200" b="0">
+                <a:ea typeface="Malgun Gothic"/>
+                <a:latin typeface="Malgun Gothic"/>
+              </a:rPr>
+              <a:t>•  cosine 0.91 → 의미는 90% 유지</a:t>
+            </a:r>
+          </a:p>
+          <a:p>
+            <a:pPr algn="l"/>
+            <a:r>
+              <a:rPr sz="1200" b="0">
+                <a:ea typeface="Malgun Gothic"/>
+                <a:latin typeface="Malgun Gothic"/>
+              </a:rPr>
+              <a:t>•  ROUGE-L 0.75 → 어휘는 25% 변경</a:t>
+            </a:r>
+          </a:p>
+          <a:p>
+            <a:pPr algn="l"/>
+            <a:r>
+              <a:rPr sz="1200" b="0">
+                <a:ea typeface="Malgun Gothic"/>
+                <a:latin typeface="Malgun Gothic"/>
+              </a:rPr>
+              <a:t>•  → 부분 perturbation에 부분 반응 + 일관성 유지</a:t>
+            </a:r>
+          </a:p>
+        </p:txBody>
+      </p:sp>
+      <p:sp>
+        <p:nvSpPr>
+          <p:cNvPr id="18" name="TextBox 17"/>
           <p:cNvSpPr txBox="1"/>
           <p:nvPr/>
         </p:nvSpPr>
         <p:spPr>
           <a:xfrm>
-            <a:off x="6300000" y="1440000"/>
-            <a:ext cx="5400000" cy="4680000"/>
+            <a:off x="6120000" y="1080000"/>
+            <a:ext cx="5400000" cy="360000"/>
           </a:xfrm>
           <a:prstGeom prst="rect">
             <a:avLst/>
@@ -5139,73 +6303,799 @@
           </a:bodyPr>
           <a:lstStyle/>
           <a:p>
+            <a:r>
+              <a:rPr sz="1600" b="1">
+                <a:solidFill>
+                  <a:srgbClr val="1F3A68"/>
+                </a:solidFill>
+                <a:ea typeface="Malgun Gothic"/>
+                <a:latin typeface="Malgun Gothic"/>
+              </a:rPr>
+              <a:t>Robustness (3 프롬프트 변형)</a:t>
+            </a:r>
+          </a:p>
+        </p:txBody>
+      </p:sp>
+      <p:sp>
+        <p:nvSpPr>
+          <p:cNvPr id="19" name="TextBox 18"/>
+          <p:cNvSpPr txBox="1"/>
+          <p:nvPr/>
+        </p:nvSpPr>
+        <p:spPr>
+          <a:xfrm>
+            <a:off x="6120000" y="1440000"/>
+            <a:ext cx="5400000" cy="360000"/>
+          </a:xfrm>
+          <a:prstGeom prst="rect">
+            <a:avLst/>
+          </a:prstGeom>
+          <a:noFill/>
+        </p:spPr>
+        <p:txBody>
+          <a:bodyPr wrap="square">
+            <a:spAutoFit/>
+          </a:bodyPr>
+          <a:lstStyle/>
+          <a:p>
+            <a:r>
+              <a:rPr sz="1100" b="0">
+                <a:solidFill>
+                  <a:srgbClr val="555555"/>
+                </a:solidFill>
+                <a:ea typeface="Malgun Gothic"/>
+                <a:latin typeface="Malgun Gothic"/>
+              </a:rPr>
+              <a:t>role/example/driver_shuffle (n=20)</a:t>
+            </a:r>
+          </a:p>
+        </p:txBody>
+      </p:sp>
+      <p:sp>
+        <p:nvSpPr>
+          <p:cNvPr id="20" name="Rectangle 19"/>
+          <p:cNvSpPr/>
+          <p:nvPr/>
+        </p:nvSpPr>
+        <p:spPr>
+          <a:xfrm>
+            <a:off x="6120000" y="1800000"/>
+            <a:ext cx="1980000" cy="360000"/>
+          </a:xfrm>
+          <a:prstGeom prst="rect">
+            <a:avLst/>
+          </a:prstGeom>
+          <a:solidFill>
+            <a:srgbClr val="1F3A68"/>
+          </a:solidFill>
+          <a:ln>
+            <a:solidFill>
+              <a:srgbClr val="CCCCCC"/>
+            </a:solidFill>
+          </a:ln>
+        </p:spPr>
+        <p:style>
+          <a:lnRef idx="1">
+            <a:schemeClr val="accent1"/>
+          </a:lnRef>
+          <a:fillRef idx="3">
+            <a:schemeClr val="accent1"/>
+          </a:fillRef>
+          <a:effectRef idx="2">
+            <a:schemeClr val="accent1"/>
+          </a:effectRef>
+          <a:fontRef idx="minor">
+            <a:schemeClr val="lt1"/>
+          </a:fontRef>
+        </p:style>
+        <p:txBody>
+          <a:bodyPr rtlCol="0" anchor="ctr" lIns="72000"/>
+          <a:lstStyle/>
+          <a:p>
+            <a:pPr algn="ctr"/>
+            <a:r>
+              <a:rPr sz="1100" b="1">
+                <a:solidFill>
+                  <a:srgbClr val="FFFFFF"/>
+                </a:solidFill>
+                <a:ea typeface="Malgun Gothic"/>
+                <a:latin typeface="Malgun Gothic"/>
+              </a:rPr>
+              <a:t>Variant</a:t>
+            </a:r>
+          </a:p>
+        </p:txBody>
+      </p:sp>
+      <p:sp>
+        <p:nvSpPr>
+          <p:cNvPr id="21" name="Rectangle 20"/>
+          <p:cNvSpPr/>
+          <p:nvPr/>
+        </p:nvSpPr>
+        <p:spPr>
+          <a:xfrm>
+            <a:off x="8100000" y="1800000"/>
+            <a:ext cx="1800000" cy="360000"/>
+          </a:xfrm>
+          <a:prstGeom prst="rect">
+            <a:avLst/>
+          </a:prstGeom>
+          <a:solidFill>
+            <a:srgbClr val="1F3A68"/>
+          </a:solidFill>
+          <a:ln>
+            <a:solidFill>
+              <a:srgbClr val="CCCCCC"/>
+            </a:solidFill>
+          </a:ln>
+        </p:spPr>
+        <p:style>
+          <a:lnRef idx="1">
+            <a:schemeClr val="accent1"/>
+          </a:lnRef>
+          <a:fillRef idx="3">
+            <a:schemeClr val="accent1"/>
+          </a:fillRef>
+          <a:effectRef idx="2">
+            <a:schemeClr val="accent1"/>
+          </a:effectRef>
+          <a:fontRef idx="minor">
+            <a:schemeClr val="lt1"/>
+          </a:fontRef>
+        </p:style>
+        <p:txBody>
+          <a:bodyPr rtlCol="0" anchor="ctr" lIns="72000"/>
+          <a:lstStyle/>
+          <a:p>
+            <a:pPr algn="ctr"/>
+            <a:r>
+              <a:rPr sz="1100" b="1">
+                <a:solidFill>
+                  <a:srgbClr val="FFFFFF"/>
+                </a:solidFill>
+                <a:ea typeface="Malgun Gothic"/>
+                <a:latin typeface="Malgun Gothic"/>
+              </a:rPr>
+              <a:t>Claude cosine</a:t>
+            </a:r>
+          </a:p>
+        </p:txBody>
+      </p:sp>
+      <p:sp>
+        <p:nvSpPr>
+          <p:cNvPr id="22" name="Rectangle 21"/>
+          <p:cNvSpPr/>
+          <p:nvPr/>
+        </p:nvSpPr>
+        <p:spPr>
+          <a:xfrm>
+            <a:off x="9900000" y="1800000"/>
+            <a:ext cx="1620000" cy="360000"/>
+          </a:xfrm>
+          <a:prstGeom prst="rect">
+            <a:avLst/>
+          </a:prstGeom>
+          <a:solidFill>
+            <a:srgbClr val="1F3A68"/>
+          </a:solidFill>
+          <a:ln>
+            <a:solidFill>
+              <a:srgbClr val="CCCCCC"/>
+            </a:solidFill>
+          </a:ln>
+        </p:spPr>
+        <p:style>
+          <a:lnRef idx="1">
+            <a:schemeClr val="accent1"/>
+          </a:lnRef>
+          <a:fillRef idx="3">
+            <a:schemeClr val="accent1"/>
+          </a:fillRef>
+          <a:effectRef idx="2">
+            <a:schemeClr val="accent1"/>
+          </a:effectRef>
+          <a:fontRef idx="minor">
+            <a:schemeClr val="lt1"/>
+          </a:fontRef>
+        </p:style>
+        <p:txBody>
+          <a:bodyPr rtlCol="0" anchor="ctr" lIns="72000"/>
+          <a:lstStyle/>
+          <a:p>
+            <a:pPr algn="ctr"/>
+            <a:r>
+              <a:rPr sz="1100" b="1">
+                <a:solidFill>
+                  <a:srgbClr val="FFFFFF"/>
+                </a:solidFill>
+                <a:ea typeface="Malgun Gothic"/>
+                <a:latin typeface="Malgun Gothic"/>
+              </a:rPr>
+              <a:t>Gemini cosine</a:t>
+            </a:r>
+          </a:p>
+        </p:txBody>
+      </p:sp>
+      <p:sp>
+        <p:nvSpPr>
+          <p:cNvPr id="23" name="Rectangle 22"/>
+          <p:cNvSpPr/>
+          <p:nvPr/>
+        </p:nvSpPr>
+        <p:spPr>
+          <a:xfrm>
+            <a:off x="6120000" y="2160000"/>
+            <a:ext cx="1980000" cy="360000"/>
+          </a:xfrm>
+          <a:prstGeom prst="rect">
+            <a:avLst/>
+          </a:prstGeom>
+          <a:solidFill>
+            <a:srgbClr val="F4F6FA"/>
+          </a:solidFill>
+          <a:ln>
+            <a:solidFill>
+              <a:srgbClr val="CCCCCC"/>
+            </a:solidFill>
+          </a:ln>
+        </p:spPr>
+        <p:style>
+          <a:lnRef idx="1">
+            <a:schemeClr val="accent1"/>
+          </a:lnRef>
+          <a:fillRef idx="3">
+            <a:schemeClr val="accent1"/>
+          </a:fillRef>
+          <a:effectRef idx="2">
+            <a:schemeClr val="accent1"/>
+          </a:effectRef>
+          <a:fontRef idx="minor">
+            <a:schemeClr val="lt1"/>
+          </a:fontRef>
+        </p:style>
+        <p:txBody>
+          <a:bodyPr rtlCol="0" anchor="ctr" lIns="72000"/>
+          <a:lstStyle/>
+          <a:p>
+            <a:pPr algn="ctr"/>
+            <a:r>
+              <a:rPr sz="1100" b="0">
+                <a:solidFill>
+                  <a:srgbClr val="222222"/>
+                </a:solidFill>
+                <a:ea typeface="Malgun Gothic"/>
+                <a:latin typeface="Malgun Gothic"/>
+              </a:rPr>
+              <a:t>role_swap</a:t>
+            </a:r>
+          </a:p>
+        </p:txBody>
+      </p:sp>
+      <p:sp>
+        <p:nvSpPr>
+          <p:cNvPr id="24" name="Rectangle 23"/>
+          <p:cNvSpPr/>
+          <p:nvPr/>
+        </p:nvSpPr>
+        <p:spPr>
+          <a:xfrm>
+            <a:off x="8100000" y="2160000"/>
+            <a:ext cx="1800000" cy="360000"/>
+          </a:xfrm>
+          <a:prstGeom prst="rect">
+            <a:avLst/>
+          </a:prstGeom>
+          <a:solidFill>
+            <a:srgbClr val="F4F6FA"/>
+          </a:solidFill>
+          <a:ln>
+            <a:solidFill>
+              <a:srgbClr val="CCCCCC"/>
+            </a:solidFill>
+          </a:ln>
+        </p:spPr>
+        <p:style>
+          <a:lnRef idx="1">
+            <a:schemeClr val="accent1"/>
+          </a:lnRef>
+          <a:fillRef idx="3">
+            <a:schemeClr val="accent1"/>
+          </a:fillRef>
+          <a:effectRef idx="2">
+            <a:schemeClr val="accent1"/>
+          </a:effectRef>
+          <a:fontRef idx="minor">
+            <a:schemeClr val="lt1"/>
+          </a:fontRef>
+        </p:style>
+        <p:txBody>
+          <a:bodyPr rtlCol="0" anchor="ctr" lIns="72000"/>
+          <a:lstStyle/>
+          <a:p>
+            <a:pPr algn="ctr"/>
+            <a:r>
+              <a:rPr sz="1100" b="0">
+                <a:solidFill>
+                  <a:srgbClr val="222222"/>
+                </a:solidFill>
+                <a:ea typeface="Malgun Gothic"/>
+                <a:latin typeface="Malgun Gothic"/>
+              </a:rPr>
+              <a:t>0.923</a:t>
+            </a:r>
+          </a:p>
+        </p:txBody>
+      </p:sp>
+      <p:sp>
+        <p:nvSpPr>
+          <p:cNvPr id="25" name="Rectangle 24"/>
+          <p:cNvSpPr/>
+          <p:nvPr/>
+        </p:nvSpPr>
+        <p:spPr>
+          <a:xfrm>
+            <a:off x="9900000" y="2160000"/>
+            <a:ext cx="1620000" cy="360000"/>
+          </a:xfrm>
+          <a:prstGeom prst="rect">
+            <a:avLst/>
+          </a:prstGeom>
+          <a:solidFill>
+            <a:srgbClr val="F4F6FA"/>
+          </a:solidFill>
+          <a:ln>
+            <a:solidFill>
+              <a:srgbClr val="CCCCCC"/>
+            </a:solidFill>
+          </a:ln>
+        </p:spPr>
+        <p:style>
+          <a:lnRef idx="1">
+            <a:schemeClr val="accent1"/>
+          </a:lnRef>
+          <a:fillRef idx="3">
+            <a:schemeClr val="accent1"/>
+          </a:fillRef>
+          <a:effectRef idx="2">
+            <a:schemeClr val="accent1"/>
+          </a:effectRef>
+          <a:fontRef idx="minor">
+            <a:schemeClr val="lt1"/>
+          </a:fontRef>
+        </p:style>
+        <p:txBody>
+          <a:bodyPr rtlCol="0" anchor="ctr" lIns="72000"/>
+          <a:lstStyle/>
+          <a:p>
+            <a:pPr algn="ctr"/>
+            <a:r>
+              <a:rPr sz="1100" b="0">
+                <a:solidFill>
+                  <a:srgbClr val="222222"/>
+                </a:solidFill>
+                <a:ea typeface="Malgun Gothic"/>
+                <a:latin typeface="Malgun Gothic"/>
+              </a:rPr>
+              <a:t>0.951</a:t>
+            </a:r>
+          </a:p>
+        </p:txBody>
+      </p:sp>
+      <p:sp>
+        <p:nvSpPr>
+          <p:cNvPr id="26" name="Rectangle 25"/>
+          <p:cNvSpPr/>
+          <p:nvPr/>
+        </p:nvSpPr>
+        <p:spPr>
+          <a:xfrm>
+            <a:off x="6120000" y="2520000"/>
+            <a:ext cx="1980000" cy="360000"/>
+          </a:xfrm>
+          <a:prstGeom prst="rect">
+            <a:avLst/>
+          </a:prstGeom>
+          <a:solidFill>
+            <a:srgbClr val="F4F6FA"/>
+          </a:solidFill>
+          <a:ln>
+            <a:solidFill>
+              <a:srgbClr val="CCCCCC"/>
+            </a:solidFill>
+          </a:ln>
+        </p:spPr>
+        <p:style>
+          <a:lnRef idx="1">
+            <a:schemeClr val="accent1"/>
+          </a:lnRef>
+          <a:fillRef idx="3">
+            <a:schemeClr val="accent1"/>
+          </a:fillRef>
+          <a:effectRef idx="2">
+            <a:schemeClr val="accent1"/>
+          </a:effectRef>
+          <a:fontRef idx="minor">
+            <a:schemeClr val="lt1"/>
+          </a:fontRef>
+        </p:style>
+        <p:txBody>
+          <a:bodyPr rtlCol="0" anchor="ctr" lIns="72000"/>
+          <a:lstStyle/>
+          <a:p>
+            <a:pPr algn="ctr"/>
+            <a:r>
+              <a:rPr sz="1100" b="0">
+                <a:solidFill>
+                  <a:srgbClr val="222222"/>
+                </a:solidFill>
+                <a:ea typeface="Malgun Gothic"/>
+                <a:latin typeface="Malgun Gothic"/>
+              </a:rPr>
+              <a:t>example_swap</a:t>
+            </a:r>
+          </a:p>
+        </p:txBody>
+      </p:sp>
+      <p:sp>
+        <p:nvSpPr>
+          <p:cNvPr id="27" name="Rectangle 26"/>
+          <p:cNvSpPr/>
+          <p:nvPr/>
+        </p:nvSpPr>
+        <p:spPr>
+          <a:xfrm>
+            <a:off x="8100000" y="2520000"/>
+            <a:ext cx="1800000" cy="360000"/>
+          </a:xfrm>
+          <a:prstGeom prst="rect">
+            <a:avLst/>
+          </a:prstGeom>
+          <a:solidFill>
+            <a:srgbClr val="F4F6FA"/>
+          </a:solidFill>
+          <a:ln>
+            <a:solidFill>
+              <a:srgbClr val="CCCCCC"/>
+            </a:solidFill>
+          </a:ln>
+        </p:spPr>
+        <p:style>
+          <a:lnRef idx="1">
+            <a:schemeClr val="accent1"/>
+          </a:lnRef>
+          <a:fillRef idx="3">
+            <a:schemeClr val="accent1"/>
+          </a:fillRef>
+          <a:effectRef idx="2">
+            <a:schemeClr val="accent1"/>
+          </a:effectRef>
+          <a:fontRef idx="minor">
+            <a:schemeClr val="lt1"/>
+          </a:fontRef>
+        </p:style>
+        <p:txBody>
+          <a:bodyPr rtlCol="0" anchor="ctr" lIns="72000"/>
+          <a:lstStyle/>
+          <a:p>
+            <a:pPr algn="ctr"/>
+            <a:r>
+              <a:rPr sz="1100" b="0">
+                <a:solidFill>
+                  <a:srgbClr val="222222"/>
+                </a:solidFill>
+                <a:ea typeface="Malgun Gothic"/>
+                <a:latin typeface="Malgun Gothic"/>
+              </a:rPr>
+              <a:t>0.914</a:t>
+            </a:r>
+          </a:p>
+        </p:txBody>
+      </p:sp>
+      <p:sp>
+        <p:nvSpPr>
+          <p:cNvPr id="28" name="Rectangle 27"/>
+          <p:cNvSpPr/>
+          <p:nvPr/>
+        </p:nvSpPr>
+        <p:spPr>
+          <a:xfrm>
+            <a:off x="9900000" y="2520000"/>
+            <a:ext cx="1620000" cy="360000"/>
+          </a:xfrm>
+          <a:prstGeom prst="rect">
+            <a:avLst/>
+          </a:prstGeom>
+          <a:solidFill>
+            <a:srgbClr val="F4F6FA"/>
+          </a:solidFill>
+          <a:ln>
+            <a:solidFill>
+              <a:srgbClr val="CCCCCC"/>
+            </a:solidFill>
+          </a:ln>
+        </p:spPr>
+        <p:style>
+          <a:lnRef idx="1">
+            <a:schemeClr val="accent1"/>
+          </a:lnRef>
+          <a:fillRef idx="3">
+            <a:schemeClr val="accent1"/>
+          </a:fillRef>
+          <a:effectRef idx="2">
+            <a:schemeClr val="accent1"/>
+          </a:effectRef>
+          <a:fontRef idx="minor">
+            <a:schemeClr val="lt1"/>
+          </a:fontRef>
+        </p:style>
+        <p:txBody>
+          <a:bodyPr rtlCol="0" anchor="ctr" lIns="72000"/>
+          <a:lstStyle/>
+          <a:p>
+            <a:pPr algn="ctr"/>
+            <a:r>
+              <a:rPr sz="1100" b="0">
+                <a:solidFill>
+                  <a:srgbClr val="222222"/>
+                </a:solidFill>
+                <a:ea typeface="Malgun Gothic"/>
+                <a:latin typeface="Malgun Gothic"/>
+              </a:rPr>
+              <a:t>0.908</a:t>
+            </a:r>
+          </a:p>
+        </p:txBody>
+      </p:sp>
+      <p:sp>
+        <p:nvSpPr>
+          <p:cNvPr id="29" name="Rectangle 28"/>
+          <p:cNvSpPr/>
+          <p:nvPr/>
+        </p:nvSpPr>
+        <p:spPr>
+          <a:xfrm>
+            <a:off x="6120000" y="2880000"/>
+            <a:ext cx="1980000" cy="360000"/>
+          </a:xfrm>
+          <a:prstGeom prst="rect">
+            <a:avLst/>
+          </a:prstGeom>
+          <a:solidFill>
+            <a:srgbClr val="F4F6FA"/>
+          </a:solidFill>
+          <a:ln>
+            <a:solidFill>
+              <a:srgbClr val="CCCCCC"/>
+            </a:solidFill>
+          </a:ln>
+        </p:spPr>
+        <p:style>
+          <a:lnRef idx="1">
+            <a:schemeClr val="accent1"/>
+          </a:lnRef>
+          <a:fillRef idx="3">
+            <a:schemeClr val="accent1"/>
+          </a:fillRef>
+          <a:effectRef idx="2">
+            <a:schemeClr val="accent1"/>
+          </a:effectRef>
+          <a:fontRef idx="minor">
+            <a:schemeClr val="lt1"/>
+          </a:fontRef>
+        </p:style>
+        <p:txBody>
+          <a:bodyPr rtlCol="0" anchor="ctr" lIns="72000"/>
+          <a:lstStyle/>
+          <a:p>
+            <a:pPr algn="ctr"/>
+            <a:r>
+              <a:rPr sz="1100" b="0">
+                <a:solidFill>
+                  <a:srgbClr val="222222"/>
+                </a:solidFill>
+                <a:ea typeface="Malgun Gothic"/>
+                <a:latin typeface="Malgun Gothic"/>
+              </a:rPr>
+              <a:t>driver_shuffle</a:t>
+            </a:r>
+          </a:p>
+        </p:txBody>
+      </p:sp>
+      <p:sp>
+        <p:nvSpPr>
+          <p:cNvPr id="30" name="Rectangle 29"/>
+          <p:cNvSpPr/>
+          <p:nvPr/>
+        </p:nvSpPr>
+        <p:spPr>
+          <a:xfrm>
+            <a:off x="8100000" y="2880000"/>
+            <a:ext cx="1800000" cy="360000"/>
+          </a:xfrm>
+          <a:prstGeom prst="rect">
+            <a:avLst/>
+          </a:prstGeom>
+          <a:solidFill>
+            <a:srgbClr val="F4F6FA"/>
+          </a:solidFill>
+          <a:ln>
+            <a:solidFill>
+              <a:srgbClr val="CCCCCC"/>
+            </a:solidFill>
+          </a:ln>
+        </p:spPr>
+        <p:style>
+          <a:lnRef idx="1">
+            <a:schemeClr val="accent1"/>
+          </a:lnRef>
+          <a:fillRef idx="3">
+            <a:schemeClr val="accent1"/>
+          </a:fillRef>
+          <a:effectRef idx="2">
+            <a:schemeClr val="accent1"/>
+          </a:effectRef>
+          <a:fontRef idx="minor">
+            <a:schemeClr val="lt1"/>
+          </a:fontRef>
+        </p:style>
+        <p:txBody>
+          <a:bodyPr rtlCol="0" anchor="ctr" lIns="72000"/>
+          <a:lstStyle/>
+          <a:p>
+            <a:pPr algn="ctr"/>
+            <a:r>
+              <a:rPr sz="1100" b="0">
+                <a:solidFill>
+                  <a:srgbClr val="222222"/>
+                </a:solidFill>
+                <a:ea typeface="Malgun Gothic"/>
+                <a:latin typeface="Malgun Gothic"/>
+              </a:rPr>
+              <a:t>0.924</a:t>
+            </a:r>
+          </a:p>
+        </p:txBody>
+      </p:sp>
+      <p:sp>
+        <p:nvSpPr>
+          <p:cNvPr id="31" name="Rectangle 30"/>
+          <p:cNvSpPr/>
+          <p:nvPr/>
+        </p:nvSpPr>
+        <p:spPr>
+          <a:xfrm>
+            <a:off x="9900000" y="2880000"/>
+            <a:ext cx="1620000" cy="360000"/>
+          </a:xfrm>
+          <a:prstGeom prst="rect">
+            <a:avLst/>
+          </a:prstGeom>
+          <a:solidFill>
+            <a:srgbClr val="F4F6FA"/>
+          </a:solidFill>
+          <a:ln>
+            <a:solidFill>
+              <a:srgbClr val="CCCCCC"/>
+            </a:solidFill>
+          </a:ln>
+        </p:spPr>
+        <p:style>
+          <a:lnRef idx="1">
+            <a:schemeClr val="accent1"/>
+          </a:lnRef>
+          <a:fillRef idx="3">
+            <a:schemeClr val="accent1"/>
+          </a:fillRef>
+          <a:effectRef idx="2">
+            <a:schemeClr val="accent1"/>
+          </a:effectRef>
+          <a:fontRef idx="minor">
+            <a:schemeClr val="lt1"/>
+          </a:fontRef>
+        </p:style>
+        <p:txBody>
+          <a:bodyPr rtlCol="0" anchor="ctr" lIns="72000"/>
+          <a:lstStyle/>
+          <a:p>
+            <a:pPr algn="ctr"/>
+            <a:r>
+              <a:rPr sz="1100" b="0">
+                <a:solidFill>
+                  <a:srgbClr val="222222"/>
+                </a:solidFill>
+                <a:ea typeface="Malgun Gothic"/>
+                <a:latin typeface="Malgun Gothic"/>
+              </a:rPr>
+              <a:t>0.942</a:t>
+            </a:r>
+          </a:p>
+        </p:txBody>
+      </p:sp>
+      <p:sp>
+        <p:nvSpPr>
+          <p:cNvPr id="32" name="TextBox 31"/>
+          <p:cNvSpPr txBox="1"/>
+          <p:nvPr/>
+        </p:nvSpPr>
+        <p:spPr>
+          <a:xfrm>
+            <a:off x="6120000" y="3420000"/>
+            <a:ext cx="5400000" cy="2880000"/>
+          </a:xfrm>
+          <a:prstGeom prst="rect">
+            <a:avLst/>
+          </a:prstGeom>
+          <a:noFill/>
+        </p:spPr>
+        <p:txBody>
+          <a:bodyPr wrap="square">
+            <a:spAutoFit/>
+          </a:bodyPr>
+          <a:lstStyle/>
+          <a:p>
             <a:pPr algn="l"/>
             <a:r>
-              <a:rPr sz="1300" b="0">
-                <a:ea typeface="Malgun Gothic"/>
-                <a:latin typeface="Malgun Gothic"/>
-              </a:rPr>
-              <a:t>•  보조 테이블 활용으로 AUROC 0.78+ 목표</a:t>
+              <a:rPr sz="1200" b="0">
+                <a:ea typeface="Malgun Gothic"/>
+                <a:latin typeface="Malgun Gothic"/>
+              </a:rPr>
+              <a:t>•  양 LLM 모두 cosine ≥ 0.90 (목표 0.85+)</a:t>
             </a:r>
           </a:p>
           <a:p>
             <a:pPr algn="l"/>
             <a:r>
-              <a:rPr sz="1300" b="0">
-                <a:ea typeface="Malgun Gothic"/>
-                <a:latin typeface="Malgun Gothic"/>
-              </a:rPr>
-              <a:t>•  Fairness-aware 학습 (Reweighing, Adversarial Debiasing)</a:t>
+              <a:rPr sz="1200" b="0">
+                <a:ea typeface="Malgun Gothic"/>
+                <a:latin typeface="Malgun Gothic"/>
+              </a:rPr>
+              <a:t>•  Gemini가 약간 더 안정적</a:t>
             </a:r>
           </a:p>
           <a:p>
             <a:pPr algn="l"/>
             <a:r>
-              <a:rPr sz="1300" b="0">
-                <a:ea typeface="Malgun Gothic"/>
-                <a:latin typeface="Malgun Gothic"/>
-              </a:rPr>
-              <a:t>•  Cross-LLM judge로 G-Eval 객관화</a:t>
-            </a:r>
-          </a:p>
-          <a:p>
-            <a:pPr algn="l"/>
-            <a:r>
-              <a:rPr sz="1300" b="0">
-                <a:ea typeface="Malgun Gothic"/>
-                <a:latin typeface="Malgun Gothic"/>
-              </a:rPr>
-              <a:t>•  BERTScore 기반 Robustness 정량 평가</a:t>
-            </a:r>
-          </a:p>
-          <a:p>
-            <a:pPr algn="l"/>
-            <a:r>
-              <a:rPr sz="1300" b="0">
-                <a:ea typeface="Malgun Gothic"/>
-                <a:latin typeface="Malgun Gothic"/>
-              </a:rPr>
-              <a:t>•  FT-Transformer 비교 모델 추가</a:t>
-            </a:r>
-          </a:p>
-          <a:p>
-            <a:pPr algn="l"/>
-            <a:r>
-              <a:rPr sz="1300" b="0">
-                <a:ea typeface="Malgun Gothic"/>
-                <a:latin typeface="Malgun Gothic"/>
-              </a:rPr>
-              <a:t>•  인간 평가 (Plausibility) — 5점 척도, Cohen's κ</a:t>
-            </a:r>
-          </a:p>
-          <a:p>
-            <a:pPr algn="l"/>
-            <a:r>
-              <a:rPr sz="1300" b="0">
-                <a:ea typeface="Malgun Gothic"/>
-                <a:latin typeface="Malgun Gothic"/>
-              </a:rPr>
-              <a:t>•  한국어 도메인 특화 LLM QLoRA 미세조정</a:t>
+              <a:rPr sz="1200" b="0">
+                <a:ea typeface="Malgun Gothic"/>
+                <a:latin typeface="Malgun Gothic"/>
+              </a:rPr>
+              <a:t>•  → 운영 환경에서도 출력 일관성 기대 가능</a:t>
+            </a:r>
+          </a:p>
+        </p:txBody>
+      </p:sp>
+      <p:sp>
+        <p:nvSpPr>
+          <p:cNvPr id="33" name="TextBox 32"/>
+          <p:cNvSpPr txBox="1"/>
+          <p:nvPr/>
+        </p:nvSpPr>
+        <p:spPr>
+          <a:xfrm>
+            <a:off x="360000" y="5940000"/>
+            <a:ext cx="11160000" cy="360000"/>
+          </a:xfrm>
+          <a:prstGeom prst="rect">
+            <a:avLst/>
+          </a:prstGeom>
+          <a:noFill/>
+        </p:spPr>
+        <p:txBody>
+          <a:bodyPr wrap="square">
+            <a:spAutoFit/>
+          </a:bodyPr>
+          <a:lstStyle/>
+          <a:p>
+            <a:pPr algn="ctr"/>
+            <a:r>
+              <a:rPr sz="1400" b="1">
+                <a:solidFill>
+                  <a:srgbClr val="C44E52"/>
+                </a:solidFill>
+                <a:ea typeface="Malgun Gothic"/>
+                <a:latin typeface="Malgun Gothic"/>
+              </a:rPr>
+              <a:t>Step 1의 핵심 메시지(환각 0%, baseline 45.5%)가 통계적으로 견고함을 입증</a:t>
             </a:r>
           </a:p>
         </p:txBody>
@@ -5219,6 +7109,873 @@
 </file>
 
 <file path=ppt/slides/slide14.xml><?xml version="1.0" encoding="utf-8"?>
+<p:sld xmlns:a="http://schemas.openxmlformats.org/drawingml/2006/main" xmlns:p="http://schemas.openxmlformats.org/presentationml/2006/main" xmlns:r="http://schemas.openxmlformats.org/officeDocument/2006/relationships">
+  <p:cSld>
+    <p:spTree>
+      <p:nvGrpSpPr>
+        <p:cNvPr id="1" name=""/>
+        <p:cNvGrpSpPr/>
+        <p:nvPr/>
+      </p:nvGrpSpPr>
+      <p:grpSpPr/>
+      <p:sp>
+        <p:nvSpPr>
+          <p:cNvPr id="2" name="Rectangle 1"/>
+          <p:cNvSpPr/>
+          <p:nvPr/>
+        </p:nvSpPr>
+        <p:spPr>
+          <a:xfrm>
+            <a:off x="0" y="0"/>
+            <a:ext cx="180000" cy="720000"/>
+          </a:xfrm>
+          <a:prstGeom prst="rect">
+            <a:avLst/>
+          </a:prstGeom>
+          <a:solidFill>
+            <a:srgbClr val="1F3A68"/>
+          </a:solidFill>
+          <a:ln>
+            <a:noFill/>
+          </a:ln>
+        </p:spPr>
+        <p:style>
+          <a:lnRef idx="1">
+            <a:schemeClr val="accent1"/>
+          </a:lnRef>
+          <a:fillRef idx="3">
+            <a:schemeClr val="accent1"/>
+          </a:fillRef>
+          <a:effectRef idx="2">
+            <a:schemeClr val="accent1"/>
+          </a:effectRef>
+          <a:fontRef idx="minor">
+            <a:schemeClr val="lt1"/>
+          </a:fontRef>
+        </p:style>
+        <p:txBody>
+          <a:bodyPr rtlCol="0" anchor="ctr"/>
+          <a:lstStyle/>
+          <a:p>
+            <a:pPr algn="ctr"/>
+          </a:p>
+        </p:txBody>
+      </p:sp>
+      <p:sp>
+        <p:nvSpPr>
+          <p:cNvPr id="3" name="TextBox 2"/>
+          <p:cNvSpPr txBox="1"/>
+          <p:nvPr/>
+        </p:nvSpPr>
+        <p:spPr>
+          <a:xfrm>
+            <a:off x="360000" y="144000"/>
+            <a:ext cx="10800000" cy="360000"/>
+          </a:xfrm>
+          <a:prstGeom prst="rect">
+            <a:avLst/>
+          </a:prstGeom>
+          <a:noFill/>
+        </p:spPr>
+        <p:txBody>
+          <a:bodyPr wrap="square">
+            <a:spAutoFit/>
+          </a:bodyPr>
+          <a:lstStyle/>
+          <a:p>
+            <a:r>
+              <a:rPr sz="2400" b="1">
+                <a:solidFill>
+                  <a:srgbClr val="1F3A68"/>
+                </a:solidFill>
+                <a:ea typeface="Malgun Gothic"/>
+                <a:latin typeface="Malgun Gothic"/>
+              </a:rPr>
+              <a:t>13. 종합 — 본 연구의 가치 3가지</a:t>
+            </a:r>
+          </a:p>
+        </p:txBody>
+      </p:sp>
+      <p:sp>
+        <p:nvSpPr>
+          <p:cNvPr id="4" name="TextBox 3"/>
+          <p:cNvSpPr txBox="1"/>
+          <p:nvPr/>
+        </p:nvSpPr>
+        <p:spPr>
+          <a:xfrm>
+            <a:off x="360000" y="503999"/>
+            <a:ext cx="10800000" cy="288000"/>
+          </a:xfrm>
+          <a:prstGeom prst="rect">
+            <a:avLst/>
+          </a:prstGeom>
+          <a:noFill/>
+        </p:spPr>
+        <p:txBody>
+          <a:bodyPr wrap="square">
+            <a:spAutoFit/>
+          </a:bodyPr>
+          <a:lstStyle/>
+          <a:p>
+            <a:r>
+              <a:rPr sz="1200" b="0">
+                <a:solidFill>
+                  <a:srgbClr val="555555"/>
+                </a:solidFill>
+                <a:ea typeface="Malgun Gothic"/>
+                <a:latin typeface="Malgun Gothic"/>
+              </a:rPr>
+              <a:t>Step 1 + Step 2-A 마무리</a:t>
+            </a:r>
+          </a:p>
+        </p:txBody>
+      </p:sp>
+      <p:sp>
+        <p:nvSpPr>
+          <p:cNvPr id="5" name="Rectangle 4"/>
+          <p:cNvSpPr/>
+          <p:nvPr/>
+        </p:nvSpPr>
+        <p:spPr>
+          <a:xfrm>
+            <a:off x="360000" y="864000"/>
+            <a:ext cx="11340000" cy="18000"/>
+          </a:xfrm>
+          <a:prstGeom prst="rect">
+            <a:avLst/>
+          </a:prstGeom>
+          <a:solidFill>
+            <a:srgbClr val="CCCCCC"/>
+          </a:solidFill>
+          <a:ln>
+            <a:noFill/>
+          </a:ln>
+        </p:spPr>
+        <p:style>
+          <a:lnRef idx="1">
+            <a:schemeClr val="accent1"/>
+          </a:lnRef>
+          <a:fillRef idx="3">
+            <a:schemeClr val="accent1"/>
+          </a:fillRef>
+          <a:effectRef idx="2">
+            <a:schemeClr val="accent1"/>
+          </a:effectRef>
+          <a:fontRef idx="minor">
+            <a:schemeClr val="lt1"/>
+          </a:fontRef>
+        </p:style>
+        <p:txBody>
+          <a:bodyPr rtlCol="0" anchor="ctr"/>
+          <a:lstStyle/>
+          <a:p>
+            <a:pPr algn="ctr"/>
+          </a:p>
+        </p:txBody>
+      </p:sp>
+      <p:sp>
+        <p:nvSpPr>
+          <p:cNvPr id="6" name="Rounded Rectangle 5"/>
+          <p:cNvSpPr/>
+          <p:nvPr/>
+        </p:nvSpPr>
+        <p:spPr>
+          <a:xfrm>
+            <a:off x="605847" y="1260000"/>
+            <a:ext cx="3420000" cy="3060000"/>
+          </a:xfrm>
+          <a:prstGeom prst="roundRect">
+            <a:avLst/>
+          </a:prstGeom>
+          <a:solidFill>
+            <a:srgbClr val="4C72B0"/>
+          </a:solidFill>
+          <a:ln>
+            <a:noFill/>
+          </a:ln>
+        </p:spPr>
+        <p:style>
+          <a:lnRef idx="1">
+            <a:schemeClr val="accent1"/>
+          </a:lnRef>
+          <a:fillRef idx="3">
+            <a:schemeClr val="accent1"/>
+          </a:fillRef>
+          <a:effectRef idx="2">
+            <a:schemeClr val="accent1"/>
+          </a:effectRef>
+          <a:fontRef idx="minor">
+            <a:schemeClr val="lt1"/>
+          </a:fontRef>
+        </p:style>
+        <p:txBody>
+          <a:bodyPr rtlCol="0" anchor="ctr" lIns="216000" rIns="216000" tIns="216000"/>
+          <a:lstStyle/>
+          <a:p>
+            <a:pPr algn="ctr"/>
+            <a:r>
+              <a:rPr sz="2200" b="1">
+                <a:solidFill>
+                  <a:srgbClr val="FFFFFF"/>
+                </a:solidFill>
+                <a:ea typeface="Malgun Gothic"/>
+                <a:latin typeface="Malgun Gothic"/>
+              </a:rPr>
+              <a:t>예측 성능</a:t>
+            </a:r>
+          </a:p>
+          <a:p>
+            <a:pPr algn="ctr"/>
+            <a:r>
+              <a:rPr sz="1200" b="0">
+                <a:solidFill>
+                  <a:srgbClr val="FFFFFF"/>
+                </a:solidFill>
+                <a:ea typeface="Malgun Gothic"/>
+                <a:latin typeface="Malgun Gothic"/>
+              </a:rPr>
+              <a:t>
+XGBoost AUROC 0.7587 ± 0.0008
+5-fold 안정적 우위
+TabNet 0.7518 — 비슷한 성능 +
+어텐션 해석성 추가</a:t>
+            </a:r>
+          </a:p>
+        </p:txBody>
+      </p:sp>
+      <p:sp>
+        <p:nvSpPr>
+          <p:cNvPr id="7" name="Rounded Rectangle 6"/>
+          <p:cNvSpPr/>
+          <p:nvPr/>
+        </p:nvSpPr>
+        <p:spPr>
+          <a:xfrm>
+            <a:off x="4385847" y="1260000"/>
+            <a:ext cx="3420000" cy="3060000"/>
+          </a:xfrm>
+          <a:prstGeom prst="roundRect">
+            <a:avLst/>
+          </a:prstGeom>
+          <a:solidFill>
+            <a:srgbClr val="55A868"/>
+          </a:solidFill>
+          <a:ln>
+            <a:noFill/>
+          </a:ln>
+        </p:spPr>
+        <p:style>
+          <a:lnRef idx="1">
+            <a:schemeClr val="accent1"/>
+          </a:lnRef>
+          <a:fillRef idx="3">
+            <a:schemeClr val="accent1"/>
+          </a:fillRef>
+          <a:effectRef idx="2">
+            <a:schemeClr val="accent1"/>
+          </a:effectRef>
+          <a:fontRef idx="minor">
+            <a:schemeClr val="lt1"/>
+          </a:fontRef>
+        </p:style>
+        <p:txBody>
+          <a:bodyPr rtlCol="0" anchor="ctr" lIns="216000" rIns="216000" tIns="216000"/>
+          <a:lstStyle/>
+          <a:p>
+            <a:pPr algn="ctr"/>
+            <a:r>
+              <a:rPr sz="2200" b="1">
+                <a:solidFill>
+                  <a:srgbClr val="FFFFFF"/>
+                </a:solidFill>
+                <a:ea typeface="Malgun Gothic"/>
+                <a:latin typeface="Malgun Gothic"/>
+              </a:rPr>
+              <a:t>해석 일관성</a:t>
+            </a:r>
+          </a:p>
+          <a:p>
+            <a:pPr algn="ctr"/>
+            <a:r>
+              <a:rPr sz="1200" b="0">
+                <a:solidFill>
+                  <a:srgbClr val="FFFFFF"/>
+                </a:solidFill>
+                <a:ea typeface="Malgun Gothic"/>
+                <a:latin typeface="Malgun Gothic"/>
+              </a:rPr>
+              <a:t>
+Spearman ρ 0.117 (전체)
+−0.195 (Top-50)
+어텐션 ↔ SHAP의
+부분 일관 + 부분 상보 정량 검증</a:t>
+            </a:r>
+          </a:p>
+        </p:txBody>
+      </p:sp>
+      <p:sp>
+        <p:nvSpPr>
+          <p:cNvPr id="8" name="Rounded Rectangle 7"/>
+          <p:cNvSpPr/>
+          <p:nvPr/>
+        </p:nvSpPr>
+        <p:spPr>
+          <a:xfrm>
+            <a:off x="8165847" y="1260000"/>
+            <a:ext cx="3420000" cy="3060000"/>
+          </a:xfrm>
+          <a:prstGeom prst="roundRect">
+            <a:avLst/>
+          </a:prstGeom>
+          <a:solidFill>
+            <a:srgbClr val="C44E52"/>
+          </a:solidFill>
+          <a:ln>
+            <a:noFill/>
+          </a:ln>
+        </p:spPr>
+        <p:style>
+          <a:lnRef idx="1">
+            <a:schemeClr val="accent1"/>
+          </a:lnRef>
+          <a:fillRef idx="3">
+            <a:schemeClr val="accent1"/>
+          </a:fillRef>
+          <a:effectRef idx="2">
+            <a:schemeClr val="accent1"/>
+          </a:effectRef>
+          <a:fontRef idx="minor">
+            <a:schemeClr val="lt1"/>
+          </a:fontRef>
+        </p:style>
+        <p:txBody>
+          <a:bodyPr rtlCol="0" anchor="ctr" lIns="216000" rIns="216000" tIns="216000"/>
+          <a:lstStyle/>
+          <a:p>
+            <a:pPr algn="ctr"/>
+            <a:r>
+              <a:rPr sz="2200" b="1">
+                <a:solidFill>
+                  <a:srgbClr val="FFFFFF"/>
+                </a:solidFill>
+                <a:ea typeface="Malgun Gothic"/>
+                <a:latin typeface="Malgun Gothic"/>
+              </a:rPr>
+              <a:t>환각 차단</a:t>
+            </a:r>
+          </a:p>
+          <a:p>
+            <a:pPr algn="ctr"/>
+            <a:r>
+              <a:rPr sz="1200" b="0">
+                <a:solidFill>
+                  <a:srgbClr val="FFFFFF"/>
+                </a:solidFill>
+                <a:ea typeface="Malgun Gothic"/>
+                <a:latin typeface="Malgun Gothic"/>
+              </a:rPr>
+              <a:t>
+Hallucination Rate 0.000
+(두 LLM 모두)
+Baseline 45.5% vs XAI-RAG 0%
+→ SHAP 컨텍스트의 직접 효과 입증</a:t>
+            </a:r>
+          </a:p>
+        </p:txBody>
+      </p:sp>
+      <p:sp>
+        <p:nvSpPr>
+          <p:cNvPr id="9" name="TextBox 8"/>
+          <p:cNvSpPr txBox="1"/>
+          <p:nvPr/>
+        </p:nvSpPr>
+        <p:spPr>
+          <a:xfrm>
+            <a:off x="360000" y="4680000"/>
+            <a:ext cx="11160000" cy="540000"/>
+          </a:xfrm>
+          <a:prstGeom prst="rect">
+            <a:avLst/>
+          </a:prstGeom>
+          <a:noFill/>
+        </p:spPr>
+        <p:txBody>
+          <a:bodyPr wrap="square">
+            <a:spAutoFit/>
+          </a:bodyPr>
+          <a:lstStyle/>
+          <a:p>
+            <a:pPr algn="ctr"/>
+            <a:r>
+              <a:rPr sz="1600" b="1">
+                <a:solidFill>
+                  <a:srgbClr val="1F3A68"/>
+                </a:solidFill>
+                <a:ea typeface="Malgun Gothic"/>
+                <a:latin typeface="Malgun Gothic"/>
+              </a:rPr>
+              <a:t>한 줄 메시지</a:t>
+            </a:r>
+          </a:p>
+        </p:txBody>
+      </p:sp>
+      <p:sp>
+        <p:nvSpPr>
+          <p:cNvPr id="10" name="TextBox 9"/>
+          <p:cNvSpPr txBox="1"/>
+          <p:nvPr/>
+        </p:nvSpPr>
+        <p:spPr>
+          <a:xfrm>
+            <a:off x="360000" y="5220000"/>
+            <a:ext cx="11160000" cy="720000"/>
+          </a:xfrm>
+          <a:prstGeom prst="rect">
+            <a:avLst/>
+          </a:prstGeom>
+          <a:noFill/>
+        </p:spPr>
+        <p:txBody>
+          <a:bodyPr wrap="square">
+            <a:spAutoFit/>
+          </a:bodyPr>
+          <a:lstStyle/>
+          <a:p>
+            <a:pPr algn="ctr"/>
+            <a:r>
+              <a:rPr sz="1800" b="1">
+                <a:solidFill>
+                  <a:srgbClr val="222222"/>
+                </a:solidFill>
+                <a:ea typeface="Malgun Gothic"/>
+                <a:latin typeface="Malgun Gothic"/>
+              </a:rPr>
+              <a:t>"SHAP 컨텍스트를 LLM의 검색된 근거로 재정의하면,
+LLM 종속성 없이 환각이 0이 되는 자연어 설명을 생성할 수 있다."</a:t>
+            </a:r>
+          </a:p>
+        </p:txBody>
+      </p:sp>
+    </p:spTree>
+  </p:cSld>
+  <p:clrMapOvr>
+    <a:masterClrMapping/>
+  </p:clrMapOvr>
+</p:sld>
+</file>
+
+<file path=ppt/slides/slide15.xml><?xml version="1.0" encoding="utf-8"?>
+<p:sld xmlns:a="http://schemas.openxmlformats.org/drawingml/2006/main" xmlns:p="http://schemas.openxmlformats.org/presentationml/2006/main" xmlns:r="http://schemas.openxmlformats.org/officeDocument/2006/relationships">
+  <p:cSld>
+    <p:spTree>
+      <p:nvGrpSpPr>
+        <p:cNvPr id="1" name=""/>
+        <p:cNvGrpSpPr/>
+        <p:nvPr/>
+      </p:nvGrpSpPr>
+      <p:grpSpPr/>
+      <p:sp>
+        <p:nvSpPr>
+          <p:cNvPr id="2" name="Rectangle 1"/>
+          <p:cNvSpPr/>
+          <p:nvPr/>
+        </p:nvSpPr>
+        <p:spPr>
+          <a:xfrm>
+            <a:off x="0" y="0"/>
+            <a:ext cx="180000" cy="720000"/>
+          </a:xfrm>
+          <a:prstGeom prst="rect">
+            <a:avLst/>
+          </a:prstGeom>
+          <a:solidFill>
+            <a:srgbClr val="1F3A68"/>
+          </a:solidFill>
+          <a:ln>
+            <a:noFill/>
+          </a:ln>
+        </p:spPr>
+        <p:style>
+          <a:lnRef idx="1">
+            <a:schemeClr val="accent1"/>
+          </a:lnRef>
+          <a:fillRef idx="3">
+            <a:schemeClr val="accent1"/>
+          </a:fillRef>
+          <a:effectRef idx="2">
+            <a:schemeClr val="accent1"/>
+          </a:effectRef>
+          <a:fontRef idx="minor">
+            <a:schemeClr val="lt1"/>
+          </a:fontRef>
+        </p:style>
+        <p:txBody>
+          <a:bodyPr rtlCol="0" anchor="ctr"/>
+          <a:lstStyle/>
+          <a:p>
+            <a:pPr algn="ctr"/>
+          </a:p>
+        </p:txBody>
+      </p:sp>
+      <p:sp>
+        <p:nvSpPr>
+          <p:cNvPr id="3" name="TextBox 2"/>
+          <p:cNvSpPr txBox="1"/>
+          <p:nvPr/>
+        </p:nvSpPr>
+        <p:spPr>
+          <a:xfrm>
+            <a:off x="360000" y="144000"/>
+            <a:ext cx="10800000" cy="360000"/>
+          </a:xfrm>
+          <a:prstGeom prst="rect">
+            <a:avLst/>
+          </a:prstGeom>
+          <a:noFill/>
+        </p:spPr>
+        <p:txBody>
+          <a:bodyPr wrap="square">
+            <a:spAutoFit/>
+          </a:bodyPr>
+          <a:lstStyle/>
+          <a:p>
+            <a:r>
+              <a:rPr sz="2400" b="1">
+                <a:solidFill>
+                  <a:srgbClr val="1F3A68"/>
+                </a:solidFill>
+                <a:ea typeface="Malgun Gothic"/>
+                <a:latin typeface="Malgun Gothic"/>
+              </a:rPr>
+              <a:t>14. 한계와 향후 계획</a:t>
+            </a:r>
+          </a:p>
+        </p:txBody>
+      </p:sp>
+      <p:sp>
+        <p:nvSpPr>
+          <p:cNvPr id="4" name="TextBox 3"/>
+          <p:cNvSpPr txBox="1"/>
+          <p:nvPr/>
+        </p:nvSpPr>
+        <p:spPr>
+          <a:xfrm>
+            <a:off x="360000" y="503999"/>
+            <a:ext cx="10800000" cy="288000"/>
+          </a:xfrm>
+          <a:prstGeom prst="rect">
+            <a:avLst/>
+          </a:prstGeom>
+          <a:noFill/>
+        </p:spPr>
+        <p:txBody>
+          <a:bodyPr wrap="square">
+            <a:spAutoFit/>
+          </a:bodyPr>
+          <a:lstStyle/>
+          <a:p>
+            <a:r>
+              <a:rPr sz="1200" b="0">
+                <a:solidFill>
+                  <a:srgbClr val="555555"/>
+                </a:solidFill>
+                <a:ea typeface="Malgun Gothic"/>
+                <a:latin typeface="Malgun Gothic"/>
+              </a:rPr>
+              <a:t>Step 3 — 본 논문 확장 (보조 테이블, fairness-aware 등)</a:t>
+            </a:r>
+          </a:p>
+        </p:txBody>
+      </p:sp>
+      <p:sp>
+        <p:nvSpPr>
+          <p:cNvPr id="5" name="Rectangle 4"/>
+          <p:cNvSpPr/>
+          <p:nvPr/>
+        </p:nvSpPr>
+        <p:spPr>
+          <a:xfrm>
+            <a:off x="360000" y="864000"/>
+            <a:ext cx="11340000" cy="18000"/>
+          </a:xfrm>
+          <a:prstGeom prst="rect">
+            <a:avLst/>
+          </a:prstGeom>
+          <a:solidFill>
+            <a:srgbClr val="CCCCCC"/>
+          </a:solidFill>
+          <a:ln>
+            <a:noFill/>
+          </a:ln>
+        </p:spPr>
+        <p:style>
+          <a:lnRef idx="1">
+            <a:schemeClr val="accent1"/>
+          </a:lnRef>
+          <a:fillRef idx="3">
+            <a:schemeClr val="accent1"/>
+          </a:fillRef>
+          <a:effectRef idx="2">
+            <a:schemeClr val="accent1"/>
+          </a:effectRef>
+          <a:fontRef idx="minor">
+            <a:schemeClr val="lt1"/>
+          </a:fontRef>
+        </p:style>
+        <p:txBody>
+          <a:bodyPr rtlCol="0" anchor="ctr"/>
+          <a:lstStyle/>
+          <a:p>
+            <a:pPr algn="ctr"/>
+          </a:p>
+        </p:txBody>
+      </p:sp>
+      <p:sp>
+        <p:nvSpPr>
+          <p:cNvPr id="6" name="TextBox 5"/>
+          <p:cNvSpPr txBox="1"/>
+          <p:nvPr/>
+        </p:nvSpPr>
+        <p:spPr>
+          <a:xfrm>
+            <a:off x="360000" y="1080000"/>
+            <a:ext cx="5400000" cy="360000"/>
+          </a:xfrm>
+          <a:prstGeom prst="rect">
+            <a:avLst/>
+          </a:prstGeom>
+          <a:noFill/>
+        </p:spPr>
+        <p:txBody>
+          <a:bodyPr wrap="square">
+            <a:spAutoFit/>
+          </a:bodyPr>
+          <a:lstStyle/>
+          <a:p>
+            <a:r>
+              <a:rPr sz="1600" b="1">
+                <a:solidFill>
+                  <a:srgbClr val="C44E52"/>
+                </a:solidFill>
+                <a:ea typeface="Malgun Gothic"/>
+                <a:latin typeface="Malgun Gothic"/>
+              </a:rPr>
+              <a:t>현재 한계</a:t>
+            </a:r>
+          </a:p>
+        </p:txBody>
+      </p:sp>
+      <p:sp>
+        <p:nvSpPr>
+          <p:cNvPr id="7" name="TextBox 6"/>
+          <p:cNvSpPr txBox="1"/>
+          <p:nvPr/>
+        </p:nvSpPr>
+        <p:spPr>
+          <a:xfrm>
+            <a:off x="540000" y="1440000"/>
+            <a:ext cx="5400000" cy="4680000"/>
+          </a:xfrm>
+          <a:prstGeom prst="rect">
+            <a:avLst/>
+          </a:prstGeom>
+          <a:noFill/>
+        </p:spPr>
+        <p:txBody>
+          <a:bodyPr wrap="square">
+            <a:spAutoFit/>
+          </a:bodyPr>
+          <a:lstStyle/>
+          <a:p>
+            <a:pPr algn="l"/>
+            <a:r>
+              <a:rPr sz="1300" b="0">
+                <a:ea typeface="Malgun Gothic"/>
+                <a:latin typeface="Malgun Gothic"/>
+              </a:rPr>
+              <a:t>•  평가 표본 10명 — 100~500명으로 확장 필요</a:t>
+            </a:r>
+          </a:p>
+          <a:p>
+            <a:pPr algn="l"/>
+            <a:r>
+              <a:rPr sz="1300" b="0">
+                <a:ea typeface="Malgun Gothic"/>
+                <a:latin typeface="Malgun Gothic"/>
+              </a:rPr>
+              <a:t>•  보조 테이블 미사용 — bureau, previous_application 등</a:t>
+            </a:r>
+          </a:p>
+          <a:p>
+            <a:pPr algn="l"/>
+            <a:r>
+              <a:rPr sz="1300" b="0">
+                <a:ea typeface="Malgun Gothic"/>
+                <a:latin typeface="Malgun Gothic"/>
+              </a:rPr>
+              <a:t>•  G-Eval self-bias — Gemini가 자기 출력 평가</a:t>
+            </a:r>
+          </a:p>
+          <a:p>
+            <a:pPr algn="l"/>
+            <a:r>
+              <a:rPr sz="1300" b="0">
+                <a:ea typeface="Malgun Gothic"/>
+                <a:latin typeface="Malgun Gothic"/>
+              </a:rPr>
+              <a:t>•  Counterfactual 정량화 미수행 (정성 비교만)</a:t>
+            </a:r>
+          </a:p>
+          <a:p>
+            <a:pPr algn="l"/>
+            <a:r>
+              <a:rPr sz="1300" b="0">
+                <a:ea typeface="Malgun Gothic"/>
+                <a:latin typeface="Malgun Gothic"/>
+              </a:rPr>
+              <a:t>•  Robustness 평가 (프롬프트 변형) 미수행</a:t>
+            </a:r>
+          </a:p>
+        </p:txBody>
+      </p:sp>
+      <p:sp>
+        <p:nvSpPr>
+          <p:cNvPr id="8" name="TextBox 7"/>
+          <p:cNvSpPr txBox="1"/>
+          <p:nvPr/>
+        </p:nvSpPr>
+        <p:spPr>
+          <a:xfrm>
+            <a:off x="6120000" y="1080000"/>
+            <a:ext cx="5400000" cy="360000"/>
+          </a:xfrm>
+          <a:prstGeom prst="rect">
+            <a:avLst/>
+          </a:prstGeom>
+          <a:noFill/>
+        </p:spPr>
+        <p:txBody>
+          <a:bodyPr wrap="square">
+            <a:spAutoFit/>
+          </a:bodyPr>
+          <a:lstStyle/>
+          <a:p>
+            <a:r>
+              <a:rPr sz="1600" b="1">
+                <a:solidFill>
+                  <a:srgbClr val="55A868"/>
+                </a:solidFill>
+                <a:ea typeface="Malgun Gothic"/>
+                <a:latin typeface="Malgun Gothic"/>
+              </a:rPr>
+              <a:t>향후 계획</a:t>
+            </a:r>
+          </a:p>
+        </p:txBody>
+      </p:sp>
+      <p:sp>
+        <p:nvSpPr>
+          <p:cNvPr id="9" name="TextBox 8"/>
+          <p:cNvSpPr txBox="1"/>
+          <p:nvPr/>
+        </p:nvSpPr>
+        <p:spPr>
+          <a:xfrm>
+            <a:off x="6300000" y="1440000"/>
+            <a:ext cx="5400000" cy="4680000"/>
+          </a:xfrm>
+          <a:prstGeom prst="rect">
+            <a:avLst/>
+          </a:prstGeom>
+          <a:noFill/>
+        </p:spPr>
+        <p:txBody>
+          <a:bodyPr wrap="square">
+            <a:spAutoFit/>
+          </a:bodyPr>
+          <a:lstStyle/>
+          <a:p>
+            <a:pPr algn="l"/>
+            <a:r>
+              <a:rPr sz="1300" b="0">
+                <a:ea typeface="Malgun Gothic"/>
+                <a:latin typeface="Malgun Gothic"/>
+              </a:rPr>
+              <a:t>•  보조 테이블 활용으로 AUROC 0.78+ 목표</a:t>
+            </a:r>
+          </a:p>
+          <a:p>
+            <a:pPr algn="l"/>
+            <a:r>
+              <a:rPr sz="1300" b="0">
+                <a:ea typeface="Malgun Gothic"/>
+                <a:latin typeface="Malgun Gothic"/>
+              </a:rPr>
+              <a:t>•  Fairness-aware 학습 (Reweighing, Adversarial Debiasing)</a:t>
+            </a:r>
+          </a:p>
+          <a:p>
+            <a:pPr algn="l"/>
+            <a:r>
+              <a:rPr sz="1300" b="0">
+                <a:ea typeface="Malgun Gothic"/>
+                <a:latin typeface="Malgun Gothic"/>
+              </a:rPr>
+              <a:t>•  Cross-LLM judge로 G-Eval 객관화</a:t>
+            </a:r>
+          </a:p>
+          <a:p>
+            <a:pPr algn="l"/>
+            <a:r>
+              <a:rPr sz="1300" b="0">
+                <a:ea typeface="Malgun Gothic"/>
+                <a:latin typeface="Malgun Gothic"/>
+              </a:rPr>
+              <a:t>•  BERTScore 기반 Robustness 정량 평가</a:t>
+            </a:r>
+          </a:p>
+          <a:p>
+            <a:pPr algn="l"/>
+            <a:r>
+              <a:rPr sz="1300" b="0">
+                <a:ea typeface="Malgun Gothic"/>
+                <a:latin typeface="Malgun Gothic"/>
+              </a:rPr>
+              <a:t>•  FT-Transformer 비교 모델 추가</a:t>
+            </a:r>
+          </a:p>
+          <a:p>
+            <a:pPr algn="l"/>
+            <a:r>
+              <a:rPr sz="1300" b="0">
+                <a:ea typeface="Malgun Gothic"/>
+                <a:latin typeface="Malgun Gothic"/>
+              </a:rPr>
+              <a:t>•  인간 평가 (Plausibility) — 5점 척도, Cohen's κ</a:t>
+            </a:r>
+          </a:p>
+          <a:p>
+            <a:pPr algn="l"/>
+            <a:r>
+              <a:rPr sz="1300" b="0">
+                <a:ea typeface="Malgun Gothic"/>
+                <a:latin typeface="Malgun Gothic"/>
+              </a:rPr>
+              <a:t>•  한국어 도메인 특화 LLM QLoRA 미세조정</a:t>
+            </a:r>
+          </a:p>
+        </p:txBody>
+      </p:sp>
+    </p:spTree>
+  </p:cSld>
+  <p:clrMapOvr>
+    <a:masterClrMapping/>
+  </p:clrMapOvr>
+</p:sld>
+</file>
+
+<file path=ppt/slides/slide16.xml><?xml version="1.0" encoding="utf-8"?>
 <p:sld xmlns:a="http://schemas.openxmlformats.org/drawingml/2006/main" xmlns:p="http://schemas.openxmlformats.org/presentationml/2006/main" xmlns:r="http://schemas.openxmlformats.org/officeDocument/2006/relationships">
   <p:cSld>
     <p:spTree>

--- a/paper/midterm_slides.pptx
+++ b/paper/midterm_slides.pptx
@@ -21,6 +21,7 @@
     <p:sldId id="269" r:id="rId20"/>
     <p:sldId id="270" r:id="rId21"/>
     <p:sldId id="271" r:id="rId22"/>
+    <p:sldId id="272" r:id="rId23"/>
   </p:sldIdLst>
   <p:sldSz cx="12191695" cy="6858000" type="screen4x3"/>
   <p:notesSz cx="6858000" cy="9144000"/>
@@ -7191,7 +7192,7 @@
                 <a:ea typeface="Malgun Gothic"/>
                 <a:latin typeface="Malgun Gothic"/>
               </a:rPr>
-              <a:t>13. 종합 — 본 연구의 가치 3가지</a:t>
+              <a:t>13. Step 3-B (보너스) — 보조 테이블 활용</a:t>
             </a:r>
           </a:p>
         </p:txBody>
@@ -7226,7 +7227,7 @@
                 <a:ea typeface="Malgun Gothic"/>
                 <a:latin typeface="Malgun Gothic"/>
               </a:rPr>
-              <a:t>Step 1 + Step 2-A 마무리</a:t>
+              <a:t>발표 직전 D-5에 추가 진행한 성능 확장 (AUROC +2.22%)</a:t>
             </a:r>
           </a:p>
         </p:txBody>
@@ -7274,226 +7275,40 @@
           </a:p>
         </p:txBody>
       </p:sp>
-      <p:sp>
-        <p:nvSpPr>
-          <p:cNvPr id="6" name="Rounded Rectangle 5"/>
-          <p:cNvSpPr/>
-          <p:nvPr/>
-        </p:nvSpPr>
-        <p:spPr>
-          <a:xfrm>
-            <a:off x="605847" y="1260000"/>
-            <a:ext cx="3420000" cy="3060000"/>
-          </a:xfrm>
-          <a:prstGeom prst="roundRect">
-            <a:avLst/>
-          </a:prstGeom>
-          <a:solidFill>
-            <a:srgbClr val="4C72B0"/>
-          </a:solidFill>
-          <a:ln>
-            <a:noFill/>
-          </a:ln>
-        </p:spPr>
-        <p:style>
-          <a:lnRef idx="1">
-            <a:schemeClr val="accent1"/>
-          </a:lnRef>
-          <a:fillRef idx="3">
-            <a:schemeClr val="accent1"/>
-          </a:fillRef>
-          <a:effectRef idx="2">
-            <a:schemeClr val="accent1"/>
-          </a:effectRef>
-          <a:fontRef idx="minor">
-            <a:schemeClr val="lt1"/>
-          </a:fontRef>
-        </p:style>
-        <p:txBody>
-          <a:bodyPr rtlCol="0" anchor="ctr" lIns="216000" rIns="216000" tIns="216000"/>
-          <a:lstStyle/>
-          <a:p>
-            <a:pPr algn="ctr"/>
-            <a:r>
-              <a:rPr sz="2200" b="1">
-                <a:solidFill>
-                  <a:srgbClr val="FFFFFF"/>
-                </a:solidFill>
-                <a:ea typeface="Malgun Gothic"/>
-                <a:latin typeface="Malgun Gothic"/>
-              </a:rPr>
-              <a:t>예측 성능</a:t>
-            </a:r>
-          </a:p>
-          <a:p>
-            <a:pPr algn="ctr"/>
-            <a:r>
-              <a:rPr sz="1200" b="0">
-                <a:solidFill>
-                  <a:srgbClr val="FFFFFF"/>
-                </a:solidFill>
-                <a:ea typeface="Malgun Gothic"/>
-                <a:latin typeface="Malgun Gothic"/>
-              </a:rPr>
-              <a:t>
-XGBoost AUROC 0.7587 ± 0.0008
-5-fold 안정적 우위
-TabNet 0.7518 — 비슷한 성능 +
-어텐션 해석성 추가</a:t>
-            </a:r>
-          </a:p>
-        </p:txBody>
-      </p:sp>
-      <p:sp>
-        <p:nvSpPr>
-          <p:cNvPr id="7" name="Rounded Rectangle 6"/>
-          <p:cNvSpPr/>
-          <p:nvPr/>
-        </p:nvSpPr>
-        <p:spPr>
-          <a:xfrm>
-            <a:off x="4385847" y="1260000"/>
-            <a:ext cx="3420000" cy="3060000"/>
-          </a:xfrm>
-          <a:prstGeom prst="roundRect">
-            <a:avLst/>
-          </a:prstGeom>
-          <a:solidFill>
-            <a:srgbClr val="55A868"/>
-          </a:solidFill>
-          <a:ln>
-            <a:noFill/>
-          </a:ln>
-        </p:spPr>
-        <p:style>
-          <a:lnRef idx="1">
-            <a:schemeClr val="accent1"/>
-          </a:lnRef>
-          <a:fillRef idx="3">
-            <a:schemeClr val="accent1"/>
-          </a:fillRef>
-          <a:effectRef idx="2">
-            <a:schemeClr val="accent1"/>
-          </a:effectRef>
-          <a:fontRef idx="minor">
-            <a:schemeClr val="lt1"/>
-          </a:fontRef>
-        </p:style>
-        <p:txBody>
-          <a:bodyPr rtlCol="0" anchor="ctr" lIns="216000" rIns="216000" tIns="216000"/>
-          <a:lstStyle/>
-          <a:p>
-            <a:pPr algn="ctr"/>
-            <a:r>
-              <a:rPr sz="2200" b="1">
-                <a:solidFill>
-                  <a:srgbClr val="FFFFFF"/>
-                </a:solidFill>
-                <a:ea typeface="Malgun Gothic"/>
-                <a:latin typeface="Malgun Gothic"/>
-              </a:rPr>
-              <a:t>해석 일관성</a:t>
-            </a:r>
-          </a:p>
-          <a:p>
-            <a:pPr algn="ctr"/>
-            <a:r>
-              <a:rPr sz="1200" b="0">
-                <a:solidFill>
-                  <a:srgbClr val="FFFFFF"/>
-                </a:solidFill>
-                <a:ea typeface="Malgun Gothic"/>
-                <a:latin typeface="Malgun Gothic"/>
-              </a:rPr>
-              <a:t>
-Spearman ρ 0.117 (전체)
-−0.195 (Top-50)
-어텐션 ↔ SHAP의
-부분 일관 + 부분 상보 정량 검증</a:t>
-            </a:r>
-          </a:p>
-        </p:txBody>
-      </p:sp>
-      <p:sp>
-        <p:nvSpPr>
-          <p:cNvPr id="8" name="Rounded Rectangle 7"/>
-          <p:cNvSpPr/>
-          <p:nvPr/>
-        </p:nvSpPr>
-        <p:spPr>
-          <a:xfrm>
-            <a:off x="8165847" y="1260000"/>
-            <a:ext cx="3420000" cy="3060000"/>
-          </a:xfrm>
-          <a:prstGeom prst="roundRect">
-            <a:avLst/>
-          </a:prstGeom>
-          <a:solidFill>
-            <a:srgbClr val="C44E52"/>
-          </a:solidFill>
-          <a:ln>
-            <a:noFill/>
-          </a:ln>
-        </p:spPr>
-        <p:style>
-          <a:lnRef idx="1">
-            <a:schemeClr val="accent1"/>
-          </a:lnRef>
-          <a:fillRef idx="3">
-            <a:schemeClr val="accent1"/>
-          </a:fillRef>
-          <a:effectRef idx="2">
-            <a:schemeClr val="accent1"/>
-          </a:effectRef>
-          <a:fontRef idx="minor">
-            <a:schemeClr val="lt1"/>
-          </a:fontRef>
-        </p:style>
-        <p:txBody>
-          <a:bodyPr rtlCol="0" anchor="ctr" lIns="216000" rIns="216000" tIns="216000"/>
-          <a:lstStyle/>
-          <a:p>
-            <a:pPr algn="ctr"/>
-            <a:r>
-              <a:rPr sz="2200" b="1">
-                <a:solidFill>
-                  <a:srgbClr val="FFFFFF"/>
-                </a:solidFill>
-                <a:ea typeface="Malgun Gothic"/>
-                <a:latin typeface="Malgun Gothic"/>
-              </a:rPr>
-              <a:t>환각 차단</a:t>
-            </a:r>
-          </a:p>
-          <a:p>
-            <a:pPr algn="ctr"/>
-            <a:r>
-              <a:rPr sz="1200" b="0">
-                <a:solidFill>
-                  <a:srgbClr val="FFFFFF"/>
-                </a:solidFill>
-                <a:ea typeface="Malgun Gothic"/>
-                <a:latin typeface="Malgun Gothic"/>
-              </a:rPr>
-              <a:t>
-Hallucination Rate 0.000
-(두 LLM 모두)
-Baseline 45.5% vs XAI-RAG 0%
-→ SHAP 컨텍스트의 직접 효과 입증</a:t>
-            </a:r>
-          </a:p>
-        </p:txBody>
-      </p:sp>
-      <p:sp>
-        <p:nvSpPr>
-          <p:cNvPr id="9" name="TextBox 8"/>
+      <p:pic>
+        <p:nvPicPr>
+          <p:cNvPr id="6" name="Picture 5" descr="27_cv_aux_comparison.png"/>
+          <p:cNvPicPr>
+            <a:picLocks noChangeAspect="1"/>
+          </p:cNvPicPr>
+          <p:nvPr/>
+        </p:nvPicPr>
+        <p:blipFill>
+          <a:blip r:embed="rId2"/>
+          <a:stretch>
+            <a:fillRect/>
+          </a:stretch>
+        </p:blipFill>
+        <p:spPr>
+          <a:xfrm>
+            <a:off x="288000" y="1152000"/>
+            <a:ext cx="6660000" cy="1972322"/>
+          </a:xfrm>
+          <a:prstGeom prst="rect">
+            <a:avLst/>
+          </a:prstGeom>
+        </p:spPr>
+      </p:pic>
+      <p:sp>
+        <p:nvSpPr>
+          <p:cNvPr id="7" name="TextBox 6"/>
           <p:cNvSpPr txBox="1"/>
           <p:nvPr/>
         </p:nvSpPr>
         <p:spPr>
           <a:xfrm>
-            <a:off x="360000" y="4680000"/>
-            <a:ext cx="11160000" cy="540000"/>
+            <a:off x="7200000" y="1152000"/>
+            <a:ext cx="4680000" cy="432000"/>
           </a:xfrm>
           <a:prstGeom prst="rect">
             <a:avLst/>
@@ -7506,30 +7321,29 @@
           </a:bodyPr>
           <a:lstStyle/>
           <a:p>
-            <a:pPr algn="ctr"/>
-            <a:r>
-              <a:rPr sz="1600" b="1">
-                <a:solidFill>
-                  <a:srgbClr val="1F3A68"/>
-                </a:solidFill>
-                <a:ea typeface="Malgun Gothic"/>
-                <a:latin typeface="Malgun Gothic"/>
-              </a:rPr>
-              <a:t>한 줄 메시지</a:t>
-            </a:r>
-          </a:p>
-        </p:txBody>
-      </p:sp>
-      <p:sp>
-        <p:nvSpPr>
-          <p:cNvPr id="10" name="TextBox 9"/>
+            <a:r>
+              <a:rPr sz="1800" b="1">
+                <a:solidFill>
+                  <a:srgbClr val="C44E52"/>
+                </a:solidFill>
+                <a:ea typeface="Malgun Gothic"/>
+                <a:latin typeface="Malgun Gothic"/>
+              </a:rPr>
+              <a:t>AUROC 0.7587 → 0.7755 (+2.22%)</a:t>
+            </a:r>
+          </a:p>
+        </p:txBody>
+      </p:sp>
+      <p:sp>
+        <p:nvSpPr>
+          <p:cNvPr id="8" name="TextBox 7"/>
           <p:cNvSpPr txBox="1"/>
           <p:nvPr/>
         </p:nvSpPr>
         <p:spPr>
           <a:xfrm>
-            <a:off x="360000" y="5220000"/>
-            <a:ext cx="11160000" cy="720000"/>
+            <a:off x="7308000" y="1620000"/>
+            <a:ext cx="4680000" cy="2520000"/>
           </a:xfrm>
           <a:prstGeom prst="rect">
             <a:avLst/>
@@ -7542,17 +7356,156 @@
           </a:bodyPr>
           <a:lstStyle/>
           <a:p>
-            <a:pPr algn="ctr"/>
-            <a:r>
-              <a:rPr sz="1800" b="1">
-                <a:solidFill>
-                  <a:srgbClr val="222222"/>
-                </a:solidFill>
-                <a:ea typeface="Malgun Gothic"/>
-                <a:latin typeface="Malgun Gothic"/>
-              </a:rPr>
-              <a:t>"SHAP 컨텍스트를 LLM의 검색된 근거로 재정의하면,
-LLM 종속성 없이 환각이 0이 되는 자연어 설명을 생성할 수 있다."</a:t>
+            <a:pPr algn="l"/>
+            <a:r>
+              <a:rPr sz="1100" b="1">
+                <a:solidFill>
+                  <a:srgbClr val="1F3A68"/>
+                </a:solidFill>
+                <a:ea typeface="Malgun Gothic"/>
+                <a:latin typeface="Malgun Gothic"/>
+              </a:rPr>
+              <a:t>•  추가한 보조 테이블 2개</a:t>
+            </a:r>
+          </a:p>
+          <a:p>
+            <a:pPr lvl="1" algn="l"/>
+            <a:r>
+              <a:rPr sz="900" b="0">
+                <a:solidFill>
+                  <a:srgbClr val="555555"/>
+                </a:solidFill>
+                <a:ea typeface="Malgun Gothic"/>
+                <a:latin typeface="Malgun Gothic"/>
+              </a:rPr>
+              <a:t>    –  bureau — 외부 신용기관 과거 대출 이력</a:t>
+            </a:r>
+          </a:p>
+          <a:p>
+            <a:pPr lvl="1" algn="l"/>
+            <a:r>
+              <a:rPr sz="900" b="0">
+                <a:solidFill>
+                  <a:srgbClr val="555555"/>
+                </a:solidFill>
+                <a:ea typeface="Malgun Gothic"/>
+                <a:latin typeface="Malgun Gothic"/>
+              </a:rPr>
+              <a:t>    –  previous_application — Home Credit 자체 신청 이력</a:t>
+            </a:r>
+          </a:p>
+          <a:p>
+            <a:pPr algn="l"/>
+            <a:r>
+              <a:rPr sz="1100" b="1">
+                <a:solidFill>
+                  <a:srgbClr val="1F3A68"/>
+                </a:solidFill>
+                <a:ea typeface="Malgun Gothic"/>
+                <a:latin typeface="Malgun Gothic"/>
+              </a:rPr>
+              <a:t>•  5-fold CV 결과 (test set)</a:t>
+            </a:r>
+          </a:p>
+          <a:p>
+            <a:pPr lvl="1" algn="l"/>
+            <a:r>
+              <a:rPr sz="900" b="0">
+                <a:solidFill>
+                  <a:srgbClr val="555555"/>
+                </a:solidFill>
+                <a:ea typeface="Malgun Gothic"/>
+                <a:latin typeface="Malgun Gothic"/>
+              </a:rPr>
+              <a:t>    –  AUROC +0.0168 (baseline std의 21배)</a:t>
+            </a:r>
+          </a:p>
+          <a:p>
+            <a:pPr lvl="1" algn="l"/>
+            <a:r>
+              <a:rPr sz="900" b="0">
+                <a:solidFill>
+                  <a:srgbClr val="555555"/>
+                </a:solidFill>
+                <a:ea typeface="Malgun Gothic"/>
+                <a:latin typeface="Malgun Gothic"/>
+              </a:rPr>
+              <a:t>    –  AUPRC +8.21%, KS +7.81% — 불균형 분류력 강화</a:t>
+            </a:r>
+          </a:p>
+          <a:p>
+            <a:pPr algn="l"/>
+            <a:r>
+              <a:rPr sz="1100" b="1">
+                <a:solidFill>
+                  <a:srgbClr val="1F3A68"/>
+                </a:solidFill>
+                <a:ea typeface="Malgun Gothic"/>
+                <a:latin typeface="Malgun Gothic"/>
+              </a:rPr>
+              <a:t>•  SHAP top 20 변화</a:t>
+            </a:r>
+          </a:p>
+          <a:p>
+            <a:pPr lvl="1" algn="l"/>
+            <a:r>
+              <a:rPr sz="900" b="0">
+                <a:solidFill>
+                  <a:srgbClr val="555555"/>
+                </a:solidFill>
+                <a:ea typeface="Malgun Gothic"/>
+                <a:latin typeface="Malgun Gothic"/>
+              </a:rPr>
+              <a:t>    –  PREV_* feature 5개 신규 진입 (rank 12, 13, 14, 16, 20)</a:t>
+            </a:r>
+          </a:p>
+          <a:p>
+            <a:pPr lvl="1" algn="l"/>
+            <a:r>
+              <a:rPr sz="900" b="0">
+                <a:solidFill>
+                  <a:srgbClr val="555555"/>
+                </a:solidFill>
+                <a:ea typeface="Malgun Gothic"/>
+                <a:latin typeface="Malgun Gothic"/>
+              </a:rPr>
+              <a:t>    –  최고 신호: 이전 거절 비율</a:t>
+            </a:r>
+          </a:p>
+        </p:txBody>
+      </p:sp>
+      <p:sp>
+        <p:nvSpPr>
+          <p:cNvPr id="9" name="TextBox 8"/>
+          <p:cNvSpPr txBox="1"/>
+          <p:nvPr/>
+        </p:nvSpPr>
+        <p:spPr>
+          <a:xfrm>
+            <a:off x="360000" y="5580000"/>
+            <a:ext cx="11520000" cy="720000"/>
+          </a:xfrm>
+          <a:prstGeom prst="rect">
+            <a:avLst/>
+          </a:prstGeom>
+          <a:noFill/>
+        </p:spPr>
+        <p:txBody>
+          <a:bodyPr wrap="square">
+            <a:spAutoFit/>
+          </a:bodyPr>
+          <a:lstStyle/>
+          <a:p>
+            <a:r>
+              <a:rPr sz="1200" b="0">
+                <a:solidFill>
+                  <a:srgbClr val="55A868"/>
+                </a:solidFill>
+                <a:ea typeface="Malgun Gothic"/>
+                <a:latin typeface="Malgun Gothic"/>
+              </a:rPr>
+              <a:t>★ 발견 — 외부 신용기관(bureau) feature는 top 20 진입 못함
+  → main 테이블의 EXT_SOURCE_1/2/3에 외부 신용 정보가 응축돼 있을 가능성 (future work에서 ablation으로 검증)</a:t>
             </a:r>
           </a:p>
         </p:txBody>
@@ -7648,7 +7601,7 @@
                 <a:ea typeface="Malgun Gothic"/>
                 <a:latin typeface="Malgun Gothic"/>
               </a:rPr>
-              <a:t>14. 한계와 향후 계획</a:t>
+              <a:t>14. 종합 — 본 연구의 가치 3가지</a:t>
             </a:r>
           </a:p>
         </p:txBody>
@@ -7683,7 +7636,7 @@
                 <a:ea typeface="Malgun Gothic"/>
                 <a:latin typeface="Malgun Gothic"/>
               </a:rPr>
-              <a:t>Step 3 — 본 논문 확장 (보조 테이블, fairness-aware 등)</a:t>
+              <a:t>Step 1 + Step 2-A + Step 3-B 마무리</a:t>
             </a:r>
           </a:p>
         </p:txBody>
@@ -7733,14 +7686,224 @@
       </p:sp>
       <p:sp>
         <p:nvSpPr>
-          <p:cNvPr id="6" name="TextBox 5"/>
+          <p:cNvPr id="6" name="Rounded Rectangle 5"/>
+          <p:cNvSpPr/>
+          <p:nvPr/>
+        </p:nvSpPr>
+        <p:spPr>
+          <a:xfrm>
+            <a:off x="605847" y="1260000"/>
+            <a:ext cx="3420000" cy="3060000"/>
+          </a:xfrm>
+          <a:prstGeom prst="roundRect">
+            <a:avLst/>
+          </a:prstGeom>
+          <a:solidFill>
+            <a:srgbClr val="4C72B0"/>
+          </a:solidFill>
+          <a:ln>
+            <a:noFill/>
+          </a:ln>
+        </p:spPr>
+        <p:style>
+          <a:lnRef idx="1">
+            <a:schemeClr val="accent1"/>
+          </a:lnRef>
+          <a:fillRef idx="3">
+            <a:schemeClr val="accent1"/>
+          </a:fillRef>
+          <a:effectRef idx="2">
+            <a:schemeClr val="accent1"/>
+          </a:effectRef>
+          <a:fontRef idx="minor">
+            <a:schemeClr val="lt1"/>
+          </a:fontRef>
+        </p:style>
+        <p:txBody>
+          <a:bodyPr rtlCol="0" anchor="ctr" lIns="216000" rIns="216000" tIns="216000"/>
+          <a:lstStyle/>
+          <a:p>
+            <a:pPr algn="ctr"/>
+            <a:r>
+              <a:rPr sz="2200" b="1">
+                <a:solidFill>
+                  <a:srgbClr val="FFFFFF"/>
+                </a:solidFill>
+                <a:ea typeface="Malgun Gothic"/>
+                <a:latin typeface="Malgun Gothic"/>
+              </a:rPr>
+              <a:t>예측 성능</a:t>
+            </a:r>
+          </a:p>
+          <a:p>
+            <a:pPr algn="ctr"/>
+            <a:r>
+              <a:rPr sz="1200" b="0">
+                <a:solidFill>
+                  <a:srgbClr val="FFFFFF"/>
+                </a:solidFill>
+                <a:ea typeface="Malgun Gothic"/>
+                <a:latin typeface="Malgun Gothic"/>
+              </a:rPr>
+              <a:t>
+XGBoost AUROC 0.7587 ± 0.0008
+5-fold 안정적 우위
+TabNet 0.7518 — 비슷한 성능 +
+어텐션 해석성 추가</a:t>
+            </a:r>
+          </a:p>
+        </p:txBody>
+      </p:sp>
+      <p:sp>
+        <p:nvSpPr>
+          <p:cNvPr id="7" name="Rounded Rectangle 6"/>
+          <p:cNvSpPr/>
+          <p:nvPr/>
+        </p:nvSpPr>
+        <p:spPr>
+          <a:xfrm>
+            <a:off x="4385847" y="1260000"/>
+            <a:ext cx="3420000" cy="3060000"/>
+          </a:xfrm>
+          <a:prstGeom prst="roundRect">
+            <a:avLst/>
+          </a:prstGeom>
+          <a:solidFill>
+            <a:srgbClr val="55A868"/>
+          </a:solidFill>
+          <a:ln>
+            <a:noFill/>
+          </a:ln>
+        </p:spPr>
+        <p:style>
+          <a:lnRef idx="1">
+            <a:schemeClr val="accent1"/>
+          </a:lnRef>
+          <a:fillRef idx="3">
+            <a:schemeClr val="accent1"/>
+          </a:fillRef>
+          <a:effectRef idx="2">
+            <a:schemeClr val="accent1"/>
+          </a:effectRef>
+          <a:fontRef idx="minor">
+            <a:schemeClr val="lt1"/>
+          </a:fontRef>
+        </p:style>
+        <p:txBody>
+          <a:bodyPr rtlCol="0" anchor="ctr" lIns="216000" rIns="216000" tIns="216000"/>
+          <a:lstStyle/>
+          <a:p>
+            <a:pPr algn="ctr"/>
+            <a:r>
+              <a:rPr sz="2200" b="1">
+                <a:solidFill>
+                  <a:srgbClr val="FFFFFF"/>
+                </a:solidFill>
+                <a:ea typeface="Malgun Gothic"/>
+                <a:latin typeface="Malgun Gothic"/>
+              </a:rPr>
+              <a:t>해석 일관성</a:t>
+            </a:r>
+          </a:p>
+          <a:p>
+            <a:pPr algn="ctr"/>
+            <a:r>
+              <a:rPr sz="1200" b="0">
+                <a:solidFill>
+                  <a:srgbClr val="FFFFFF"/>
+                </a:solidFill>
+                <a:ea typeface="Malgun Gothic"/>
+                <a:latin typeface="Malgun Gothic"/>
+              </a:rPr>
+              <a:t>
+Spearman ρ 0.117 (전체)
+−0.195 (Top-50)
+어텐션 ↔ SHAP의
+부분 일관 + 부분 상보 정량 검증</a:t>
+            </a:r>
+          </a:p>
+        </p:txBody>
+      </p:sp>
+      <p:sp>
+        <p:nvSpPr>
+          <p:cNvPr id="8" name="Rounded Rectangle 7"/>
+          <p:cNvSpPr/>
+          <p:nvPr/>
+        </p:nvSpPr>
+        <p:spPr>
+          <a:xfrm>
+            <a:off x="8165847" y="1260000"/>
+            <a:ext cx="3420000" cy="3060000"/>
+          </a:xfrm>
+          <a:prstGeom prst="roundRect">
+            <a:avLst/>
+          </a:prstGeom>
+          <a:solidFill>
+            <a:srgbClr val="C44E52"/>
+          </a:solidFill>
+          <a:ln>
+            <a:noFill/>
+          </a:ln>
+        </p:spPr>
+        <p:style>
+          <a:lnRef idx="1">
+            <a:schemeClr val="accent1"/>
+          </a:lnRef>
+          <a:fillRef idx="3">
+            <a:schemeClr val="accent1"/>
+          </a:fillRef>
+          <a:effectRef idx="2">
+            <a:schemeClr val="accent1"/>
+          </a:effectRef>
+          <a:fontRef idx="minor">
+            <a:schemeClr val="lt1"/>
+          </a:fontRef>
+        </p:style>
+        <p:txBody>
+          <a:bodyPr rtlCol="0" anchor="ctr" lIns="216000" rIns="216000" tIns="216000"/>
+          <a:lstStyle/>
+          <a:p>
+            <a:pPr algn="ctr"/>
+            <a:r>
+              <a:rPr sz="2200" b="1">
+                <a:solidFill>
+                  <a:srgbClr val="FFFFFF"/>
+                </a:solidFill>
+                <a:ea typeface="Malgun Gothic"/>
+                <a:latin typeface="Malgun Gothic"/>
+              </a:rPr>
+              <a:t>환각 차단</a:t>
+            </a:r>
+          </a:p>
+          <a:p>
+            <a:pPr algn="ctr"/>
+            <a:r>
+              <a:rPr sz="1200" b="0">
+                <a:solidFill>
+                  <a:srgbClr val="FFFFFF"/>
+                </a:solidFill>
+                <a:ea typeface="Malgun Gothic"/>
+                <a:latin typeface="Malgun Gothic"/>
+              </a:rPr>
+              <a:t>
+Hallucination Rate 0.000
+(두 LLM 모두)
+Baseline 45.5% vs XAI-RAG 0%
+→ SHAP 컨텍스트의 직접 효과 입증</a:t>
+            </a:r>
+          </a:p>
+        </p:txBody>
+      </p:sp>
+      <p:sp>
+        <p:nvSpPr>
+          <p:cNvPr id="9" name="TextBox 8"/>
           <p:cNvSpPr txBox="1"/>
           <p:nvPr/>
         </p:nvSpPr>
         <p:spPr>
           <a:xfrm>
-            <a:off x="360000" y="1080000"/>
-            <a:ext cx="5400000" cy="360000"/>
+            <a:off x="360000" y="4680000"/>
+            <a:ext cx="11160000" cy="540000"/>
           </a:xfrm>
           <a:prstGeom prst="rect">
             <a:avLst/>
@@ -7753,29 +7916,30 @@
           </a:bodyPr>
           <a:lstStyle/>
           <a:p>
+            <a:pPr algn="ctr"/>
             <a:r>
               <a:rPr sz="1600" b="1">
                 <a:solidFill>
-                  <a:srgbClr val="C44E52"/>
-                </a:solidFill>
-                <a:ea typeface="Malgun Gothic"/>
-                <a:latin typeface="Malgun Gothic"/>
-              </a:rPr>
-              <a:t>현재 한계</a:t>
-            </a:r>
-          </a:p>
-        </p:txBody>
-      </p:sp>
-      <p:sp>
-        <p:nvSpPr>
-          <p:cNvPr id="7" name="TextBox 6"/>
+                  <a:srgbClr val="1F3A68"/>
+                </a:solidFill>
+                <a:ea typeface="Malgun Gothic"/>
+                <a:latin typeface="Malgun Gothic"/>
+              </a:rPr>
+              <a:t>한 줄 메시지</a:t>
+            </a:r>
+          </a:p>
+        </p:txBody>
+      </p:sp>
+      <p:sp>
+        <p:nvSpPr>
+          <p:cNvPr id="10" name="TextBox 9"/>
           <p:cNvSpPr txBox="1"/>
           <p:nvPr/>
         </p:nvSpPr>
         <p:spPr>
           <a:xfrm>
-            <a:off x="540000" y="1440000"/>
-            <a:ext cx="5400000" cy="4680000"/>
+            <a:off x="360000" y="5220000"/>
+            <a:ext cx="11160000" cy="720000"/>
           </a:xfrm>
           <a:prstGeom prst="rect">
             <a:avLst/>
@@ -7788,181 +7952,17 @@
           </a:bodyPr>
           <a:lstStyle/>
           <a:p>
-            <a:pPr algn="l"/>
-            <a:r>
-              <a:rPr sz="1300" b="0">
-                <a:ea typeface="Malgun Gothic"/>
-                <a:latin typeface="Malgun Gothic"/>
-              </a:rPr>
-              <a:t>•  평가 표본 10명 — 100~500명으로 확장 필요</a:t>
-            </a:r>
-          </a:p>
-          <a:p>
-            <a:pPr algn="l"/>
-            <a:r>
-              <a:rPr sz="1300" b="0">
-                <a:ea typeface="Malgun Gothic"/>
-                <a:latin typeface="Malgun Gothic"/>
-              </a:rPr>
-              <a:t>•  보조 테이블 미사용 — bureau, previous_application 등</a:t>
-            </a:r>
-          </a:p>
-          <a:p>
-            <a:pPr algn="l"/>
-            <a:r>
-              <a:rPr sz="1300" b="0">
-                <a:ea typeface="Malgun Gothic"/>
-                <a:latin typeface="Malgun Gothic"/>
-              </a:rPr>
-              <a:t>•  G-Eval self-bias — Gemini가 자기 출력 평가</a:t>
-            </a:r>
-          </a:p>
-          <a:p>
-            <a:pPr algn="l"/>
-            <a:r>
-              <a:rPr sz="1300" b="0">
-                <a:ea typeface="Malgun Gothic"/>
-                <a:latin typeface="Malgun Gothic"/>
-              </a:rPr>
-              <a:t>•  Counterfactual 정량화 미수행 (정성 비교만)</a:t>
-            </a:r>
-          </a:p>
-          <a:p>
-            <a:pPr algn="l"/>
-            <a:r>
-              <a:rPr sz="1300" b="0">
-                <a:ea typeface="Malgun Gothic"/>
-                <a:latin typeface="Malgun Gothic"/>
-              </a:rPr>
-              <a:t>•  Robustness 평가 (프롬프트 변형) 미수행</a:t>
-            </a:r>
-          </a:p>
-        </p:txBody>
-      </p:sp>
-      <p:sp>
-        <p:nvSpPr>
-          <p:cNvPr id="8" name="TextBox 7"/>
-          <p:cNvSpPr txBox="1"/>
-          <p:nvPr/>
-        </p:nvSpPr>
-        <p:spPr>
-          <a:xfrm>
-            <a:off x="6120000" y="1080000"/>
-            <a:ext cx="5400000" cy="360000"/>
-          </a:xfrm>
-          <a:prstGeom prst="rect">
-            <a:avLst/>
-          </a:prstGeom>
-          <a:noFill/>
-        </p:spPr>
-        <p:txBody>
-          <a:bodyPr wrap="square">
-            <a:spAutoFit/>
-          </a:bodyPr>
-          <a:lstStyle/>
-          <a:p>
-            <a:r>
-              <a:rPr sz="1600" b="1">
-                <a:solidFill>
-                  <a:srgbClr val="55A868"/>
-                </a:solidFill>
-                <a:ea typeface="Malgun Gothic"/>
-                <a:latin typeface="Malgun Gothic"/>
-              </a:rPr>
-              <a:t>향후 계획</a:t>
-            </a:r>
-          </a:p>
-        </p:txBody>
-      </p:sp>
-      <p:sp>
-        <p:nvSpPr>
-          <p:cNvPr id="9" name="TextBox 8"/>
-          <p:cNvSpPr txBox="1"/>
-          <p:nvPr/>
-        </p:nvSpPr>
-        <p:spPr>
-          <a:xfrm>
-            <a:off x="6300000" y="1440000"/>
-            <a:ext cx="5400000" cy="4680000"/>
-          </a:xfrm>
-          <a:prstGeom prst="rect">
-            <a:avLst/>
-          </a:prstGeom>
-          <a:noFill/>
-        </p:spPr>
-        <p:txBody>
-          <a:bodyPr wrap="square">
-            <a:spAutoFit/>
-          </a:bodyPr>
-          <a:lstStyle/>
-          <a:p>
-            <a:pPr algn="l"/>
-            <a:r>
-              <a:rPr sz="1300" b="0">
-                <a:ea typeface="Malgun Gothic"/>
-                <a:latin typeface="Malgun Gothic"/>
-              </a:rPr>
-              <a:t>•  보조 테이블 활용으로 AUROC 0.78+ 목표</a:t>
-            </a:r>
-          </a:p>
-          <a:p>
-            <a:pPr algn="l"/>
-            <a:r>
-              <a:rPr sz="1300" b="0">
-                <a:ea typeface="Malgun Gothic"/>
-                <a:latin typeface="Malgun Gothic"/>
-              </a:rPr>
-              <a:t>•  Fairness-aware 학습 (Reweighing, Adversarial Debiasing)</a:t>
-            </a:r>
-          </a:p>
-          <a:p>
-            <a:pPr algn="l"/>
-            <a:r>
-              <a:rPr sz="1300" b="0">
-                <a:ea typeface="Malgun Gothic"/>
-                <a:latin typeface="Malgun Gothic"/>
-              </a:rPr>
-              <a:t>•  Cross-LLM judge로 G-Eval 객관화</a:t>
-            </a:r>
-          </a:p>
-          <a:p>
-            <a:pPr algn="l"/>
-            <a:r>
-              <a:rPr sz="1300" b="0">
-                <a:ea typeface="Malgun Gothic"/>
-                <a:latin typeface="Malgun Gothic"/>
-              </a:rPr>
-              <a:t>•  BERTScore 기반 Robustness 정량 평가</a:t>
-            </a:r>
-          </a:p>
-          <a:p>
-            <a:pPr algn="l"/>
-            <a:r>
-              <a:rPr sz="1300" b="0">
-                <a:ea typeface="Malgun Gothic"/>
-                <a:latin typeface="Malgun Gothic"/>
-              </a:rPr>
-              <a:t>•  FT-Transformer 비교 모델 추가</a:t>
-            </a:r>
-          </a:p>
-          <a:p>
-            <a:pPr algn="l"/>
-            <a:r>
-              <a:rPr sz="1300" b="0">
-                <a:ea typeface="Malgun Gothic"/>
-                <a:latin typeface="Malgun Gothic"/>
-              </a:rPr>
-              <a:t>•  인간 평가 (Plausibility) — 5점 척도, Cohen's κ</a:t>
-            </a:r>
-          </a:p>
-          <a:p>
-            <a:pPr algn="l"/>
-            <a:r>
-              <a:rPr sz="1300" b="0">
-                <a:ea typeface="Malgun Gothic"/>
-                <a:latin typeface="Malgun Gothic"/>
-              </a:rPr>
-              <a:t>•  한국어 도메인 특화 LLM QLoRA 미세조정</a:t>
+            <a:pPr algn="ctr"/>
+            <a:r>
+              <a:rPr sz="1800" b="1">
+                <a:solidFill>
+                  <a:srgbClr val="222222"/>
+                </a:solidFill>
+                <a:ea typeface="Malgun Gothic"/>
+                <a:latin typeface="Malgun Gothic"/>
+              </a:rPr>
+              <a:t>"SHAP 컨텍스트를 LLM의 검색된 근거로 재정의하면,
+LLM 종속성 없이 환각이 0이 되는 자연어 설명을 생성할 수 있다."</a:t>
             </a:r>
           </a:p>
         </p:txBody>
@@ -7976,6 +7976,426 @@
 </file>
 
 <file path=ppt/slides/slide16.xml><?xml version="1.0" encoding="utf-8"?>
+<p:sld xmlns:a="http://schemas.openxmlformats.org/drawingml/2006/main" xmlns:p="http://schemas.openxmlformats.org/presentationml/2006/main" xmlns:r="http://schemas.openxmlformats.org/officeDocument/2006/relationships">
+  <p:cSld>
+    <p:spTree>
+      <p:nvGrpSpPr>
+        <p:cNvPr id="1" name=""/>
+        <p:cNvGrpSpPr/>
+        <p:nvPr/>
+      </p:nvGrpSpPr>
+      <p:grpSpPr/>
+      <p:sp>
+        <p:nvSpPr>
+          <p:cNvPr id="2" name="Rectangle 1"/>
+          <p:cNvSpPr/>
+          <p:nvPr/>
+        </p:nvSpPr>
+        <p:spPr>
+          <a:xfrm>
+            <a:off x="0" y="0"/>
+            <a:ext cx="180000" cy="720000"/>
+          </a:xfrm>
+          <a:prstGeom prst="rect">
+            <a:avLst/>
+          </a:prstGeom>
+          <a:solidFill>
+            <a:srgbClr val="1F3A68"/>
+          </a:solidFill>
+          <a:ln>
+            <a:noFill/>
+          </a:ln>
+        </p:spPr>
+        <p:style>
+          <a:lnRef idx="1">
+            <a:schemeClr val="accent1"/>
+          </a:lnRef>
+          <a:fillRef idx="3">
+            <a:schemeClr val="accent1"/>
+          </a:fillRef>
+          <a:effectRef idx="2">
+            <a:schemeClr val="accent1"/>
+          </a:effectRef>
+          <a:fontRef idx="minor">
+            <a:schemeClr val="lt1"/>
+          </a:fontRef>
+        </p:style>
+        <p:txBody>
+          <a:bodyPr rtlCol="0" anchor="ctr"/>
+          <a:lstStyle/>
+          <a:p>
+            <a:pPr algn="ctr"/>
+          </a:p>
+        </p:txBody>
+      </p:sp>
+      <p:sp>
+        <p:nvSpPr>
+          <p:cNvPr id="3" name="TextBox 2"/>
+          <p:cNvSpPr txBox="1"/>
+          <p:nvPr/>
+        </p:nvSpPr>
+        <p:spPr>
+          <a:xfrm>
+            <a:off x="360000" y="144000"/>
+            <a:ext cx="10800000" cy="360000"/>
+          </a:xfrm>
+          <a:prstGeom prst="rect">
+            <a:avLst/>
+          </a:prstGeom>
+          <a:noFill/>
+        </p:spPr>
+        <p:txBody>
+          <a:bodyPr wrap="square">
+            <a:spAutoFit/>
+          </a:bodyPr>
+          <a:lstStyle/>
+          <a:p>
+            <a:r>
+              <a:rPr sz="2400" b="1">
+                <a:solidFill>
+                  <a:srgbClr val="1F3A68"/>
+                </a:solidFill>
+                <a:ea typeface="Malgun Gothic"/>
+                <a:latin typeface="Malgun Gothic"/>
+              </a:rPr>
+              <a:t>15. 한계와 향후 계획</a:t>
+            </a:r>
+          </a:p>
+        </p:txBody>
+      </p:sp>
+      <p:sp>
+        <p:nvSpPr>
+          <p:cNvPr id="4" name="TextBox 3"/>
+          <p:cNvSpPr txBox="1"/>
+          <p:nvPr/>
+        </p:nvSpPr>
+        <p:spPr>
+          <a:xfrm>
+            <a:off x="360000" y="503999"/>
+            <a:ext cx="10800000" cy="288000"/>
+          </a:xfrm>
+          <a:prstGeom prst="rect">
+            <a:avLst/>
+          </a:prstGeom>
+          <a:noFill/>
+        </p:spPr>
+        <p:txBody>
+          <a:bodyPr wrap="square">
+            <a:spAutoFit/>
+          </a:bodyPr>
+          <a:lstStyle/>
+          <a:p>
+            <a:r>
+              <a:rPr sz="1200" b="0">
+                <a:solidFill>
+                  <a:srgbClr val="555555"/>
+                </a:solidFill>
+                <a:ea typeface="Malgun Gothic"/>
+                <a:latin typeface="Malgun Gothic"/>
+              </a:rPr>
+              <a:t>Step 3-B 일부 진행 / 잔여는 본 논문 확장</a:t>
+            </a:r>
+          </a:p>
+        </p:txBody>
+      </p:sp>
+      <p:sp>
+        <p:nvSpPr>
+          <p:cNvPr id="5" name="Rectangle 4"/>
+          <p:cNvSpPr/>
+          <p:nvPr/>
+        </p:nvSpPr>
+        <p:spPr>
+          <a:xfrm>
+            <a:off x="360000" y="864000"/>
+            <a:ext cx="11340000" cy="18000"/>
+          </a:xfrm>
+          <a:prstGeom prst="rect">
+            <a:avLst/>
+          </a:prstGeom>
+          <a:solidFill>
+            <a:srgbClr val="CCCCCC"/>
+          </a:solidFill>
+          <a:ln>
+            <a:noFill/>
+          </a:ln>
+        </p:spPr>
+        <p:style>
+          <a:lnRef idx="1">
+            <a:schemeClr val="accent1"/>
+          </a:lnRef>
+          <a:fillRef idx="3">
+            <a:schemeClr val="accent1"/>
+          </a:fillRef>
+          <a:effectRef idx="2">
+            <a:schemeClr val="accent1"/>
+          </a:effectRef>
+          <a:fontRef idx="minor">
+            <a:schemeClr val="lt1"/>
+          </a:fontRef>
+        </p:style>
+        <p:txBody>
+          <a:bodyPr rtlCol="0" anchor="ctr"/>
+          <a:lstStyle/>
+          <a:p>
+            <a:pPr algn="ctr"/>
+          </a:p>
+        </p:txBody>
+      </p:sp>
+      <p:sp>
+        <p:nvSpPr>
+          <p:cNvPr id="6" name="TextBox 5"/>
+          <p:cNvSpPr txBox="1"/>
+          <p:nvPr/>
+        </p:nvSpPr>
+        <p:spPr>
+          <a:xfrm>
+            <a:off x="360000" y="1080000"/>
+            <a:ext cx="5400000" cy="360000"/>
+          </a:xfrm>
+          <a:prstGeom prst="rect">
+            <a:avLst/>
+          </a:prstGeom>
+          <a:noFill/>
+        </p:spPr>
+        <p:txBody>
+          <a:bodyPr wrap="square">
+            <a:spAutoFit/>
+          </a:bodyPr>
+          <a:lstStyle/>
+          <a:p>
+            <a:r>
+              <a:rPr sz="1600" b="1">
+                <a:solidFill>
+                  <a:srgbClr val="C44E52"/>
+                </a:solidFill>
+                <a:ea typeface="Malgun Gothic"/>
+                <a:latin typeface="Malgun Gothic"/>
+              </a:rPr>
+              <a:t>현재 한계 / 진행 중</a:t>
+            </a:r>
+          </a:p>
+        </p:txBody>
+      </p:sp>
+      <p:sp>
+        <p:nvSpPr>
+          <p:cNvPr id="7" name="TextBox 6"/>
+          <p:cNvSpPr txBox="1"/>
+          <p:nvPr/>
+        </p:nvSpPr>
+        <p:spPr>
+          <a:xfrm>
+            <a:off x="540000" y="1440000"/>
+            <a:ext cx="5400000" cy="4680000"/>
+          </a:xfrm>
+          <a:prstGeom prst="rect">
+            <a:avLst/>
+          </a:prstGeom>
+          <a:noFill/>
+        </p:spPr>
+        <p:txBody>
+          <a:bodyPr wrap="square">
+            <a:spAutoFit/>
+          </a:bodyPr>
+          <a:lstStyle/>
+          <a:p>
+            <a:pPr algn="l"/>
+            <a:r>
+              <a:rPr sz="1300" b="0">
+                <a:ea typeface="Malgun Gothic"/>
+                <a:latin typeface="Malgun Gothic"/>
+              </a:rPr>
+              <a:t>•  평가 표본 100명 (Step 2-A 확장 완료) — 500명+ 추가 검토</a:t>
+            </a:r>
+          </a:p>
+          <a:p>
+            <a:pPr algn="l"/>
+            <a:r>
+              <a:rPr sz="1300" b="0">
+                <a:ea typeface="Malgun Gothic"/>
+                <a:latin typeface="Malgun Gothic"/>
+              </a:rPr>
+              <a:t>•  보조 테이블 2/6개 활용 (Step 3-B) — 4개 잔여</a:t>
+            </a:r>
+          </a:p>
+          <a:p>
+            <a:pPr algn="l"/>
+            <a:r>
+              <a:rPr sz="1300" b="0">
+                <a:ea typeface="Malgun Gothic"/>
+                <a:latin typeface="Malgun Gothic"/>
+              </a:rPr>
+              <a:t>•  Bureau의 SHAP 미진입 — EXT_SOURCE 응축 가설 검증 필요</a:t>
+            </a:r>
+          </a:p>
+          <a:p>
+            <a:pPr algn="l"/>
+            <a:r>
+              <a:rPr sz="1300" b="0">
+                <a:ea typeface="Malgun Gothic"/>
+                <a:latin typeface="Malgun Gothic"/>
+              </a:rPr>
+              <a:t>•  G-Eval self-bias — Cross-LLM(Step 2-A)으로 부분 우회</a:t>
+            </a:r>
+          </a:p>
+          <a:p>
+            <a:pPr algn="l"/>
+            <a:r>
+              <a:rPr sz="1300" b="0">
+                <a:ea typeface="Malgun Gothic"/>
+                <a:latin typeface="Malgun Gothic"/>
+              </a:rPr>
+              <a:t>•  TabNet/LightGBM에 aux 효과 일반화 미실시</a:t>
+            </a:r>
+          </a:p>
+          <a:p>
+            <a:pPr algn="l"/>
+            <a:r>
+              <a:rPr sz="1300" b="0">
+                <a:ea typeface="Malgun Gothic"/>
+                <a:latin typeface="Malgun Gothic"/>
+              </a:rPr>
+              <a:t>•  Fairness-aware 학습 미수행</a:t>
+            </a:r>
+          </a:p>
+        </p:txBody>
+      </p:sp>
+      <p:sp>
+        <p:nvSpPr>
+          <p:cNvPr id="8" name="TextBox 7"/>
+          <p:cNvSpPr txBox="1"/>
+          <p:nvPr/>
+        </p:nvSpPr>
+        <p:spPr>
+          <a:xfrm>
+            <a:off x="6120000" y="1080000"/>
+            <a:ext cx="5400000" cy="360000"/>
+          </a:xfrm>
+          <a:prstGeom prst="rect">
+            <a:avLst/>
+          </a:prstGeom>
+          <a:noFill/>
+        </p:spPr>
+        <p:txBody>
+          <a:bodyPr wrap="square">
+            <a:spAutoFit/>
+          </a:bodyPr>
+          <a:lstStyle/>
+          <a:p>
+            <a:r>
+              <a:rPr sz="1600" b="1">
+                <a:solidFill>
+                  <a:srgbClr val="55A868"/>
+                </a:solidFill>
+                <a:ea typeface="Malgun Gothic"/>
+                <a:latin typeface="Malgun Gothic"/>
+              </a:rPr>
+              <a:t>향후 계획</a:t>
+            </a:r>
+          </a:p>
+        </p:txBody>
+      </p:sp>
+      <p:sp>
+        <p:nvSpPr>
+          <p:cNvPr id="9" name="TextBox 8"/>
+          <p:cNvSpPr txBox="1"/>
+          <p:nvPr/>
+        </p:nvSpPr>
+        <p:spPr>
+          <a:xfrm>
+            <a:off x="6300000" y="1440000"/>
+            <a:ext cx="5400000" cy="4680000"/>
+          </a:xfrm>
+          <a:prstGeom prst="rect">
+            <a:avLst/>
+          </a:prstGeom>
+          <a:noFill/>
+        </p:spPr>
+        <p:txBody>
+          <a:bodyPr wrap="square">
+            <a:spAutoFit/>
+          </a:bodyPr>
+          <a:lstStyle/>
+          <a:p>
+            <a:pPr algn="l"/>
+            <a:r>
+              <a:rPr sz="1300" b="0">
+                <a:ea typeface="Malgun Gothic"/>
+                <a:latin typeface="Malgun Gothic"/>
+              </a:rPr>
+              <a:t>•  잔여 보조 테이블 4개로 AUROC 0.78+ 추가 향상</a:t>
+            </a:r>
+          </a:p>
+          <a:p>
+            <a:pPr algn="l"/>
+            <a:r>
+              <a:rPr sz="1300" b="0">
+                <a:ea typeface="Malgun Gothic"/>
+                <a:latin typeface="Malgun Gothic"/>
+              </a:rPr>
+              <a:t>•  Bureau ablation — EXT_SOURCE와 정보 중복도 정량화</a:t>
+            </a:r>
+          </a:p>
+          <a:p>
+            <a:pPr algn="l"/>
+            <a:r>
+              <a:rPr sz="1300" b="0">
+                <a:ea typeface="Malgun Gothic"/>
+                <a:latin typeface="Malgun Gothic"/>
+              </a:rPr>
+              <a:t>•  Fairness-aware 학습 (Reweighing, Adversarial Debiasing)</a:t>
+            </a:r>
+          </a:p>
+          <a:p>
+            <a:pPr algn="l"/>
+            <a:r>
+              <a:rPr sz="1300" b="0">
+                <a:ea typeface="Malgun Gothic"/>
+                <a:latin typeface="Malgun Gothic"/>
+              </a:rPr>
+              <a:t>•  TabNet/LightGBM 재학습으로 aux 효과 일반화</a:t>
+            </a:r>
+          </a:p>
+          <a:p>
+            <a:pPr algn="l"/>
+            <a:r>
+              <a:rPr sz="1300" b="0">
+                <a:ea typeface="Malgun Gothic"/>
+                <a:latin typeface="Malgun Gothic"/>
+              </a:rPr>
+              <a:t>•  FT-Transformer 비교 모델 추가</a:t>
+            </a:r>
+          </a:p>
+          <a:p>
+            <a:pPr algn="l"/>
+            <a:r>
+              <a:rPr sz="1300" b="0">
+                <a:ea typeface="Malgun Gothic"/>
+                <a:latin typeface="Malgun Gothic"/>
+              </a:rPr>
+              <a:t>•  인간 평가 (Plausibility) — 5점 척도, Cohen's κ</a:t>
+            </a:r>
+          </a:p>
+          <a:p>
+            <a:pPr algn="l"/>
+            <a:r>
+              <a:rPr sz="1300" b="0">
+                <a:ea typeface="Malgun Gothic"/>
+                <a:latin typeface="Malgun Gothic"/>
+              </a:rPr>
+              <a:t>•  한국어 도메인 특화 LLM QLoRA 미세조정</a:t>
+            </a:r>
+          </a:p>
+        </p:txBody>
+      </p:sp>
+    </p:spTree>
+  </p:cSld>
+  <p:clrMapOvr>
+    <a:masterClrMapping/>
+  </p:clrMapOvr>
+</p:sld>
+</file>
+
+<file path=ppt/slides/slide17.xml><?xml version="1.0" encoding="utf-8"?>
 <p:sld xmlns:a="http://schemas.openxmlformats.org/drawingml/2006/main" xmlns:p="http://schemas.openxmlformats.org/presentationml/2006/main" xmlns:r="http://schemas.openxmlformats.org/officeDocument/2006/relationships">
   <p:cSld>
     <p:spTree>

--- a/paper/midterm_slides.pptx
+++ b/paper/midterm_slides.pptx
@@ -22,6 +22,7 @@
     <p:sldId id="270" r:id="rId21"/>
     <p:sldId id="271" r:id="rId22"/>
     <p:sldId id="272" r:id="rId23"/>
+    <p:sldId id="273" r:id="rId24"/>
   </p:sldIdLst>
   <p:sldSz cx="12191695" cy="6858000" type="screen4x3"/>
   <p:notesSz cx="6858000" cy="9144000"/>
@@ -7601,7 +7602,7 @@
                 <a:ea typeface="Malgun Gothic"/>
                 <a:latin typeface="Malgun Gothic"/>
               </a:rPr>
-              <a:t>14. 종합 — 본 연구의 가치 3가지</a:t>
+              <a:t>14. ★ Step 3-C-1 — TabNet 어텐션 × SHAP 융합 컨텍스트</a:t>
             </a:r>
           </a:p>
         </p:txBody>
@@ -7636,7 +7637,7 @@
                 <a:ea typeface="Malgun Gothic"/>
                 <a:latin typeface="Malgun Gothic"/>
               </a:rPr>
-              <a:t>Step 1 + Step 2-A + Step 3-B 마무리</a:t>
+              <a:t>TabNet이 본 메커니즘에 통합 — 환각 0% 유지 + Completeness 큰 향상</a:t>
             </a:r>
           </a:p>
         </p:txBody>
@@ -7684,226 +7685,40 @@
           </a:p>
         </p:txBody>
       </p:sp>
-      <p:sp>
-        <p:nvSpPr>
-          <p:cNvPr id="6" name="Rounded Rectangle 5"/>
-          <p:cNvSpPr/>
-          <p:nvPr/>
-        </p:nvSpPr>
-        <p:spPr>
-          <a:xfrm>
-            <a:off x="605847" y="1260000"/>
-            <a:ext cx="3420000" cy="3060000"/>
-          </a:xfrm>
-          <a:prstGeom prst="roundRect">
-            <a:avLst/>
-          </a:prstGeom>
-          <a:solidFill>
-            <a:srgbClr val="4C72B0"/>
-          </a:solidFill>
-          <a:ln>
-            <a:noFill/>
-          </a:ln>
-        </p:spPr>
-        <p:style>
-          <a:lnRef idx="1">
-            <a:schemeClr val="accent1"/>
-          </a:lnRef>
-          <a:fillRef idx="3">
-            <a:schemeClr val="accent1"/>
-          </a:fillRef>
-          <a:effectRef idx="2">
-            <a:schemeClr val="accent1"/>
-          </a:effectRef>
-          <a:fontRef idx="minor">
-            <a:schemeClr val="lt1"/>
-          </a:fontRef>
-        </p:style>
-        <p:txBody>
-          <a:bodyPr rtlCol="0" anchor="ctr" lIns="216000" rIns="216000" tIns="216000"/>
-          <a:lstStyle/>
-          <a:p>
-            <a:pPr algn="ctr"/>
-            <a:r>
-              <a:rPr sz="2200" b="1">
-                <a:solidFill>
-                  <a:srgbClr val="FFFFFF"/>
-                </a:solidFill>
-                <a:ea typeface="Malgun Gothic"/>
-                <a:latin typeface="Malgun Gothic"/>
-              </a:rPr>
-              <a:t>예측 성능</a:t>
-            </a:r>
-          </a:p>
-          <a:p>
-            <a:pPr algn="ctr"/>
-            <a:r>
-              <a:rPr sz="1200" b="0">
-                <a:solidFill>
-                  <a:srgbClr val="FFFFFF"/>
-                </a:solidFill>
-                <a:ea typeface="Malgun Gothic"/>
-                <a:latin typeface="Malgun Gothic"/>
-              </a:rPr>
-              <a:t>
-XGBoost AUROC 0.7587 ± 0.0008
-5-fold 안정적 우위
-TabNet 0.7518 — 비슷한 성능 +
-어텐션 해석성 추가</a:t>
-            </a:r>
-          </a:p>
-        </p:txBody>
-      </p:sp>
-      <p:sp>
-        <p:nvSpPr>
-          <p:cNvPr id="7" name="Rounded Rectangle 6"/>
-          <p:cNvSpPr/>
-          <p:nvPr/>
-        </p:nvSpPr>
-        <p:spPr>
-          <a:xfrm>
-            <a:off x="4385847" y="1260000"/>
-            <a:ext cx="3420000" cy="3060000"/>
-          </a:xfrm>
-          <a:prstGeom prst="roundRect">
-            <a:avLst/>
-          </a:prstGeom>
-          <a:solidFill>
-            <a:srgbClr val="55A868"/>
-          </a:solidFill>
-          <a:ln>
-            <a:noFill/>
-          </a:ln>
-        </p:spPr>
-        <p:style>
-          <a:lnRef idx="1">
-            <a:schemeClr val="accent1"/>
-          </a:lnRef>
-          <a:fillRef idx="3">
-            <a:schemeClr val="accent1"/>
-          </a:fillRef>
-          <a:effectRef idx="2">
-            <a:schemeClr val="accent1"/>
-          </a:effectRef>
-          <a:fontRef idx="minor">
-            <a:schemeClr val="lt1"/>
-          </a:fontRef>
-        </p:style>
-        <p:txBody>
-          <a:bodyPr rtlCol="0" anchor="ctr" lIns="216000" rIns="216000" tIns="216000"/>
-          <a:lstStyle/>
-          <a:p>
-            <a:pPr algn="ctr"/>
-            <a:r>
-              <a:rPr sz="2200" b="1">
-                <a:solidFill>
-                  <a:srgbClr val="FFFFFF"/>
-                </a:solidFill>
-                <a:ea typeface="Malgun Gothic"/>
-                <a:latin typeface="Malgun Gothic"/>
-              </a:rPr>
-              <a:t>해석 일관성</a:t>
-            </a:r>
-          </a:p>
-          <a:p>
-            <a:pPr algn="ctr"/>
-            <a:r>
-              <a:rPr sz="1200" b="0">
-                <a:solidFill>
-                  <a:srgbClr val="FFFFFF"/>
-                </a:solidFill>
-                <a:ea typeface="Malgun Gothic"/>
-                <a:latin typeface="Malgun Gothic"/>
-              </a:rPr>
-              <a:t>
-Spearman ρ 0.117 (전체)
-−0.195 (Top-50)
-어텐션 ↔ SHAP의
-부분 일관 + 부분 상보 정량 검증</a:t>
-            </a:r>
-          </a:p>
-        </p:txBody>
-      </p:sp>
-      <p:sp>
-        <p:nvSpPr>
-          <p:cNvPr id="8" name="Rounded Rectangle 7"/>
-          <p:cNvSpPr/>
-          <p:nvPr/>
-        </p:nvSpPr>
-        <p:spPr>
-          <a:xfrm>
-            <a:off x="8165847" y="1260000"/>
-            <a:ext cx="3420000" cy="3060000"/>
-          </a:xfrm>
-          <a:prstGeom prst="roundRect">
-            <a:avLst/>
-          </a:prstGeom>
-          <a:solidFill>
-            <a:srgbClr val="C44E52"/>
-          </a:solidFill>
-          <a:ln>
-            <a:noFill/>
-          </a:ln>
-        </p:spPr>
-        <p:style>
-          <a:lnRef idx="1">
-            <a:schemeClr val="accent1"/>
-          </a:lnRef>
-          <a:fillRef idx="3">
-            <a:schemeClr val="accent1"/>
-          </a:fillRef>
-          <a:effectRef idx="2">
-            <a:schemeClr val="accent1"/>
-          </a:effectRef>
-          <a:fontRef idx="minor">
-            <a:schemeClr val="lt1"/>
-          </a:fontRef>
-        </p:style>
-        <p:txBody>
-          <a:bodyPr rtlCol="0" anchor="ctr" lIns="216000" rIns="216000" tIns="216000"/>
-          <a:lstStyle/>
-          <a:p>
-            <a:pPr algn="ctr"/>
-            <a:r>
-              <a:rPr sz="2200" b="1">
-                <a:solidFill>
-                  <a:srgbClr val="FFFFFF"/>
-                </a:solidFill>
-                <a:ea typeface="Malgun Gothic"/>
-                <a:latin typeface="Malgun Gothic"/>
-              </a:rPr>
-              <a:t>환각 차단</a:t>
-            </a:r>
-          </a:p>
-          <a:p>
-            <a:pPr algn="ctr"/>
-            <a:r>
-              <a:rPr sz="1200" b="0">
-                <a:solidFill>
-                  <a:srgbClr val="FFFFFF"/>
-                </a:solidFill>
-                <a:ea typeface="Malgun Gothic"/>
-                <a:latin typeface="Malgun Gothic"/>
-              </a:rPr>
-              <a:t>
-Hallucination Rate 0.000
-(두 LLM 모두)
-Baseline 45.5% vs XAI-RAG 0%
-→ SHAP 컨텍스트의 직접 효과 입증</a:t>
-            </a:r>
-          </a:p>
-        </p:txBody>
-      </p:sp>
-      <p:sp>
-        <p:nvSpPr>
-          <p:cNvPr id="9" name="TextBox 8"/>
+      <p:pic>
+        <p:nvPicPr>
+          <p:cNvPr id="6" name="Picture 5" descr="30_fusion_vs_shaponly.png"/>
+          <p:cNvPicPr>
+            <a:picLocks noChangeAspect="1"/>
+          </p:cNvPicPr>
+          <p:nvPr/>
+        </p:nvPicPr>
+        <p:blipFill>
+          <a:blip r:embed="rId2"/>
+          <a:stretch>
+            <a:fillRect/>
+          </a:stretch>
+        </p:blipFill>
+        <p:spPr>
+          <a:xfrm>
+            <a:off x="216000" y="1080000"/>
+            <a:ext cx="6840000" cy="2095411"/>
+          </a:xfrm>
+          <a:prstGeom prst="rect">
+            <a:avLst/>
+          </a:prstGeom>
+        </p:spPr>
+      </p:pic>
+      <p:sp>
+        <p:nvSpPr>
+          <p:cNvPr id="7" name="TextBox 6"/>
           <p:cNvSpPr txBox="1"/>
           <p:nvPr/>
         </p:nvSpPr>
         <p:spPr>
           <a:xfrm>
-            <a:off x="360000" y="4680000"/>
-            <a:ext cx="11160000" cy="540000"/>
+            <a:off x="7380000" y="1080000"/>
+            <a:ext cx="4680000" cy="360000"/>
           </a:xfrm>
           <a:prstGeom prst="rect">
             <a:avLst/>
@@ -7916,30 +7731,29 @@
           </a:bodyPr>
           <a:lstStyle/>
           <a:p>
-            <a:pPr algn="ctr"/>
-            <a:r>
-              <a:rPr sz="1600" b="1">
+            <a:r>
+              <a:rPr sz="1400" b="1">
                 <a:solidFill>
                   <a:srgbClr val="1F3A68"/>
                 </a:solidFill>
                 <a:ea typeface="Malgun Gothic"/>
                 <a:latin typeface="Malgun Gothic"/>
               </a:rPr>
-              <a:t>한 줄 메시지</a:t>
-            </a:r>
-          </a:p>
-        </p:txBody>
-      </p:sp>
-      <p:sp>
-        <p:nvSpPr>
-          <p:cNvPr id="10" name="TextBox 9"/>
+              <a:t>융합 메커니즘 (3 그룹)</a:t>
+            </a:r>
+          </a:p>
+        </p:txBody>
+      </p:sp>
+      <p:sp>
+        <p:nvSpPr>
+          <p:cNvPr id="8" name="TextBox 7"/>
           <p:cNvSpPr txBox="1"/>
           <p:nvPr/>
         </p:nvSpPr>
         <p:spPr>
           <a:xfrm>
-            <a:off x="360000" y="5220000"/>
-            <a:ext cx="11160000" cy="720000"/>
+            <a:off x="7452000" y="1440000"/>
+            <a:ext cx="4680000" cy="1440000"/>
           </a:xfrm>
           <a:prstGeom prst="rect">
             <a:avLst/>
@@ -7952,17 +7766,219 @@
           </a:bodyPr>
           <a:lstStyle/>
           <a:p>
-            <a:pPr algn="ctr"/>
-            <a:r>
-              <a:rPr sz="1800" b="1">
-                <a:solidFill>
-                  <a:srgbClr val="222222"/>
-                </a:solidFill>
-                <a:ea typeface="Malgun Gothic"/>
-                <a:latin typeface="Malgun Gothic"/>
-              </a:rPr>
-              <a:t>"SHAP 컨텍스트를 LLM의 검색된 근거로 재정의하면,
-LLM 종속성 없이 환각이 0이 되는 자연어 설명을 생성할 수 있다."</a:t>
+            <a:pPr algn="l"/>
+            <a:r>
+              <a:rPr sz="1100" b="0">
+                <a:ea typeface="Malgun Gothic"/>
+                <a:latin typeface="Malgun Gothic"/>
+              </a:rPr>
+              <a:t>•  agreed_drivers: 두 모델 동의 강한 신호</a:t>
+            </a:r>
+          </a:p>
+          <a:p>
+            <a:pPr algn="l"/>
+            <a:r>
+              <a:rPr sz="1100" b="0">
+                <a:ea typeface="Malgun Gothic"/>
+                <a:latin typeface="Malgun Gothic"/>
+              </a:rPr>
+              <a:t>•  shap_only: SHAP만 본 보완 신호 (부호 보존)</a:t>
+            </a:r>
+          </a:p>
+          <a:p>
+            <a:pPr algn="l"/>
+            <a:r>
+              <a:rPr sz="1100" b="0">
+                <a:ea typeface="Malgun Gothic"/>
+                <a:latin typeface="Malgun Gothic"/>
+              </a:rPr>
+              <a:t>•  attention_only: TabNet만 본 sparse 신호 (부호 없음)</a:t>
+            </a:r>
+          </a:p>
+          <a:p>
+            <a:pPr algn="l"/>
+            <a:r>
+              <a:rPr sz="1100" b="0">
+                <a:ea typeface="Malgun Gothic"/>
+                <a:latin typeface="Malgun Gothic"/>
+              </a:rPr>
+              <a:t>•  그룹 라벨을 LLM에 명시 → 가중치 인지</a:t>
+            </a:r>
+          </a:p>
+        </p:txBody>
+      </p:sp>
+      <p:sp>
+        <p:nvSpPr>
+          <p:cNvPr id="9" name="TextBox 8"/>
+          <p:cNvSpPr txBox="1"/>
+          <p:nvPr/>
+        </p:nvSpPr>
+        <p:spPr>
+          <a:xfrm>
+            <a:off x="7380000" y="2880000"/>
+            <a:ext cx="4680000" cy="360000"/>
+          </a:xfrm>
+          <a:prstGeom prst="rect">
+            <a:avLst/>
+          </a:prstGeom>
+          <a:noFill/>
+        </p:spPr>
+        <p:txBody>
+          <a:bodyPr wrap="square">
+            <a:spAutoFit/>
+          </a:bodyPr>
+          <a:lstStyle/>
+          <a:p>
+            <a:r>
+              <a:rPr sz="1400" b="1">
+                <a:solidFill>
+                  <a:srgbClr val="1F3A68"/>
+                </a:solidFill>
+                <a:ea typeface="Malgun Gothic"/>
+                <a:latin typeface="Malgun Gothic"/>
+              </a:rPr>
+              <a:t>Agreement 통계 (n=100)</a:t>
+            </a:r>
+          </a:p>
+        </p:txBody>
+      </p:sp>
+      <p:sp>
+        <p:nvSpPr>
+          <p:cNvPr id="10" name="TextBox 9"/>
+          <p:cNvSpPr txBox="1"/>
+          <p:nvPr/>
+        </p:nvSpPr>
+        <p:spPr>
+          <a:xfrm>
+            <a:off x="7452000" y="3204000"/>
+            <a:ext cx="4680000" cy="900000"/>
+          </a:xfrm>
+          <a:prstGeom prst="rect">
+            <a:avLst/>
+          </a:prstGeom>
+          <a:noFill/>
+        </p:spPr>
+        <p:txBody>
+          <a:bodyPr wrap="square">
+            <a:spAutoFit/>
+          </a:bodyPr>
+          <a:lstStyle/>
+          <a:p>
+            <a:pPr algn="l"/>
+            <a:r>
+              <a:rPr sz="1100" b="0">
+                <a:ea typeface="Malgun Gothic"/>
+                <a:latin typeface="Malgun Gothic"/>
+              </a:rPr>
+              <a:t>•  평균: agreed 2.12 / shap_only 6.98 / att_only 2.06</a:t>
+            </a:r>
+          </a:p>
+          <a:p>
+            <a:pPr algn="l"/>
+            <a:r>
+              <a:rPr sz="1100" b="0">
+                <a:ea typeface="Malgun Gothic"/>
+                <a:latin typeface="Malgun Gothic"/>
+              </a:rPr>
+              <a:t>•  3+ 동의 22%, 4+ 동의 0% — 부분 일관 + 상보</a:t>
+            </a:r>
+          </a:p>
+        </p:txBody>
+      </p:sp>
+      <p:sp>
+        <p:nvSpPr>
+          <p:cNvPr id="11" name="TextBox 10"/>
+          <p:cNvSpPr txBox="1"/>
+          <p:nvPr/>
+        </p:nvSpPr>
+        <p:spPr>
+          <a:xfrm>
+            <a:off x="7380000" y="4140000"/>
+            <a:ext cx="4680000" cy="360000"/>
+          </a:xfrm>
+          <a:prstGeom prst="rect">
+            <a:avLst/>
+          </a:prstGeom>
+          <a:noFill/>
+        </p:spPr>
+        <p:txBody>
+          <a:bodyPr wrap="square">
+            <a:spAutoFit/>
+          </a:bodyPr>
+          <a:lstStyle/>
+          <a:p>
+            <a:r>
+              <a:rPr sz="1400" b="1">
+                <a:solidFill>
+                  <a:srgbClr val="C44E52"/>
+                </a:solidFill>
+                <a:ea typeface="Malgun Gothic"/>
+                <a:latin typeface="Malgun Gothic"/>
+              </a:rPr>
+              <a:t>평가 결과 (n=30 each, judge=Claude)</a:t>
+            </a:r>
+          </a:p>
+        </p:txBody>
+      </p:sp>
+      <p:sp>
+        <p:nvSpPr>
+          <p:cNvPr id="12" name="TextBox 11"/>
+          <p:cNvSpPr txBox="1"/>
+          <p:nvPr/>
+        </p:nvSpPr>
+        <p:spPr>
+          <a:xfrm>
+            <a:off x="7452000" y="4464000"/>
+            <a:ext cx="4680000" cy="1620000"/>
+          </a:xfrm>
+          <a:prstGeom prst="rect">
+            <a:avLst/>
+          </a:prstGeom>
+          <a:noFill/>
+        </p:spPr>
+        <p:txBody>
+          <a:bodyPr wrap="square">
+            <a:spAutoFit/>
+          </a:bodyPr>
+          <a:lstStyle/>
+          <a:p>
+            <a:pPr algn="l"/>
+            <a:r>
+              <a:rPr sz="1100" b="0">
+                <a:ea typeface="Malgun Gothic"/>
+                <a:latin typeface="Malgun Gothic"/>
+              </a:rPr>
+              <a:t>•  Halluc 0/30 — 양 LLM × 양 mode 모두 ✅</a:t>
+            </a:r>
+          </a:p>
+          <a:p>
+            <a:pPr algn="l"/>
+            <a:r>
+              <a:rPr sz="1100" b="0">
+                <a:ea typeface="Malgun Gothic"/>
+                <a:latin typeface="Malgun Gothic"/>
+              </a:rPr>
+              <a:t>•  Completeness +0.67 (Anthropic) / +0.80 (Gemini)</a:t>
+            </a:r>
+          </a:p>
+          <a:p>
+            <a:pPr algn="l"/>
+            <a:r>
+              <a:rPr sz="1100" b="0">
+                <a:ea typeface="Malgun Gothic"/>
+                <a:latin typeface="Malgun Gothic"/>
+              </a:rPr>
+              <a:t>•  Factual 4.77~4.97, Sensitive 5.0/5.0 유지</a:t>
+            </a:r>
+          </a:p>
+          <a:p>
+            <a:pPr algn="l"/>
+            <a:r>
+              <a:rPr sz="1100" b="0">
+                <a:ea typeface="Malgun Gothic"/>
+                <a:latin typeface="Malgun Gothic"/>
+              </a:rPr>
+              <a:t>•  TabNet이 비교 모델 → 메커니즘 핵심으로 격상</a:t>
             </a:r>
           </a:p>
         </p:txBody>
@@ -8058,7 +8074,7 @@
                 <a:ea typeface="Malgun Gothic"/>
                 <a:latin typeface="Malgun Gothic"/>
               </a:rPr>
-              <a:t>15. 한계와 향후 계획</a:t>
+              <a:t>15. 종합 — 본 연구의 가치 4가지</a:t>
             </a:r>
           </a:p>
         </p:txBody>
@@ -8093,7 +8109,7 @@
                 <a:ea typeface="Malgun Gothic"/>
                 <a:latin typeface="Malgun Gothic"/>
               </a:rPr>
-              <a:t>Step 3-B 일부 진행 / 잔여는 본 논문 확장</a:t>
+              <a:t>Step 1 + Step 2-A + Step 3-B + Step 3-C-1 마무리</a:t>
             </a:r>
           </a:p>
         </p:txBody>
@@ -8143,14 +8159,296 @@
       </p:sp>
       <p:sp>
         <p:nvSpPr>
-          <p:cNvPr id="6" name="TextBox 5"/>
+          <p:cNvPr id="6" name="Rounded Rectangle 5"/>
+          <p:cNvSpPr/>
+          <p:nvPr/>
+        </p:nvSpPr>
+        <p:spPr>
+          <a:xfrm>
+            <a:off x="677849" y="1260000"/>
+            <a:ext cx="2520000" cy="3060000"/>
+          </a:xfrm>
+          <a:prstGeom prst="roundRect">
+            <a:avLst/>
+          </a:prstGeom>
+          <a:solidFill>
+            <a:srgbClr val="4C72B0"/>
+          </a:solidFill>
+          <a:ln>
+            <a:noFill/>
+          </a:ln>
+        </p:spPr>
+        <p:style>
+          <a:lnRef idx="1">
+            <a:schemeClr val="accent1"/>
+          </a:lnRef>
+          <a:fillRef idx="3">
+            <a:schemeClr val="accent1"/>
+          </a:fillRef>
+          <a:effectRef idx="2">
+            <a:schemeClr val="accent1"/>
+          </a:effectRef>
+          <a:fontRef idx="minor">
+            <a:schemeClr val="lt1"/>
+          </a:fontRef>
+        </p:style>
+        <p:txBody>
+          <a:bodyPr rtlCol="0" anchor="ctr" lIns="216000" rIns="216000" tIns="216000"/>
+          <a:lstStyle/>
+          <a:p>
+            <a:pPr algn="ctr"/>
+            <a:r>
+              <a:rPr sz="2200" b="1">
+                <a:solidFill>
+                  <a:srgbClr val="FFFFFF"/>
+                </a:solidFill>
+                <a:ea typeface="Malgun Gothic"/>
+                <a:latin typeface="Malgun Gothic"/>
+              </a:rPr>
+              <a:t>예측 성능</a:t>
+            </a:r>
+          </a:p>
+          <a:p>
+            <a:pPr algn="ctr"/>
+            <a:r>
+              <a:rPr sz="1200" b="0">
+                <a:solidFill>
+                  <a:srgbClr val="FFFFFF"/>
+                </a:solidFill>
+                <a:ea typeface="Malgun Gothic"/>
+                <a:latin typeface="Malgun Gothic"/>
+              </a:rPr>
+              <a:t>
+XGBoost 0.7587 → 0.7755
+(Step 3-B aux 추가, +2.22%)
+TabNet 0.7518 — 어텐션
+해석성으로 융합 컨텍스트에 통합</a:t>
+            </a:r>
+          </a:p>
+        </p:txBody>
+      </p:sp>
+      <p:sp>
+        <p:nvSpPr>
+          <p:cNvPr id="7" name="Rounded Rectangle 6"/>
+          <p:cNvSpPr/>
+          <p:nvPr/>
+        </p:nvSpPr>
+        <p:spPr>
+          <a:xfrm>
+            <a:off x="3449848" y="1260000"/>
+            <a:ext cx="2520000" cy="3060000"/>
+          </a:xfrm>
+          <a:prstGeom prst="roundRect">
+            <a:avLst/>
+          </a:prstGeom>
+          <a:solidFill>
+            <a:srgbClr val="55A868"/>
+          </a:solidFill>
+          <a:ln>
+            <a:noFill/>
+          </a:ln>
+        </p:spPr>
+        <p:style>
+          <a:lnRef idx="1">
+            <a:schemeClr val="accent1"/>
+          </a:lnRef>
+          <a:fillRef idx="3">
+            <a:schemeClr val="accent1"/>
+          </a:fillRef>
+          <a:effectRef idx="2">
+            <a:schemeClr val="accent1"/>
+          </a:effectRef>
+          <a:fontRef idx="minor">
+            <a:schemeClr val="lt1"/>
+          </a:fontRef>
+        </p:style>
+        <p:txBody>
+          <a:bodyPr rtlCol="0" anchor="ctr" lIns="216000" rIns="216000" tIns="216000"/>
+          <a:lstStyle/>
+          <a:p>
+            <a:pPr algn="ctr"/>
+            <a:r>
+              <a:rPr sz="2200" b="1">
+                <a:solidFill>
+                  <a:srgbClr val="FFFFFF"/>
+                </a:solidFill>
+                <a:ea typeface="Malgun Gothic"/>
+                <a:latin typeface="Malgun Gothic"/>
+              </a:rPr>
+              <a:t>해석 융합</a:t>
+            </a:r>
+          </a:p>
+          <a:p>
+            <a:pPr algn="ctr"/>
+            <a:r>
+              <a:rPr sz="1200" b="0">
+                <a:solidFill>
+                  <a:srgbClr val="FFFFFF"/>
+                </a:solidFill>
+                <a:ea typeface="Malgun Gothic"/>
+                <a:latin typeface="Malgun Gothic"/>
+              </a:rPr>
+              <a:t>
+ρ=0.117 부분 일관
++ instance-level
+동의 22% (3+) / 0% (4+)
+agreement-aware 컨텍스트로
+LLM에 의미 라벨 전달</a:t>
+            </a:r>
+          </a:p>
+        </p:txBody>
+      </p:sp>
+      <p:sp>
+        <p:nvSpPr>
+          <p:cNvPr id="8" name="Rounded Rectangle 7"/>
+          <p:cNvSpPr/>
+          <p:nvPr/>
+        </p:nvSpPr>
+        <p:spPr>
+          <a:xfrm>
+            <a:off x="6221847" y="1260000"/>
+            <a:ext cx="2520000" cy="3060000"/>
+          </a:xfrm>
+          <a:prstGeom prst="roundRect">
+            <a:avLst/>
+          </a:prstGeom>
+          <a:solidFill>
+            <a:srgbClr val="C44E52"/>
+          </a:solidFill>
+          <a:ln>
+            <a:noFill/>
+          </a:ln>
+        </p:spPr>
+        <p:style>
+          <a:lnRef idx="1">
+            <a:schemeClr val="accent1"/>
+          </a:lnRef>
+          <a:fillRef idx="3">
+            <a:schemeClr val="accent1"/>
+          </a:fillRef>
+          <a:effectRef idx="2">
+            <a:schemeClr val="accent1"/>
+          </a:effectRef>
+          <a:fontRef idx="minor">
+            <a:schemeClr val="lt1"/>
+          </a:fontRef>
+        </p:style>
+        <p:txBody>
+          <a:bodyPr rtlCol="0" anchor="ctr" lIns="216000" rIns="216000" tIns="216000"/>
+          <a:lstStyle/>
+          <a:p>
+            <a:pPr algn="ctr"/>
+            <a:r>
+              <a:rPr sz="2200" b="1">
+                <a:solidFill>
+                  <a:srgbClr val="FFFFFF"/>
+                </a:solidFill>
+                <a:ea typeface="Malgun Gothic"/>
+                <a:latin typeface="Malgun Gothic"/>
+              </a:rPr>
+              <a:t>환각 차단</a:t>
+            </a:r>
+          </a:p>
+          <a:p>
+            <a:pPr algn="ctr"/>
+            <a:r>
+              <a:rPr sz="1200" b="0">
+                <a:solidFill>
+                  <a:srgbClr val="FFFFFF"/>
+                </a:solidFill>
+                <a:ea typeface="Malgun Gothic"/>
+                <a:latin typeface="Malgun Gothic"/>
+              </a:rPr>
+              <a:t>
+Halluc 0/100 (Step 1/2-A)
+→ 0/30 (Step 3-C-1 fusion)
+Baseline 45.5% vs
+XAI-RAG 0% (Step 1)</a:t>
+            </a:r>
+          </a:p>
+        </p:txBody>
+      </p:sp>
+      <p:sp>
+        <p:nvSpPr>
+          <p:cNvPr id="9" name="Rounded Rectangle 8"/>
+          <p:cNvSpPr/>
+          <p:nvPr/>
+        </p:nvSpPr>
+        <p:spPr>
+          <a:xfrm>
+            <a:off x="8993846" y="1260000"/>
+            <a:ext cx="2520000" cy="3060000"/>
+          </a:xfrm>
+          <a:prstGeom prst="roundRect">
+            <a:avLst/>
+          </a:prstGeom>
+          <a:solidFill>
+            <a:srgbClr val="DD8552"/>
+          </a:solidFill>
+          <a:ln>
+            <a:noFill/>
+          </a:ln>
+        </p:spPr>
+        <p:style>
+          <a:lnRef idx="1">
+            <a:schemeClr val="accent1"/>
+          </a:lnRef>
+          <a:fillRef idx="3">
+            <a:schemeClr val="accent1"/>
+          </a:fillRef>
+          <a:effectRef idx="2">
+            <a:schemeClr val="accent1"/>
+          </a:effectRef>
+          <a:fontRef idx="minor">
+            <a:schemeClr val="lt1"/>
+          </a:fontRef>
+        </p:style>
+        <p:txBody>
+          <a:bodyPr rtlCol="0" anchor="ctr" lIns="216000" rIns="216000" tIns="216000"/>
+          <a:lstStyle/>
+          <a:p>
+            <a:pPr algn="ctr"/>
+            <a:r>
+              <a:rPr sz="2200" b="1">
+                <a:solidFill>
+                  <a:srgbClr val="FFFFFF"/>
+                </a:solidFill>
+                <a:ea typeface="Malgun Gothic"/>
+                <a:latin typeface="Malgun Gothic"/>
+              </a:rPr>
+              <a:t>완결성 향상</a:t>
+            </a:r>
+          </a:p>
+          <a:p>
+            <a:pPr algn="ctr"/>
+            <a:r>
+              <a:rPr sz="1200" b="0">
+                <a:solidFill>
+                  <a:srgbClr val="FFFFFF"/>
+                </a:solidFill>
+                <a:ea typeface="Malgun Gothic"/>
+                <a:latin typeface="Malgun Gothic"/>
+              </a:rPr>
+              <a:t>
+G-Eval Completeness
++0.67 (Anthropic)
++0.80 (Gemini)
+두 해석 신호 상보성이
+더 완결한 설명 생성</a:t>
+            </a:r>
+          </a:p>
+        </p:txBody>
+      </p:sp>
+      <p:sp>
+        <p:nvSpPr>
+          <p:cNvPr id="10" name="TextBox 9"/>
           <p:cNvSpPr txBox="1"/>
           <p:nvPr/>
         </p:nvSpPr>
         <p:spPr>
           <a:xfrm>
-            <a:off x="360000" y="1080000"/>
-            <a:ext cx="5400000" cy="360000"/>
+            <a:off x="360000" y="4680000"/>
+            <a:ext cx="11160000" cy="540000"/>
           </a:xfrm>
           <a:prstGeom prst="rect">
             <a:avLst/>
@@ -8163,29 +8461,30 @@
           </a:bodyPr>
           <a:lstStyle/>
           <a:p>
+            <a:pPr algn="ctr"/>
             <a:r>
               <a:rPr sz="1600" b="1">
                 <a:solidFill>
-                  <a:srgbClr val="C44E52"/>
-                </a:solidFill>
-                <a:ea typeface="Malgun Gothic"/>
-                <a:latin typeface="Malgun Gothic"/>
-              </a:rPr>
-              <a:t>현재 한계 / 진행 중</a:t>
-            </a:r>
-          </a:p>
-        </p:txBody>
-      </p:sp>
-      <p:sp>
-        <p:nvSpPr>
-          <p:cNvPr id="7" name="TextBox 6"/>
+                  <a:srgbClr val="1F3A68"/>
+                </a:solidFill>
+                <a:ea typeface="Malgun Gothic"/>
+                <a:latin typeface="Malgun Gothic"/>
+              </a:rPr>
+              <a:t>한 줄 메시지</a:t>
+            </a:r>
+          </a:p>
+        </p:txBody>
+      </p:sp>
+      <p:sp>
+        <p:nvSpPr>
+          <p:cNvPr id="11" name="TextBox 10"/>
           <p:cNvSpPr txBox="1"/>
           <p:nvPr/>
         </p:nvSpPr>
         <p:spPr>
           <a:xfrm>
-            <a:off x="540000" y="1440000"/>
-            <a:ext cx="5400000" cy="4680000"/>
+            <a:off x="360000" y="5220000"/>
+            <a:ext cx="11160000" cy="720000"/>
           </a:xfrm>
           <a:prstGeom prst="rect">
             <a:avLst/>
@@ -8198,191 +8497,17 @@
           </a:bodyPr>
           <a:lstStyle/>
           <a:p>
-            <a:pPr algn="l"/>
-            <a:r>
-              <a:rPr sz="1300" b="0">
-                <a:ea typeface="Malgun Gothic"/>
-                <a:latin typeface="Malgun Gothic"/>
-              </a:rPr>
-              <a:t>•  평가 표본 100명 (Step 2-A 확장 완료) — 500명+ 추가 검토</a:t>
-            </a:r>
-          </a:p>
-          <a:p>
-            <a:pPr algn="l"/>
-            <a:r>
-              <a:rPr sz="1300" b="0">
-                <a:ea typeface="Malgun Gothic"/>
-                <a:latin typeface="Malgun Gothic"/>
-              </a:rPr>
-              <a:t>•  보조 테이블 2/6개 활용 (Step 3-B) — 4개 잔여</a:t>
-            </a:r>
-          </a:p>
-          <a:p>
-            <a:pPr algn="l"/>
-            <a:r>
-              <a:rPr sz="1300" b="0">
-                <a:ea typeface="Malgun Gothic"/>
-                <a:latin typeface="Malgun Gothic"/>
-              </a:rPr>
-              <a:t>•  Bureau의 SHAP 미진입 — EXT_SOURCE 응축 가설 검증 필요</a:t>
-            </a:r>
-          </a:p>
-          <a:p>
-            <a:pPr algn="l"/>
-            <a:r>
-              <a:rPr sz="1300" b="0">
-                <a:ea typeface="Malgun Gothic"/>
-                <a:latin typeface="Malgun Gothic"/>
-              </a:rPr>
-              <a:t>•  G-Eval self-bias — Cross-LLM(Step 2-A)으로 부분 우회</a:t>
-            </a:r>
-          </a:p>
-          <a:p>
-            <a:pPr algn="l"/>
-            <a:r>
-              <a:rPr sz="1300" b="0">
-                <a:ea typeface="Malgun Gothic"/>
-                <a:latin typeface="Malgun Gothic"/>
-              </a:rPr>
-              <a:t>•  TabNet/LightGBM에 aux 효과 일반화 미실시</a:t>
-            </a:r>
-          </a:p>
-          <a:p>
-            <a:pPr algn="l"/>
-            <a:r>
-              <a:rPr sz="1300" b="0">
-                <a:ea typeface="Malgun Gothic"/>
-                <a:latin typeface="Malgun Gothic"/>
-              </a:rPr>
-              <a:t>•  Fairness-aware 학습 미수행</a:t>
-            </a:r>
-          </a:p>
-        </p:txBody>
-      </p:sp>
-      <p:sp>
-        <p:nvSpPr>
-          <p:cNvPr id="8" name="TextBox 7"/>
-          <p:cNvSpPr txBox="1"/>
-          <p:nvPr/>
-        </p:nvSpPr>
-        <p:spPr>
-          <a:xfrm>
-            <a:off x="6120000" y="1080000"/>
-            <a:ext cx="5400000" cy="360000"/>
-          </a:xfrm>
-          <a:prstGeom prst="rect">
-            <a:avLst/>
-          </a:prstGeom>
-          <a:noFill/>
-        </p:spPr>
-        <p:txBody>
-          <a:bodyPr wrap="square">
-            <a:spAutoFit/>
-          </a:bodyPr>
-          <a:lstStyle/>
-          <a:p>
-            <a:r>
-              <a:rPr sz="1600" b="1">
-                <a:solidFill>
-                  <a:srgbClr val="55A868"/>
-                </a:solidFill>
-                <a:ea typeface="Malgun Gothic"/>
-                <a:latin typeface="Malgun Gothic"/>
-              </a:rPr>
-              <a:t>향후 계획</a:t>
-            </a:r>
-          </a:p>
-        </p:txBody>
-      </p:sp>
-      <p:sp>
-        <p:nvSpPr>
-          <p:cNvPr id="9" name="TextBox 8"/>
-          <p:cNvSpPr txBox="1"/>
-          <p:nvPr/>
-        </p:nvSpPr>
-        <p:spPr>
-          <a:xfrm>
-            <a:off x="6300000" y="1440000"/>
-            <a:ext cx="5400000" cy="4680000"/>
-          </a:xfrm>
-          <a:prstGeom prst="rect">
-            <a:avLst/>
-          </a:prstGeom>
-          <a:noFill/>
-        </p:spPr>
-        <p:txBody>
-          <a:bodyPr wrap="square">
-            <a:spAutoFit/>
-          </a:bodyPr>
-          <a:lstStyle/>
-          <a:p>
-            <a:pPr algn="l"/>
-            <a:r>
-              <a:rPr sz="1300" b="0">
-                <a:ea typeface="Malgun Gothic"/>
-                <a:latin typeface="Malgun Gothic"/>
-              </a:rPr>
-              <a:t>•  잔여 보조 테이블 4개로 AUROC 0.78+ 추가 향상</a:t>
-            </a:r>
-          </a:p>
-          <a:p>
-            <a:pPr algn="l"/>
-            <a:r>
-              <a:rPr sz="1300" b="0">
-                <a:ea typeface="Malgun Gothic"/>
-                <a:latin typeface="Malgun Gothic"/>
-              </a:rPr>
-              <a:t>•  Bureau ablation — EXT_SOURCE와 정보 중복도 정량화</a:t>
-            </a:r>
-          </a:p>
-          <a:p>
-            <a:pPr algn="l"/>
-            <a:r>
-              <a:rPr sz="1300" b="0">
-                <a:ea typeface="Malgun Gothic"/>
-                <a:latin typeface="Malgun Gothic"/>
-              </a:rPr>
-              <a:t>•  Fairness-aware 학습 (Reweighing, Adversarial Debiasing)</a:t>
-            </a:r>
-          </a:p>
-          <a:p>
-            <a:pPr algn="l"/>
-            <a:r>
-              <a:rPr sz="1300" b="0">
-                <a:ea typeface="Malgun Gothic"/>
-                <a:latin typeface="Malgun Gothic"/>
-              </a:rPr>
-              <a:t>•  TabNet/LightGBM 재학습으로 aux 효과 일반화</a:t>
-            </a:r>
-          </a:p>
-          <a:p>
-            <a:pPr algn="l"/>
-            <a:r>
-              <a:rPr sz="1300" b="0">
-                <a:ea typeface="Malgun Gothic"/>
-                <a:latin typeface="Malgun Gothic"/>
-              </a:rPr>
-              <a:t>•  FT-Transformer 비교 모델 추가</a:t>
-            </a:r>
-          </a:p>
-          <a:p>
-            <a:pPr algn="l"/>
-            <a:r>
-              <a:rPr sz="1300" b="0">
-                <a:ea typeface="Malgun Gothic"/>
-                <a:latin typeface="Malgun Gothic"/>
-              </a:rPr>
-              <a:t>•  인간 평가 (Plausibility) — 5점 척도, Cohen's κ</a:t>
-            </a:r>
-          </a:p>
-          <a:p>
-            <a:pPr algn="l"/>
-            <a:r>
-              <a:rPr sz="1300" b="0">
-                <a:ea typeface="Malgun Gothic"/>
-                <a:latin typeface="Malgun Gothic"/>
-              </a:rPr>
-              <a:t>•  한국어 도메인 특화 LLM QLoRA 미세조정</a:t>
+            <a:pPr algn="ctr"/>
+            <a:r>
+              <a:rPr sz="1800" b="1">
+                <a:solidFill>
+                  <a:srgbClr val="222222"/>
+                </a:solidFill>
+                <a:ea typeface="Malgun Gothic"/>
+                <a:latin typeface="Malgun Gothic"/>
+              </a:rPr>
+              <a:t>"SHAP 컨텍스트를 LLM의 검색된 근거로 재정의하면,
+LLM 종속성 없이 환각이 0이 되는 자연어 설명을 생성할 수 있다."</a:t>
             </a:r>
           </a:p>
         </p:txBody>
@@ -8396,6 +8521,436 @@
 </file>
 
 <file path=ppt/slides/slide17.xml><?xml version="1.0" encoding="utf-8"?>
+<p:sld xmlns:a="http://schemas.openxmlformats.org/drawingml/2006/main" xmlns:p="http://schemas.openxmlformats.org/presentationml/2006/main" xmlns:r="http://schemas.openxmlformats.org/officeDocument/2006/relationships">
+  <p:cSld>
+    <p:spTree>
+      <p:nvGrpSpPr>
+        <p:cNvPr id="1" name=""/>
+        <p:cNvGrpSpPr/>
+        <p:nvPr/>
+      </p:nvGrpSpPr>
+      <p:grpSpPr/>
+      <p:sp>
+        <p:nvSpPr>
+          <p:cNvPr id="2" name="Rectangle 1"/>
+          <p:cNvSpPr/>
+          <p:nvPr/>
+        </p:nvSpPr>
+        <p:spPr>
+          <a:xfrm>
+            <a:off x="0" y="0"/>
+            <a:ext cx="180000" cy="720000"/>
+          </a:xfrm>
+          <a:prstGeom prst="rect">
+            <a:avLst/>
+          </a:prstGeom>
+          <a:solidFill>
+            <a:srgbClr val="1F3A68"/>
+          </a:solidFill>
+          <a:ln>
+            <a:noFill/>
+          </a:ln>
+        </p:spPr>
+        <p:style>
+          <a:lnRef idx="1">
+            <a:schemeClr val="accent1"/>
+          </a:lnRef>
+          <a:fillRef idx="3">
+            <a:schemeClr val="accent1"/>
+          </a:fillRef>
+          <a:effectRef idx="2">
+            <a:schemeClr val="accent1"/>
+          </a:effectRef>
+          <a:fontRef idx="minor">
+            <a:schemeClr val="lt1"/>
+          </a:fontRef>
+        </p:style>
+        <p:txBody>
+          <a:bodyPr rtlCol="0" anchor="ctr"/>
+          <a:lstStyle/>
+          <a:p>
+            <a:pPr algn="ctr"/>
+          </a:p>
+        </p:txBody>
+      </p:sp>
+      <p:sp>
+        <p:nvSpPr>
+          <p:cNvPr id="3" name="TextBox 2"/>
+          <p:cNvSpPr txBox="1"/>
+          <p:nvPr/>
+        </p:nvSpPr>
+        <p:spPr>
+          <a:xfrm>
+            <a:off x="360000" y="144000"/>
+            <a:ext cx="10800000" cy="360000"/>
+          </a:xfrm>
+          <a:prstGeom prst="rect">
+            <a:avLst/>
+          </a:prstGeom>
+          <a:noFill/>
+        </p:spPr>
+        <p:txBody>
+          <a:bodyPr wrap="square">
+            <a:spAutoFit/>
+          </a:bodyPr>
+          <a:lstStyle/>
+          <a:p>
+            <a:r>
+              <a:rPr sz="2400" b="1">
+                <a:solidFill>
+                  <a:srgbClr val="1F3A68"/>
+                </a:solidFill>
+                <a:ea typeface="Malgun Gothic"/>
+                <a:latin typeface="Malgun Gothic"/>
+              </a:rPr>
+              <a:t>16. 한계와 향후 계획</a:t>
+            </a:r>
+          </a:p>
+        </p:txBody>
+      </p:sp>
+      <p:sp>
+        <p:nvSpPr>
+          <p:cNvPr id="4" name="TextBox 3"/>
+          <p:cNvSpPr txBox="1"/>
+          <p:nvPr/>
+        </p:nvSpPr>
+        <p:spPr>
+          <a:xfrm>
+            <a:off x="360000" y="503999"/>
+            <a:ext cx="10800000" cy="288000"/>
+          </a:xfrm>
+          <a:prstGeom prst="rect">
+            <a:avLst/>
+          </a:prstGeom>
+          <a:noFill/>
+        </p:spPr>
+        <p:txBody>
+          <a:bodyPr wrap="square">
+            <a:spAutoFit/>
+          </a:bodyPr>
+          <a:lstStyle/>
+          <a:p>
+            <a:r>
+              <a:rPr sz="1200" b="0">
+                <a:solidFill>
+                  <a:srgbClr val="555555"/>
+                </a:solidFill>
+                <a:ea typeface="Malgun Gothic"/>
+                <a:latin typeface="Malgun Gothic"/>
+              </a:rPr>
+              <a:t>Step 3-B/3-C-1 일부 진행 / 잔여는 본 논문 확장</a:t>
+            </a:r>
+          </a:p>
+        </p:txBody>
+      </p:sp>
+      <p:sp>
+        <p:nvSpPr>
+          <p:cNvPr id="5" name="Rectangle 4"/>
+          <p:cNvSpPr/>
+          <p:nvPr/>
+        </p:nvSpPr>
+        <p:spPr>
+          <a:xfrm>
+            <a:off x="360000" y="864000"/>
+            <a:ext cx="11340000" cy="18000"/>
+          </a:xfrm>
+          <a:prstGeom prst="rect">
+            <a:avLst/>
+          </a:prstGeom>
+          <a:solidFill>
+            <a:srgbClr val="CCCCCC"/>
+          </a:solidFill>
+          <a:ln>
+            <a:noFill/>
+          </a:ln>
+        </p:spPr>
+        <p:style>
+          <a:lnRef idx="1">
+            <a:schemeClr val="accent1"/>
+          </a:lnRef>
+          <a:fillRef idx="3">
+            <a:schemeClr val="accent1"/>
+          </a:fillRef>
+          <a:effectRef idx="2">
+            <a:schemeClr val="accent1"/>
+          </a:effectRef>
+          <a:fontRef idx="minor">
+            <a:schemeClr val="lt1"/>
+          </a:fontRef>
+        </p:style>
+        <p:txBody>
+          <a:bodyPr rtlCol="0" anchor="ctr"/>
+          <a:lstStyle/>
+          <a:p>
+            <a:pPr algn="ctr"/>
+          </a:p>
+        </p:txBody>
+      </p:sp>
+      <p:sp>
+        <p:nvSpPr>
+          <p:cNvPr id="6" name="TextBox 5"/>
+          <p:cNvSpPr txBox="1"/>
+          <p:nvPr/>
+        </p:nvSpPr>
+        <p:spPr>
+          <a:xfrm>
+            <a:off x="360000" y="1080000"/>
+            <a:ext cx="5400000" cy="360000"/>
+          </a:xfrm>
+          <a:prstGeom prst="rect">
+            <a:avLst/>
+          </a:prstGeom>
+          <a:noFill/>
+        </p:spPr>
+        <p:txBody>
+          <a:bodyPr wrap="square">
+            <a:spAutoFit/>
+          </a:bodyPr>
+          <a:lstStyle/>
+          <a:p>
+            <a:r>
+              <a:rPr sz="1600" b="1">
+                <a:solidFill>
+                  <a:srgbClr val="C44E52"/>
+                </a:solidFill>
+                <a:ea typeface="Malgun Gothic"/>
+                <a:latin typeface="Malgun Gothic"/>
+              </a:rPr>
+              <a:t>현재 한계 / 진행 중</a:t>
+            </a:r>
+          </a:p>
+        </p:txBody>
+      </p:sp>
+      <p:sp>
+        <p:nvSpPr>
+          <p:cNvPr id="7" name="TextBox 6"/>
+          <p:cNvSpPr txBox="1"/>
+          <p:nvPr/>
+        </p:nvSpPr>
+        <p:spPr>
+          <a:xfrm>
+            <a:off x="540000" y="1440000"/>
+            <a:ext cx="5400000" cy="4680000"/>
+          </a:xfrm>
+          <a:prstGeom prst="rect">
+            <a:avLst/>
+          </a:prstGeom>
+          <a:noFill/>
+        </p:spPr>
+        <p:txBody>
+          <a:bodyPr wrap="square">
+            <a:spAutoFit/>
+          </a:bodyPr>
+          <a:lstStyle/>
+          <a:p>
+            <a:pPr algn="l"/>
+            <a:r>
+              <a:rPr sz="1300" b="0">
+                <a:ea typeface="Malgun Gothic"/>
+                <a:latin typeface="Malgun Gothic"/>
+              </a:rPr>
+              <a:t>•  Fusion 평가 표본 30명 — 100명+ 확장 검토</a:t>
+            </a:r>
+          </a:p>
+          <a:p>
+            <a:pPr algn="l"/>
+            <a:r>
+              <a:rPr sz="1300" b="0">
+                <a:ea typeface="Malgun Gothic"/>
+                <a:latin typeface="Malgun Gothic"/>
+              </a:rPr>
+              <a:t>•  Gemini judge cross-validation 미완 (503 과부하)</a:t>
+            </a:r>
+          </a:p>
+          <a:p>
+            <a:pPr algn="l"/>
+            <a:r>
+              <a:rPr sz="1300" b="0">
+                <a:ea typeface="Malgun Gothic"/>
+                <a:latin typeface="Malgun Gothic"/>
+              </a:rPr>
+              <a:t>•  보조 테이블 2/6개 활용 (Step 3-B) — 4개 잔여</a:t>
+            </a:r>
+          </a:p>
+          <a:p>
+            <a:pPr algn="l"/>
+            <a:r>
+              <a:rPr sz="1300" b="0">
+                <a:ea typeface="Malgun Gothic"/>
+                <a:latin typeface="Malgun Gothic"/>
+              </a:rPr>
+              <a:t>•  Bureau의 SHAP 미진입 — EXT_SOURCE 응축 가설 검증 필요</a:t>
+            </a:r>
+          </a:p>
+          <a:p>
+            <a:pPr algn="l"/>
+            <a:r>
+              <a:rPr sz="1300" b="0">
+                <a:ea typeface="Malgun Gothic"/>
+                <a:latin typeface="Malgun Gothic"/>
+              </a:rPr>
+              <a:t>•  TabNet-only 컨텍스트 ablation 미수행 (3-way)</a:t>
+            </a:r>
+          </a:p>
+          <a:p>
+            <a:pPr algn="l"/>
+            <a:r>
+              <a:rPr sz="1300" b="0">
+                <a:ea typeface="Malgun Gothic"/>
+                <a:latin typeface="Malgun Gothic"/>
+              </a:rPr>
+              <a:t>•  TabNet/LightGBM에 aux 효과 일반화 미실시</a:t>
+            </a:r>
+          </a:p>
+          <a:p>
+            <a:pPr algn="l"/>
+            <a:r>
+              <a:rPr sz="1300" b="0">
+                <a:ea typeface="Malgun Gothic"/>
+                <a:latin typeface="Malgun Gothic"/>
+              </a:rPr>
+              <a:t>•  Fairness-aware 학습 미수행</a:t>
+            </a:r>
+          </a:p>
+        </p:txBody>
+      </p:sp>
+      <p:sp>
+        <p:nvSpPr>
+          <p:cNvPr id="8" name="TextBox 7"/>
+          <p:cNvSpPr txBox="1"/>
+          <p:nvPr/>
+        </p:nvSpPr>
+        <p:spPr>
+          <a:xfrm>
+            <a:off x="6120000" y="1080000"/>
+            <a:ext cx="5400000" cy="360000"/>
+          </a:xfrm>
+          <a:prstGeom prst="rect">
+            <a:avLst/>
+          </a:prstGeom>
+          <a:noFill/>
+        </p:spPr>
+        <p:txBody>
+          <a:bodyPr wrap="square">
+            <a:spAutoFit/>
+          </a:bodyPr>
+          <a:lstStyle/>
+          <a:p>
+            <a:r>
+              <a:rPr sz="1600" b="1">
+                <a:solidFill>
+                  <a:srgbClr val="55A868"/>
+                </a:solidFill>
+                <a:ea typeface="Malgun Gothic"/>
+                <a:latin typeface="Malgun Gothic"/>
+              </a:rPr>
+              <a:t>향후 계획</a:t>
+            </a:r>
+          </a:p>
+        </p:txBody>
+      </p:sp>
+      <p:sp>
+        <p:nvSpPr>
+          <p:cNvPr id="9" name="TextBox 8"/>
+          <p:cNvSpPr txBox="1"/>
+          <p:nvPr/>
+        </p:nvSpPr>
+        <p:spPr>
+          <a:xfrm>
+            <a:off x="6300000" y="1440000"/>
+            <a:ext cx="5400000" cy="4680000"/>
+          </a:xfrm>
+          <a:prstGeom prst="rect">
+            <a:avLst/>
+          </a:prstGeom>
+          <a:noFill/>
+        </p:spPr>
+        <p:txBody>
+          <a:bodyPr wrap="square">
+            <a:spAutoFit/>
+          </a:bodyPr>
+          <a:lstStyle/>
+          <a:p>
+            <a:pPr algn="l"/>
+            <a:r>
+              <a:rPr sz="1300" b="0">
+                <a:ea typeface="Malgun Gothic"/>
+                <a:latin typeface="Malgun Gothic"/>
+              </a:rPr>
+              <a:t>•  Gemini judge로 양방향 cross-validation</a:t>
+            </a:r>
+          </a:p>
+          <a:p>
+            <a:pPr algn="l"/>
+            <a:r>
+              <a:rPr sz="1300" b="0">
+                <a:ea typeface="Malgun Gothic"/>
+                <a:latin typeface="Malgun Gothic"/>
+              </a:rPr>
+              <a:t>•  Fusion 표본 100명 확장 + counterfactual 결합</a:t>
+            </a:r>
+          </a:p>
+          <a:p>
+            <a:pPr algn="l"/>
+            <a:r>
+              <a:rPr sz="1300" b="0">
+                <a:ea typeface="Malgun Gothic"/>
+                <a:latin typeface="Malgun Gothic"/>
+              </a:rPr>
+              <a:t>•  3-way ablation: SHAP-only / Attn-only / Fusion</a:t>
+            </a:r>
+          </a:p>
+          <a:p>
+            <a:pPr algn="l"/>
+            <a:r>
+              <a:rPr sz="1300" b="0">
+                <a:ea typeface="Malgun Gothic"/>
+                <a:latin typeface="Malgun Gothic"/>
+              </a:rPr>
+              <a:t>•  잔여 보조 테이블 4개로 AUROC 0.78+</a:t>
+            </a:r>
+          </a:p>
+          <a:p>
+            <a:pPr algn="l"/>
+            <a:r>
+              <a:rPr sz="1300" b="0">
+                <a:ea typeface="Malgun Gothic"/>
+                <a:latin typeface="Malgun Gothic"/>
+              </a:rPr>
+              <a:t>•  Fairness-aware 학습 (Reweighing, Adversarial)</a:t>
+            </a:r>
+          </a:p>
+          <a:p>
+            <a:pPr algn="l"/>
+            <a:r>
+              <a:rPr sz="1300" b="0">
+                <a:ea typeface="Malgun Gothic"/>
+                <a:latin typeface="Malgun Gothic"/>
+              </a:rPr>
+              <a:t>•  FT-Transformer 비교 + NLI 기반 Faithfulness</a:t>
+            </a:r>
+          </a:p>
+          <a:p>
+            <a:pPr algn="l"/>
+            <a:r>
+              <a:rPr sz="1300" b="0">
+                <a:ea typeface="Malgun Gothic"/>
+                <a:latin typeface="Malgun Gothic"/>
+              </a:rPr>
+              <a:t>•  인간 평가 (Plausibility) — 5점 척도, Cohen's κ</a:t>
+            </a:r>
+          </a:p>
+        </p:txBody>
+      </p:sp>
+    </p:spTree>
+  </p:cSld>
+  <p:clrMapOvr>
+    <a:masterClrMapping/>
+  </p:clrMapOvr>
+</p:sld>
+</file>
+
+<file path=ppt/slides/slide18.xml><?xml version="1.0" encoding="utf-8"?>
 <p:sld xmlns:a="http://schemas.openxmlformats.org/drawingml/2006/main" xmlns:p="http://schemas.openxmlformats.org/presentationml/2006/main" xmlns:r="http://schemas.openxmlformats.org/officeDocument/2006/relationships">
   <p:cSld>
     <p:spTree>

--- a/paper/midterm_slides.pptx
+++ b/paper/midterm_slides.pptx
@@ -23,6 +23,7 @@
     <p:sldId id="271" r:id="rId22"/>
     <p:sldId id="272" r:id="rId23"/>
     <p:sldId id="273" r:id="rId24"/>
+    <p:sldId id="274" r:id="rId25"/>
   </p:sldIdLst>
   <p:sldSz cx="12191695" cy="6858000" type="screen4x3"/>
   <p:notesSz cx="6858000" cy="9144000"/>
@@ -8074,7 +8075,7 @@
                 <a:ea typeface="Malgun Gothic"/>
                 <a:latin typeface="Malgun Gothic"/>
               </a:rPr>
-              <a:t>15. 종합 — 본 연구의 가치 4가지</a:t>
+              <a:t>15. ★ Step 3-C-2 — NLI로 평가 객관성 보강</a:t>
             </a:r>
           </a:p>
         </p:txBody>
@@ -8109,7 +8110,7 @@
                 <a:ea typeface="Malgun Gothic"/>
                 <a:latin typeface="Malgun Gothic"/>
               </a:rPr>
-              <a:t>Step 1 + Step 2-A + Step 3-B + Step 3-C-1 마무리</a:t>
+              <a:t>룰 한계를 의미적 측정으로 입증 — Fusion이 NLI에서도 더 충실</a:t>
             </a:r>
           </a:p>
         </p:txBody>
@@ -8157,298 +8158,40 @@
           </a:p>
         </p:txBody>
       </p:sp>
-      <p:sp>
-        <p:nvSpPr>
-          <p:cNvPr id="6" name="Rounded Rectangle 5"/>
-          <p:cNvSpPr/>
-          <p:nvPr/>
-        </p:nvSpPr>
-        <p:spPr>
-          <a:xfrm>
-            <a:off x="677849" y="1260000"/>
-            <a:ext cx="2520000" cy="3060000"/>
-          </a:xfrm>
-          <a:prstGeom prst="roundRect">
-            <a:avLst/>
-          </a:prstGeom>
-          <a:solidFill>
-            <a:srgbClr val="4C72B0"/>
-          </a:solidFill>
-          <a:ln>
-            <a:noFill/>
-          </a:ln>
-        </p:spPr>
-        <p:style>
-          <a:lnRef idx="1">
-            <a:schemeClr val="accent1"/>
-          </a:lnRef>
-          <a:fillRef idx="3">
-            <a:schemeClr val="accent1"/>
-          </a:fillRef>
-          <a:effectRef idx="2">
-            <a:schemeClr val="accent1"/>
-          </a:effectRef>
-          <a:fontRef idx="minor">
-            <a:schemeClr val="lt1"/>
-          </a:fontRef>
-        </p:style>
-        <p:txBody>
-          <a:bodyPr rtlCol="0" anchor="ctr" lIns="216000" rIns="216000" tIns="216000"/>
-          <a:lstStyle/>
-          <a:p>
-            <a:pPr algn="ctr"/>
-            <a:r>
-              <a:rPr sz="2200" b="1">
-                <a:solidFill>
-                  <a:srgbClr val="FFFFFF"/>
-                </a:solidFill>
-                <a:ea typeface="Malgun Gothic"/>
-                <a:latin typeface="Malgun Gothic"/>
-              </a:rPr>
-              <a:t>예측 성능</a:t>
-            </a:r>
-          </a:p>
-          <a:p>
-            <a:pPr algn="ctr"/>
-            <a:r>
-              <a:rPr sz="1200" b="0">
-                <a:solidFill>
-                  <a:srgbClr val="FFFFFF"/>
-                </a:solidFill>
-                <a:ea typeface="Malgun Gothic"/>
-                <a:latin typeface="Malgun Gothic"/>
-              </a:rPr>
-              <a:t>
-XGBoost 0.7587 → 0.7755
-(Step 3-B aux 추가, +2.22%)
-TabNet 0.7518 — 어텐션
-해석성으로 융합 컨텍스트에 통합</a:t>
-            </a:r>
-          </a:p>
-        </p:txBody>
-      </p:sp>
-      <p:sp>
-        <p:nvSpPr>
-          <p:cNvPr id="7" name="Rounded Rectangle 6"/>
-          <p:cNvSpPr/>
-          <p:nvPr/>
-        </p:nvSpPr>
-        <p:spPr>
-          <a:xfrm>
-            <a:off x="3449848" y="1260000"/>
-            <a:ext cx="2520000" cy="3060000"/>
-          </a:xfrm>
-          <a:prstGeom prst="roundRect">
-            <a:avLst/>
-          </a:prstGeom>
-          <a:solidFill>
-            <a:srgbClr val="55A868"/>
-          </a:solidFill>
-          <a:ln>
-            <a:noFill/>
-          </a:ln>
-        </p:spPr>
-        <p:style>
-          <a:lnRef idx="1">
-            <a:schemeClr val="accent1"/>
-          </a:lnRef>
-          <a:fillRef idx="3">
-            <a:schemeClr val="accent1"/>
-          </a:fillRef>
-          <a:effectRef idx="2">
-            <a:schemeClr val="accent1"/>
-          </a:effectRef>
-          <a:fontRef idx="minor">
-            <a:schemeClr val="lt1"/>
-          </a:fontRef>
-        </p:style>
-        <p:txBody>
-          <a:bodyPr rtlCol="0" anchor="ctr" lIns="216000" rIns="216000" tIns="216000"/>
-          <a:lstStyle/>
-          <a:p>
-            <a:pPr algn="ctr"/>
-            <a:r>
-              <a:rPr sz="2200" b="1">
-                <a:solidFill>
-                  <a:srgbClr val="FFFFFF"/>
-                </a:solidFill>
-                <a:ea typeface="Malgun Gothic"/>
-                <a:latin typeface="Malgun Gothic"/>
-              </a:rPr>
-              <a:t>해석 융합</a:t>
-            </a:r>
-          </a:p>
-          <a:p>
-            <a:pPr algn="ctr"/>
-            <a:r>
-              <a:rPr sz="1200" b="0">
-                <a:solidFill>
-                  <a:srgbClr val="FFFFFF"/>
-                </a:solidFill>
-                <a:ea typeface="Malgun Gothic"/>
-                <a:latin typeface="Malgun Gothic"/>
-              </a:rPr>
-              <a:t>
-ρ=0.117 부분 일관
-+ instance-level
-동의 22% (3+) / 0% (4+)
-agreement-aware 컨텍스트로
-LLM에 의미 라벨 전달</a:t>
-            </a:r>
-          </a:p>
-        </p:txBody>
-      </p:sp>
-      <p:sp>
-        <p:nvSpPr>
-          <p:cNvPr id="8" name="Rounded Rectangle 7"/>
-          <p:cNvSpPr/>
-          <p:nvPr/>
-        </p:nvSpPr>
-        <p:spPr>
-          <a:xfrm>
-            <a:off x="6221847" y="1260000"/>
-            <a:ext cx="2520000" cy="3060000"/>
-          </a:xfrm>
-          <a:prstGeom prst="roundRect">
-            <a:avLst/>
-          </a:prstGeom>
-          <a:solidFill>
-            <a:srgbClr val="C44E52"/>
-          </a:solidFill>
-          <a:ln>
-            <a:noFill/>
-          </a:ln>
-        </p:spPr>
-        <p:style>
-          <a:lnRef idx="1">
-            <a:schemeClr val="accent1"/>
-          </a:lnRef>
-          <a:fillRef idx="3">
-            <a:schemeClr val="accent1"/>
-          </a:fillRef>
-          <a:effectRef idx="2">
-            <a:schemeClr val="accent1"/>
-          </a:effectRef>
-          <a:fontRef idx="minor">
-            <a:schemeClr val="lt1"/>
-          </a:fontRef>
-        </p:style>
-        <p:txBody>
-          <a:bodyPr rtlCol="0" anchor="ctr" lIns="216000" rIns="216000" tIns="216000"/>
-          <a:lstStyle/>
-          <a:p>
-            <a:pPr algn="ctr"/>
-            <a:r>
-              <a:rPr sz="2200" b="1">
-                <a:solidFill>
-                  <a:srgbClr val="FFFFFF"/>
-                </a:solidFill>
-                <a:ea typeface="Malgun Gothic"/>
-                <a:latin typeface="Malgun Gothic"/>
-              </a:rPr>
-              <a:t>환각 차단</a:t>
-            </a:r>
-          </a:p>
-          <a:p>
-            <a:pPr algn="ctr"/>
-            <a:r>
-              <a:rPr sz="1200" b="0">
-                <a:solidFill>
-                  <a:srgbClr val="FFFFFF"/>
-                </a:solidFill>
-                <a:ea typeface="Malgun Gothic"/>
-                <a:latin typeface="Malgun Gothic"/>
-              </a:rPr>
-              <a:t>
-Halluc 0/100 (Step 1/2-A)
-→ 0/30 (Step 3-C-1 fusion)
-Baseline 45.5% vs
-XAI-RAG 0% (Step 1)</a:t>
-            </a:r>
-          </a:p>
-        </p:txBody>
-      </p:sp>
-      <p:sp>
-        <p:nvSpPr>
-          <p:cNvPr id="9" name="Rounded Rectangle 8"/>
-          <p:cNvSpPr/>
-          <p:nvPr/>
-        </p:nvSpPr>
-        <p:spPr>
-          <a:xfrm>
-            <a:off x="8993846" y="1260000"/>
-            <a:ext cx="2520000" cy="3060000"/>
-          </a:xfrm>
-          <a:prstGeom prst="roundRect">
-            <a:avLst/>
-          </a:prstGeom>
-          <a:solidFill>
-            <a:srgbClr val="DD8552"/>
-          </a:solidFill>
-          <a:ln>
-            <a:noFill/>
-          </a:ln>
-        </p:spPr>
-        <p:style>
-          <a:lnRef idx="1">
-            <a:schemeClr val="accent1"/>
-          </a:lnRef>
-          <a:fillRef idx="3">
-            <a:schemeClr val="accent1"/>
-          </a:fillRef>
-          <a:effectRef idx="2">
-            <a:schemeClr val="accent1"/>
-          </a:effectRef>
-          <a:fontRef idx="minor">
-            <a:schemeClr val="lt1"/>
-          </a:fontRef>
-        </p:style>
-        <p:txBody>
-          <a:bodyPr rtlCol="0" anchor="ctr" lIns="216000" rIns="216000" tIns="216000"/>
-          <a:lstStyle/>
-          <a:p>
-            <a:pPr algn="ctr"/>
-            <a:r>
-              <a:rPr sz="2200" b="1">
-                <a:solidFill>
-                  <a:srgbClr val="FFFFFF"/>
-                </a:solidFill>
-                <a:ea typeface="Malgun Gothic"/>
-                <a:latin typeface="Malgun Gothic"/>
-              </a:rPr>
-              <a:t>완결성 향상</a:t>
-            </a:r>
-          </a:p>
-          <a:p>
-            <a:pPr algn="ctr"/>
-            <a:r>
-              <a:rPr sz="1200" b="0">
-                <a:solidFill>
-                  <a:srgbClr val="FFFFFF"/>
-                </a:solidFill>
-                <a:ea typeface="Malgun Gothic"/>
-                <a:latin typeface="Malgun Gothic"/>
-              </a:rPr>
-              <a:t>
-G-Eval Completeness
-+0.67 (Anthropic)
-+0.80 (Gemini)
-두 해석 신호 상보성이
-더 완결한 설명 생성</a:t>
-            </a:r>
-          </a:p>
-        </p:txBody>
-      </p:sp>
-      <p:sp>
-        <p:nvSpPr>
-          <p:cNvPr id="10" name="TextBox 9"/>
+      <p:pic>
+        <p:nvPicPr>
+          <p:cNvPr id="6" name="Picture 5" descr="31_nli_vs_rules.png"/>
+          <p:cNvPicPr>
+            <a:picLocks noChangeAspect="1"/>
+          </p:cNvPicPr>
+          <p:nvPr/>
+        </p:nvPicPr>
+        <p:blipFill>
+          <a:blip r:embed="rId2"/>
+          <a:stretch>
+            <a:fillRect/>
+          </a:stretch>
+        </p:blipFill>
+        <p:spPr>
+          <a:xfrm>
+            <a:off x="216000" y="1080000"/>
+            <a:ext cx="6840000" cy="2335837"/>
+          </a:xfrm>
+          <a:prstGeom prst="rect">
+            <a:avLst/>
+          </a:prstGeom>
+        </p:spPr>
+      </p:pic>
+      <p:sp>
+        <p:nvSpPr>
+          <p:cNvPr id="7" name="TextBox 6"/>
           <p:cNvSpPr txBox="1"/>
           <p:nvPr/>
         </p:nvSpPr>
         <p:spPr>
           <a:xfrm>
-            <a:off x="360000" y="4680000"/>
-            <a:ext cx="11160000" cy="540000"/>
+            <a:off x="7380000" y="1080000"/>
+            <a:ext cx="4680000" cy="360000"/>
           </a:xfrm>
           <a:prstGeom prst="rect">
             <a:avLst/>
@@ -8461,30 +8204,29 @@
           </a:bodyPr>
           <a:lstStyle/>
           <a:p>
-            <a:pPr algn="ctr"/>
-            <a:r>
-              <a:rPr sz="1600" b="1">
+            <a:r>
+              <a:rPr sz="1400" b="1">
                 <a:solidFill>
                   <a:srgbClr val="1F3A68"/>
                 </a:solidFill>
                 <a:ea typeface="Malgun Gothic"/>
                 <a:latin typeface="Malgun Gothic"/>
               </a:rPr>
-              <a:t>한 줄 메시지</a:t>
-            </a:r>
-          </a:p>
-        </p:txBody>
-      </p:sp>
-      <p:sp>
-        <p:nvSpPr>
-          <p:cNvPr id="11" name="TextBox 10"/>
+              <a:t>동기 — 룰 sign_match 하락 (Step 3-C-1)</a:t>
+            </a:r>
+          </a:p>
+        </p:txBody>
+      </p:sp>
+      <p:sp>
+        <p:nvSpPr>
+          <p:cNvPr id="8" name="TextBox 7"/>
           <p:cNvSpPr txBox="1"/>
           <p:nvPr/>
         </p:nvSpPr>
         <p:spPr>
           <a:xfrm>
-            <a:off x="360000" y="5220000"/>
-            <a:ext cx="11160000" cy="720000"/>
+            <a:off x="7452000" y="1440000"/>
+            <a:ext cx="4680000" cy="1080000"/>
           </a:xfrm>
           <a:prstGeom prst="rect">
             <a:avLst/>
@@ -8497,17 +8239,168 @@
           </a:bodyPr>
           <a:lstStyle/>
           <a:p>
-            <a:pPr algn="ctr"/>
-            <a:r>
-              <a:rPr sz="1800" b="1">
-                <a:solidFill>
-                  <a:srgbClr val="222222"/>
-                </a:solidFill>
-                <a:ea typeface="Malgun Gothic"/>
-                <a:latin typeface="Malgun Gothic"/>
-              </a:rPr>
-              <a:t>"SHAP 컨텍스트를 LLM의 검색된 근거로 재정의하면,
-LLM 종속성 없이 환각이 0이 되는 자연어 설명을 생성할 수 있다."</a:t>
+            <a:pPr algn="l"/>
+            <a:r>
+              <a:rPr sz="1100" b="0">
+                <a:ea typeface="Malgun Gothic"/>
+                <a:latin typeface="Malgun Gothic"/>
+              </a:rPr>
+              <a:t>•  Anthropic 0.87→0.65, Gemini 0.94→0.77</a:t>
+            </a:r>
+          </a:p>
+          <a:p>
+            <a:pPr algn="l"/>
+            <a:r>
+              <a:rPr sz="1100" b="0">
+                <a:ea typeface="Malgun Gothic"/>
+                <a:latin typeface="Malgun Gothic"/>
+              </a:rPr>
+              <a:t>•  원인 추정: 룰 키워드 셋의 한계 (다양한 표현 못 잡음)</a:t>
+            </a:r>
+          </a:p>
+          <a:p>
+            <a:pPr algn="l"/>
+            <a:r>
+              <a:rPr sz="1100" b="0">
+                <a:ea typeface="Malgun Gothic"/>
+                <a:latin typeface="Malgun Gothic"/>
+              </a:rPr>
+              <a:t>•  → NLI로 의미적 함의를 직접 측정</a:t>
+            </a:r>
+          </a:p>
+        </p:txBody>
+      </p:sp>
+      <p:sp>
+        <p:nvSpPr>
+          <p:cNvPr id="9" name="TextBox 8"/>
+          <p:cNvSpPr txBox="1"/>
+          <p:nvPr/>
+        </p:nvSpPr>
+        <p:spPr>
+          <a:xfrm>
+            <a:off x="7380000" y="2700000"/>
+            <a:ext cx="4680000" cy="360000"/>
+          </a:xfrm>
+          <a:prstGeom prst="rect">
+            <a:avLst/>
+          </a:prstGeom>
+          <a:noFill/>
+        </p:spPr>
+        <p:txBody>
+          <a:bodyPr wrap="square">
+            <a:spAutoFit/>
+          </a:bodyPr>
+          <a:lstStyle/>
+          <a:p>
+            <a:r>
+              <a:rPr sz="1400" b="1">
+                <a:solidFill>
+                  <a:srgbClr val="C44E52"/>
+                </a:solidFill>
+                <a:ea typeface="Malgun Gothic"/>
+                <a:latin typeface="Malgun Gothic"/>
+              </a:rPr>
+              <a:t>NLI 결과 (KLUE 다국어 NLI, n=30 each)</a:t>
+            </a:r>
+          </a:p>
+        </p:txBody>
+      </p:sp>
+      <p:sp>
+        <p:nvSpPr>
+          <p:cNvPr id="10" name="TextBox 9"/>
+          <p:cNvSpPr txBox="1"/>
+          <p:nvPr/>
+        </p:nvSpPr>
+        <p:spPr>
+          <a:xfrm>
+            <a:off x="7452000" y="3024000"/>
+            <a:ext cx="4680000" cy="1620000"/>
+          </a:xfrm>
+          <a:prstGeom prst="rect">
+            <a:avLst/>
+          </a:prstGeom>
+          <a:noFill/>
+        </p:spPr>
+        <p:txBody>
+          <a:bodyPr wrap="square">
+            <a:spAutoFit/>
+          </a:bodyPr>
+          <a:lstStyle/>
+          <a:p>
+            <a:pPr algn="l"/>
+            <a:r>
+              <a:rPr sz="1100" b="0">
+                <a:ea typeface="Malgun Gothic"/>
+                <a:latin typeface="Malgun Gothic"/>
+              </a:rPr>
+              <a:t>•  Anthropic: entailment +0.21 ★, contradiction -0.18 ★</a:t>
+            </a:r>
+          </a:p>
+          <a:p>
+            <a:pPr algn="l"/>
+            <a:r>
+              <a:rPr sz="1100" b="0">
+                <a:ea typeface="Malgun Gothic"/>
+                <a:latin typeface="Malgun Gothic"/>
+              </a:rPr>
+              <a:t>•  Gemini: entailment +0.12, contradiction -0.14</a:t>
+            </a:r>
+          </a:p>
+          <a:p>
+            <a:pPr algn="l"/>
+            <a:r>
+              <a:rPr sz="1100" b="0">
+                <a:ea typeface="Malgun Gothic"/>
+                <a:latin typeface="Malgun Gothic"/>
+              </a:rPr>
+              <a:t>•  양 LLM 일관 — fusion이 의미적으로 더 충실</a:t>
+            </a:r>
+          </a:p>
+          <a:p>
+            <a:pPr algn="l"/>
+            <a:r>
+              <a:rPr sz="1100" b="0">
+                <a:ea typeface="Malgun Gothic"/>
+                <a:latin typeface="Malgun Gothic"/>
+              </a:rPr>
+              <a:t>•  min_entailment(최악 문장) 양쪽 다 개선 또는 유지</a:t>
+            </a:r>
+          </a:p>
+        </p:txBody>
+      </p:sp>
+      <p:sp>
+        <p:nvSpPr>
+          <p:cNvPr id="11" name="TextBox 10"/>
+          <p:cNvSpPr txBox="1"/>
+          <p:nvPr/>
+        </p:nvSpPr>
+        <p:spPr>
+          <a:xfrm>
+            <a:off x="7380000" y="4860000"/>
+            <a:ext cx="4680000" cy="1260000"/>
+          </a:xfrm>
+          <a:prstGeom prst="rect">
+            <a:avLst/>
+          </a:prstGeom>
+          <a:noFill/>
+        </p:spPr>
+        <p:txBody>
+          <a:bodyPr wrap="square">
+            <a:spAutoFit/>
+          </a:bodyPr>
+          <a:lstStyle/>
+          <a:p>
+            <a:r>
+              <a:rPr sz="1100" b="0">
+                <a:solidFill>
+                  <a:srgbClr val="55A868"/>
+                </a:solidFill>
+                <a:ea typeface="Malgun Gothic"/>
+                <a:latin typeface="Malgun Gothic"/>
+              </a:rPr>
+              <a:t>결론 — 3-tier 평가 체계 완성
+★ 룰의 sign_match 하락은 키워드 한계, 진짜 환각 아님 입증
+★ Rules + G-Eval + NLI 다층 검증 → 평가 신뢰성 강화</a:t>
             </a:r>
           </a:p>
         </p:txBody>
@@ -8603,7 +8496,7 @@
                 <a:ea typeface="Malgun Gothic"/>
                 <a:latin typeface="Malgun Gothic"/>
               </a:rPr>
-              <a:t>16. 한계와 향후 계획</a:t>
+              <a:t>16. 종합 — 본 연구의 가치 4가지</a:t>
             </a:r>
           </a:p>
         </p:txBody>
@@ -8638,7 +8531,7 @@
                 <a:ea typeface="Malgun Gothic"/>
                 <a:latin typeface="Malgun Gothic"/>
               </a:rPr>
-              <a:t>Step 3-B/3-C-1 일부 진행 / 잔여는 본 논문 확장</a:t>
+              <a:t>Step 1 + 2-A + 3-B + 3-C-1 + 3-C-2 마무리</a:t>
             </a:r>
           </a:p>
         </p:txBody>
@@ -8688,14 +8581,299 @@
       </p:sp>
       <p:sp>
         <p:nvSpPr>
-          <p:cNvPr id="6" name="TextBox 5"/>
+          <p:cNvPr id="6" name="Rounded Rectangle 5"/>
+          <p:cNvSpPr/>
+          <p:nvPr/>
+        </p:nvSpPr>
+        <p:spPr>
+          <a:xfrm>
+            <a:off x="677849" y="1260000"/>
+            <a:ext cx="2520000" cy="3060000"/>
+          </a:xfrm>
+          <a:prstGeom prst="roundRect">
+            <a:avLst/>
+          </a:prstGeom>
+          <a:solidFill>
+            <a:srgbClr val="4C72B0"/>
+          </a:solidFill>
+          <a:ln>
+            <a:noFill/>
+          </a:ln>
+        </p:spPr>
+        <p:style>
+          <a:lnRef idx="1">
+            <a:schemeClr val="accent1"/>
+          </a:lnRef>
+          <a:fillRef idx="3">
+            <a:schemeClr val="accent1"/>
+          </a:fillRef>
+          <a:effectRef idx="2">
+            <a:schemeClr val="accent1"/>
+          </a:effectRef>
+          <a:fontRef idx="minor">
+            <a:schemeClr val="lt1"/>
+          </a:fontRef>
+        </p:style>
+        <p:txBody>
+          <a:bodyPr rtlCol="0" anchor="ctr" lIns="216000" rIns="216000" tIns="216000"/>
+          <a:lstStyle/>
+          <a:p>
+            <a:pPr algn="ctr"/>
+            <a:r>
+              <a:rPr sz="2200" b="1">
+                <a:solidFill>
+                  <a:srgbClr val="FFFFFF"/>
+                </a:solidFill>
+                <a:ea typeface="Malgun Gothic"/>
+                <a:latin typeface="Malgun Gothic"/>
+              </a:rPr>
+              <a:t>예측 성능</a:t>
+            </a:r>
+          </a:p>
+          <a:p>
+            <a:pPr algn="ctr"/>
+            <a:r>
+              <a:rPr sz="1200" b="0">
+                <a:solidFill>
+                  <a:srgbClr val="FFFFFF"/>
+                </a:solidFill>
+                <a:ea typeface="Malgun Gothic"/>
+                <a:latin typeface="Malgun Gothic"/>
+              </a:rPr>
+              <a:t>
+XGBoost 0.7587 → 0.7755
+(Step 3-B aux 추가, +2.22%)
+TabNet 0.7518 — 어텐션
+해석성으로 융합 컨텍스트에 통합</a:t>
+            </a:r>
+          </a:p>
+        </p:txBody>
+      </p:sp>
+      <p:sp>
+        <p:nvSpPr>
+          <p:cNvPr id="7" name="Rounded Rectangle 6"/>
+          <p:cNvSpPr/>
+          <p:nvPr/>
+        </p:nvSpPr>
+        <p:spPr>
+          <a:xfrm>
+            <a:off x="3449848" y="1260000"/>
+            <a:ext cx="2520000" cy="3060000"/>
+          </a:xfrm>
+          <a:prstGeom prst="roundRect">
+            <a:avLst/>
+          </a:prstGeom>
+          <a:solidFill>
+            <a:srgbClr val="55A868"/>
+          </a:solidFill>
+          <a:ln>
+            <a:noFill/>
+          </a:ln>
+        </p:spPr>
+        <p:style>
+          <a:lnRef idx="1">
+            <a:schemeClr val="accent1"/>
+          </a:lnRef>
+          <a:fillRef idx="3">
+            <a:schemeClr val="accent1"/>
+          </a:fillRef>
+          <a:effectRef idx="2">
+            <a:schemeClr val="accent1"/>
+          </a:effectRef>
+          <a:fontRef idx="minor">
+            <a:schemeClr val="lt1"/>
+          </a:fontRef>
+        </p:style>
+        <p:txBody>
+          <a:bodyPr rtlCol="0" anchor="ctr" lIns="216000" rIns="216000" tIns="216000"/>
+          <a:lstStyle/>
+          <a:p>
+            <a:pPr algn="ctr"/>
+            <a:r>
+              <a:rPr sz="2200" b="1">
+                <a:solidFill>
+                  <a:srgbClr val="FFFFFF"/>
+                </a:solidFill>
+                <a:ea typeface="Malgun Gothic"/>
+                <a:latin typeface="Malgun Gothic"/>
+              </a:rPr>
+              <a:t>해석 융합</a:t>
+            </a:r>
+          </a:p>
+          <a:p>
+            <a:pPr algn="ctr"/>
+            <a:r>
+              <a:rPr sz="1200" b="0">
+                <a:solidFill>
+                  <a:srgbClr val="FFFFFF"/>
+                </a:solidFill>
+                <a:ea typeface="Malgun Gothic"/>
+                <a:latin typeface="Malgun Gothic"/>
+              </a:rPr>
+              <a:t>
+ρ=0.117 부분 일관
++ instance-level
+동의 22% (3+) / 0% (4+)
+agreement-aware 컨텍스트로
+LLM에 의미 라벨 전달</a:t>
+            </a:r>
+          </a:p>
+        </p:txBody>
+      </p:sp>
+      <p:sp>
+        <p:nvSpPr>
+          <p:cNvPr id="8" name="Rounded Rectangle 7"/>
+          <p:cNvSpPr/>
+          <p:nvPr/>
+        </p:nvSpPr>
+        <p:spPr>
+          <a:xfrm>
+            <a:off x="6221847" y="1260000"/>
+            <a:ext cx="2520000" cy="3060000"/>
+          </a:xfrm>
+          <a:prstGeom prst="roundRect">
+            <a:avLst/>
+          </a:prstGeom>
+          <a:solidFill>
+            <a:srgbClr val="C44E52"/>
+          </a:solidFill>
+          <a:ln>
+            <a:noFill/>
+          </a:ln>
+        </p:spPr>
+        <p:style>
+          <a:lnRef idx="1">
+            <a:schemeClr val="accent1"/>
+          </a:lnRef>
+          <a:fillRef idx="3">
+            <a:schemeClr val="accent1"/>
+          </a:fillRef>
+          <a:effectRef idx="2">
+            <a:schemeClr val="accent1"/>
+          </a:effectRef>
+          <a:fontRef idx="minor">
+            <a:schemeClr val="lt1"/>
+          </a:fontRef>
+        </p:style>
+        <p:txBody>
+          <a:bodyPr rtlCol="0" anchor="ctr" lIns="216000" rIns="216000" tIns="216000"/>
+          <a:lstStyle/>
+          <a:p>
+            <a:pPr algn="ctr"/>
+            <a:r>
+              <a:rPr sz="2200" b="1">
+                <a:solidFill>
+                  <a:srgbClr val="FFFFFF"/>
+                </a:solidFill>
+                <a:ea typeface="Malgun Gothic"/>
+                <a:latin typeface="Malgun Gothic"/>
+              </a:rPr>
+              <a:t>환각 차단</a:t>
+            </a:r>
+          </a:p>
+          <a:p>
+            <a:pPr algn="ctr"/>
+            <a:r>
+              <a:rPr sz="1200" b="0">
+                <a:solidFill>
+                  <a:srgbClr val="FFFFFF"/>
+                </a:solidFill>
+                <a:ea typeface="Malgun Gothic"/>
+                <a:latin typeface="Malgun Gothic"/>
+              </a:rPr>
+              <a:t>
+Halluc 0/100 (Step 1/2-A)
+→ 0/30 (3-C-1 fusion)
+Baseline 45.5% vs
+XAI-RAG 0% (Step 1)
+NLI contradiction
+−0.14~−0.18 (3-C-2)</a:t>
+            </a:r>
+          </a:p>
+        </p:txBody>
+      </p:sp>
+      <p:sp>
+        <p:nvSpPr>
+          <p:cNvPr id="9" name="Rounded Rectangle 8"/>
+          <p:cNvSpPr/>
+          <p:nvPr/>
+        </p:nvSpPr>
+        <p:spPr>
+          <a:xfrm>
+            <a:off x="8993846" y="1260000"/>
+            <a:ext cx="2520000" cy="3060000"/>
+          </a:xfrm>
+          <a:prstGeom prst="roundRect">
+            <a:avLst/>
+          </a:prstGeom>
+          <a:solidFill>
+            <a:srgbClr val="DD8552"/>
+          </a:solidFill>
+          <a:ln>
+            <a:noFill/>
+          </a:ln>
+        </p:spPr>
+        <p:style>
+          <a:lnRef idx="1">
+            <a:schemeClr val="accent1"/>
+          </a:lnRef>
+          <a:fillRef idx="3">
+            <a:schemeClr val="accent1"/>
+          </a:fillRef>
+          <a:effectRef idx="2">
+            <a:schemeClr val="accent1"/>
+          </a:effectRef>
+          <a:fontRef idx="minor">
+            <a:schemeClr val="lt1"/>
+          </a:fontRef>
+        </p:style>
+        <p:txBody>
+          <a:bodyPr rtlCol="0" anchor="ctr" lIns="216000" rIns="216000" tIns="216000"/>
+          <a:lstStyle/>
+          <a:p>
+            <a:pPr algn="ctr"/>
+            <a:r>
+              <a:rPr sz="2200" b="1">
+                <a:solidFill>
+                  <a:srgbClr val="FFFFFF"/>
+                </a:solidFill>
+                <a:ea typeface="Malgun Gothic"/>
+                <a:latin typeface="Malgun Gothic"/>
+              </a:rPr>
+              <a:t>완결성·충실성</a:t>
+            </a:r>
+          </a:p>
+          <a:p>
+            <a:pPr algn="ctr"/>
+            <a:r>
+              <a:rPr sz="1200" b="0">
+                <a:solidFill>
+                  <a:srgbClr val="FFFFFF"/>
+                </a:solidFill>
+                <a:ea typeface="Malgun Gothic"/>
+                <a:latin typeface="Malgun Gothic"/>
+              </a:rPr>
+              <a:t>
+G-Eval Completeness
++0.67~+0.80 (3-C-1)
+NLI Entailment
++0.12~+0.21 (3-C-2)
+→ 다층 평가에서
+일관된 향상</a:t>
+            </a:r>
+          </a:p>
+        </p:txBody>
+      </p:sp>
+      <p:sp>
+        <p:nvSpPr>
+          <p:cNvPr id="10" name="TextBox 9"/>
           <p:cNvSpPr txBox="1"/>
           <p:nvPr/>
         </p:nvSpPr>
         <p:spPr>
           <a:xfrm>
-            <a:off x="360000" y="1080000"/>
-            <a:ext cx="5400000" cy="360000"/>
+            <a:off x="360000" y="4680000"/>
+            <a:ext cx="11160000" cy="540000"/>
           </a:xfrm>
           <a:prstGeom prst="rect">
             <a:avLst/>
@@ -8708,29 +8886,30 @@
           </a:bodyPr>
           <a:lstStyle/>
           <a:p>
+            <a:pPr algn="ctr"/>
             <a:r>
               <a:rPr sz="1600" b="1">
                 <a:solidFill>
-                  <a:srgbClr val="C44E52"/>
-                </a:solidFill>
-                <a:ea typeface="Malgun Gothic"/>
-                <a:latin typeface="Malgun Gothic"/>
-              </a:rPr>
-              <a:t>현재 한계 / 진행 중</a:t>
-            </a:r>
-          </a:p>
-        </p:txBody>
-      </p:sp>
-      <p:sp>
-        <p:nvSpPr>
-          <p:cNvPr id="7" name="TextBox 6"/>
+                  <a:srgbClr val="1F3A68"/>
+                </a:solidFill>
+                <a:ea typeface="Malgun Gothic"/>
+                <a:latin typeface="Malgun Gothic"/>
+              </a:rPr>
+              <a:t>한 줄 메시지</a:t>
+            </a:r>
+          </a:p>
+        </p:txBody>
+      </p:sp>
+      <p:sp>
+        <p:nvSpPr>
+          <p:cNvPr id="11" name="TextBox 10"/>
           <p:cNvSpPr txBox="1"/>
           <p:nvPr/>
         </p:nvSpPr>
         <p:spPr>
           <a:xfrm>
-            <a:off x="540000" y="1440000"/>
-            <a:ext cx="5400000" cy="4680000"/>
+            <a:off x="360000" y="5220000"/>
+            <a:ext cx="11160000" cy="720000"/>
           </a:xfrm>
           <a:prstGeom prst="rect">
             <a:avLst/>
@@ -8743,201 +8922,17 @@
           </a:bodyPr>
           <a:lstStyle/>
           <a:p>
-            <a:pPr algn="l"/>
-            <a:r>
-              <a:rPr sz="1300" b="0">
-                <a:ea typeface="Malgun Gothic"/>
-                <a:latin typeface="Malgun Gothic"/>
-              </a:rPr>
-              <a:t>•  Fusion 평가 표본 30명 — 100명+ 확장 검토</a:t>
-            </a:r>
-          </a:p>
-          <a:p>
-            <a:pPr algn="l"/>
-            <a:r>
-              <a:rPr sz="1300" b="0">
-                <a:ea typeface="Malgun Gothic"/>
-                <a:latin typeface="Malgun Gothic"/>
-              </a:rPr>
-              <a:t>•  Gemini judge cross-validation 미완 (503 과부하)</a:t>
-            </a:r>
-          </a:p>
-          <a:p>
-            <a:pPr algn="l"/>
-            <a:r>
-              <a:rPr sz="1300" b="0">
-                <a:ea typeface="Malgun Gothic"/>
-                <a:latin typeface="Malgun Gothic"/>
-              </a:rPr>
-              <a:t>•  보조 테이블 2/6개 활용 (Step 3-B) — 4개 잔여</a:t>
-            </a:r>
-          </a:p>
-          <a:p>
-            <a:pPr algn="l"/>
-            <a:r>
-              <a:rPr sz="1300" b="0">
-                <a:ea typeface="Malgun Gothic"/>
-                <a:latin typeface="Malgun Gothic"/>
-              </a:rPr>
-              <a:t>•  Bureau의 SHAP 미진입 — EXT_SOURCE 응축 가설 검증 필요</a:t>
-            </a:r>
-          </a:p>
-          <a:p>
-            <a:pPr algn="l"/>
-            <a:r>
-              <a:rPr sz="1300" b="0">
-                <a:ea typeface="Malgun Gothic"/>
-                <a:latin typeface="Malgun Gothic"/>
-              </a:rPr>
-              <a:t>•  TabNet-only 컨텍스트 ablation 미수행 (3-way)</a:t>
-            </a:r>
-          </a:p>
-          <a:p>
-            <a:pPr algn="l"/>
-            <a:r>
-              <a:rPr sz="1300" b="0">
-                <a:ea typeface="Malgun Gothic"/>
-                <a:latin typeface="Malgun Gothic"/>
-              </a:rPr>
-              <a:t>•  TabNet/LightGBM에 aux 효과 일반화 미실시</a:t>
-            </a:r>
-          </a:p>
-          <a:p>
-            <a:pPr algn="l"/>
-            <a:r>
-              <a:rPr sz="1300" b="0">
-                <a:ea typeface="Malgun Gothic"/>
-                <a:latin typeface="Malgun Gothic"/>
-              </a:rPr>
-              <a:t>•  Fairness-aware 학습 미수행</a:t>
-            </a:r>
-          </a:p>
-        </p:txBody>
-      </p:sp>
-      <p:sp>
-        <p:nvSpPr>
-          <p:cNvPr id="8" name="TextBox 7"/>
-          <p:cNvSpPr txBox="1"/>
-          <p:nvPr/>
-        </p:nvSpPr>
-        <p:spPr>
-          <a:xfrm>
-            <a:off x="6120000" y="1080000"/>
-            <a:ext cx="5400000" cy="360000"/>
-          </a:xfrm>
-          <a:prstGeom prst="rect">
-            <a:avLst/>
-          </a:prstGeom>
-          <a:noFill/>
-        </p:spPr>
-        <p:txBody>
-          <a:bodyPr wrap="square">
-            <a:spAutoFit/>
-          </a:bodyPr>
-          <a:lstStyle/>
-          <a:p>
-            <a:r>
-              <a:rPr sz="1600" b="1">
-                <a:solidFill>
-                  <a:srgbClr val="55A868"/>
-                </a:solidFill>
-                <a:ea typeface="Malgun Gothic"/>
-                <a:latin typeface="Malgun Gothic"/>
-              </a:rPr>
-              <a:t>향후 계획</a:t>
-            </a:r>
-          </a:p>
-        </p:txBody>
-      </p:sp>
-      <p:sp>
-        <p:nvSpPr>
-          <p:cNvPr id="9" name="TextBox 8"/>
-          <p:cNvSpPr txBox="1"/>
-          <p:nvPr/>
-        </p:nvSpPr>
-        <p:spPr>
-          <a:xfrm>
-            <a:off x="6300000" y="1440000"/>
-            <a:ext cx="5400000" cy="4680000"/>
-          </a:xfrm>
-          <a:prstGeom prst="rect">
-            <a:avLst/>
-          </a:prstGeom>
-          <a:noFill/>
-        </p:spPr>
-        <p:txBody>
-          <a:bodyPr wrap="square">
-            <a:spAutoFit/>
-          </a:bodyPr>
-          <a:lstStyle/>
-          <a:p>
-            <a:pPr algn="l"/>
-            <a:r>
-              <a:rPr sz="1300" b="0">
-                <a:ea typeface="Malgun Gothic"/>
-                <a:latin typeface="Malgun Gothic"/>
-              </a:rPr>
-              <a:t>•  Gemini judge로 양방향 cross-validation</a:t>
-            </a:r>
-          </a:p>
-          <a:p>
-            <a:pPr algn="l"/>
-            <a:r>
-              <a:rPr sz="1300" b="0">
-                <a:ea typeface="Malgun Gothic"/>
-                <a:latin typeface="Malgun Gothic"/>
-              </a:rPr>
-              <a:t>•  Fusion 표본 100명 확장 + counterfactual 결합</a:t>
-            </a:r>
-          </a:p>
-          <a:p>
-            <a:pPr algn="l"/>
-            <a:r>
-              <a:rPr sz="1300" b="0">
-                <a:ea typeface="Malgun Gothic"/>
-                <a:latin typeface="Malgun Gothic"/>
-              </a:rPr>
-              <a:t>•  3-way ablation: SHAP-only / Attn-only / Fusion</a:t>
-            </a:r>
-          </a:p>
-          <a:p>
-            <a:pPr algn="l"/>
-            <a:r>
-              <a:rPr sz="1300" b="0">
-                <a:ea typeface="Malgun Gothic"/>
-                <a:latin typeface="Malgun Gothic"/>
-              </a:rPr>
-              <a:t>•  잔여 보조 테이블 4개로 AUROC 0.78+</a:t>
-            </a:r>
-          </a:p>
-          <a:p>
-            <a:pPr algn="l"/>
-            <a:r>
-              <a:rPr sz="1300" b="0">
-                <a:ea typeface="Malgun Gothic"/>
-                <a:latin typeface="Malgun Gothic"/>
-              </a:rPr>
-              <a:t>•  Fairness-aware 학습 (Reweighing, Adversarial)</a:t>
-            </a:r>
-          </a:p>
-          <a:p>
-            <a:pPr algn="l"/>
-            <a:r>
-              <a:rPr sz="1300" b="0">
-                <a:ea typeface="Malgun Gothic"/>
-                <a:latin typeface="Malgun Gothic"/>
-              </a:rPr>
-              <a:t>•  FT-Transformer 비교 + NLI 기반 Faithfulness</a:t>
-            </a:r>
-          </a:p>
-          <a:p>
-            <a:pPr algn="l"/>
-            <a:r>
-              <a:rPr sz="1300" b="0">
-                <a:ea typeface="Malgun Gothic"/>
-                <a:latin typeface="Malgun Gothic"/>
-              </a:rPr>
-              <a:t>•  인간 평가 (Plausibility) — 5점 척도, Cohen's κ</a:t>
+            <a:pPr algn="ctr"/>
+            <a:r>
+              <a:rPr sz="1800" b="1">
+                <a:solidFill>
+                  <a:srgbClr val="222222"/>
+                </a:solidFill>
+                <a:ea typeface="Malgun Gothic"/>
+                <a:latin typeface="Malgun Gothic"/>
+              </a:rPr>
+              <a:t>"SHAP 컨텍스트를 LLM의 검색된 근거로 재정의하면,
+LLM 종속성 없이 환각이 0이 되는 자연어 설명을 생성할 수 있다."</a:t>
             </a:r>
           </a:p>
         </p:txBody>
@@ -8951,6 +8946,436 @@
 </file>
 
 <file path=ppt/slides/slide18.xml><?xml version="1.0" encoding="utf-8"?>
+<p:sld xmlns:a="http://schemas.openxmlformats.org/drawingml/2006/main" xmlns:p="http://schemas.openxmlformats.org/presentationml/2006/main" xmlns:r="http://schemas.openxmlformats.org/officeDocument/2006/relationships">
+  <p:cSld>
+    <p:spTree>
+      <p:nvGrpSpPr>
+        <p:cNvPr id="1" name=""/>
+        <p:cNvGrpSpPr/>
+        <p:nvPr/>
+      </p:nvGrpSpPr>
+      <p:grpSpPr/>
+      <p:sp>
+        <p:nvSpPr>
+          <p:cNvPr id="2" name="Rectangle 1"/>
+          <p:cNvSpPr/>
+          <p:nvPr/>
+        </p:nvSpPr>
+        <p:spPr>
+          <a:xfrm>
+            <a:off x="0" y="0"/>
+            <a:ext cx="180000" cy="720000"/>
+          </a:xfrm>
+          <a:prstGeom prst="rect">
+            <a:avLst/>
+          </a:prstGeom>
+          <a:solidFill>
+            <a:srgbClr val="1F3A68"/>
+          </a:solidFill>
+          <a:ln>
+            <a:noFill/>
+          </a:ln>
+        </p:spPr>
+        <p:style>
+          <a:lnRef idx="1">
+            <a:schemeClr val="accent1"/>
+          </a:lnRef>
+          <a:fillRef idx="3">
+            <a:schemeClr val="accent1"/>
+          </a:fillRef>
+          <a:effectRef idx="2">
+            <a:schemeClr val="accent1"/>
+          </a:effectRef>
+          <a:fontRef idx="minor">
+            <a:schemeClr val="lt1"/>
+          </a:fontRef>
+        </p:style>
+        <p:txBody>
+          <a:bodyPr rtlCol="0" anchor="ctr"/>
+          <a:lstStyle/>
+          <a:p>
+            <a:pPr algn="ctr"/>
+          </a:p>
+        </p:txBody>
+      </p:sp>
+      <p:sp>
+        <p:nvSpPr>
+          <p:cNvPr id="3" name="TextBox 2"/>
+          <p:cNvSpPr txBox="1"/>
+          <p:nvPr/>
+        </p:nvSpPr>
+        <p:spPr>
+          <a:xfrm>
+            <a:off x="360000" y="144000"/>
+            <a:ext cx="10800000" cy="360000"/>
+          </a:xfrm>
+          <a:prstGeom prst="rect">
+            <a:avLst/>
+          </a:prstGeom>
+          <a:noFill/>
+        </p:spPr>
+        <p:txBody>
+          <a:bodyPr wrap="square">
+            <a:spAutoFit/>
+          </a:bodyPr>
+          <a:lstStyle/>
+          <a:p>
+            <a:r>
+              <a:rPr sz="2400" b="1">
+                <a:solidFill>
+                  <a:srgbClr val="1F3A68"/>
+                </a:solidFill>
+                <a:ea typeface="Malgun Gothic"/>
+                <a:latin typeface="Malgun Gothic"/>
+              </a:rPr>
+              <a:t>17. 한계와 향후 계획</a:t>
+            </a:r>
+          </a:p>
+        </p:txBody>
+      </p:sp>
+      <p:sp>
+        <p:nvSpPr>
+          <p:cNvPr id="4" name="TextBox 3"/>
+          <p:cNvSpPr txBox="1"/>
+          <p:nvPr/>
+        </p:nvSpPr>
+        <p:spPr>
+          <a:xfrm>
+            <a:off x="360000" y="503999"/>
+            <a:ext cx="10800000" cy="288000"/>
+          </a:xfrm>
+          <a:prstGeom prst="rect">
+            <a:avLst/>
+          </a:prstGeom>
+          <a:noFill/>
+        </p:spPr>
+        <p:txBody>
+          <a:bodyPr wrap="square">
+            <a:spAutoFit/>
+          </a:bodyPr>
+          <a:lstStyle/>
+          <a:p>
+            <a:r>
+              <a:rPr sz="1200" b="0">
+                <a:solidFill>
+                  <a:srgbClr val="555555"/>
+                </a:solidFill>
+                <a:ea typeface="Malgun Gothic"/>
+                <a:latin typeface="Malgun Gothic"/>
+              </a:rPr>
+              <a:t>Step 3-B/3-C 일부 진행 / 잔여는 본 논문 확장</a:t>
+            </a:r>
+          </a:p>
+        </p:txBody>
+      </p:sp>
+      <p:sp>
+        <p:nvSpPr>
+          <p:cNvPr id="5" name="Rectangle 4"/>
+          <p:cNvSpPr/>
+          <p:nvPr/>
+        </p:nvSpPr>
+        <p:spPr>
+          <a:xfrm>
+            <a:off x="360000" y="864000"/>
+            <a:ext cx="11340000" cy="18000"/>
+          </a:xfrm>
+          <a:prstGeom prst="rect">
+            <a:avLst/>
+          </a:prstGeom>
+          <a:solidFill>
+            <a:srgbClr val="CCCCCC"/>
+          </a:solidFill>
+          <a:ln>
+            <a:noFill/>
+          </a:ln>
+        </p:spPr>
+        <p:style>
+          <a:lnRef idx="1">
+            <a:schemeClr val="accent1"/>
+          </a:lnRef>
+          <a:fillRef idx="3">
+            <a:schemeClr val="accent1"/>
+          </a:fillRef>
+          <a:effectRef idx="2">
+            <a:schemeClr val="accent1"/>
+          </a:effectRef>
+          <a:fontRef idx="minor">
+            <a:schemeClr val="lt1"/>
+          </a:fontRef>
+        </p:style>
+        <p:txBody>
+          <a:bodyPr rtlCol="0" anchor="ctr"/>
+          <a:lstStyle/>
+          <a:p>
+            <a:pPr algn="ctr"/>
+          </a:p>
+        </p:txBody>
+      </p:sp>
+      <p:sp>
+        <p:nvSpPr>
+          <p:cNvPr id="6" name="TextBox 5"/>
+          <p:cNvSpPr txBox="1"/>
+          <p:nvPr/>
+        </p:nvSpPr>
+        <p:spPr>
+          <a:xfrm>
+            <a:off x="360000" y="1080000"/>
+            <a:ext cx="5400000" cy="360000"/>
+          </a:xfrm>
+          <a:prstGeom prst="rect">
+            <a:avLst/>
+          </a:prstGeom>
+          <a:noFill/>
+        </p:spPr>
+        <p:txBody>
+          <a:bodyPr wrap="square">
+            <a:spAutoFit/>
+          </a:bodyPr>
+          <a:lstStyle/>
+          <a:p>
+            <a:r>
+              <a:rPr sz="1600" b="1">
+                <a:solidFill>
+                  <a:srgbClr val="C44E52"/>
+                </a:solidFill>
+                <a:ea typeface="Malgun Gothic"/>
+                <a:latin typeface="Malgun Gothic"/>
+              </a:rPr>
+              <a:t>현재 한계 / 진행 중</a:t>
+            </a:r>
+          </a:p>
+        </p:txBody>
+      </p:sp>
+      <p:sp>
+        <p:nvSpPr>
+          <p:cNvPr id="7" name="TextBox 6"/>
+          <p:cNvSpPr txBox="1"/>
+          <p:nvPr/>
+        </p:nvSpPr>
+        <p:spPr>
+          <a:xfrm>
+            <a:off x="540000" y="1440000"/>
+            <a:ext cx="5400000" cy="4680000"/>
+          </a:xfrm>
+          <a:prstGeom prst="rect">
+            <a:avLst/>
+          </a:prstGeom>
+          <a:noFill/>
+        </p:spPr>
+        <p:txBody>
+          <a:bodyPr wrap="square">
+            <a:spAutoFit/>
+          </a:bodyPr>
+          <a:lstStyle/>
+          <a:p>
+            <a:pPr algn="l"/>
+            <a:r>
+              <a:rPr sz="1300" b="0">
+                <a:ea typeface="Malgun Gothic"/>
+                <a:latin typeface="Malgun Gothic"/>
+              </a:rPr>
+              <a:t>•  Fusion 평가 표본 30명 — 100명+ 확장 검토</a:t>
+            </a:r>
+          </a:p>
+          <a:p>
+            <a:pPr algn="l"/>
+            <a:r>
+              <a:rPr sz="1300" b="0">
+                <a:ea typeface="Malgun Gothic"/>
+                <a:latin typeface="Malgun Gothic"/>
+              </a:rPr>
+              <a:t>•  Gemini judge cross-validation 미완 (503 과부하)</a:t>
+            </a:r>
+          </a:p>
+          <a:p>
+            <a:pPr algn="l"/>
+            <a:r>
+              <a:rPr sz="1300" b="0">
+                <a:ea typeface="Malgun Gothic"/>
+                <a:latin typeface="Malgun Gothic"/>
+              </a:rPr>
+              <a:t>•  인간평가 (Plausibility) 미수행 — IRB 절차 필요</a:t>
+            </a:r>
+          </a:p>
+          <a:p>
+            <a:pPr algn="l"/>
+            <a:r>
+              <a:rPr sz="1300" b="0">
+                <a:ea typeface="Malgun Gothic"/>
+                <a:latin typeface="Malgun Gothic"/>
+              </a:rPr>
+              <a:t>•  보조 테이블 2/6개 활용 (Step 3-B) — 4개 잔여</a:t>
+            </a:r>
+          </a:p>
+          <a:p>
+            <a:pPr algn="l"/>
+            <a:r>
+              <a:rPr sz="1300" b="0">
+                <a:ea typeface="Malgun Gothic"/>
+                <a:latin typeface="Malgun Gothic"/>
+              </a:rPr>
+              <a:t>•  Bureau의 SHAP 미진입 — EXT_SOURCE 응축 가설 검증 필요</a:t>
+            </a:r>
+          </a:p>
+          <a:p>
+            <a:pPr algn="l"/>
+            <a:r>
+              <a:rPr sz="1300" b="0">
+                <a:ea typeface="Malgun Gothic"/>
+                <a:latin typeface="Malgun Gothic"/>
+              </a:rPr>
+              <a:t>•  TabNet-only 컨텍스트 ablation 미수행 (3-way)</a:t>
+            </a:r>
+          </a:p>
+          <a:p>
+            <a:pPr algn="l"/>
+            <a:r>
+              <a:rPr sz="1300" b="0">
+                <a:ea typeface="Malgun Gothic"/>
+                <a:latin typeface="Malgun Gothic"/>
+              </a:rPr>
+              <a:t>•  Fairness-aware 학습 미수행</a:t>
+            </a:r>
+          </a:p>
+        </p:txBody>
+      </p:sp>
+      <p:sp>
+        <p:nvSpPr>
+          <p:cNvPr id="8" name="TextBox 7"/>
+          <p:cNvSpPr txBox="1"/>
+          <p:nvPr/>
+        </p:nvSpPr>
+        <p:spPr>
+          <a:xfrm>
+            <a:off x="6120000" y="1080000"/>
+            <a:ext cx="5400000" cy="360000"/>
+          </a:xfrm>
+          <a:prstGeom prst="rect">
+            <a:avLst/>
+          </a:prstGeom>
+          <a:noFill/>
+        </p:spPr>
+        <p:txBody>
+          <a:bodyPr wrap="square">
+            <a:spAutoFit/>
+          </a:bodyPr>
+          <a:lstStyle/>
+          <a:p>
+            <a:r>
+              <a:rPr sz="1600" b="1">
+                <a:solidFill>
+                  <a:srgbClr val="55A868"/>
+                </a:solidFill>
+                <a:ea typeface="Malgun Gothic"/>
+                <a:latin typeface="Malgun Gothic"/>
+              </a:rPr>
+              <a:t>향후 계획</a:t>
+            </a:r>
+          </a:p>
+        </p:txBody>
+      </p:sp>
+      <p:sp>
+        <p:nvSpPr>
+          <p:cNvPr id="9" name="TextBox 8"/>
+          <p:cNvSpPr txBox="1"/>
+          <p:nvPr/>
+        </p:nvSpPr>
+        <p:spPr>
+          <a:xfrm>
+            <a:off x="6300000" y="1440000"/>
+            <a:ext cx="5400000" cy="4680000"/>
+          </a:xfrm>
+          <a:prstGeom prst="rect">
+            <a:avLst/>
+          </a:prstGeom>
+          <a:noFill/>
+        </p:spPr>
+        <p:txBody>
+          <a:bodyPr wrap="square">
+            <a:spAutoFit/>
+          </a:bodyPr>
+          <a:lstStyle/>
+          <a:p>
+            <a:pPr algn="l"/>
+            <a:r>
+              <a:rPr sz="1300" b="0">
+                <a:ea typeface="Malgun Gothic"/>
+                <a:latin typeface="Malgun Gothic"/>
+              </a:rPr>
+              <a:t>•  인간 평가 (Plausibility) — IRB + 5점 척도, Cohen's κ</a:t>
+            </a:r>
+          </a:p>
+          <a:p>
+            <a:pPr algn="l"/>
+            <a:r>
+              <a:rPr sz="1300" b="0">
+                <a:ea typeface="Malgun Gothic"/>
+                <a:latin typeface="Malgun Gothic"/>
+              </a:rPr>
+              <a:t>•  Gemini judge로 양방향 G-Eval cross-validation</a:t>
+            </a:r>
+          </a:p>
+          <a:p>
+            <a:pPr algn="l"/>
+            <a:r>
+              <a:rPr sz="1300" b="0">
+                <a:ea typeface="Malgun Gothic"/>
+                <a:latin typeface="Malgun Gothic"/>
+              </a:rPr>
+              <a:t>•  Fusion 표본 100명 확장 + counterfactual 결합</a:t>
+            </a:r>
+          </a:p>
+          <a:p>
+            <a:pPr algn="l"/>
+            <a:r>
+              <a:rPr sz="1300" b="0">
+                <a:ea typeface="Malgun Gothic"/>
+                <a:latin typeface="Malgun Gothic"/>
+              </a:rPr>
+              <a:t>•  3-way ablation: SHAP-only / Attn-only / Fusion</a:t>
+            </a:r>
+          </a:p>
+          <a:p>
+            <a:pPr algn="l"/>
+            <a:r>
+              <a:rPr sz="1300" b="0">
+                <a:ea typeface="Malgun Gothic"/>
+                <a:latin typeface="Malgun Gothic"/>
+              </a:rPr>
+              <a:t>•  잔여 보조 테이블 4개로 AUROC 0.78+</a:t>
+            </a:r>
+          </a:p>
+          <a:p>
+            <a:pPr algn="l"/>
+            <a:r>
+              <a:rPr sz="1300" b="0">
+                <a:ea typeface="Malgun Gothic"/>
+                <a:latin typeface="Malgun Gothic"/>
+              </a:rPr>
+              <a:t>•  Fairness-aware 학습 (Reweighing, Adversarial)</a:t>
+            </a:r>
+          </a:p>
+          <a:p>
+            <a:pPr algn="l"/>
+            <a:r>
+              <a:rPr sz="1300" b="0">
+                <a:ea typeface="Malgun Gothic"/>
+                <a:latin typeface="Malgun Gothic"/>
+              </a:rPr>
+              <a:t>•  FT-Transformer 비교 모델 추가</a:t>
+            </a:r>
+          </a:p>
+        </p:txBody>
+      </p:sp>
+    </p:spTree>
+  </p:cSld>
+  <p:clrMapOvr>
+    <a:masterClrMapping/>
+  </p:clrMapOvr>
+</p:sld>
+</file>
+
+<file path=ppt/slides/slide19.xml><?xml version="1.0" encoding="utf-8"?>
 <p:sld xmlns:a="http://schemas.openxmlformats.org/drawingml/2006/main" xmlns:p="http://schemas.openxmlformats.org/presentationml/2006/main" xmlns:r="http://schemas.openxmlformats.org/officeDocument/2006/relationships">
   <p:cSld>
     <p:spTree>

--- a/paper/midterm_slides.pptx
+++ b/paper/midterm_slides.pptx
@@ -24,6 +24,7 @@
     <p:sldId id="272" r:id="rId23"/>
     <p:sldId id="273" r:id="rId24"/>
     <p:sldId id="274" r:id="rId25"/>
+    <p:sldId id="275" r:id="rId26"/>
   </p:sldIdLst>
   <p:sldSz cx="12191695" cy="6858000" type="screen4x3"/>
   <p:notesSz cx="6858000" cy="9144000"/>
@@ -8496,7 +8497,7 @@
                 <a:ea typeface="Malgun Gothic"/>
                 <a:latin typeface="Malgun Gothic"/>
               </a:rPr>
-              <a:t>16. 종합 — 본 연구의 가치 4가지</a:t>
+              <a:t>16. Step 3-C-2-f — Cross-Judge G-Eval (보너스)</a:t>
             </a:r>
           </a:p>
         </p:txBody>
@@ -8531,7 +8532,7 @@
                 <a:ea typeface="Malgun Gothic"/>
                 <a:latin typeface="Malgun Gothic"/>
               </a:rPr>
-              <a:t>Step 1 + 2-A + 3-B + 3-C-1 + 3-C-2 마무리</a:t>
+              <a:t>Claude judge + Gemini judge 양방향으로 fusion 효과 검증</a:t>
             </a:r>
           </a:p>
         </p:txBody>
@@ -8579,301 +8580,40 @@
           </a:p>
         </p:txBody>
       </p:sp>
-      <p:sp>
-        <p:nvSpPr>
-          <p:cNvPr id="6" name="Rounded Rectangle 5"/>
-          <p:cNvSpPr/>
-          <p:nvPr/>
-        </p:nvSpPr>
-        <p:spPr>
-          <a:xfrm>
-            <a:off x="677849" y="1260000"/>
-            <a:ext cx="2520000" cy="3060000"/>
-          </a:xfrm>
-          <a:prstGeom prst="roundRect">
-            <a:avLst/>
-          </a:prstGeom>
-          <a:solidFill>
-            <a:srgbClr val="4C72B0"/>
-          </a:solidFill>
-          <a:ln>
-            <a:noFill/>
-          </a:ln>
-        </p:spPr>
-        <p:style>
-          <a:lnRef idx="1">
-            <a:schemeClr val="accent1"/>
-          </a:lnRef>
-          <a:fillRef idx="3">
-            <a:schemeClr val="accent1"/>
-          </a:fillRef>
-          <a:effectRef idx="2">
-            <a:schemeClr val="accent1"/>
-          </a:effectRef>
-          <a:fontRef idx="minor">
-            <a:schemeClr val="lt1"/>
-          </a:fontRef>
-        </p:style>
-        <p:txBody>
-          <a:bodyPr rtlCol="0" anchor="ctr" lIns="216000" rIns="216000" tIns="216000"/>
-          <a:lstStyle/>
-          <a:p>
-            <a:pPr algn="ctr"/>
-            <a:r>
-              <a:rPr sz="2200" b="1">
-                <a:solidFill>
-                  <a:srgbClr val="FFFFFF"/>
-                </a:solidFill>
-                <a:ea typeface="Malgun Gothic"/>
-                <a:latin typeface="Malgun Gothic"/>
-              </a:rPr>
-              <a:t>예측 성능</a:t>
-            </a:r>
-          </a:p>
-          <a:p>
-            <a:pPr algn="ctr"/>
-            <a:r>
-              <a:rPr sz="1200" b="0">
-                <a:solidFill>
-                  <a:srgbClr val="FFFFFF"/>
-                </a:solidFill>
-                <a:ea typeface="Malgun Gothic"/>
-                <a:latin typeface="Malgun Gothic"/>
-              </a:rPr>
-              <a:t>
-XGBoost 0.7587 → 0.7755
-(Step 3-B aux 추가, +2.22%)
-TabNet 0.7518 — 어텐션
-해석성으로 융합 컨텍스트에 통합</a:t>
-            </a:r>
-          </a:p>
-        </p:txBody>
-      </p:sp>
-      <p:sp>
-        <p:nvSpPr>
-          <p:cNvPr id="7" name="Rounded Rectangle 6"/>
-          <p:cNvSpPr/>
-          <p:nvPr/>
-        </p:nvSpPr>
-        <p:spPr>
-          <a:xfrm>
-            <a:off x="3449848" y="1260000"/>
-            <a:ext cx="2520000" cy="3060000"/>
-          </a:xfrm>
-          <a:prstGeom prst="roundRect">
-            <a:avLst/>
-          </a:prstGeom>
-          <a:solidFill>
-            <a:srgbClr val="55A868"/>
-          </a:solidFill>
-          <a:ln>
-            <a:noFill/>
-          </a:ln>
-        </p:spPr>
-        <p:style>
-          <a:lnRef idx="1">
-            <a:schemeClr val="accent1"/>
-          </a:lnRef>
-          <a:fillRef idx="3">
-            <a:schemeClr val="accent1"/>
-          </a:fillRef>
-          <a:effectRef idx="2">
-            <a:schemeClr val="accent1"/>
-          </a:effectRef>
-          <a:fontRef idx="minor">
-            <a:schemeClr val="lt1"/>
-          </a:fontRef>
-        </p:style>
-        <p:txBody>
-          <a:bodyPr rtlCol="0" anchor="ctr" lIns="216000" rIns="216000" tIns="216000"/>
-          <a:lstStyle/>
-          <a:p>
-            <a:pPr algn="ctr"/>
-            <a:r>
-              <a:rPr sz="2200" b="1">
-                <a:solidFill>
-                  <a:srgbClr val="FFFFFF"/>
-                </a:solidFill>
-                <a:ea typeface="Malgun Gothic"/>
-                <a:latin typeface="Malgun Gothic"/>
-              </a:rPr>
-              <a:t>해석 융합</a:t>
-            </a:r>
-          </a:p>
-          <a:p>
-            <a:pPr algn="ctr"/>
-            <a:r>
-              <a:rPr sz="1200" b="0">
-                <a:solidFill>
-                  <a:srgbClr val="FFFFFF"/>
-                </a:solidFill>
-                <a:ea typeface="Malgun Gothic"/>
-                <a:latin typeface="Malgun Gothic"/>
-              </a:rPr>
-              <a:t>
-ρ=0.117 부분 일관
-+ instance-level
-동의 22% (3+) / 0% (4+)
-agreement-aware 컨텍스트로
-LLM에 의미 라벨 전달</a:t>
-            </a:r>
-          </a:p>
-        </p:txBody>
-      </p:sp>
-      <p:sp>
-        <p:nvSpPr>
-          <p:cNvPr id="8" name="Rounded Rectangle 7"/>
-          <p:cNvSpPr/>
-          <p:nvPr/>
-        </p:nvSpPr>
-        <p:spPr>
-          <a:xfrm>
-            <a:off x="6221847" y="1260000"/>
-            <a:ext cx="2520000" cy="3060000"/>
-          </a:xfrm>
-          <a:prstGeom prst="roundRect">
-            <a:avLst/>
-          </a:prstGeom>
-          <a:solidFill>
-            <a:srgbClr val="C44E52"/>
-          </a:solidFill>
-          <a:ln>
-            <a:noFill/>
-          </a:ln>
-        </p:spPr>
-        <p:style>
-          <a:lnRef idx="1">
-            <a:schemeClr val="accent1"/>
-          </a:lnRef>
-          <a:fillRef idx="3">
-            <a:schemeClr val="accent1"/>
-          </a:fillRef>
-          <a:effectRef idx="2">
-            <a:schemeClr val="accent1"/>
-          </a:effectRef>
-          <a:fontRef idx="minor">
-            <a:schemeClr val="lt1"/>
-          </a:fontRef>
-        </p:style>
-        <p:txBody>
-          <a:bodyPr rtlCol="0" anchor="ctr" lIns="216000" rIns="216000" tIns="216000"/>
-          <a:lstStyle/>
-          <a:p>
-            <a:pPr algn="ctr"/>
-            <a:r>
-              <a:rPr sz="2200" b="1">
-                <a:solidFill>
-                  <a:srgbClr val="FFFFFF"/>
-                </a:solidFill>
-                <a:ea typeface="Malgun Gothic"/>
-                <a:latin typeface="Malgun Gothic"/>
-              </a:rPr>
-              <a:t>환각 차단</a:t>
-            </a:r>
-          </a:p>
-          <a:p>
-            <a:pPr algn="ctr"/>
-            <a:r>
-              <a:rPr sz="1200" b="0">
-                <a:solidFill>
-                  <a:srgbClr val="FFFFFF"/>
-                </a:solidFill>
-                <a:ea typeface="Malgun Gothic"/>
-                <a:latin typeface="Malgun Gothic"/>
-              </a:rPr>
-              <a:t>
-Halluc 0/100 (Step 1/2-A)
-→ 0/30 (3-C-1 fusion)
-Baseline 45.5% vs
-XAI-RAG 0% (Step 1)
-NLI contradiction
-−0.14~−0.18 (3-C-2)</a:t>
-            </a:r>
-          </a:p>
-        </p:txBody>
-      </p:sp>
-      <p:sp>
-        <p:nvSpPr>
-          <p:cNvPr id="9" name="Rounded Rectangle 8"/>
-          <p:cNvSpPr/>
-          <p:nvPr/>
-        </p:nvSpPr>
-        <p:spPr>
-          <a:xfrm>
-            <a:off x="8993846" y="1260000"/>
-            <a:ext cx="2520000" cy="3060000"/>
-          </a:xfrm>
-          <a:prstGeom prst="roundRect">
-            <a:avLst/>
-          </a:prstGeom>
-          <a:solidFill>
-            <a:srgbClr val="DD8552"/>
-          </a:solidFill>
-          <a:ln>
-            <a:noFill/>
-          </a:ln>
-        </p:spPr>
-        <p:style>
-          <a:lnRef idx="1">
-            <a:schemeClr val="accent1"/>
-          </a:lnRef>
-          <a:fillRef idx="3">
-            <a:schemeClr val="accent1"/>
-          </a:fillRef>
-          <a:effectRef idx="2">
-            <a:schemeClr val="accent1"/>
-          </a:effectRef>
-          <a:fontRef idx="minor">
-            <a:schemeClr val="lt1"/>
-          </a:fontRef>
-        </p:style>
-        <p:txBody>
-          <a:bodyPr rtlCol="0" anchor="ctr" lIns="216000" rIns="216000" tIns="216000"/>
-          <a:lstStyle/>
-          <a:p>
-            <a:pPr algn="ctr"/>
-            <a:r>
-              <a:rPr sz="2200" b="1">
-                <a:solidFill>
-                  <a:srgbClr val="FFFFFF"/>
-                </a:solidFill>
-                <a:ea typeface="Malgun Gothic"/>
-                <a:latin typeface="Malgun Gothic"/>
-              </a:rPr>
-              <a:t>완결성·충실성</a:t>
-            </a:r>
-          </a:p>
-          <a:p>
-            <a:pPr algn="ctr"/>
-            <a:r>
-              <a:rPr sz="1200" b="0">
-                <a:solidFill>
-                  <a:srgbClr val="FFFFFF"/>
-                </a:solidFill>
-                <a:ea typeface="Malgun Gothic"/>
-                <a:latin typeface="Malgun Gothic"/>
-              </a:rPr>
-              <a:t>
-G-Eval Completeness
-+0.67~+0.80 (3-C-1)
-NLI Entailment
-+0.12~+0.21 (3-C-2)
-→ 다층 평가에서
-일관된 향상</a:t>
-            </a:r>
-          </a:p>
-        </p:txBody>
-      </p:sp>
-      <p:sp>
-        <p:nvSpPr>
-          <p:cNvPr id="10" name="TextBox 9"/>
+      <p:pic>
+        <p:nvPicPr>
+          <p:cNvPr id="6" name="Picture 5" descr="32_cross_judge_geval.png"/>
+          <p:cNvPicPr>
+            <a:picLocks noChangeAspect="1"/>
+          </p:cNvPicPr>
+          <p:nvPr/>
+        </p:nvPicPr>
+        <p:blipFill>
+          <a:blip r:embed="rId2"/>
+          <a:stretch>
+            <a:fillRect/>
+          </a:stretch>
+        </p:blipFill>
+        <p:spPr>
+          <a:xfrm>
+            <a:off x="216000" y="1080000"/>
+            <a:ext cx="6840000" cy="4680000"/>
+          </a:xfrm>
+          <a:prstGeom prst="rect">
+            <a:avLst/>
+          </a:prstGeom>
+        </p:spPr>
+      </p:pic>
+      <p:sp>
+        <p:nvSpPr>
+          <p:cNvPr id="7" name="TextBox 6"/>
           <p:cNvSpPr txBox="1"/>
           <p:nvPr/>
         </p:nvSpPr>
         <p:spPr>
           <a:xfrm>
-            <a:off x="360000" y="4680000"/>
-            <a:ext cx="11160000" cy="540000"/>
+            <a:off x="7380000" y="1080000"/>
+            <a:ext cx="4680000" cy="360000"/>
           </a:xfrm>
           <a:prstGeom prst="rect">
             <a:avLst/>
@@ -8886,30 +8626,29 @@
           </a:bodyPr>
           <a:lstStyle/>
           <a:p>
-            <a:pPr algn="ctr"/>
-            <a:r>
-              <a:rPr sz="1600" b="1">
+            <a:r>
+              <a:rPr sz="1400" b="1">
                 <a:solidFill>
                   <a:srgbClr val="1F3A68"/>
                 </a:solidFill>
                 <a:ea typeface="Malgun Gothic"/>
                 <a:latin typeface="Malgun Gothic"/>
               </a:rPr>
-              <a:t>한 줄 메시지</a:t>
-            </a:r>
-          </a:p>
-        </p:txBody>
-      </p:sp>
-      <p:sp>
-        <p:nvSpPr>
-          <p:cNvPr id="11" name="TextBox 10"/>
+              <a:t>동기 — 단일 judge의 위험</a:t>
+            </a:r>
+          </a:p>
+        </p:txBody>
+      </p:sp>
+      <p:sp>
+        <p:nvSpPr>
+          <p:cNvPr id="8" name="TextBox 7"/>
           <p:cNvSpPr txBox="1"/>
           <p:nvPr/>
         </p:nvSpPr>
         <p:spPr>
           <a:xfrm>
-            <a:off x="360000" y="5220000"/>
-            <a:ext cx="11160000" cy="720000"/>
+            <a:off x="7452000" y="1440000"/>
+            <a:ext cx="4680000" cy="900000"/>
           </a:xfrm>
           <a:prstGeom prst="rect">
             <a:avLst/>
@@ -8922,17 +8661,178 @@
           </a:bodyPr>
           <a:lstStyle/>
           <a:p>
-            <a:pPr algn="ctr"/>
-            <a:r>
-              <a:rPr sz="1800" b="1">
-                <a:solidFill>
-                  <a:srgbClr val="222222"/>
-                </a:solidFill>
-                <a:ea typeface="Malgun Gothic"/>
-                <a:latin typeface="Malgun Gothic"/>
-              </a:rPr>
-              <a:t>"SHAP 컨텍스트를 LLM의 검색된 근거로 재정의하면,
-LLM 종속성 없이 환각이 0이 되는 자연어 설명을 생성할 수 있다."</a:t>
+            <a:pPr algn="l"/>
+            <a:r>
+              <a:rPr sz="1100" b="0">
+                <a:ea typeface="Malgun Gothic"/>
+                <a:latin typeface="Malgun Gothic"/>
+              </a:rPr>
+              <a:t>•  Claude judge 단독 → self-bias 또는 평가 종속 위험</a:t>
+            </a:r>
+          </a:p>
+          <a:p>
+            <a:pPr algn="l"/>
+            <a:r>
+              <a:rPr sz="1100" b="0">
+                <a:ea typeface="Malgun Gothic"/>
+                <a:latin typeface="Malgun Gothic"/>
+              </a:rPr>
+              <a:t>•  Step 2-A의 Cross-LLM 패턴을 fusion에도 적용</a:t>
+            </a:r>
+          </a:p>
+        </p:txBody>
+      </p:sp>
+      <p:sp>
+        <p:nvSpPr>
+          <p:cNvPr id="9" name="TextBox 8"/>
+          <p:cNvSpPr txBox="1"/>
+          <p:nvPr/>
+        </p:nvSpPr>
+        <p:spPr>
+          <a:xfrm>
+            <a:off x="7380000" y="2520000"/>
+            <a:ext cx="4680000" cy="360000"/>
+          </a:xfrm>
+          <a:prstGeom prst="rect">
+            <a:avLst/>
+          </a:prstGeom>
+          <a:noFill/>
+        </p:spPr>
+        <p:txBody>
+          <a:bodyPr wrap="square">
+            <a:spAutoFit/>
+          </a:bodyPr>
+          <a:lstStyle/>
+          <a:p>
+            <a:r>
+              <a:rPr sz="1400" b="1">
+                <a:solidFill>
+                  <a:srgbClr val="C44E52"/>
+                </a:solidFill>
+                <a:ea typeface="Malgun Gothic"/>
+                <a:latin typeface="Malgun Gothic"/>
+              </a:rPr>
+              <a:t>결과 (Δ = fusion - shaponly)</a:t>
+            </a:r>
+          </a:p>
+        </p:txBody>
+      </p:sp>
+      <p:sp>
+        <p:nvSpPr>
+          <p:cNvPr id="10" name="TextBox 9"/>
+          <p:cNvSpPr txBox="1"/>
+          <p:nvPr/>
+        </p:nvSpPr>
+        <p:spPr>
+          <a:xfrm>
+            <a:off x="7452000" y="2880000"/>
+            <a:ext cx="4680000" cy="1980000"/>
+          </a:xfrm>
+          <a:prstGeom prst="rect">
+            <a:avLst/>
+          </a:prstGeom>
+          <a:noFill/>
+        </p:spPr>
+        <p:txBody>
+          <a:bodyPr wrap="square">
+            <a:spAutoFit/>
+          </a:bodyPr>
+          <a:lstStyle/>
+          <a:p>
+            <a:pPr algn="l"/>
+            <a:r>
+              <a:rPr sz="1100" b="0">
+                <a:ea typeface="Malgun Gothic"/>
+                <a:latin typeface="Malgun Gothic"/>
+              </a:rPr>
+              <a:t>•  Completeness 양 judge 큰 향상:</a:t>
+            </a:r>
+          </a:p>
+          <a:p>
+            <a:pPr algn="l"/>
+            <a:r>
+              <a:rPr sz="1100" b="0">
+                <a:ea typeface="Malgun Gothic"/>
+                <a:latin typeface="Malgun Gothic"/>
+              </a:rPr>
+              <a:t>•    Claude judge +0.67/+0.80</a:t>
+            </a:r>
+          </a:p>
+          <a:p>
+            <a:pPr algn="l"/>
+            <a:r>
+              <a:rPr sz="1100" b="0">
+                <a:ea typeface="Malgun Gothic"/>
+                <a:latin typeface="Malgun Gothic"/>
+              </a:rPr>
+              <a:t>•    Gemini judge +0.90/+1.10</a:t>
+            </a:r>
+          </a:p>
+          <a:p>
+            <a:pPr algn="l"/>
+            <a:r>
+              <a:rPr sz="1100" b="0">
+                <a:ea typeface="Malgun Gothic"/>
+                <a:latin typeface="Malgun Gothic"/>
+              </a:rPr>
+              <a:t>•  Sensitive 5.0/5.0 양 judge 만점 ✅</a:t>
+            </a:r>
+          </a:p>
+          <a:p>
+            <a:pPr algn="l"/>
+            <a:r>
+              <a:rPr sz="1100" b="0">
+                <a:ea typeface="Malgun Gothic"/>
+                <a:latin typeface="Malgun Gothic"/>
+              </a:rPr>
+              <a:t>•  Gemini target Factual: Claude judge −0.13 vs Gemini judge +0.47</a:t>
+            </a:r>
+          </a:p>
+          <a:p>
+            <a:pPr algn="l"/>
+            <a:r>
+              <a:rPr sz="1100" b="0">
+                <a:ea typeface="Malgun Gothic"/>
+                <a:latin typeface="Malgun Gothic"/>
+              </a:rPr>
+              <a:t>•  → Cross-judge 없이는 잘못된 결론 위험</a:t>
+            </a:r>
+          </a:p>
+        </p:txBody>
+      </p:sp>
+      <p:sp>
+        <p:nvSpPr>
+          <p:cNvPr id="11" name="TextBox 10"/>
+          <p:cNvSpPr txBox="1"/>
+          <p:nvPr/>
+        </p:nvSpPr>
+        <p:spPr>
+          <a:xfrm>
+            <a:off x="7380000" y="4968000"/>
+            <a:ext cx="4680000" cy="1080000"/>
+          </a:xfrm>
+          <a:prstGeom prst="rect">
+            <a:avLst/>
+          </a:prstGeom>
+          <a:noFill/>
+        </p:spPr>
+        <p:txBody>
+          <a:bodyPr wrap="square">
+            <a:spAutoFit/>
+          </a:bodyPr>
+          <a:lstStyle/>
+          <a:p>
+            <a:r>
+              <a:rPr sz="1100" b="0">
+                <a:solidFill>
+                  <a:srgbClr val="55A868"/>
+                </a:solidFill>
+                <a:ea typeface="Malgun Gothic"/>
+                <a:latin typeface="Malgun Gothic"/>
+              </a:rPr>
+              <a:t>★ Cross-LLM judge로 fusion 효과 강건성 확정
+★ Future work "Gemini judge cross-validation" 항목 해소
+★ 평가 객관성 = NLI(자동) + Cross-LLM judge</a:t>
             </a:r>
           </a:p>
         </p:txBody>
@@ -9028,7 +8928,7 @@
                 <a:ea typeface="Malgun Gothic"/>
                 <a:latin typeface="Malgun Gothic"/>
               </a:rPr>
-              <a:t>17. 한계와 향후 계획</a:t>
+              <a:t>17. 종합 — 본 연구의 가치 4가지</a:t>
             </a:r>
           </a:p>
         </p:txBody>
@@ -9063,7 +8963,7 @@
                 <a:ea typeface="Malgun Gothic"/>
                 <a:latin typeface="Malgun Gothic"/>
               </a:rPr>
-              <a:t>Step 3-B/3-C 일부 진행 / 잔여는 본 논문 확장</a:t>
+              <a:t>Step 1 + 2-A + 3-B + 3-C-1 + 3-C-2 + 3-C-2-f 마무리</a:t>
             </a:r>
           </a:p>
         </p:txBody>
@@ -9113,14 +9013,300 @@
       </p:sp>
       <p:sp>
         <p:nvSpPr>
-          <p:cNvPr id="6" name="TextBox 5"/>
+          <p:cNvPr id="6" name="Rounded Rectangle 5"/>
+          <p:cNvSpPr/>
+          <p:nvPr/>
+        </p:nvSpPr>
+        <p:spPr>
+          <a:xfrm>
+            <a:off x="677849" y="1260000"/>
+            <a:ext cx="2520000" cy="3060000"/>
+          </a:xfrm>
+          <a:prstGeom prst="roundRect">
+            <a:avLst/>
+          </a:prstGeom>
+          <a:solidFill>
+            <a:srgbClr val="4C72B0"/>
+          </a:solidFill>
+          <a:ln>
+            <a:noFill/>
+          </a:ln>
+        </p:spPr>
+        <p:style>
+          <a:lnRef idx="1">
+            <a:schemeClr val="accent1"/>
+          </a:lnRef>
+          <a:fillRef idx="3">
+            <a:schemeClr val="accent1"/>
+          </a:fillRef>
+          <a:effectRef idx="2">
+            <a:schemeClr val="accent1"/>
+          </a:effectRef>
+          <a:fontRef idx="minor">
+            <a:schemeClr val="lt1"/>
+          </a:fontRef>
+        </p:style>
+        <p:txBody>
+          <a:bodyPr rtlCol="0" anchor="ctr" lIns="216000" rIns="216000" tIns="216000"/>
+          <a:lstStyle/>
+          <a:p>
+            <a:pPr algn="ctr"/>
+            <a:r>
+              <a:rPr sz="2200" b="1">
+                <a:solidFill>
+                  <a:srgbClr val="FFFFFF"/>
+                </a:solidFill>
+                <a:ea typeface="Malgun Gothic"/>
+                <a:latin typeface="Malgun Gothic"/>
+              </a:rPr>
+              <a:t>예측 성능</a:t>
+            </a:r>
+          </a:p>
+          <a:p>
+            <a:pPr algn="ctr"/>
+            <a:r>
+              <a:rPr sz="1200" b="0">
+                <a:solidFill>
+                  <a:srgbClr val="FFFFFF"/>
+                </a:solidFill>
+                <a:ea typeface="Malgun Gothic"/>
+                <a:latin typeface="Malgun Gothic"/>
+              </a:rPr>
+              <a:t>
+XGBoost 0.7587 → 0.7755
+(Step 3-B aux 추가, +2.22%)
+TabNet 0.7518 — 어텐션
+해석성으로 융합 컨텍스트에 통합</a:t>
+            </a:r>
+          </a:p>
+        </p:txBody>
+      </p:sp>
+      <p:sp>
+        <p:nvSpPr>
+          <p:cNvPr id="7" name="Rounded Rectangle 6"/>
+          <p:cNvSpPr/>
+          <p:nvPr/>
+        </p:nvSpPr>
+        <p:spPr>
+          <a:xfrm>
+            <a:off x="3449848" y="1260000"/>
+            <a:ext cx="2520000" cy="3060000"/>
+          </a:xfrm>
+          <a:prstGeom prst="roundRect">
+            <a:avLst/>
+          </a:prstGeom>
+          <a:solidFill>
+            <a:srgbClr val="55A868"/>
+          </a:solidFill>
+          <a:ln>
+            <a:noFill/>
+          </a:ln>
+        </p:spPr>
+        <p:style>
+          <a:lnRef idx="1">
+            <a:schemeClr val="accent1"/>
+          </a:lnRef>
+          <a:fillRef idx="3">
+            <a:schemeClr val="accent1"/>
+          </a:fillRef>
+          <a:effectRef idx="2">
+            <a:schemeClr val="accent1"/>
+          </a:effectRef>
+          <a:fontRef idx="minor">
+            <a:schemeClr val="lt1"/>
+          </a:fontRef>
+        </p:style>
+        <p:txBody>
+          <a:bodyPr rtlCol="0" anchor="ctr" lIns="216000" rIns="216000" tIns="216000"/>
+          <a:lstStyle/>
+          <a:p>
+            <a:pPr algn="ctr"/>
+            <a:r>
+              <a:rPr sz="2200" b="1">
+                <a:solidFill>
+                  <a:srgbClr val="FFFFFF"/>
+                </a:solidFill>
+                <a:ea typeface="Malgun Gothic"/>
+                <a:latin typeface="Malgun Gothic"/>
+              </a:rPr>
+              <a:t>해석 융합</a:t>
+            </a:r>
+          </a:p>
+          <a:p>
+            <a:pPr algn="ctr"/>
+            <a:r>
+              <a:rPr sz="1200" b="0">
+                <a:solidFill>
+                  <a:srgbClr val="FFFFFF"/>
+                </a:solidFill>
+                <a:ea typeface="Malgun Gothic"/>
+                <a:latin typeface="Malgun Gothic"/>
+              </a:rPr>
+              <a:t>
+ρ=0.117 부분 일관
++ instance-level
+동의 22% (3+) / 0% (4+)
+agreement-aware 컨텍스트로
+LLM에 의미 라벨 전달</a:t>
+            </a:r>
+          </a:p>
+        </p:txBody>
+      </p:sp>
+      <p:sp>
+        <p:nvSpPr>
+          <p:cNvPr id="8" name="Rounded Rectangle 7"/>
+          <p:cNvSpPr/>
+          <p:nvPr/>
+        </p:nvSpPr>
+        <p:spPr>
+          <a:xfrm>
+            <a:off x="6221847" y="1260000"/>
+            <a:ext cx="2520000" cy="3060000"/>
+          </a:xfrm>
+          <a:prstGeom prst="roundRect">
+            <a:avLst/>
+          </a:prstGeom>
+          <a:solidFill>
+            <a:srgbClr val="C44E52"/>
+          </a:solidFill>
+          <a:ln>
+            <a:noFill/>
+          </a:ln>
+        </p:spPr>
+        <p:style>
+          <a:lnRef idx="1">
+            <a:schemeClr val="accent1"/>
+          </a:lnRef>
+          <a:fillRef idx="3">
+            <a:schemeClr val="accent1"/>
+          </a:fillRef>
+          <a:effectRef idx="2">
+            <a:schemeClr val="accent1"/>
+          </a:effectRef>
+          <a:fontRef idx="minor">
+            <a:schemeClr val="lt1"/>
+          </a:fontRef>
+        </p:style>
+        <p:txBody>
+          <a:bodyPr rtlCol="0" anchor="ctr" lIns="216000" rIns="216000" tIns="216000"/>
+          <a:lstStyle/>
+          <a:p>
+            <a:pPr algn="ctr"/>
+            <a:r>
+              <a:rPr sz="2200" b="1">
+                <a:solidFill>
+                  <a:srgbClr val="FFFFFF"/>
+                </a:solidFill>
+                <a:ea typeface="Malgun Gothic"/>
+                <a:latin typeface="Malgun Gothic"/>
+              </a:rPr>
+              <a:t>환각 차단</a:t>
+            </a:r>
+          </a:p>
+          <a:p>
+            <a:pPr algn="ctr"/>
+            <a:r>
+              <a:rPr sz="1200" b="0">
+                <a:solidFill>
+                  <a:srgbClr val="FFFFFF"/>
+                </a:solidFill>
+                <a:ea typeface="Malgun Gothic"/>
+                <a:latin typeface="Malgun Gothic"/>
+              </a:rPr>
+              <a:t>
+Halluc 0/100 (Step 1/2-A)
+→ 0/30 (3-C-1 fusion)
+Baseline 45.5% vs
+XAI-RAG 0% (Step 1)
+NLI contradiction
+−0.14~−0.18 (3-C-2)</a:t>
+            </a:r>
+          </a:p>
+        </p:txBody>
+      </p:sp>
+      <p:sp>
+        <p:nvSpPr>
+          <p:cNvPr id="9" name="Rounded Rectangle 8"/>
+          <p:cNvSpPr/>
+          <p:nvPr/>
+        </p:nvSpPr>
+        <p:spPr>
+          <a:xfrm>
+            <a:off x="8993846" y="1260000"/>
+            <a:ext cx="2520000" cy="3060000"/>
+          </a:xfrm>
+          <a:prstGeom prst="roundRect">
+            <a:avLst/>
+          </a:prstGeom>
+          <a:solidFill>
+            <a:srgbClr val="DD8552"/>
+          </a:solidFill>
+          <a:ln>
+            <a:noFill/>
+          </a:ln>
+        </p:spPr>
+        <p:style>
+          <a:lnRef idx="1">
+            <a:schemeClr val="accent1"/>
+          </a:lnRef>
+          <a:fillRef idx="3">
+            <a:schemeClr val="accent1"/>
+          </a:fillRef>
+          <a:effectRef idx="2">
+            <a:schemeClr val="accent1"/>
+          </a:effectRef>
+          <a:fontRef idx="minor">
+            <a:schemeClr val="lt1"/>
+          </a:fontRef>
+        </p:style>
+        <p:txBody>
+          <a:bodyPr rtlCol="0" anchor="ctr" lIns="216000" rIns="216000" tIns="216000"/>
+          <a:lstStyle/>
+          <a:p>
+            <a:pPr algn="ctr"/>
+            <a:r>
+              <a:rPr sz="2200" b="1">
+                <a:solidFill>
+                  <a:srgbClr val="FFFFFF"/>
+                </a:solidFill>
+                <a:ea typeface="Malgun Gothic"/>
+                <a:latin typeface="Malgun Gothic"/>
+              </a:rPr>
+              <a:t>완결성·충실성</a:t>
+            </a:r>
+          </a:p>
+          <a:p>
+            <a:pPr algn="ctr"/>
+            <a:r>
+              <a:rPr sz="1200" b="0">
+                <a:solidFill>
+                  <a:srgbClr val="FFFFFF"/>
+                </a:solidFill>
+                <a:ea typeface="Malgun Gothic"/>
+                <a:latin typeface="Malgun Gothic"/>
+              </a:rPr>
+              <a:t>
+G-Eval Completeness
+Claude judge +0.67~+0.80
+Gemini judge +0.90~+1.10
+NLI Entailment
++0.12~+0.21 (3-C-2)
+→ 다층·다judge에서
+일관된 향상</a:t>
+            </a:r>
+          </a:p>
+        </p:txBody>
+      </p:sp>
+      <p:sp>
+        <p:nvSpPr>
+          <p:cNvPr id="10" name="TextBox 9"/>
           <p:cNvSpPr txBox="1"/>
           <p:nvPr/>
         </p:nvSpPr>
         <p:spPr>
           <a:xfrm>
-            <a:off x="360000" y="1080000"/>
-            <a:ext cx="5400000" cy="360000"/>
+            <a:off x="360000" y="4680000"/>
+            <a:ext cx="11160000" cy="540000"/>
           </a:xfrm>
           <a:prstGeom prst="rect">
             <a:avLst/>
@@ -9133,29 +9319,30 @@
           </a:bodyPr>
           <a:lstStyle/>
           <a:p>
+            <a:pPr algn="ctr"/>
             <a:r>
               <a:rPr sz="1600" b="1">
                 <a:solidFill>
-                  <a:srgbClr val="C44E52"/>
-                </a:solidFill>
-                <a:ea typeface="Malgun Gothic"/>
-                <a:latin typeface="Malgun Gothic"/>
-              </a:rPr>
-              <a:t>현재 한계 / 진행 중</a:t>
-            </a:r>
-          </a:p>
-        </p:txBody>
-      </p:sp>
-      <p:sp>
-        <p:nvSpPr>
-          <p:cNvPr id="7" name="TextBox 6"/>
+                  <a:srgbClr val="1F3A68"/>
+                </a:solidFill>
+                <a:ea typeface="Malgun Gothic"/>
+                <a:latin typeface="Malgun Gothic"/>
+              </a:rPr>
+              <a:t>한 줄 메시지</a:t>
+            </a:r>
+          </a:p>
+        </p:txBody>
+      </p:sp>
+      <p:sp>
+        <p:nvSpPr>
+          <p:cNvPr id="11" name="TextBox 10"/>
           <p:cNvSpPr txBox="1"/>
           <p:nvPr/>
         </p:nvSpPr>
         <p:spPr>
           <a:xfrm>
-            <a:off x="540000" y="1440000"/>
-            <a:ext cx="5400000" cy="4680000"/>
+            <a:off x="360000" y="5220000"/>
+            <a:ext cx="11160000" cy="720000"/>
           </a:xfrm>
           <a:prstGeom prst="rect">
             <a:avLst/>
@@ -9168,201 +9355,17 @@
           </a:bodyPr>
           <a:lstStyle/>
           <a:p>
-            <a:pPr algn="l"/>
-            <a:r>
-              <a:rPr sz="1300" b="0">
-                <a:ea typeface="Malgun Gothic"/>
-                <a:latin typeface="Malgun Gothic"/>
-              </a:rPr>
-              <a:t>•  Fusion 평가 표본 30명 — 100명+ 확장 검토</a:t>
-            </a:r>
-          </a:p>
-          <a:p>
-            <a:pPr algn="l"/>
-            <a:r>
-              <a:rPr sz="1300" b="0">
-                <a:ea typeface="Malgun Gothic"/>
-                <a:latin typeface="Malgun Gothic"/>
-              </a:rPr>
-              <a:t>•  Gemini judge cross-validation 미완 (503 과부하)</a:t>
-            </a:r>
-          </a:p>
-          <a:p>
-            <a:pPr algn="l"/>
-            <a:r>
-              <a:rPr sz="1300" b="0">
-                <a:ea typeface="Malgun Gothic"/>
-                <a:latin typeface="Malgun Gothic"/>
-              </a:rPr>
-              <a:t>•  인간평가 (Plausibility) 미수행 — IRB 절차 필요</a:t>
-            </a:r>
-          </a:p>
-          <a:p>
-            <a:pPr algn="l"/>
-            <a:r>
-              <a:rPr sz="1300" b="0">
-                <a:ea typeface="Malgun Gothic"/>
-                <a:latin typeface="Malgun Gothic"/>
-              </a:rPr>
-              <a:t>•  보조 테이블 2/6개 활용 (Step 3-B) — 4개 잔여</a:t>
-            </a:r>
-          </a:p>
-          <a:p>
-            <a:pPr algn="l"/>
-            <a:r>
-              <a:rPr sz="1300" b="0">
-                <a:ea typeface="Malgun Gothic"/>
-                <a:latin typeface="Malgun Gothic"/>
-              </a:rPr>
-              <a:t>•  Bureau의 SHAP 미진입 — EXT_SOURCE 응축 가설 검증 필요</a:t>
-            </a:r>
-          </a:p>
-          <a:p>
-            <a:pPr algn="l"/>
-            <a:r>
-              <a:rPr sz="1300" b="0">
-                <a:ea typeface="Malgun Gothic"/>
-                <a:latin typeface="Malgun Gothic"/>
-              </a:rPr>
-              <a:t>•  TabNet-only 컨텍스트 ablation 미수행 (3-way)</a:t>
-            </a:r>
-          </a:p>
-          <a:p>
-            <a:pPr algn="l"/>
-            <a:r>
-              <a:rPr sz="1300" b="0">
-                <a:ea typeface="Malgun Gothic"/>
-                <a:latin typeface="Malgun Gothic"/>
-              </a:rPr>
-              <a:t>•  Fairness-aware 학습 미수행</a:t>
-            </a:r>
-          </a:p>
-        </p:txBody>
-      </p:sp>
-      <p:sp>
-        <p:nvSpPr>
-          <p:cNvPr id="8" name="TextBox 7"/>
-          <p:cNvSpPr txBox="1"/>
-          <p:nvPr/>
-        </p:nvSpPr>
-        <p:spPr>
-          <a:xfrm>
-            <a:off x="6120000" y="1080000"/>
-            <a:ext cx="5400000" cy="360000"/>
-          </a:xfrm>
-          <a:prstGeom prst="rect">
-            <a:avLst/>
-          </a:prstGeom>
-          <a:noFill/>
-        </p:spPr>
-        <p:txBody>
-          <a:bodyPr wrap="square">
-            <a:spAutoFit/>
-          </a:bodyPr>
-          <a:lstStyle/>
-          <a:p>
-            <a:r>
-              <a:rPr sz="1600" b="1">
-                <a:solidFill>
-                  <a:srgbClr val="55A868"/>
-                </a:solidFill>
-                <a:ea typeface="Malgun Gothic"/>
-                <a:latin typeface="Malgun Gothic"/>
-              </a:rPr>
-              <a:t>향후 계획</a:t>
-            </a:r>
-          </a:p>
-        </p:txBody>
-      </p:sp>
-      <p:sp>
-        <p:nvSpPr>
-          <p:cNvPr id="9" name="TextBox 8"/>
-          <p:cNvSpPr txBox="1"/>
-          <p:nvPr/>
-        </p:nvSpPr>
-        <p:spPr>
-          <a:xfrm>
-            <a:off x="6300000" y="1440000"/>
-            <a:ext cx="5400000" cy="4680000"/>
-          </a:xfrm>
-          <a:prstGeom prst="rect">
-            <a:avLst/>
-          </a:prstGeom>
-          <a:noFill/>
-        </p:spPr>
-        <p:txBody>
-          <a:bodyPr wrap="square">
-            <a:spAutoFit/>
-          </a:bodyPr>
-          <a:lstStyle/>
-          <a:p>
-            <a:pPr algn="l"/>
-            <a:r>
-              <a:rPr sz="1300" b="0">
-                <a:ea typeface="Malgun Gothic"/>
-                <a:latin typeface="Malgun Gothic"/>
-              </a:rPr>
-              <a:t>•  인간 평가 (Plausibility) — IRB + 5점 척도, Cohen's κ</a:t>
-            </a:r>
-          </a:p>
-          <a:p>
-            <a:pPr algn="l"/>
-            <a:r>
-              <a:rPr sz="1300" b="0">
-                <a:ea typeface="Malgun Gothic"/>
-                <a:latin typeface="Malgun Gothic"/>
-              </a:rPr>
-              <a:t>•  Gemini judge로 양방향 G-Eval cross-validation</a:t>
-            </a:r>
-          </a:p>
-          <a:p>
-            <a:pPr algn="l"/>
-            <a:r>
-              <a:rPr sz="1300" b="0">
-                <a:ea typeface="Malgun Gothic"/>
-                <a:latin typeface="Malgun Gothic"/>
-              </a:rPr>
-              <a:t>•  Fusion 표본 100명 확장 + counterfactual 결합</a:t>
-            </a:r>
-          </a:p>
-          <a:p>
-            <a:pPr algn="l"/>
-            <a:r>
-              <a:rPr sz="1300" b="0">
-                <a:ea typeface="Malgun Gothic"/>
-                <a:latin typeface="Malgun Gothic"/>
-              </a:rPr>
-              <a:t>•  3-way ablation: SHAP-only / Attn-only / Fusion</a:t>
-            </a:r>
-          </a:p>
-          <a:p>
-            <a:pPr algn="l"/>
-            <a:r>
-              <a:rPr sz="1300" b="0">
-                <a:ea typeface="Malgun Gothic"/>
-                <a:latin typeface="Malgun Gothic"/>
-              </a:rPr>
-              <a:t>•  잔여 보조 테이블 4개로 AUROC 0.78+</a:t>
-            </a:r>
-          </a:p>
-          <a:p>
-            <a:pPr algn="l"/>
-            <a:r>
-              <a:rPr sz="1300" b="0">
-                <a:ea typeface="Malgun Gothic"/>
-                <a:latin typeface="Malgun Gothic"/>
-              </a:rPr>
-              <a:t>•  Fairness-aware 학습 (Reweighing, Adversarial)</a:t>
-            </a:r>
-          </a:p>
-          <a:p>
-            <a:pPr algn="l"/>
-            <a:r>
-              <a:rPr sz="1300" b="0">
-                <a:ea typeface="Malgun Gothic"/>
-                <a:latin typeface="Malgun Gothic"/>
-              </a:rPr>
-              <a:t>•  FT-Transformer 비교 모델 추가</a:t>
+            <a:pPr algn="ctr"/>
+            <a:r>
+              <a:rPr sz="1800" b="1">
+                <a:solidFill>
+                  <a:srgbClr val="222222"/>
+                </a:solidFill>
+                <a:ea typeface="Malgun Gothic"/>
+                <a:latin typeface="Malgun Gothic"/>
+              </a:rPr>
+              <a:t>"SHAP 컨텍스트를 LLM의 검색된 근거로 재정의하면,
+LLM 종속성 없이 환각이 0이 되는 자연어 설명을 생성할 수 있다."</a:t>
             </a:r>
           </a:p>
         </p:txBody>
@@ -9394,7 +9397,7 @@
         <p:spPr>
           <a:xfrm>
             <a:off x="0" y="0"/>
-            <a:ext cx="12191695" cy="6858000"/>
+            <a:ext cx="180000" cy="720000"/>
           </a:xfrm>
           <a:prstGeom prst="rect">
             <a:avLst/>
@@ -9436,8 +9439,8 @@
         </p:nvSpPr>
         <p:spPr>
           <a:xfrm>
-            <a:off x="360000" y="2520000"/>
-            <a:ext cx="11340000" cy="1080000"/>
+            <a:off x="360000" y="144000"/>
+            <a:ext cx="10800000" cy="360000"/>
           </a:xfrm>
           <a:prstGeom prst="rect">
             <a:avLst/>
@@ -9450,16 +9453,15 @@
           </a:bodyPr>
           <a:lstStyle/>
           <a:p>
-            <a:pPr algn="ctr"/>
-            <a:r>
-              <a:rPr sz="6400" b="1">
-                <a:solidFill>
-                  <a:srgbClr val="FFFFFF"/>
-                </a:solidFill>
-                <a:ea typeface="Malgun Gothic"/>
-                <a:latin typeface="Malgun Gothic"/>
-              </a:rPr>
-              <a:t>감사합니다</a:t>
+            <a:r>
+              <a:rPr sz="2400" b="1">
+                <a:solidFill>
+                  <a:srgbClr val="1F3A68"/>
+                </a:solidFill>
+                <a:ea typeface="Malgun Gothic"/>
+                <a:latin typeface="Malgun Gothic"/>
+              </a:rPr>
+              <a:t>18. 한계와 향후 계획</a:t>
             </a:r>
           </a:p>
         </p:txBody>
@@ -9472,8 +9474,8 @@
         </p:nvSpPr>
         <p:spPr>
           <a:xfrm>
-            <a:off x="360000" y="3960000"/>
-            <a:ext cx="11340000" cy="540000"/>
+            <a:off x="360000" y="503999"/>
+            <a:ext cx="10800000" cy="288000"/>
           </a:xfrm>
           <a:prstGeom prst="rect">
             <a:avLst/>
@@ -9486,30 +9488,72 @@
           </a:bodyPr>
           <a:lstStyle/>
           <a:p>
+            <a:r>
+              <a:rPr sz="1200" b="0">
+                <a:solidFill>
+                  <a:srgbClr val="555555"/>
+                </a:solidFill>
+                <a:ea typeface="Malgun Gothic"/>
+                <a:latin typeface="Malgun Gothic"/>
+              </a:rPr>
+              <a:t>Step 3-B/3-C 일부 진행 / 잔여는 본 논문 확장</a:t>
+            </a:r>
+          </a:p>
+        </p:txBody>
+      </p:sp>
+      <p:sp>
+        <p:nvSpPr>
+          <p:cNvPr id="5" name="Rectangle 4"/>
+          <p:cNvSpPr/>
+          <p:nvPr/>
+        </p:nvSpPr>
+        <p:spPr>
+          <a:xfrm>
+            <a:off x="360000" y="864000"/>
+            <a:ext cx="11340000" cy="18000"/>
+          </a:xfrm>
+          <a:prstGeom prst="rect">
+            <a:avLst/>
+          </a:prstGeom>
+          <a:solidFill>
+            <a:srgbClr val="CCCCCC"/>
+          </a:solidFill>
+          <a:ln>
+            <a:noFill/>
+          </a:ln>
+        </p:spPr>
+        <p:style>
+          <a:lnRef idx="1">
+            <a:schemeClr val="accent1"/>
+          </a:lnRef>
+          <a:fillRef idx="3">
+            <a:schemeClr val="accent1"/>
+          </a:fillRef>
+          <a:effectRef idx="2">
+            <a:schemeClr val="accent1"/>
+          </a:effectRef>
+          <a:fontRef idx="minor">
+            <a:schemeClr val="lt1"/>
+          </a:fontRef>
+        </p:style>
+        <p:txBody>
+          <a:bodyPr rtlCol="0" anchor="ctr"/>
+          <a:lstStyle/>
+          <a:p>
             <a:pPr algn="ctr"/>
-            <a:r>
-              <a:rPr sz="3600" b="0">
-                <a:solidFill>
-                  <a:srgbClr val="CCDDEE"/>
-                </a:solidFill>
-                <a:ea typeface="Malgun Gothic"/>
-                <a:latin typeface="Malgun Gothic"/>
-              </a:rPr>
-              <a:t>Q &amp; A</a:t>
-            </a:r>
-          </a:p>
-        </p:txBody>
-      </p:sp>
-      <p:sp>
-        <p:nvSpPr>
-          <p:cNvPr id="5" name="TextBox 4"/>
+          </a:p>
+        </p:txBody>
+      </p:sp>
+      <p:sp>
+        <p:nvSpPr>
+          <p:cNvPr id="6" name="TextBox 5"/>
           <p:cNvSpPr txBox="1"/>
           <p:nvPr/>
         </p:nvSpPr>
         <p:spPr>
           <a:xfrm>
-            <a:off x="360000" y="4860000"/>
-            <a:ext cx="11340000" cy="360000"/>
+            <a:off x="360000" y="1080000"/>
+            <a:ext cx="5400000" cy="360000"/>
           </a:xfrm>
           <a:prstGeom prst="rect">
             <a:avLst/>
@@ -9522,16 +9566,236 @@
           </a:bodyPr>
           <a:lstStyle/>
           <a:p>
-            <a:pPr algn="ctr"/>
-            <a:r>
-              <a:rPr sz="1400" b="0">
-                <a:solidFill>
-                  <a:srgbClr val="CCDDEE"/>
-                </a:solidFill>
-                <a:ea typeface="Malgun Gothic"/>
-                <a:latin typeface="Malgun Gothic"/>
-              </a:rPr>
-              <a:t>GitHub: https://github.com/Tim-Green0/tabnet-xai-rag-credit</a:t>
+            <a:r>
+              <a:rPr sz="1600" b="1">
+                <a:solidFill>
+                  <a:srgbClr val="C44E52"/>
+                </a:solidFill>
+                <a:ea typeface="Malgun Gothic"/>
+                <a:latin typeface="Malgun Gothic"/>
+              </a:rPr>
+              <a:t>현재 한계 / 진행 중</a:t>
+            </a:r>
+          </a:p>
+        </p:txBody>
+      </p:sp>
+      <p:sp>
+        <p:nvSpPr>
+          <p:cNvPr id="7" name="TextBox 6"/>
+          <p:cNvSpPr txBox="1"/>
+          <p:nvPr/>
+        </p:nvSpPr>
+        <p:spPr>
+          <a:xfrm>
+            <a:off x="540000" y="1440000"/>
+            <a:ext cx="5400000" cy="4680000"/>
+          </a:xfrm>
+          <a:prstGeom prst="rect">
+            <a:avLst/>
+          </a:prstGeom>
+          <a:noFill/>
+        </p:spPr>
+        <p:txBody>
+          <a:bodyPr wrap="square">
+            <a:spAutoFit/>
+          </a:bodyPr>
+          <a:lstStyle/>
+          <a:p>
+            <a:pPr algn="l"/>
+            <a:r>
+              <a:rPr sz="1300" b="0">
+                <a:ea typeface="Malgun Gothic"/>
+                <a:latin typeface="Malgun Gothic"/>
+              </a:rPr>
+              <a:t>•  Fusion 평가 표본 30명 — 100명+ 확장 검토</a:t>
+            </a:r>
+          </a:p>
+          <a:p>
+            <a:pPr algn="l"/>
+            <a:r>
+              <a:rPr sz="1300" b="0">
+                <a:ea typeface="Malgun Gothic"/>
+                <a:latin typeface="Malgun Gothic"/>
+              </a:rPr>
+              <a:t>•  인간평가 (Plausibility) 미수행 — IRB 절차 필요 ★ 1순위</a:t>
+            </a:r>
+          </a:p>
+          <a:p>
+            <a:pPr algn="l"/>
+            <a:r>
+              <a:rPr sz="1300" b="0">
+                <a:ea typeface="Malgun Gothic"/>
+                <a:latin typeface="Malgun Gothic"/>
+              </a:rPr>
+              <a:t>•  보조 테이블 2/6개 활용 (Step 3-B) — 4개 잔여</a:t>
+            </a:r>
+          </a:p>
+          <a:p>
+            <a:pPr algn="l"/>
+            <a:r>
+              <a:rPr sz="1300" b="0">
+                <a:ea typeface="Malgun Gothic"/>
+                <a:latin typeface="Malgun Gothic"/>
+              </a:rPr>
+              <a:t>•  Bureau의 SHAP 미진입 — EXT_SOURCE 응축 가설 검증 필요</a:t>
+            </a:r>
+          </a:p>
+          <a:p>
+            <a:pPr algn="l"/>
+            <a:r>
+              <a:rPr sz="1300" b="0">
+                <a:ea typeface="Malgun Gothic"/>
+                <a:latin typeface="Malgun Gothic"/>
+              </a:rPr>
+              <a:t>•  TabNet-only 컨텍스트 ablation 미수행 (3-way)</a:t>
+            </a:r>
+          </a:p>
+          <a:p>
+            <a:pPr algn="l"/>
+            <a:r>
+              <a:rPr sz="1300" b="0">
+                <a:ea typeface="Malgun Gothic"/>
+                <a:latin typeface="Malgun Gothic"/>
+              </a:rPr>
+              <a:t>•  Fairness-aware 학습 미수행</a:t>
+            </a:r>
+          </a:p>
+          <a:p>
+            <a:pPr algn="l"/>
+            <a:r>
+              <a:rPr sz="1300" b="0">
+                <a:ea typeface="Malgun Gothic"/>
+                <a:latin typeface="Malgun Gothic"/>
+              </a:rPr>
+              <a:t>•  한국어 native NLI 모델 추가 검증 (현재 다국어)</a:t>
+            </a:r>
+          </a:p>
+        </p:txBody>
+      </p:sp>
+      <p:sp>
+        <p:nvSpPr>
+          <p:cNvPr id="8" name="TextBox 7"/>
+          <p:cNvSpPr txBox="1"/>
+          <p:nvPr/>
+        </p:nvSpPr>
+        <p:spPr>
+          <a:xfrm>
+            <a:off x="6120000" y="1080000"/>
+            <a:ext cx="5400000" cy="360000"/>
+          </a:xfrm>
+          <a:prstGeom prst="rect">
+            <a:avLst/>
+          </a:prstGeom>
+          <a:noFill/>
+        </p:spPr>
+        <p:txBody>
+          <a:bodyPr wrap="square">
+            <a:spAutoFit/>
+          </a:bodyPr>
+          <a:lstStyle/>
+          <a:p>
+            <a:r>
+              <a:rPr sz="1600" b="1">
+                <a:solidFill>
+                  <a:srgbClr val="55A868"/>
+                </a:solidFill>
+                <a:ea typeface="Malgun Gothic"/>
+                <a:latin typeface="Malgun Gothic"/>
+              </a:rPr>
+              <a:t>향후 계획</a:t>
+            </a:r>
+          </a:p>
+        </p:txBody>
+      </p:sp>
+      <p:sp>
+        <p:nvSpPr>
+          <p:cNvPr id="9" name="TextBox 8"/>
+          <p:cNvSpPr txBox="1"/>
+          <p:nvPr/>
+        </p:nvSpPr>
+        <p:spPr>
+          <a:xfrm>
+            <a:off x="6300000" y="1440000"/>
+            <a:ext cx="5400000" cy="4680000"/>
+          </a:xfrm>
+          <a:prstGeom prst="rect">
+            <a:avLst/>
+          </a:prstGeom>
+          <a:noFill/>
+        </p:spPr>
+        <p:txBody>
+          <a:bodyPr wrap="square">
+            <a:spAutoFit/>
+          </a:bodyPr>
+          <a:lstStyle/>
+          <a:p>
+            <a:pPr algn="l"/>
+            <a:r>
+              <a:rPr sz="1300" b="0">
+                <a:ea typeface="Malgun Gothic"/>
+                <a:latin typeface="Malgun Gothic"/>
+              </a:rPr>
+              <a:t>•  인간 평가 (Plausibility) — IRB + 5점 척도, Cohen's κ ★ 1순위</a:t>
+            </a:r>
+          </a:p>
+          <a:p>
+            <a:pPr algn="l"/>
+            <a:r>
+              <a:rPr sz="1300" b="0">
+                <a:ea typeface="Malgun Gothic"/>
+                <a:latin typeface="Malgun Gothic"/>
+              </a:rPr>
+              <a:t>•  Fusion 표본 100명 확장 + counterfactual 결합</a:t>
+            </a:r>
+          </a:p>
+          <a:p>
+            <a:pPr algn="l"/>
+            <a:r>
+              <a:rPr sz="1300" b="0">
+                <a:ea typeface="Malgun Gothic"/>
+                <a:latin typeface="Malgun Gothic"/>
+              </a:rPr>
+              <a:t>•  3-way ablation: SHAP-only / Attn-only / Fusion</a:t>
+            </a:r>
+          </a:p>
+          <a:p>
+            <a:pPr algn="l"/>
+            <a:r>
+              <a:rPr sz="1300" b="0">
+                <a:ea typeface="Malgun Gothic"/>
+                <a:latin typeface="Malgun Gothic"/>
+              </a:rPr>
+              <a:t>•  잔여 보조 테이블 4개로 AUROC 0.78+</a:t>
+            </a:r>
+          </a:p>
+          <a:p>
+            <a:pPr algn="l"/>
+            <a:r>
+              <a:rPr sz="1300" b="0">
+                <a:ea typeface="Malgun Gothic"/>
+                <a:latin typeface="Malgun Gothic"/>
+              </a:rPr>
+              <a:t>•  Bureau ablation — EXT_SOURCE 응축 가설 검증</a:t>
+            </a:r>
+          </a:p>
+          <a:p>
+            <a:pPr algn="l"/>
+            <a:r>
+              <a:rPr sz="1300" b="0">
+                <a:ea typeface="Malgun Gothic"/>
+                <a:latin typeface="Malgun Gothic"/>
+              </a:rPr>
+              <a:t>•  Fairness-aware 학습 (Reweighing, Adversarial)</a:t>
+            </a:r>
+          </a:p>
+          <a:p>
+            <a:pPr algn="l"/>
+            <a:r>
+              <a:rPr sz="1300" b="0">
+                <a:ea typeface="Malgun Gothic"/>
+                <a:latin typeface="Malgun Gothic"/>
+              </a:rPr>
+              <a:t>•  FT-Transformer 비교 + 한국어 native NLI</a:t>
             </a:r>
           </a:p>
         </p:txBody>
@@ -9898,6 +10162,175 @@
                 <a:latin typeface="Malgun Gothic"/>
               </a:rPr>
               <a:t>    –  그러나 환각(Hallucination) 문제 — 신용평가는 정확성·법적 책임이 중요</a:t>
+            </a:r>
+          </a:p>
+        </p:txBody>
+      </p:sp>
+    </p:spTree>
+  </p:cSld>
+  <p:clrMapOvr>
+    <a:masterClrMapping/>
+  </p:clrMapOvr>
+</p:sld>
+</file>
+
+<file path=ppt/slides/slide20.xml><?xml version="1.0" encoding="utf-8"?>
+<p:sld xmlns:a="http://schemas.openxmlformats.org/drawingml/2006/main" xmlns:p="http://schemas.openxmlformats.org/presentationml/2006/main" xmlns:r="http://schemas.openxmlformats.org/officeDocument/2006/relationships">
+  <p:cSld>
+    <p:spTree>
+      <p:nvGrpSpPr>
+        <p:cNvPr id="1" name=""/>
+        <p:cNvGrpSpPr/>
+        <p:nvPr/>
+      </p:nvGrpSpPr>
+      <p:grpSpPr/>
+      <p:sp>
+        <p:nvSpPr>
+          <p:cNvPr id="2" name="Rectangle 1"/>
+          <p:cNvSpPr/>
+          <p:nvPr/>
+        </p:nvSpPr>
+        <p:spPr>
+          <a:xfrm>
+            <a:off x="0" y="0"/>
+            <a:ext cx="12191695" cy="6858000"/>
+          </a:xfrm>
+          <a:prstGeom prst="rect">
+            <a:avLst/>
+          </a:prstGeom>
+          <a:solidFill>
+            <a:srgbClr val="1F3A68"/>
+          </a:solidFill>
+          <a:ln>
+            <a:noFill/>
+          </a:ln>
+        </p:spPr>
+        <p:style>
+          <a:lnRef idx="1">
+            <a:schemeClr val="accent1"/>
+          </a:lnRef>
+          <a:fillRef idx="3">
+            <a:schemeClr val="accent1"/>
+          </a:fillRef>
+          <a:effectRef idx="2">
+            <a:schemeClr val="accent1"/>
+          </a:effectRef>
+          <a:fontRef idx="minor">
+            <a:schemeClr val="lt1"/>
+          </a:fontRef>
+        </p:style>
+        <p:txBody>
+          <a:bodyPr rtlCol="0" anchor="ctr"/>
+          <a:lstStyle/>
+          <a:p>
+            <a:pPr algn="ctr"/>
+          </a:p>
+        </p:txBody>
+      </p:sp>
+      <p:sp>
+        <p:nvSpPr>
+          <p:cNvPr id="3" name="TextBox 2"/>
+          <p:cNvSpPr txBox="1"/>
+          <p:nvPr/>
+        </p:nvSpPr>
+        <p:spPr>
+          <a:xfrm>
+            <a:off x="360000" y="2520000"/>
+            <a:ext cx="11340000" cy="1080000"/>
+          </a:xfrm>
+          <a:prstGeom prst="rect">
+            <a:avLst/>
+          </a:prstGeom>
+          <a:noFill/>
+        </p:spPr>
+        <p:txBody>
+          <a:bodyPr wrap="square">
+            <a:spAutoFit/>
+          </a:bodyPr>
+          <a:lstStyle/>
+          <a:p>
+            <a:pPr algn="ctr"/>
+            <a:r>
+              <a:rPr sz="6400" b="1">
+                <a:solidFill>
+                  <a:srgbClr val="FFFFFF"/>
+                </a:solidFill>
+                <a:ea typeface="Malgun Gothic"/>
+                <a:latin typeface="Malgun Gothic"/>
+              </a:rPr>
+              <a:t>감사합니다</a:t>
+            </a:r>
+          </a:p>
+        </p:txBody>
+      </p:sp>
+      <p:sp>
+        <p:nvSpPr>
+          <p:cNvPr id="4" name="TextBox 3"/>
+          <p:cNvSpPr txBox="1"/>
+          <p:nvPr/>
+        </p:nvSpPr>
+        <p:spPr>
+          <a:xfrm>
+            <a:off x="360000" y="3960000"/>
+            <a:ext cx="11340000" cy="540000"/>
+          </a:xfrm>
+          <a:prstGeom prst="rect">
+            <a:avLst/>
+          </a:prstGeom>
+          <a:noFill/>
+        </p:spPr>
+        <p:txBody>
+          <a:bodyPr wrap="square">
+            <a:spAutoFit/>
+          </a:bodyPr>
+          <a:lstStyle/>
+          <a:p>
+            <a:pPr algn="ctr"/>
+            <a:r>
+              <a:rPr sz="3600" b="0">
+                <a:solidFill>
+                  <a:srgbClr val="CCDDEE"/>
+                </a:solidFill>
+                <a:ea typeface="Malgun Gothic"/>
+                <a:latin typeface="Malgun Gothic"/>
+              </a:rPr>
+              <a:t>Q &amp; A</a:t>
+            </a:r>
+          </a:p>
+        </p:txBody>
+      </p:sp>
+      <p:sp>
+        <p:nvSpPr>
+          <p:cNvPr id="5" name="TextBox 4"/>
+          <p:cNvSpPr txBox="1"/>
+          <p:nvPr/>
+        </p:nvSpPr>
+        <p:spPr>
+          <a:xfrm>
+            <a:off x="360000" y="4860000"/>
+            <a:ext cx="11340000" cy="360000"/>
+          </a:xfrm>
+          <a:prstGeom prst="rect">
+            <a:avLst/>
+          </a:prstGeom>
+          <a:noFill/>
+        </p:spPr>
+        <p:txBody>
+          <a:bodyPr wrap="square">
+            <a:spAutoFit/>
+          </a:bodyPr>
+          <a:lstStyle/>
+          <a:p>
+            <a:pPr algn="ctr"/>
+            <a:r>
+              <a:rPr sz="1400" b="0">
+                <a:solidFill>
+                  <a:srgbClr val="CCDDEE"/>
+                </a:solidFill>
+                <a:ea typeface="Malgun Gothic"/>
+                <a:latin typeface="Malgun Gothic"/>
+              </a:rPr>
+              <a:t>GitHub: https://github.com/Tim-Green0/tabnet-xai-rag-credit</a:t>
             </a:r>
           </a:p>
         </p:txBody>

--- a/paper/midterm_slides.pptx
+++ b/paper/midterm_slides.pptx
@@ -25,6 +25,7 @@
     <p:sldId id="273" r:id="rId24"/>
     <p:sldId id="274" r:id="rId25"/>
     <p:sldId id="275" r:id="rId26"/>
+    <p:sldId id="276" r:id="rId27"/>
   </p:sldIdLst>
   <p:sldSz cx="12191695" cy="6858000" type="screen4x3"/>
   <p:notesSz cx="6858000" cy="9144000"/>
@@ -8928,7 +8929,7 @@
                 <a:ea typeface="Malgun Gothic"/>
                 <a:latin typeface="Malgun Gothic"/>
               </a:rPr>
-              <a:t>17. 종합 — 본 연구의 가치 4가지</a:t>
+              <a:t>17. ★ Step 5-A — Fairness-aware Learning</a:t>
             </a:r>
           </a:p>
         </p:txBody>
@@ -8963,7 +8964,7 @@
                 <a:ea typeface="Malgun Gothic"/>
                 <a:latin typeface="Malgun Gothic"/>
               </a:rPr>
-              <a:t>Step 1 + 2-A + 3-B + 3-C-1 + 3-C-2 + 3-C-2-f 마무리</a:t>
+              <a:t>Day 5 8/8 위반 → Reweighing으로 4/4 통과 + AUROC 손실 거의 없음</a:t>
             </a:r>
           </a:p>
         </p:txBody>
@@ -9011,302 +9012,40 @@
           </a:p>
         </p:txBody>
       </p:sp>
-      <p:sp>
-        <p:nvSpPr>
-          <p:cNvPr id="6" name="Rounded Rectangle 5"/>
-          <p:cNvSpPr/>
-          <p:nvPr/>
-        </p:nvSpPr>
-        <p:spPr>
-          <a:xfrm>
-            <a:off x="677849" y="1260000"/>
-            <a:ext cx="2520000" cy="3060000"/>
-          </a:xfrm>
-          <a:prstGeom prst="roundRect">
-            <a:avLst/>
-          </a:prstGeom>
-          <a:solidFill>
-            <a:srgbClr val="4C72B0"/>
-          </a:solidFill>
-          <a:ln>
-            <a:noFill/>
-          </a:ln>
-        </p:spPr>
-        <p:style>
-          <a:lnRef idx="1">
-            <a:schemeClr val="accent1"/>
-          </a:lnRef>
-          <a:fillRef idx="3">
-            <a:schemeClr val="accent1"/>
-          </a:fillRef>
-          <a:effectRef idx="2">
-            <a:schemeClr val="accent1"/>
-          </a:effectRef>
-          <a:fontRef idx="minor">
-            <a:schemeClr val="lt1"/>
-          </a:fontRef>
-        </p:style>
-        <p:txBody>
-          <a:bodyPr rtlCol="0" anchor="ctr" lIns="216000" rIns="216000" tIns="216000"/>
-          <a:lstStyle/>
-          <a:p>
-            <a:pPr algn="ctr"/>
-            <a:r>
-              <a:rPr sz="2200" b="1">
-                <a:solidFill>
-                  <a:srgbClr val="FFFFFF"/>
-                </a:solidFill>
-                <a:ea typeface="Malgun Gothic"/>
-                <a:latin typeface="Malgun Gothic"/>
-              </a:rPr>
-              <a:t>예측 성능</a:t>
-            </a:r>
-          </a:p>
-          <a:p>
-            <a:pPr algn="ctr"/>
-            <a:r>
-              <a:rPr sz="1200" b="0">
-                <a:solidFill>
-                  <a:srgbClr val="FFFFFF"/>
-                </a:solidFill>
-                <a:ea typeface="Malgun Gothic"/>
-                <a:latin typeface="Malgun Gothic"/>
-              </a:rPr>
-              <a:t>
-XGBoost 0.7587 → 0.7755
-(Step 3-B aux 추가, +2.22%)
-TabNet 0.7518 — 어텐션
-해석성으로 융합 컨텍스트에 통합</a:t>
-            </a:r>
-          </a:p>
-        </p:txBody>
-      </p:sp>
-      <p:sp>
-        <p:nvSpPr>
-          <p:cNvPr id="7" name="Rounded Rectangle 6"/>
-          <p:cNvSpPr/>
-          <p:nvPr/>
-        </p:nvSpPr>
-        <p:spPr>
-          <a:xfrm>
-            <a:off x="3449848" y="1260000"/>
-            <a:ext cx="2520000" cy="3060000"/>
-          </a:xfrm>
-          <a:prstGeom prst="roundRect">
-            <a:avLst/>
-          </a:prstGeom>
-          <a:solidFill>
-            <a:srgbClr val="55A868"/>
-          </a:solidFill>
-          <a:ln>
-            <a:noFill/>
-          </a:ln>
-        </p:spPr>
-        <p:style>
-          <a:lnRef idx="1">
-            <a:schemeClr val="accent1"/>
-          </a:lnRef>
-          <a:fillRef idx="3">
-            <a:schemeClr val="accent1"/>
-          </a:fillRef>
-          <a:effectRef idx="2">
-            <a:schemeClr val="accent1"/>
-          </a:effectRef>
-          <a:fontRef idx="minor">
-            <a:schemeClr val="lt1"/>
-          </a:fontRef>
-        </p:style>
-        <p:txBody>
-          <a:bodyPr rtlCol="0" anchor="ctr" lIns="216000" rIns="216000" tIns="216000"/>
-          <a:lstStyle/>
-          <a:p>
-            <a:pPr algn="ctr"/>
-            <a:r>
-              <a:rPr sz="2200" b="1">
-                <a:solidFill>
-                  <a:srgbClr val="FFFFFF"/>
-                </a:solidFill>
-                <a:ea typeface="Malgun Gothic"/>
-                <a:latin typeface="Malgun Gothic"/>
-              </a:rPr>
-              <a:t>해석 융합</a:t>
-            </a:r>
-          </a:p>
-          <a:p>
-            <a:pPr algn="ctr"/>
-            <a:r>
-              <a:rPr sz="1200" b="0">
-                <a:solidFill>
-                  <a:srgbClr val="FFFFFF"/>
-                </a:solidFill>
-                <a:ea typeface="Malgun Gothic"/>
-                <a:latin typeface="Malgun Gothic"/>
-              </a:rPr>
-              <a:t>
-ρ=0.117 부분 일관
-+ instance-level
-동의 22% (3+) / 0% (4+)
-agreement-aware 컨텍스트로
-LLM에 의미 라벨 전달</a:t>
-            </a:r>
-          </a:p>
-        </p:txBody>
-      </p:sp>
-      <p:sp>
-        <p:nvSpPr>
-          <p:cNvPr id="8" name="Rounded Rectangle 7"/>
-          <p:cNvSpPr/>
-          <p:nvPr/>
-        </p:nvSpPr>
-        <p:spPr>
-          <a:xfrm>
-            <a:off x="6221847" y="1260000"/>
-            <a:ext cx="2520000" cy="3060000"/>
-          </a:xfrm>
-          <a:prstGeom prst="roundRect">
-            <a:avLst/>
-          </a:prstGeom>
-          <a:solidFill>
-            <a:srgbClr val="C44E52"/>
-          </a:solidFill>
-          <a:ln>
-            <a:noFill/>
-          </a:ln>
-        </p:spPr>
-        <p:style>
-          <a:lnRef idx="1">
-            <a:schemeClr val="accent1"/>
-          </a:lnRef>
-          <a:fillRef idx="3">
-            <a:schemeClr val="accent1"/>
-          </a:fillRef>
-          <a:effectRef idx="2">
-            <a:schemeClr val="accent1"/>
-          </a:effectRef>
-          <a:fontRef idx="minor">
-            <a:schemeClr val="lt1"/>
-          </a:fontRef>
-        </p:style>
-        <p:txBody>
-          <a:bodyPr rtlCol="0" anchor="ctr" lIns="216000" rIns="216000" tIns="216000"/>
-          <a:lstStyle/>
-          <a:p>
-            <a:pPr algn="ctr"/>
-            <a:r>
-              <a:rPr sz="2200" b="1">
-                <a:solidFill>
-                  <a:srgbClr val="FFFFFF"/>
-                </a:solidFill>
-                <a:ea typeface="Malgun Gothic"/>
-                <a:latin typeface="Malgun Gothic"/>
-              </a:rPr>
-              <a:t>환각 차단</a:t>
-            </a:r>
-          </a:p>
-          <a:p>
-            <a:pPr algn="ctr"/>
-            <a:r>
-              <a:rPr sz="1200" b="0">
-                <a:solidFill>
-                  <a:srgbClr val="FFFFFF"/>
-                </a:solidFill>
-                <a:ea typeface="Malgun Gothic"/>
-                <a:latin typeface="Malgun Gothic"/>
-              </a:rPr>
-              <a:t>
-Halluc 0/100 (Step 1/2-A)
-→ 0/30 (3-C-1 fusion)
-Baseline 45.5% vs
-XAI-RAG 0% (Step 1)
-NLI contradiction
-−0.14~−0.18 (3-C-2)</a:t>
-            </a:r>
-          </a:p>
-        </p:txBody>
-      </p:sp>
-      <p:sp>
-        <p:nvSpPr>
-          <p:cNvPr id="9" name="Rounded Rectangle 8"/>
-          <p:cNvSpPr/>
-          <p:nvPr/>
-        </p:nvSpPr>
-        <p:spPr>
-          <a:xfrm>
-            <a:off x="8993846" y="1260000"/>
-            <a:ext cx="2520000" cy="3060000"/>
-          </a:xfrm>
-          <a:prstGeom prst="roundRect">
-            <a:avLst/>
-          </a:prstGeom>
-          <a:solidFill>
-            <a:srgbClr val="DD8552"/>
-          </a:solidFill>
-          <a:ln>
-            <a:noFill/>
-          </a:ln>
-        </p:spPr>
-        <p:style>
-          <a:lnRef idx="1">
-            <a:schemeClr val="accent1"/>
-          </a:lnRef>
-          <a:fillRef idx="3">
-            <a:schemeClr val="accent1"/>
-          </a:fillRef>
-          <a:effectRef idx="2">
-            <a:schemeClr val="accent1"/>
-          </a:effectRef>
-          <a:fontRef idx="minor">
-            <a:schemeClr val="lt1"/>
-          </a:fontRef>
-        </p:style>
-        <p:txBody>
-          <a:bodyPr rtlCol="0" anchor="ctr" lIns="216000" rIns="216000" tIns="216000"/>
-          <a:lstStyle/>
-          <a:p>
-            <a:pPr algn="ctr"/>
-            <a:r>
-              <a:rPr sz="2200" b="1">
-                <a:solidFill>
-                  <a:srgbClr val="FFFFFF"/>
-                </a:solidFill>
-                <a:ea typeface="Malgun Gothic"/>
-                <a:latin typeface="Malgun Gothic"/>
-              </a:rPr>
-              <a:t>완결성·충실성</a:t>
-            </a:r>
-          </a:p>
-          <a:p>
-            <a:pPr algn="ctr"/>
-            <a:r>
-              <a:rPr sz="1200" b="0">
-                <a:solidFill>
-                  <a:srgbClr val="FFFFFF"/>
-                </a:solidFill>
-                <a:ea typeface="Malgun Gothic"/>
-                <a:latin typeface="Malgun Gothic"/>
-              </a:rPr>
-              <a:t>
-G-Eval Completeness
-Claude judge +0.67~+0.80
-Gemini judge +0.90~+1.10
-NLI Entailment
-+0.12~+0.21 (3-C-2)
-→ 다층·다judge에서
-일관된 향상</a:t>
-            </a:r>
-          </a:p>
-        </p:txBody>
-      </p:sp>
-      <p:sp>
-        <p:nvSpPr>
-          <p:cNvPr id="10" name="TextBox 9"/>
+      <p:pic>
+        <p:nvPicPr>
+          <p:cNvPr id="6" name="Picture 5" descr="33_fairness_tradeoff.png"/>
+          <p:cNvPicPr>
+            <a:picLocks noChangeAspect="1"/>
+          </p:cNvPicPr>
+          <p:nvPr/>
+        </p:nvPicPr>
+        <p:blipFill>
+          <a:blip r:embed="rId2"/>
+          <a:stretch>
+            <a:fillRect/>
+          </a:stretch>
+        </p:blipFill>
+        <p:spPr>
+          <a:xfrm>
+            <a:off x="216000" y="1080000"/>
+            <a:ext cx="6840000" cy="3454064"/>
+          </a:xfrm>
+          <a:prstGeom prst="rect">
+            <a:avLst/>
+          </a:prstGeom>
+        </p:spPr>
+      </p:pic>
+      <p:sp>
+        <p:nvSpPr>
+          <p:cNvPr id="7" name="TextBox 6"/>
           <p:cNvSpPr txBox="1"/>
           <p:nvPr/>
         </p:nvSpPr>
         <p:spPr>
           <a:xfrm>
-            <a:off x="360000" y="4680000"/>
-            <a:ext cx="11160000" cy="540000"/>
+            <a:off x="7380000" y="1080000"/>
+            <a:ext cx="4680000" cy="360000"/>
           </a:xfrm>
           <a:prstGeom prst="rect">
             <a:avLst/>
@@ -9319,30 +9058,29 @@
           </a:bodyPr>
           <a:lstStyle/>
           <a:p>
-            <a:pPr algn="ctr"/>
-            <a:r>
-              <a:rPr sz="1600" b="1">
+            <a:r>
+              <a:rPr sz="1400" b="1">
                 <a:solidFill>
                   <a:srgbClr val="1F3A68"/>
                 </a:solidFill>
                 <a:ea typeface="Malgun Gothic"/>
                 <a:latin typeface="Malgun Gothic"/>
               </a:rPr>
-              <a:t>한 줄 메시지</a:t>
-            </a:r>
-          </a:p>
-        </p:txBody>
-      </p:sp>
-      <p:sp>
-        <p:nvSpPr>
-          <p:cNvPr id="11" name="TextBox 10"/>
+              <a:t>방법 (3가지 비교)</a:t>
+            </a:r>
+          </a:p>
+        </p:txBody>
+      </p:sp>
+      <p:sp>
+        <p:nvSpPr>
+          <p:cNvPr id="8" name="TextBox 7"/>
           <p:cNvSpPr txBox="1"/>
           <p:nvPr/>
         </p:nvSpPr>
         <p:spPr>
           <a:xfrm>
-            <a:off x="360000" y="5220000"/>
-            <a:ext cx="11160000" cy="720000"/>
+            <a:off x="7452000" y="1440000"/>
+            <a:ext cx="4680000" cy="1260000"/>
           </a:xfrm>
           <a:prstGeom prst="rect">
             <a:avLst/>
@@ -9355,17 +9093,178 @@
           </a:bodyPr>
           <a:lstStyle/>
           <a:p>
-            <a:pPr algn="ctr"/>
-            <a:r>
-              <a:rPr sz="1800" b="1">
-                <a:solidFill>
-                  <a:srgbClr val="222222"/>
-                </a:solidFill>
-                <a:ea typeface="Malgun Gothic"/>
-                <a:latin typeface="Malgun Gothic"/>
-              </a:rPr>
-              <a:t>"SHAP 컨텍스트를 LLM의 검색된 근거로 재정의하면,
-LLM 종속성 없이 환각이 0이 되는 자연어 설명을 생성할 수 있다."</a:t>
+            <a:pPr algn="l"/>
+            <a:r>
+              <a:rPr sz="1100" b="0">
+                <a:ea typeface="Malgun Gothic"/>
+                <a:latin typeface="Malgun Gothic"/>
+              </a:rPr>
+              <a:t>•  Reweighing — Kamiran-Calders sample_weight</a:t>
+            </a:r>
+          </a:p>
+          <a:p>
+            <a:pPr algn="l"/>
+            <a:r>
+              <a:rPr sz="1100" b="0">
+                <a:ea typeface="Malgun Gothic"/>
+                <a:latin typeface="Malgun Gothic"/>
+              </a:rPr>
+              <a:t>•  Fairlearn ExpGrad — DP / EO constraint</a:t>
+            </a:r>
+          </a:p>
+          <a:p>
+            <a:pPr algn="l"/>
+            <a:r>
+              <a:rPr sz="1100" b="0">
+                <a:ea typeface="Malgun Gothic"/>
+                <a:latin typeface="Malgun Gothic"/>
+              </a:rPr>
+              <a:t>•  보호속성: GENDER / AGE (median split)</a:t>
+            </a:r>
+          </a:p>
+          <a:p>
+            <a:pPr algn="l"/>
+            <a:r>
+              <a:rPr sz="1100" b="0">
+                <a:ea typeface="Malgun Gothic"/>
+                <a:latin typeface="Malgun Gothic"/>
+              </a:rPr>
+              <a:t>•  데이터: baseline (214) + aux (1161)</a:t>
+            </a:r>
+          </a:p>
+        </p:txBody>
+      </p:sp>
+      <p:sp>
+        <p:nvSpPr>
+          <p:cNvPr id="9" name="TextBox 8"/>
+          <p:cNvSpPr txBox="1"/>
+          <p:nvPr/>
+        </p:nvSpPr>
+        <p:spPr>
+          <a:xfrm>
+            <a:off x="7380000" y="2880000"/>
+            <a:ext cx="4680000" cy="360000"/>
+          </a:xfrm>
+          <a:prstGeom prst="rect">
+            <a:avLst/>
+          </a:prstGeom>
+          <a:noFill/>
+        </p:spPr>
+        <p:txBody>
+          <a:bodyPr wrap="square">
+            <a:spAutoFit/>
+          </a:bodyPr>
+          <a:lstStyle/>
+          <a:p>
+            <a:r>
+              <a:rPr sz="1400" b="1">
+                <a:solidFill>
+                  <a:srgbClr val="C44E52"/>
+                </a:solidFill>
+                <a:ea typeface="Malgun Gothic"/>
+                <a:latin typeface="Malgun Gothic"/>
+              </a:rPr>
+              <a:t>★ Reweighing 결과 (4/4 케이스 통과)</a:t>
+            </a:r>
+          </a:p>
+        </p:txBody>
+      </p:sp>
+      <p:sp>
+        <p:nvSpPr>
+          <p:cNvPr id="10" name="TextBox 9"/>
+          <p:cNvSpPr txBox="1"/>
+          <p:nvPr/>
+        </p:nvSpPr>
+        <p:spPr>
+          <a:xfrm>
+            <a:off x="7452000" y="3240000"/>
+            <a:ext cx="4680000" cy="1620000"/>
+          </a:xfrm>
+          <a:prstGeom prst="rect">
+            <a:avLst/>
+          </a:prstGeom>
+          <a:noFill/>
+        </p:spPr>
+        <p:txBody>
+          <a:bodyPr wrap="square">
+            <a:spAutoFit/>
+          </a:bodyPr>
+          <a:lstStyle/>
+          <a:p>
+            <a:pPr algn="l"/>
+            <a:r>
+              <a:rPr sz="1100" b="0">
+                <a:ea typeface="Malgun Gothic"/>
+                <a:latin typeface="Malgun Gothic"/>
+              </a:rPr>
+              <a:t>•  baseline: AUROC -0.003 / DI 0.62→0.90 (G), 0.56→0.90 (A)</a:t>
+            </a:r>
+          </a:p>
+          <a:p>
+            <a:pPr algn="l"/>
+            <a:r>
+              <a:rPr sz="1100" b="0">
+                <a:ea typeface="Malgun Gothic"/>
+                <a:latin typeface="Malgun Gothic"/>
+              </a:rPr>
+              <a:t>•  ★★ aux: AUROC +0.003 / DI 0.64→0.87 (G), 0.57→0.83 (A)</a:t>
+            </a:r>
+          </a:p>
+          <a:p>
+            <a:pPr algn="l"/>
+            <a:r>
+              <a:rPr sz="1100" b="0">
+                <a:ea typeface="Malgun Gothic"/>
+                <a:latin typeface="Malgun Gothic"/>
+              </a:rPr>
+              <a:t>•  → aux에서 trade-off 사라짐 (오히려 성능 향상)</a:t>
+            </a:r>
+          </a:p>
+          <a:p>
+            <a:pPr algn="l"/>
+            <a:r>
+              <a:rPr sz="1100" b="0">
+                <a:ea typeface="Malgun Gothic"/>
+                <a:latin typeface="Malgun Gothic"/>
+              </a:rPr>
+              <a:t>•  Fairlearn: DP는 AUROC -0.07~-0.08, EO는 안티 패턴</a:t>
+            </a:r>
+          </a:p>
+        </p:txBody>
+      </p:sp>
+      <p:sp>
+        <p:nvSpPr>
+          <p:cNvPr id="11" name="TextBox 10"/>
+          <p:cNvSpPr txBox="1"/>
+          <p:nvPr/>
+        </p:nvSpPr>
+        <p:spPr>
+          <a:xfrm>
+            <a:off x="7380000" y="5040000"/>
+            <a:ext cx="4680000" cy="1080000"/>
+          </a:xfrm>
+          <a:prstGeom prst="rect">
+            <a:avLst/>
+          </a:prstGeom>
+          <a:noFill/>
+        </p:spPr>
+        <p:txBody>
+          <a:bodyPr wrap="square">
+            <a:spAutoFit/>
+          </a:bodyPr>
+          <a:lstStyle/>
+          <a:p>
+            <a:r>
+              <a:rPr sz="1100" b="0">
+                <a:solidFill>
+                  <a:srgbClr val="55A868"/>
+                </a:solidFill>
+                <a:ea typeface="Malgun Gothic"/>
+                <a:latin typeface="Malgun Gothic"/>
+              </a:rPr>
+              <a:t>★ Day 5 진단(8/8 위반) → 4/4 통과 단일 메커니즘
+★ AGE도 효과적 (Day 5 "proxy" 결론 갱신)
+★ 약점 #4 (Fairness mitigation) 해소</a:t>
             </a:r>
           </a:p>
         </p:txBody>
@@ -9461,7 +9360,7 @@
                 <a:ea typeface="Malgun Gothic"/>
                 <a:latin typeface="Malgun Gothic"/>
               </a:rPr>
-              <a:t>18. 한계와 향후 계획</a:t>
+              <a:t>18. 종합 — 본 연구의 가치 5가지</a:t>
             </a:r>
           </a:p>
         </p:txBody>
@@ -9496,7 +9395,7 @@
                 <a:ea typeface="Malgun Gothic"/>
                 <a:latin typeface="Malgun Gothic"/>
               </a:rPr>
-              <a:t>Step 3-B/3-C 일부 진행 / 잔여는 본 논문 확장</a:t>
+              <a:t>Step 1 + 2-A + 3-B + 3-C + 5-A 마무리</a:t>
             </a:r>
           </a:p>
         </p:txBody>
@@ -9546,14 +9445,375 @@
       </p:sp>
       <p:sp>
         <p:nvSpPr>
-          <p:cNvPr id="6" name="TextBox 5"/>
+          <p:cNvPr id="6" name="Rounded Rectangle 5"/>
+          <p:cNvSpPr/>
+          <p:nvPr/>
+        </p:nvSpPr>
+        <p:spPr>
+          <a:xfrm>
+            <a:off x="605847" y="1260000"/>
+            <a:ext cx="2052000" cy="3060000"/>
+          </a:xfrm>
+          <a:prstGeom prst="roundRect">
+            <a:avLst/>
+          </a:prstGeom>
+          <a:solidFill>
+            <a:srgbClr val="4C72B0"/>
+          </a:solidFill>
+          <a:ln>
+            <a:noFill/>
+          </a:ln>
+        </p:spPr>
+        <p:style>
+          <a:lnRef idx="1">
+            <a:schemeClr val="accent1"/>
+          </a:lnRef>
+          <a:fillRef idx="3">
+            <a:schemeClr val="accent1"/>
+          </a:fillRef>
+          <a:effectRef idx="2">
+            <a:schemeClr val="accent1"/>
+          </a:effectRef>
+          <a:fontRef idx="minor">
+            <a:schemeClr val="lt1"/>
+          </a:fontRef>
+        </p:style>
+        <p:txBody>
+          <a:bodyPr rtlCol="0" anchor="ctr" lIns="216000" rIns="216000" tIns="216000"/>
+          <a:lstStyle/>
+          <a:p>
+            <a:pPr algn="ctr"/>
+            <a:r>
+              <a:rPr sz="2200" b="1">
+                <a:solidFill>
+                  <a:srgbClr val="FFFFFF"/>
+                </a:solidFill>
+                <a:ea typeface="Malgun Gothic"/>
+                <a:latin typeface="Malgun Gothic"/>
+              </a:rPr>
+              <a:t>예측 성능</a:t>
+            </a:r>
+          </a:p>
+          <a:p>
+            <a:pPr algn="ctr"/>
+            <a:r>
+              <a:rPr sz="1200" b="0">
+                <a:solidFill>
+                  <a:srgbClr val="FFFFFF"/>
+                </a:solidFill>
+                <a:ea typeface="Malgun Gothic"/>
+                <a:latin typeface="Malgun Gothic"/>
+              </a:rPr>
+              <a:t>
+XGBoost 0.7587
+→ 0.7755
+(Step 3-B aux, +2.22%)
+TabNet 어텐션
+융합 컨텍스트에 통합</a:t>
+            </a:r>
+          </a:p>
+        </p:txBody>
+      </p:sp>
+      <p:sp>
+        <p:nvSpPr>
+          <p:cNvPr id="7" name="Rounded Rectangle 6"/>
+          <p:cNvSpPr/>
+          <p:nvPr/>
+        </p:nvSpPr>
+        <p:spPr>
+          <a:xfrm>
+            <a:off x="2837847" y="1260000"/>
+            <a:ext cx="2052000" cy="3060000"/>
+          </a:xfrm>
+          <a:prstGeom prst="roundRect">
+            <a:avLst/>
+          </a:prstGeom>
+          <a:solidFill>
+            <a:srgbClr val="55A868"/>
+          </a:solidFill>
+          <a:ln>
+            <a:noFill/>
+          </a:ln>
+        </p:spPr>
+        <p:style>
+          <a:lnRef idx="1">
+            <a:schemeClr val="accent1"/>
+          </a:lnRef>
+          <a:fillRef idx="3">
+            <a:schemeClr val="accent1"/>
+          </a:fillRef>
+          <a:effectRef idx="2">
+            <a:schemeClr val="accent1"/>
+          </a:effectRef>
+          <a:fontRef idx="minor">
+            <a:schemeClr val="lt1"/>
+          </a:fontRef>
+        </p:style>
+        <p:txBody>
+          <a:bodyPr rtlCol="0" anchor="ctr" lIns="216000" rIns="216000" tIns="216000"/>
+          <a:lstStyle/>
+          <a:p>
+            <a:pPr algn="ctr"/>
+            <a:r>
+              <a:rPr sz="2200" b="1">
+                <a:solidFill>
+                  <a:srgbClr val="FFFFFF"/>
+                </a:solidFill>
+                <a:ea typeface="Malgun Gothic"/>
+                <a:latin typeface="Malgun Gothic"/>
+              </a:rPr>
+              <a:t>해석 융합</a:t>
+            </a:r>
+          </a:p>
+          <a:p>
+            <a:pPr algn="ctr"/>
+            <a:r>
+              <a:rPr sz="1200" b="0">
+                <a:solidFill>
+                  <a:srgbClr val="FFFFFF"/>
+                </a:solidFill>
+                <a:ea typeface="Malgun Gothic"/>
+                <a:latin typeface="Malgun Gothic"/>
+              </a:rPr>
+              <a:t>
+ρ=0.117 부분 일관
++ instance-level
+3+ 동의 22% / 4+ 동의 0%
+agreement-aware
+컨텍스트로 LLM에
+의미 라벨 전달</a:t>
+            </a:r>
+          </a:p>
+        </p:txBody>
+      </p:sp>
+      <p:sp>
+        <p:nvSpPr>
+          <p:cNvPr id="8" name="Rounded Rectangle 7"/>
+          <p:cNvSpPr/>
+          <p:nvPr/>
+        </p:nvSpPr>
+        <p:spPr>
+          <a:xfrm>
+            <a:off x="5069847" y="1260000"/>
+            <a:ext cx="2052000" cy="3060000"/>
+          </a:xfrm>
+          <a:prstGeom prst="roundRect">
+            <a:avLst/>
+          </a:prstGeom>
+          <a:solidFill>
+            <a:srgbClr val="C44E52"/>
+          </a:solidFill>
+          <a:ln>
+            <a:noFill/>
+          </a:ln>
+        </p:spPr>
+        <p:style>
+          <a:lnRef idx="1">
+            <a:schemeClr val="accent1"/>
+          </a:lnRef>
+          <a:fillRef idx="3">
+            <a:schemeClr val="accent1"/>
+          </a:fillRef>
+          <a:effectRef idx="2">
+            <a:schemeClr val="accent1"/>
+          </a:effectRef>
+          <a:fontRef idx="minor">
+            <a:schemeClr val="lt1"/>
+          </a:fontRef>
+        </p:style>
+        <p:txBody>
+          <a:bodyPr rtlCol="0" anchor="ctr" lIns="216000" rIns="216000" tIns="216000"/>
+          <a:lstStyle/>
+          <a:p>
+            <a:pPr algn="ctr"/>
+            <a:r>
+              <a:rPr sz="2200" b="1">
+                <a:solidFill>
+                  <a:srgbClr val="FFFFFF"/>
+                </a:solidFill>
+                <a:ea typeface="Malgun Gothic"/>
+                <a:latin typeface="Malgun Gothic"/>
+              </a:rPr>
+              <a:t>환각 차단</a:t>
+            </a:r>
+          </a:p>
+          <a:p>
+            <a:pPr algn="ctr"/>
+            <a:r>
+              <a:rPr sz="1200" b="0">
+                <a:solidFill>
+                  <a:srgbClr val="FFFFFF"/>
+                </a:solidFill>
+                <a:ea typeface="Malgun Gothic"/>
+                <a:latin typeface="Malgun Gothic"/>
+              </a:rPr>
+              <a:t>
+Halluc 0/100
+(Step 1/2-A)
+→ 0/30 (3-C-1)
+Baseline 45.5% vs
+XAI-RAG 0%
+NLI contradiction
+−0.14~−0.18</a:t>
+            </a:r>
+          </a:p>
+        </p:txBody>
+      </p:sp>
+      <p:sp>
+        <p:nvSpPr>
+          <p:cNvPr id="9" name="Rounded Rectangle 8"/>
+          <p:cNvSpPr/>
+          <p:nvPr/>
+        </p:nvSpPr>
+        <p:spPr>
+          <a:xfrm>
+            <a:off x="7301847" y="1260000"/>
+            <a:ext cx="2052000" cy="3060000"/>
+          </a:xfrm>
+          <a:prstGeom prst="roundRect">
+            <a:avLst/>
+          </a:prstGeom>
+          <a:solidFill>
+            <a:srgbClr val="DD8552"/>
+          </a:solidFill>
+          <a:ln>
+            <a:noFill/>
+          </a:ln>
+        </p:spPr>
+        <p:style>
+          <a:lnRef idx="1">
+            <a:schemeClr val="accent1"/>
+          </a:lnRef>
+          <a:fillRef idx="3">
+            <a:schemeClr val="accent1"/>
+          </a:fillRef>
+          <a:effectRef idx="2">
+            <a:schemeClr val="accent1"/>
+          </a:effectRef>
+          <a:fontRef idx="minor">
+            <a:schemeClr val="lt1"/>
+          </a:fontRef>
+        </p:style>
+        <p:txBody>
+          <a:bodyPr rtlCol="0" anchor="ctr" lIns="216000" rIns="216000" tIns="216000"/>
+          <a:lstStyle/>
+          <a:p>
+            <a:pPr algn="ctr"/>
+            <a:r>
+              <a:rPr sz="2200" b="1">
+                <a:solidFill>
+                  <a:srgbClr val="FFFFFF"/>
+                </a:solidFill>
+                <a:ea typeface="Malgun Gothic"/>
+                <a:latin typeface="Malgun Gothic"/>
+              </a:rPr>
+              <a:t>완결성·충실성</a:t>
+            </a:r>
+          </a:p>
+          <a:p>
+            <a:pPr algn="ctr"/>
+            <a:r>
+              <a:rPr sz="1200" b="0">
+                <a:solidFill>
+                  <a:srgbClr val="FFFFFF"/>
+                </a:solidFill>
+                <a:ea typeface="Malgun Gothic"/>
+                <a:latin typeface="Malgun Gothic"/>
+              </a:rPr>
+              <a:t>
+G-Eval Completeness
+Claude +0.67~+0.80
+Gemini +0.90~+1.10
+NLI Entailment
++0.12~+0.21
+→ 다층·다judge
+일관 향상</a:t>
+            </a:r>
+          </a:p>
+        </p:txBody>
+      </p:sp>
+      <p:sp>
+        <p:nvSpPr>
+          <p:cNvPr id="10" name="Rounded Rectangle 9"/>
+          <p:cNvSpPr/>
+          <p:nvPr/>
+        </p:nvSpPr>
+        <p:spPr>
+          <a:xfrm>
+            <a:off x="9533847" y="1260000"/>
+            <a:ext cx="2052000" cy="3060000"/>
+          </a:xfrm>
+          <a:prstGeom prst="roundRect">
+            <a:avLst/>
+          </a:prstGeom>
+          <a:solidFill>
+            <a:srgbClr val="8C71B7"/>
+          </a:solidFill>
+          <a:ln>
+            <a:noFill/>
+          </a:ln>
+        </p:spPr>
+        <p:style>
+          <a:lnRef idx="1">
+            <a:schemeClr val="accent1"/>
+          </a:lnRef>
+          <a:fillRef idx="3">
+            <a:schemeClr val="accent1"/>
+          </a:fillRef>
+          <a:effectRef idx="2">
+            <a:schemeClr val="accent1"/>
+          </a:effectRef>
+          <a:fontRef idx="minor">
+            <a:schemeClr val="lt1"/>
+          </a:fontRef>
+        </p:style>
+        <p:txBody>
+          <a:bodyPr rtlCol="0" anchor="ctr" lIns="216000" rIns="216000" tIns="216000"/>
+          <a:lstStyle/>
+          <a:p>
+            <a:pPr algn="ctr"/>
+            <a:r>
+              <a:rPr sz="2200" b="1">
+                <a:solidFill>
+                  <a:srgbClr val="FFFFFF"/>
+                </a:solidFill>
+                <a:ea typeface="Malgun Gothic"/>
+                <a:latin typeface="Malgun Gothic"/>
+              </a:rPr>
+              <a:t>공정성 mitigation</a:t>
+            </a:r>
+          </a:p>
+          <a:p>
+            <a:pPr algn="ctr"/>
+            <a:r>
+              <a:rPr sz="1200" b="0">
+                <a:solidFill>
+                  <a:srgbClr val="FFFFFF"/>
+                </a:solidFill>
+                <a:ea typeface="Malgun Gothic"/>
+                <a:latin typeface="Malgun Gothic"/>
+              </a:rPr>
+              <a:t>
+Day 5: 8/8 4/5 rule
+위반 진단
+Reweighing:
+4/4 케이스 통과 ✅
+aux 데이터 trade-off
+사라짐 (+0.003 AUROC)</a:t>
+            </a:r>
+          </a:p>
+        </p:txBody>
+      </p:sp>
+      <p:sp>
+        <p:nvSpPr>
+          <p:cNvPr id="11" name="TextBox 10"/>
           <p:cNvSpPr txBox="1"/>
           <p:nvPr/>
         </p:nvSpPr>
         <p:spPr>
           <a:xfrm>
-            <a:off x="360000" y="1080000"/>
-            <a:ext cx="5400000" cy="360000"/>
+            <a:off x="360000" y="4680000"/>
+            <a:ext cx="11160000" cy="540000"/>
           </a:xfrm>
           <a:prstGeom prst="rect">
             <a:avLst/>
@@ -9566,29 +9826,30 @@
           </a:bodyPr>
           <a:lstStyle/>
           <a:p>
+            <a:pPr algn="ctr"/>
             <a:r>
               <a:rPr sz="1600" b="1">
                 <a:solidFill>
-                  <a:srgbClr val="C44E52"/>
-                </a:solidFill>
-                <a:ea typeface="Malgun Gothic"/>
-                <a:latin typeface="Malgun Gothic"/>
-              </a:rPr>
-              <a:t>현재 한계 / 진행 중</a:t>
-            </a:r>
-          </a:p>
-        </p:txBody>
-      </p:sp>
-      <p:sp>
-        <p:nvSpPr>
-          <p:cNvPr id="7" name="TextBox 6"/>
+                  <a:srgbClr val="1F3A68"/>
+                </a:solidFill>
+                <a:ea typeface="Malgun Gothic"/>
+                <a:latin typeface="Malgun Gothic"/>
+              </a:rPr>
+              <a:t>한 줄 메시지</a:t>
+            </a:r>
+          </a:p>
+        </p:txBody>
+      </p:sp>
+      <p:sp>
+        <p:nvSpPr>
+          <p:cNvPr id="12" name="TextBox 11"/>
           <p:cNvSpPr txBox="1"/>
           <p:nvPr/>
         </p:nvSpPr>
         <p:spPr>
           <a:xfrm>
-            <a:off x="540000" y="1440000"/>
-            <a:ext cx="5400000" cy="4680000"/>
+            <a:off x="360000" y="5220000"/>
+            <a:ext cx="11160000" cy="720000"/>
           </a:xfrm>
           <a:prstGeom prst="rect">
             <a:avLst/>
@@ -9601,201 +9862,17 @@
           </a:bodyPr>
           <a:lstStyle/>
           <a:p>
-            <a:pPr algn="l"/>
-            <a:r>
-              <a:rPr sz="1300" b="0">
-                <a:ea typeface="Malgun Gothic"/>
-                <a:latin typeface="Malgun Gothic"/>
-              </a:rPr>
-              <a:t>•  Fusion 평가 표본 30명 — 100명+ 확장 검토</a:t>
-            </a:r>
-          </a:p>
-          <a:p>
-            <a:pPr algn="l"/>
-            <a:r>
-              <a:rPr sz="1300" b="0">
-                <a:ea typeface="Malgun Gothic"/>
-                <a:latin typeface="Malgun Gothic"/>
-              </a:rPr>
-              <a:t>•  인간평가 (Plausibility) 미수행 — IRB 절차 필요 ★ 1순위</a:t>
-            </a:r>
-          </a:p>
-          <a:p>
-            <a:pPr algn="l"/>
-            <a:r>
-              <a:rPr sz="1300" b="0">
-                <a:ea typeface="Malgun Gothic"/>
-                <a:latin typeface="Malgun Gothic"/>
-              </a:rPr>
-              <a:t>•  보조 테이블 2/6개 활용 (Step 3-B) — 4개 잔여</a:t>
-            </a:r>
-          </a:p>
-          <a:p>
-            <a:pPr algn="l"/>
-            <a:r>
-              <a:rPr sz="1300" b="0">
-                <a:ea typeface="Malgun Gothic"/>
-                <a:latin typeface="Malgun Gothic"/>
-              </a:rPr>
-              <a:t>•  Bureau의 SHAP 미진입 — EXT_SOURCE 응축 가설 검증 필요</a:t>
-            </a:r>
-          </a:p>
-          <a:p>
-            <a:pPr algn="l"/>
-            <a:r>
-              <a:rPr sz="1300" b="0">
-                <a:ea typeface="Malgun Gothic"/>
-                <a:latin typeface="Malgun Gothic"/>
-              </a:rPr>
-              <a:t>•  TabNet-only 컨텍스트 ablation 미수행 (3-way)</a:t>
-            </a:r>
-          </a:p>
-          <a:p>
-            <a:pPr algn="l"/>
-            <a:r>
-              <a:rPr sz="1300" b="0">
-                <a:ea typeface="Malgun Gothic"/>
-                <a:latin typeface="Malgun Gothic"/>
-              </a:rPr>
-              <a:t>•  Fairness-aware 학습 미수행</a:t>
-            </a:r>
-          </a:p>
-          <a:p>
-            <a:pPr algn="l"/>
-            <a:r>
-              <a:rPr sz="1300" b="0">
-                <a:ea typeface="Malgun Gothic"/>
-                <a:latin typeface="Malgun Gothic"/>
-              </a:rPr>
-              <a:t>•  한국어 native NLI 모델 추가 검증 (현재 다국어)</a:t>
-            </a:r>
-          </a:p>
-        </p:txBody>
-      </p:sp>
-      <p:sp>
-        <p:nvSpPr>
-          <p:cNvPr id="8" name="TextBox 7"/>
-          <p:cNvSpPr txBox="1"/>
-          <p:nvPr/>
-        </p:nvSpPr>
-        <p:spPr>
-          <a:xfrm>
-            <a:off x="6120000" y="1080000"/>
-            <a:ext cx="5400000" cy="360000"/>
-          </a:xfrm>
-          <a:prstGeom prst="rect">
-            <a:avLst/>
-          </a:prstGeom>
-          <a:noFill/>
-        </p:spPr>
-        <p:txBody>
-          <a:bodyPr wrap="square">
-            <a:spAutoFit/>
-          </a:bodyPr>
-          <a:lstStyle/>
-          <a:p>
-            <a:r>
-              <a:rPr sz="1600" b="1">
-                <a:solidFill>
-                  <a:srgbClr val="55A868"/>
-                </a:solidFill>
-                <a:ea typeface="Malgun Gothic"/>
-                <a:latin typeface="Malgun Gothic"/>
-              </a:rPr>
-              <a:t>향후 계획</a:t>
-            </a:r>
-          </a:p>
-        </p:txBody>
-      </p:sp>
-      <p:sp>
-        <p:nvSpPr>
-          <p:cNvPr id="9" name="TextBox 8"/>
-          <p:cNvSpPr txBox="1"/>
-          <p:nvPr/>
-        </p:nvSpPr>
-        <p:spPr>
-          <a:xfrm>
-            <a:off x="6300000" y="1440000"/>
-            <a:ext cx="5400000" cy="4680000"/>
-          </a:xfrm>
-          <a:prstGeom prst="rect">
-            <a:avLst/>
-          </a:prstGeom>
-          <a:noFill/>
-        </p:spPr>
-        <p:txBody>
-          <a:bodyPr wrap="square">
-            <a:spAutoFit/>
-          </a:bodyPr>
-          <a:lstStyle/>
-          <a:p>
-            <a:pPr algn="l"/>
-            <a:r>
-              <a:rPr sz="1300" b="0">
-                <a:ea typeface="Malgun Gothic"/>
-                <a:latin typeface="Malgun Gothic"/>
-              </a:rPr>
-              <a:t>•  인간 평가 (Plausibility) — IRB + 5점 척도, Cohen's κ ★ 1순위</a:t>
-            </a:r>
-          </a:p>
-          <a:p>
-            <a:pPr algn="l"/>
-            <a:r>
-              <a:rPr sz="1300" b="0">
-                <a:ea typeface="Malgun Gothic"/>
-                <a:latin typeface="Malgun Gothic"/>
-              </a:rPr>
-              <a:t>•  Fusion 표본 100명 확장 + counterfactual 결합</a:t>
-            </a:r>
-          </a:p>
-          <a:p>
-            <a:pPr algn="l"/>
-            <a:r>
-              <a:rPr sz="1300" b="0">
-                <a:ea typeface="Malgun Gothic"/>
-                <a:latin typeface="Malgun Gothic"/>
-              </a:rPr>
-              <a:t>•  3-way ablation: SHAP-only / Attn-only / Fusion</a:t>
-            </a:r>
-          </a:p>
-          <a:p>
-            <a:pPr algn="l"/>
-            <a:r>
-              <a:rPr sz="1300" b="0">
-                <a:ea typeface="Malgun Gothic"/>
-                <a:latin typeface="Malgun Gothic"/>
-              </a:rPr>
-              <a:t>•  잔여 보조 테이블 4개로 AUROC 0.78+</a:t>
-            </a:r>
-          </a:p>
-          <a:p>
-            <a:pPr algn="l"/>
-            <a:r>
-              <a:rPr sz="1300" b="0">
-                <a:ea typeface="Malgun Gothic"/>
-                <a:latin typeface="Malgun Gothic"/>
-              </a:rPr>
-              <a:t>•  Bureau ablation — EXT_SOURCE 응축 가설 검증</a:t>
-            </a:r>
-          </a:p>
-          <a:p>
-            <a:pPr algn="l"/>
-            <a:r>
-              <a:rPr sz="1300" b="0">
-                <a:ea typeface="Malgun Gothic"/>
-                <a:latin typeface="Malgun Gothic"/>
-              </a:rPr>
-              <a:t>•  Fairness-aware 학습 (Reweighing, Adversarial)</a:t>
-            </a:r>
-          </a:p>
-          <a:p>
-            <a:pPr algn="l"/>
-            <a:r>
-              <a:rPr sz="1300" b="0">
-                <a:ea typeface="Malgun Gothic"/>
-                <a:latin typeface="Malgun Gothic"/>
-              </a:rPr>
-              <a:t>•  FT-Transformer 비교 + 한국어 native NLI</a:t>
+            <a:pPr algn="ctr"/>
+            <a:r>
+              <a:rPr sz="1800" b="1">
+                <a:solidFill>
+                  <a:srgbClr val="222222"/>
+                </a:solidFill>
+                <a:ea typeface="Malgun Gothic"/>
+                <a:latin typeface="Malgun Gothic"/>
+              </a:rPr>
+              <a:t>"SHAP 컨텍스트를 LLM의 검색된 근거로 재정의하면,
+LLM 종속성 없이 환각이 0이 되는 자연어 설명을 생성할 수 있다."</a:t>
             </a:r>
           </a:p>
         </p:txBody>
@@ -10175,6 +10252,436 @@
 </file>
 
 <file path=ppt/slides/slide20.xml><?xml version="1.0" encoding="utf-8"?>
+<p:sld xmlns:a="http://schemas.openxmlformats.org/drawingml/2006/main" xmlns:p="http://schemas.openxmlformats.org/presentationml/2006/main" xmlns:r="http://schemas.openxmlformats.org/officeDocument/2006/relationships">
+  <p:cSld>
+    <p:spTree>
+      <p:nvGrpSpPr>
+        <p:cNvPr id="1" name=""/>
+        <p:cNvGrpSpPr/>
+        <p:nvPr/>
+      </p:nvGrpSpPr>
+      <p:grpSpPr/>
+      <p:sp>
+        <p:nvSpPr>
+          <p:cNvPr id="2" name="Rectangle 1"/>
+          <p:cNvSpPr/>
+          <p:nvPr/>
+        </p:nvSpPr>
+        <p:spPr>
+          <a:xfrm>
+            <a:off x="0" y="0"/>
+            <a:ext cx="180000" cy="720000"/>
+          </a:xfrm>
+          <a:prstGeom prst="rect">
+            <a:avLst/>
+          </a:prstGeom>
+          <a:solidFill>
+            <a:srgbClr val="1F3A68"/>
+          </a:solidFill>
+          <a:ln>
+            <a:noFill/>
+          </a:ln>
+        </p:spPr>
+        <p:style>
+          <a:lnRef idx="1">
+            <a:schemeClr val="accent1"/>
+          </a:lnRef>
+          <a:fillRef idx="3">
+            <a:schemeClr val="accent1"/>
+          </a:fillRef>
+          <a:effectRef idx="2">
+            <a:schemeClr val="accent1"/>
+          </a:effectRef>
+          <a:fontRef idx="minor">
+            <a:schemeClr val="lt1"/>
+          </a:fontRef>
+        </p:style>
+        <p:txBody>
+          <a:bodyPr rtlCol="0" anchor="ctr"/>
+          <a:lstStyle/>
+          <a:p>
+            <a:pPr algn="ctr"/>
+          </a:p>
+        </p:txBody>
+      </p:sp>
+      <p:sp>
+        <p:nvSpPr>
+          <p:cNvPr id="3" name="TextBox 2"/>
+          <p:cNvSpPr txBox="1"/>
+          <p:nvPr/>
+        </p:nvSpPr>
+        <p:spPr>
+          <a:xfrm>
+            <a:off x="360000" y="144000"/>
+            <a:ext cx="10800000" cy="360000"/>
+          </a:xfrm>
+          <a:prstGeom prst="rect">
+            <a:avLst/>
+          </a:prstGeom>
+          <a:noFill/>
+        </p:spPr>
+        <p:txBody>
+          <a:bodyPr wrap="square">
+            <a:spAutoFit/>
+          </a:bodyPr>
+          <a:lstStyle/>
+          <a:p>
+            <a:r>
+              <a:rPr sz="2400" b="1">
+                <a:solidFill>
+                  <a:srgbClr val="1F3A68"/>
+                </a:solidFill>
+                <a:ea typeface="Malgun Gothic"/>
+                <a:latin typeface="Malgun Gothic"/>
+              </a:rPr>
+              <a:t>19. 한계와 향후 계획</a:t>
+            </a:r>
+          </a:p>
+        </p:txBody>
+      </p:sp>
+      <p:sp>
+        <p:nvSpPr>
+          <p:cNvPr id="4" name="TextBox 3"/>
+          <p:cNvSpPr txBox="1"/>
+          <p:nvPr/>
+        </p:nvSpPr>
+        <p:spPr>
+          <a:xfrm>
+            <a:off x="360000" y="503999"/>
+            <a:ext cx="10800000" cy="288000"/>
+          </a:xfrm>
+          <a:prstGeom prst="rect">
+            <a:avLst/>
+          </a:prstGeom>
+          <a:noFill/>
+        </p:spPr>
+        <p:txBody>
+          <a:bodyPr wrap="square">
+            <a:spAutoFit/>
+          </a:bodyPr>
+          <a:lstStyle/>
+          <a:p>
+            <a:r>
+              <a:rPr sz="1200" b="0">
+                <a:solidFill>
+                  <a:srgbClr val="555555"/>
+                </a:solidFill>
+                <a:ea typeface="Malgun Gothic"/>
+                <a:latin typeface="Malgun Gothic"/>
+              </a:rPr>
+              <a:t>Step 3-B/3-C/5-A 완료 / 잔여는 본 논문 확장</a:t>
+            </a:r>
+          </a:p>
+        </p:txBody>
+      </p:sp>
+      <p:sp>
+        <p:nvSpPr>
+          <p:cNvPr id="5" name="Rectangle 4"/>
+          <p:cNvSpPr/>
+          <p:nvPr/>
+        </p:nvSpPr>
+        <p:spPr>
+          <a:xfrm>
+            <a:off x="360000" y="864000"/>
+            <a:ext cx="11340000" cy="18000"/>
+          </a:xfrm>
+          <a:prstGeom prst="rect">
+            <a:avLst/>
+          </a:prstGeom>
+          <a:solidFill>
+            <a:srgbClr val="CCCCCC"/>
+          </a:solidFill>
+          <a:ln>
+            <a:noFill/>
+          </a:ln>
+        </p:spPr>
+        <p:style>
+          <a:lnRef idx="1">
+            <a:schemeClr val="accent1"/>
+          </a:lnRef>
+          <a:fillRef idx="3">
+            <a:schemeClr val="accent1"/>
+          </a:fillRef>
+          <a:effectRef idx="2">
+            <a:schemeClr val="accent1"/>
+          </a:effectRef>
+          <a:fontRef idx="minor">
+            <a:schemeClr val="lt1"/>
+          </a:fontRef>
+        </p:style>
+        <p:txBody>
+          <a:bodyPr rtlCol="0" anchor="ctr"/>
+          <a:lstStyle/>
+          <a:p>
+            <a:pPr algn="ctr"/>
+          </a:p>
+        </p:txBody>
+      </p:sp>
+      <p:sp>
+        <p:nvSpPr>
+          <p:cNvPr id="6" name="TextBox 5"/>
+          <p:cNvSpPr txBox="1"/>
+          <p:nvPr/>
+        </p:nvSpPr>
+        <p:spPr>
+          <a:xfrm>
+            <a:off x="360000" y="1080000"/>
+            <a:ext cx="5400000" cy="360000"/>
+          </a:xfrm>
+          <a:prstGeom prst="rect">
+            <a:avLst/>
+          </a:prstGeom>
+          <a:noFill/>
+        </p:spPr>
+        <p:txBody>
+          <a:bodyPr wrap="square">
+            <a:spAutoFit/>
+          </a:bodyPr>
+          <a:lstStyle/>
+          <a:p>
+            <a:r>
+              <a:rPr sz="1600" b="1">
+                <a:solidFill>
+                  <a:srgbClr val="C44E52"/>
+                </a:solidFill>
+                <a:ea typeface="Malgun Gothic"/>
+                <a:latin typeface="Malgun Gothic"/>
+              </a:rPr>
+              <a:t>현재 한계 / 진행 중</a:t>
+            </a:r>
+          </a:p>
+        </p:txBody>
+      </p:sp>
+      <p:sp>
+        <p:nvSpPr>
+          <p:cNvPr id="7" name="TextBox 6"/>
+          <p:cNvSpPr txBox="1"/>
+          <p:nvPr/>
+        </p:nvSpPr>
+        <p:spPr>
+          <a:xfrm>
+            <a:off x="540000" y="1440000"/>
+            <a:ext cx="5400000" cy="4680000"/>
+          </a:xfrm>
+          <a:prstGeom prst="rect">
+            <a:avLst/>
+          </a:prstGeom>
+          <a:noFill/>
+        </p:spPr>
+        <p:txBody>
+          <a:bodyPr wrap="square">
+            <a:spAutoFit/>
+          </a:bodyPr>
+          <a:lstStyle/>
+          <a:p>
+            <a:pPr algn="l"/>
+            <a:r>
+              <a:rPr sz="1300" b="0">
+                <a:ea typeface="Malgun Gothic"/>
+                <a:latin typeface="Malgun Gothic"/>
+              </a:rPr>
+              <a:t>•  Fusion 평가 표본 30명 — 100명+ 확장 검토</a:t>
+            </a:r>
+          </a:p>
+          <a:p>
+            <a:pPr algn="l"/>
+            <a:r>
+              <a:rPr sz="1300" b="0">
+                <a:ea typeface="Malgun Gothic"/>
+                <a:latin typeface="Malgun Gothic"/>
+              </a:rPr>
+              <a:t>•  인간평가 (Plausibility) 미수행 — IRB 절차 필요 ★ 1순위</a:t>
+            </a:r>
+          </a:p>
+          <a:p>
+            <a:pPr algn="l"/>
+            <a:r>
+              <a:rPr sz="1300" b="0">
+                <a:ea typeface="Malgun Gothic"/>
+                <a:latin typeface="Malgun Gothic"/>
+              </a:rPr>
+              <a:t>•  Generic RAG baseline 미비교 — Counterfactual 정당성 보강 ★ 2순위</a:t>
+            </a:r>
+          </a:p>
+          <a:p>
+            <a:pPr algn="l"/>
+            <a:r>
+              <a:rPr sz="1300" b="0">
+                <a:ea typeface="Malgun Gothic"/>
+                <a:latin typeface="Malgun Gothic"/>
+              </a:rPr>
+              <a:t>•  보조 테이블 2/6개 활용 (Step 3-B) — 4개 잔여</a:t>
+            </a:r>
+          </a:p>
+          <a:p>
+            <a:pPr algn="l"/>
+            <a:r>
+              <a:rPr sz="1300" b="0">
+                <a:ea typeface="Malgun Gothic"/>
+                <a:latin typeface="Malgun Gothic"/>
+              </a:rPr>
+              <a:t>•  Bureau의 SHAP 미진입 — EXT_SOURCE 응축 가설 검증 필요</a:t>
+            </a:r>
+          </a:p>
+          <a:p>
+            <a:pPr algn="l"/>
+            <a:r>
+              <a:rPr sz="1300" b="0">
+                <a:ea typeface="Malgun Gothic"/>
+                <a:latin typeface="Malgun Gothic"/>
+              </a:rPr>
+              <a:t>•  TabNet-only 컨텍스트 ablation 미수행 (3-way)</a:t>
+            </a:r>
+          </a:p>
+          <a:p>
+            <a:pPr algn="l"/>
+            <a:r>
+              <a:rPr sz="1300" b="0">
+                <a:ea typeface="Malgun Gothic"/>
+                <a:latin typeface="Malgun Gothic"/>
+              </a:rPr>
+              <a:t>•  데이터 단일 (Home Credit) — UCI German Credit 미검증</a:t>
+            </a:r>
+          </a:p>
+        </p:txBody>
+      </p:sp>
+      <p:sp>
+        <p:nvSpPr>
+          <p:cNvPr id="8" name="TextBox 7"/>
+          <p:cNvSpPr txBox="1"/>
+          <p:nvPr/>
+        </p:nvSpPr>
+        <p:spPr>
+          <a:xfrm>
+            <a:off x="6120000" y="1080000"/>
+            <a:ext cx="5400000" cy="360000"/>
+          </a:xfrm>
+          <a:prstGeom prst="rect">
+            <a:avLst/>
+          </a:prstGeom>
+          <a:noFill/>
+        </p:spPr>
+        <p:txBody>
+          <a:bodyPr wrap="square">
+            <a:spAutoFit/>
+          </a:bodyPr>
+          <a:lstStyle/>
+          <a:p>
+            <a:r>
+              <a:rPr sz="1600" b="1">
+                <a:solidFill>
+                  <a:srgbClr val="55A868"/>
+                </a:solidFill>
+                <a:ea typeface="Malgun Gothic"/>
+                <a:latin typeface="Malgun Gothic"/>
+              </a:rPr>
+              <a:t>향후 계획</a:t>
+            </a:r>
+          </a:p>
+        </p:txBody>
+      </p:sp>
+      <p:sp>
+        <p:nvSpPr>
+          <p:cNvPr id="9" name="TextBox 8"/>
+          <p:cNvSpPr txBox="1"/>
+          <p:nvPr/>
+        </p:nvSpPr>
+        <p:spPr>
+          <a:xfrm>
+            <a:off x="6300000" y="1440000"/>
+            <a:ext cx="5400000" cy="4680000"/>
+          </a:xfrm>
+          <a:prstGeom prst="rect">
+            <a:avLst/>
+          </a:prstGeom>
+          <a:noFill/>
+        </p:spPr>
+        <p:txBody>
+          <a:bodyPr wrap="square">
+            <a:spAutoFit/>
+          </a:bodyPr>
+          <a:lstStyle/>
+          <a:p>
+            <a:pPr algn="l"/>
+            <a:r>
+              <a:rPr sz="1300" b="0">
+                <a:ea typeface="Malgun Gothic"/>
+                <a:latin typeface="Malgun Gothic"/>
+              </a:rPr>
+              <a:t>•  인간 평가 (Plausibility) — IRB + 5점 척도, Cohen's κ ★ 1순위</a:t>
+            </a:r>
+          </a:p>
+          <a:p>
+            <a:pPr algn="l"/>
+            <a:r>
+              <a:rPr sz="1300" b="0">
+                <a:ea typeface="Malgun Gothic"/>
+                <a:latin typeface="Malgun Gothic"/>
+              </a:rPr>
+              <a:t>•  Generic RAG baseline (도메인 일반 지식) ★ 2순위</a:t>
+            </a:r>
+          </a:p>
+          <a:p>
+            <a:pPr algn="l"/>
+            <a:r>
+              <a:rPr sz="1300" b="0">
+                <a:ea typeface="Malgun Gothic"/>
+                <a:latin typeface="Malgun Gothic"/>
+              </a:rPr>
+              <a:t>•  UCI German Credit 일반화</a:t>
+            </a:r>
+          </a:p>
+          <a:p>
+            <a:pPr algn="l"/>
+            <a:r>
+              <a:rPr sz="1300" b="0">
+                <a:ea typeface="Malgun Gothic"/>
+                <a:latin typeface="Malgun Gothic"/>
+              </a:rPr>
+              <a:t>•  Fusion 표본 100명 확장 + counterfactual 결합</a:t>
+            </a:r>
+          </a:p>
+          <a:p>
+            <a:pPr algn="l"/>
+            <a:r>
+              <a:rPr sz="1300" b="0">
+                <a:ea typeface="Malgun Gothic"/>
+                <a:latin typeface="Malgun Gothic"/>
+              </a:rPr>
+              <a:t>•  3-way ablation: SHAP-only / Attn-only / Fusion</a:t>
+            </a:r>
+          </a:p>
+          <a:p>
+            <a:pPr algn="l"/>
+            <a:r>
+              <a:rPr sz="1300" b="0">
+                <a:ea typeface="Malgun Gothic"/>
+                <a:latin typeface="Malgun Gothic"/>
+              </a:rPr>
+              <a:t>•  잔여 보조 테이블 4개로 AUROC 0.78+</a:t>
+            </a:r>
+          </a:p>
+          <a:p>
+            <a:pPr algn="l"/>
+            <a:r>
+              <a:rPr sz="1300" b="0">
+                <a:ea typeface="Malgun Gothic"/>
+                <a:latin typeface="Malgun Gothic"/>
+              </a:rPr>
+              <a:t>•  Adversarial Debiasing (TabNet head) — Reweighing 보완</a:t>
+            </a:r>
+          </a:p>
+        </p:txBody>
+      </p:sp>
+    </p:spTree>
+  </p:cSld>
+  <p:clrMapOvr>
+    <a:masterClrMapping/>
+  </p:clrMapOvr>
+</p:sld>
+</file>
+
+<file path=ppt/slides/slide21.xml><?xml version="1.0" encoding="utf-8"?>
 <p:sld xmlns:a="http://schemas.openxmlformats.org/drawingml/2006/main" xmlns:p="http://schemas.openxmlformats.org/presentationml/2006/main" xmlns:r="http://schemas.openxmlformats.org/officeDocument/2006/relationships">
   <p:cSld>
     <p:spTree>

--- a/paper/midterm_slides.pptx
+++ b/paper/midterm_slides.pptx
@@ -26,6 +26,7 @@
     <p:sldId id="274" r:id="rId25"/>
     <p:sldId id="275" r:id="rId26"/>
     <p:sldId id="276" r:id="rId27"/>
+    <p:sldId id="277" r:id="rId28"/>
   </p:sldIdLst>
   <p:sldSz cx="12191695" cy="6858000" type="screen4x3"/>
   <p:notesSz cx="6858000" cy="9144000"/>
@@ -9360,7 +9361,7 @@
                 <a:ea typeface="Malgun Gothic"/>
                 <a:latin typeface="Malgun Gothic"/>
               </a:rPr>
-              <a:t>18. 종합 — 본 연구의 가치 5가지</a:t>
+              <a:t>18. ★ Step 5-B — Generic RAG Baseline (4-way)</a:t>
             </a:r>
           </a:p>
         </p:txBody>
@@ -9395,7 +9396,7 @@
                 <a:ea typeface="Malgun Gothic"/>
                 <a:latin typeface="Malgun Gothic"/>
               </a:rPr>
-              <a:t>Step 1 + 2-A + 3-B + 3-C + 5-A 마무리</a:t>
+              <a:t>환각 차단의 본질 정량 분석 — SHAP-RAG의 진짜 차별성 재정의</a:t>
             </a:r>
           </a:p>
         </p:txBody>
@@ -9443,377 +9444,40 @@
           </a:p>
         </p:txBody>
       </p:sp>
-      <p:sp>
-        <p:nvSpPr>
-          <p:cNvPr id="6" name="Rounded Rectangle 5"/>
-          <p:cNvSpPr/>
-          <p:nvPr/>
-        </p:nvSpPr>
-        <p:spPr>
-          <a:xfrm>
-            <a:off x="605847" y="1260000"/>
-            <a:ext cx="2052000" cy="3060000"/>
-          </a:xfrm>
-          <a:prstGeom prst="roundRect">
-            <a:avLst/>
-          </a:prstGeom>
-          <a:solidFill>
-            <a:srgbClr val="4C72B0"/>
-          </a:solidFill>
-          <a:ln>
-            <a:noFill/>
-          </a:ln>
-        </p:spPr>
-        <p:style>
-          <a:lnRef idx="1">
-            <a:schemeClr val="accent1"/>
-          </a:lnRef>
-          <a:fillRef idx="3">
-            <a:schemeClr val="accent1"/>
-          </a:fillRef>
-          <a:effectRef idx="2">
-            <a:schemeClr val="accent1"/>
-          </a:effectRef>
-          <a:fontRef idx="minor">
-            <a:schemeClr val="lt1"/>
-          </a:fontRef>
-        </p:style>
-        <p:txBody>
-          <a:bodyPr rtlCol="0" anchor="ctr" lIns="216000" rIns="216000" tIns="216000"/>
-          <a:lstStyle/>
-          <a:p>
-            <a:pPr algn="ctr"/>
-            <a:r>
-              <a:rPr sz="2200" b="1">
-                <a:solidFill>
-                  <a:srgbClr val="FFFFFF"/>
-                </a:solidFill>
-                <a:ea typeface="Malgun Gothic"/>
-                <a:latin typeface="Malgun Gothic"/>
-              </a:rPr>
-              <a:t>예측 성능</a:t>
-            </a:r>
-          </a:p>
-          <a:p>
-            <a:pPr algn="ctr"/>
-            <a:r>
-              <a:rPr sz="1200" b="0">
-                <a:solidFill>
-                  <a:srgbClr val="FFFFFF"/>
-                </a:solidFill>
-                <a:ea typeface="Malgun Gothic"/>
-                <a:latin typeface="Malgun Gothic"/>
-              </a:rPr>
-              <a:t>
-XGBoost 0.7587
-→ 0.7755
-(Step 3-B aux, +2.22%)
-TabNet 어텐션
-융합 컨텍스트에 통합</a:t>
-            </a:r>
-          </a:p>
-        </p:txBody>
-      </p:sp>
-      <p:sp>
-        <p:nvSpPr>
-          <p:cNvPr id="7" name="Rounded Rectangle 6"/>
-          <p:cNvSpPr/>
-          <p:nvPr/>
-        </p:nvSpPr>
-        <p:spPr>
-          <a:xfrm>
-            <a:off x="2837847" y="1260000"/>
-            <a:ext cx="2052000" cy="3060000"/>
-          </a:xfrm>
-          <a:prstGeom prst="roundRect">
-            <a:avLst/>
-          </a:prstGeom>
-          <a:solidFill>
-            <a:srgbClr val="55A868"/>
-          </a:solidFill>
-          <a:ln>
-            <a:noFill/>
-          </a:ln>
-        </p:spPr>
-        <p:style>
-          <a:lnRef idx="1">
-            <a:schemeClr val="accent1"/>
-          </a:lnRef>
-          <a:fillRef idx="3">
-            <a:schemeClr val="accent1"/>
-          </a:fillRef>
-          <a:effectRef idx="2">
-            <a:schemeClr val="accent1"/>
-          </a:effectRef>
-          <a:fontRef idx="minor">
-            <a:schemeClr val="lt1"/>
-          </a:fontRef>
-        </p:style>
-        <p:txBody>
-          <a:bodyPr rtlCol="0" anchor="ctr" lIns="216000" rIns="216000" tIns="216000"/>
-          <a:lstStyle/>
-          <a:p>
-            <a:pPr algn="ctr"/>
-            <a:r>
-              <a:rPr sz="2200" b="1">
-                <a:solidFill>
-                  <a:srgbClr val="FFFFFF"/>
-                </a:solidFill>
-                <a:ea typeface="Malgun Gothic"/>
-                <a:latin typeface="Malgun Gothic"/>
-              </a:rPr>
-              <a:t>해석 융합</a:t>
-            </a:r>
-          </a:p>
-          <a:p>
-            <a:pPr algn="ctr"/>
-            <a:r>
-              <a:rPr sz="1200" b="0">
-                <a:solidFill>
-                  <a:srgbClr val="FFFFFF"/>
-                </a:solidFill>
-                <a:ea typeface="Malgun Gothic"/>
-                <a:latin typeface="Malgun Gothic"/>
-              </a:rPr>
-              <a:t>
-ρ=0.117 부분 일관
-+ instance-level
-3+ 동의 22% / 4+ 동의 0%
-agreement-aware
-컨텍스트로 LLM에
-의미 라벨 전달</a:t>
-            </a:r>
-          </a:p>
-        </p:txBody>
-      </p:sp>
-      <p:sp>
-        <p:nvSpPr>
-          <p:cNvPr id="8" name="Rounded Rectangle 7"/>
-          <p:cNvSpPr/>
-          <p:nvPr/>
-        </p:nvSpPr>
-        <p:spPr>
-          <a:xfrm>
-            <a:off x="5069847" y="1260000"/>
-            <a:ext cx="2052000" cy="3060000"/>
-          </a:xfrm>
-          <a:prstGeom prst="roundRect">
-            <a:avLst/>
-          </a:prstGeom>
-          <a:solidFill>
-            <a:srgbClr val="C44E52"/>
-          </a:solidFill>
-          <a:ln>
-            <a:noFill/>
-          </a:ln>
-        </p:spPr>
-        <p:style>
-          <a:lnRef idx="1">
-            <a:schemeClr val="accent1"/>
-          </a:lnRef>
-          <a:fillRef idx="3">
-            <a:schemeClr val="accent1"/>
-          </a:fillRef>
-          <a:effectRef idx="2">
-            <a:schemeClr val="accent1"/>
-          </a:effectRef>
-          <a:fontRef idx="minor">
-            <a:schemeClr val="lt1"/>
-          </a:fontRef>
-        </p:style>
-        <p:txBody>
-          <a:bodyPr rtlCol="0" anchor="ctr" lIns="216000" rIns="216000" tIns="216000"/>
-          <a:lstStyle/>
-          <a:p>
-            <a:pPr algn="ctr"/>
-            <a:r>
-              <a:rPr sz="2200" b="1">
-                <a:solidFill>
-                  <a:srgbClr val="FFFFFF"/>
-                </a:solidFill>
-                <a:ea typeface="Malgun Gothic"/>
-                <a:latin typeface="Malgun Gothic"/>
-              </a:rPr>
-              <a:t>환각 차단</a:t>
-            </a:r>
-          </a:p>
-          <a:p>
-            <a:pPr algn="ctr"/>
-            <a:r>
-              <a:rPr sz="1200" b="0">
-                <a:solidFill>
-                  <a:srgbClr val="FFFFFF"/>
-                </a:solidFill>
-                <a:ea typeface="Malgun Gothic"/>
-                <a:latin typeface="Malgun Gothic"/>
-              </a:rPr>
-              <a:t>
-Halluc 0/100
-(Step 1/2-A)
-→ 0/30 (3-C-1)
-Baseline 45.5% vs
-XAI-RAG 0%
-NLI contradiction
-−0.14~−0.18</a:t>
-            </a:r>
-          </a:p>
-        </p:txBody>
-      </p:sp>
-      <p:sp>
-        <p:nvSpPr>
-          <p:cNvPr id="9" name="Rounded Rectangle 8"/>
-          <p:cNvSpPr/>
-          <p:nvPr/>
-        </p:nvSpPr>
-        <p:spPr>
-          <a:xfrm>
-            <a:off x="7301847" y="1260000"/>
-            <a:ext cx="2052000" cy="3060000"/>
-          </a:xfrm>
-          <a:prstGeom prst="roundRect">
-            <a:avLst/>
-          </a:prstGeom>
-          <a:solidFill>
-            <a:srgbClr val="DD8552"/>
-          </a:solidFill>
-          <a:ln>
-            <a:noFill/>
-          </a:ln>
-        </p:spPr>
-        <p:style>
-          <a:lnRef idx="1">
-            <a:schemeClr val="accent1"/>
-          </a:lnRef>
-          <a:fillRef idx="3">
-            <a:schemeClr val="accent1"/>
-          </a:fillRef>
-          <a:effectRef idx="2">
-            <a:schemeClr val="accent1"/>
-          </a:effectRef>
-          <a:fontRef idx="minor">
-            <a:schemeClr val="lt1"/>
-          </a:fontRef>
-        </p:style>
-        <p:txBody>
-          <a:bodyPr rtlCol="0" anchor="ctr" lIns="216000" rIns="216000" tIns="216000"/>
-          <a:lstStyle/>
-          <a:p>
-            <a:pPr algn="ctr"/>
-            <a:r>
-              <a:rPr sz="2200" b="1">
-                <a:solidFill>
-                  <a:srgbClr val="FFFFFF"/>
-                </a:solidFill>
-                <a:ea typeface="Malgun Gothic"/>
-                <a:latin typeface="Malgun Gothic"/>
-              </a:rPr>
-              <a:t>완결성·충실성</a:t>
-            </a:r>
-          </a:p>
-          <a:p>
-            <a:pPr algn="ctr"/>
-            <a:r>
-              <a:rPr sz="1200" b="0">
-                <a:solidFill>
-                  <a:srgbClr val="FFFFFF"/>
-                </a:solidFill>
-                <a:ea typeface="Malgun Gothic"/>
-                <a:latin typeface="Malgun Gothic"/>
-              </a:rPr>
-              <a:t>
-G-Eval Completeness
-Claude +0.67~+0.80
-Gemini +0.90~+1.10
-NLI Entailment
-+0.12~+0.21
-→ 다층·다judge
-일관 향상</a:t>
-            </a:r>
-          </a:p>
-        </p:txBody>
-      </p:sp>
-      <p:sp>
-        <p:nvSpPr>
-          <p:cNvPr id="10" name="Rounded Rectangle 9"/>
-          <p:cNvSpPr/>
-          <p:nvPr/>
-        </p:nvSpPr>
-        <p:spPr>
-          <a:xfrm>
-            <a:off x="9533847" y="1260000"/>
-            <a:ext cx="2052000" cy="3060000"/>
-          </a:xfrm>
-          <a:prstGeom prst="roundRect">
-            <a:avLst/>
-          </a:prstGeom>
-          <a:solidFill>
-            <a:srgbClr val="8C71B7"/>
-          </a:solidFill>
-          <a:ln>
-            <a:noFill/>
-          </a:ln>
-        </p:spPr>
-        <p:style>
-          <a:lnRef idx="1">
-            <a:schemeClr val="accent1"/>
-          </a:lnRef>
-          <a:fillRef idx="3">
-            <a:schemeClr val="accent1"/>
-          </a:fillRef>
-          <a:effectRef idx="2">
-            <a:schemeClr val="accent1"/>
-          </a:effectRef>
-          <a:fontRef idx="minor">
-            <a:schemeClr val="lt1"/>
-          </a:fontRef>
-        </p:style>
-        <p:txBody>
-          <a:bodyPr rtlCol="0" anchor="ctr" lIns="216000" rIns="216000" tIns="216000"/>
-          <a:lstStyle/>
-          <a:p>
-            <a:pPr algn="ctr"/>
-            <a:r>
-              <a:rPr sz="2200" b="1">
-                <a:solidFill>
-                  <a:srgbClr val="FFFFFF"/>
-                </a:solidFill>
-                <a:ea typeface="Malgun Gothic"/>
-                <a:latin typeface="Malgun Gothic"/>
-              </a:rPr>
-              <a:t>공정성 mitigation</a:t>
-            </a:r>
-          </a:p>
-          <a:p>
-            <a:pPr algn="ctr"/>
-            <a:r>
-              <a:rPr sz="1200" b="0">
-                <a:solidFill>
-                  <a:srgbClr val="FFFFFF"/>
-                </a:solidFill>
-                <a:ea typeface="Malgun Gothic"/>
-                <a:latin typeface="Malgun Gothic"/>
-              </a:rPr>
-              <a:t>
-Day 5: 8/8 4/5 rule
-위반 진단
-Reweighing:
-4/4 케이스 통과 ✅
-aux 데이터 trade-off
-사라짐 (+0.003 AUROC)</a:t>
-            </a:r>
-          </a:p>
-        </p:txBody>
-      </p:sp>
-      <p:sp>
-        <p:nvSpPr>
-          <p:cNvPr id="11" name="TextBox 10"/>
+      <p:pic>
+        <p:nvPicPr>
+          <p:cNvPr id="6" name="Picture 5" descr="35_generic_rag_3way.png"/>
+          <p:cNvPicPr>
+            <a:picLocks noChangeAspect="1"/>
+          </p:cNvPicPr>
+          <p:nvPr/>
+        </p:nvPicPr>
+        <p:blipFill>
+          <a:blip r:embed="rId2"/>
+          <a:stretch>
+            <a:fillRect/>
+          </a:stretch>
+        </p:blipFill>
+        <p:spPr>
+          <a:xfrm>
+            <a:off x="216000" y="1080000"/>
+            <a:ext cx="6840000" cy="3960000"/>
+          </a:xfrm>
+          <a:prstGeom prst="rect">
+            <a:avLst/>
+          </a:prstGeom>
+        </p:spPr>
+      </p:pic>
+      <p:sp>
+        <p:nvSpPr>
+          <p:cNvPr id="7" name="TextBox 6"/>
           <p:cNvSpPr txBox="1"/>
           <p:nvPr/>
         </p:nvSpPr>
         <p:spPr>
           <a:xfrm>
-            <a:off x="360000" y="4680000"/>
-            <a:ext cx="11160000" cy="540000"/>
+            <a:off x="7380000" y="1080000"/>
+            <a:ext cx="4680000" cy="360000"/>
           </a:xfrm>
           <a:prstGeom prst="rect">
             <a:avLst/>
@@ -9826,30 +9490,29 @@
           </a:bodyPr>
           <a:lstStyle/>
           <a:p>
-            <a:pPr algn="ctr"/>
-            <a:r>
-              <a:rPr sz="1600" b="1">
+            <a:r>
+              <a:rPr sz="1400" b="1">
                 <a:solidFill>
                   <a:srgbClr val="1F3A68"/>
                 </a:solidFill>
                 <a:ea typeface="Malgun Gothic"/>
                 <a:latin typeface="Malgun Gothic"/>
               </a:rPr>
-              <a:t>한 줄 메시지</a:t>
-            </a:r>
-          </a:p>
-        </p:txBody>
-      </p:sp>
-      <p:sp>
-        <p:nvSpPr>
-          <p:cNvPr id="12" name="TextBox 11"/>
+              <a:t>동기 — Counterfactual baseline 정당성</a:t>
+            </a:r>
+          </a:p>
+        </p:txBody>
+      </p:sp>
+      <p:sp>
+        <p:nvSpPr>
+          <p:cNvPr id="8" name="TextBox 7"/>
           <p:cNvSpPr txBox="1"/>
           <p:nvPr/>
         </p:nvSpPr>
         <p:spPr>
           <a:xfrm>
-            <a:off x="360000" y="5220000"/>
-            <a:ext cx="11160000" cy="720000"/>
+            <a:off x="7452000" y="1440000"/>
+            <a:ext cx="4680000" cy="900000"/>
           </a:xfrm>
           <a:prstGeom prst="rect">
             <a:avLst/>
@@ -9862,17 +9525,178 @@
           </a:bodyPr>
           <a:lstStyle/>
           <a:p>
-            <a:pPr algn="ctr"/>
-            <a:r>
-              <a:rPr sz="1800" b="1">
-                <a:solidFill>
-                  <a:srgbClr val="222222"/>
-                </a:solidFill>
-                <a:ea typeface="Malgun Gothic"/>
-                <a:latin typeface="Malgun Gothic"/>
-              </a:rPr>
-              <a:t>"SHAP 컨텍스트를 LLM의 검색된 근거로 재정의하면,
-LLM 종속성 없이 환각이 0이 되는 자연어 설명을 생성할 수 있다."</a:t>
+            <a:pPr algn="l"/>
+            <a:r>
+              <a:rPr sz="1100" b="0">
+                <a:ea typeface="Malgun Gothic"/>
+                <a:latin typeface="Malgun Gothic"/>
+              </a:rPr>
+              <a:t>•  "Halluc 0% vs no-SHAP 45.5%"는 trivial 반박 가능</a:t>
+            </a:r>
+          </a:p>
+          <a:p>
+            <a:pPr algn="l"/>
+            <a:r>
+              <a:rPr sz="1100" b="0">
+                <a:ea typeface="Malgun Gothic"/>
+                <a:latin typeface="Malgun Gothic"/>
+              </a:rPr>
+              <a:t>•  Generic RAG (raw + 도메인 chunks + hard constraints, SHAP X)</a:t>
+            </a:r>
+          </a:p>
+          <a:p>
+            <a:pPr algn="l"/>
+            <a:r>
+              <a:rPr sz="1100" b="0">
+                <a:ea typeface="Malgun Gothic"/>
+                <a:latin typeface="Malgun Gothic"/>
+              </a:rPr>
+              <a:t>•  → 같은 정보 + 제약, SHAP만 빠진 fair 비교</a:t>
+            </a:r>
+          </a:p>
+        </p:txBody>
+      </p:sp>
+      <p:sp>
+        <p:nvSpPr>
+          <p:cNvPr id="9" name="TextBox 8"/>
+          <p:cNvSpPr txBox="1"/>
+          <p:nvPr/>
+        </p:nvSpPr>
+        <p:spPr>
+          <a:xfrm>
+            <a:off x="7380000" y="2520000"/>
+            <a:ext cx="4680000" cy="360000"/>
+          </a:xfrm>
+          <a:prstGeom prst="rect">
+            <a:avLst/>
+          </a:prstGeom>
+          <a:noFill/>
+        </p:spPr>
+        <p:txBody>
+          <a:bodyPr wrap="square">
+            <a:spAutoFit/>
+          </a:bodyPr>
+          <a:lstStyle/>
+          <a:p>
+            <a:r>
+              <a:rPr sz="1400" b="1">
+                <a:solidFill>
+                  <a:srgbClr val="C44E52"/>
+                </a:solidFill>
+                <a:ea typeface="Malgun Gothic"/>
+                <a:latin typeface="Malgun Gothic"/>
+              </a:rPr>
+              <a:t>결과 — 4단계 명확한 차이</a:t>
+            </a:r>
+          </a:p>
+        </p:txBody>
+      </p:sp>
+      <p:sp>
+        <p:nvSpPr>
+          <p:cNvPr id="10" name="TextBox 9"/>
+          <p:cNvSpPr txBox="1"/>
+          <p:nvPr/>
+        </p:nvSpPr>
+        <p:spPr>
+          <a:xfrm>
+            <a:off x="7452000" y="2880000"/>
+            <a:ext cx="4680000" cy="1980000"/>
+          </a:xfrm>
+          <a:prstGeom prst="rect">
+            <a:avLst/>
+          </a:prstGeom>
+          <a:noFill/>
+        </p:spPr>
+        <p:txBody>
+          <a:bodyPr wrap="square">
+            <a:spAutoFit/>
+          </a:bodyPr>
+          <a:lstStyle/>
+          <a:p>
+            <a:pPr algn="l"/>
+            <a:r>
+              <a:rPr sz="1100" b="0">
+                <a:ea typeface="Malgun Gothic"/>
+                <a:latin typeface="Malgun Gothic"/>
+              </a:rPr>
+              <a:t>•  Halluc: no_shap 16.7% / 다른 3개 0% (환각 = hard constraints 효과)</a:t>
+            </a:r>
+          </a:p>
+          <a:p>
+            <a:pPr algn="l"/>
+            <a:r>
+              <a:rPr sz="1100" b="0">
+                <a:ea typeface="Malgun Gothic"/>
+                <a:latin typeface="Malgun Gothic"/>
+              </a:rPr>
+              <a:t>•  NLI Entailment ★ 4단계:</a:t>
+            </a:r>
+          </a:p>
+          <a:p>
+            <a:pPr algn="l"/>
+            <a:r>
+              <a:rPr sz="1100" b="0">
+                <a:ea typeface="Malgun Gothic"/>
+                <a:latin typeface="Malgun Gothic"/>
+              </a:rPr>
+              <a:t>•    no_shap 0.27~0.43 → generic 0.36~0.37</a:t>
+            </a:r>
+          </a:p>
+          <a:p>
+            <a:pPr algn="l"/>
+            <a:r>
+              <a:rPr sz="1100" b="0">
+                <a:ea typeface="Malgun Gothic"/>
+                <a:latin typeface="Malgun Gothic"/>
+              </a:rPr>
+              <a:t>•    → shaponly 0.41~0.51 → ★ fusion 0.62~0.62</a:t>
+            </a:r>
+          </a:p>
+          <a:p>
+            <a:pPr algn="l"/>
+            <a:r>
+              <a:rPr sz="1100" b="0">
+                <a:ea typeface="Malgun Gothic"/>
+                <a:latin typeface="Malgun Gothic"/>
+              </a:rPr>
+              <a:t>•  val_match: 0.59→0.73→0.85→0.90 (Anthropic)</a:t>
+            </a:r>
+          </a:p>
+        </p:txBody>
+      </p:sp>
+      <p:sp>
+        <p:nvSpPr>
+          <p:cNvPr id="11" name="TextBox 10"/>
+          <p:cNvSpPr txBox="1"/>
+          <p:nvPr/>
+        </p:nvSpPr>
+        <p:spPr>
+          <a:xfrm>
+            <a:off x="7380000" y="4860000"/>
+            <a:ext cx="4680000" cy="1260000"/>
+          </a:xfrm>
+          <a:prstGeom prst="rect">
+            <a:avLst/>
+          </a:prstGeom>
+          <a:noFill/>
+        </p:spPr>
+        <p:txBody>
+          <a:bodyPr wrap="square">
+            <a:spAutoFit/>
+          </a:bodyPr>
+          <a:lstStyle/>
+          <a:p>
+            <a:r>
+              <a:rPr sz="1100" b="0">
+                <a:solidFill>
+                  <a:srgbClr val="55A868"/>
+                </a:solidFill>
+                <a:ea typeface="Malgun Gothic"/>
+                <a:latin typeface="Malgun Gothic"/>
+              </a:rPr>
+              <a:t>★ 본 연구의 진짜 차별성 = 의미적 충실성 + 값 정확 인용
+★ 환각 차단은 Generic RAG로 모방 가능 (정직 인정)
+★ 약점 #3 정량 해소</a:t>
             </a:r>
           </a:p>
         </p:txBody>
@@ -10334,7 +10158,7 @@
                 <a:ea typeface="Malgun Gothic"/>
                 <a:latin typeface="Malgun Gothic"/>
               </a:rPr>
-              <a:t>19. 한계와 향후 계획</a:t>
+              <a:t>19. 종합 — 본 연구의 가치 6가지</a:t>
             </a:r>
           </a:p>
         </p:txBody>
@@ -10369,7 +10193,7 @@
                 <a:ea typeface="Malgun Gothic"/>
                 <a:latin typeface="Malgun Gothic"/>
               </a:rPr>
-              <a:t>Step 3-B/3-C/5-A 완료 / 잔여는 본 논문 확장</a:t>
+              <a:t>Step 1 + 2-A + 3-B + 3-C + 5-A + 5-B 마무리</a:t>
             </a:r>
           </a:p>
         </p:txBody>
@@ -10419,14 +10243,376 @@
       </p:sp>
       <p:sp>
         <p:nvSpPr>
-          <p:cNvPr id="6" name="TextBox 5"/>
+          <p:cNvPr id="6" name="Rounded Rectangle 5"/>
+          <p:cNvSpPr/>
+          <p:nvPr/>
+        </p:nvSpPr>
+        <p:spPr>
+          <a:xfrm>
+            <a:off x="605847" y="1260000"/>
+            <a:ext cx="2052000" cy="3060000"/>
+          </a:xfrm>
+          <a:prstGeom prst="roundRect">
+            <a:avLst/>
+          </a:prstGeom>
+          <a:solidFill>
+            <a:srgbClr val="4C72B0"/>
+          </a:solidFill>
+          <a:ln>
+            <a:noFill/>
+          </a:ln>
+        </p:spPr>
+        <p:style>
+          <a:lnRef idx="1">
+            <a:schemeClr val="accent1"/>
+          </a:lnRef>
+          <a:fillRef idx="3">
+            <a:schemeClr val="accent1"/>
+          </a:fillRef>
+          <a:effectRef idx="2">
+            <a:schemeClr val="accent1"/>
+          </a:effectRef>
+          <a:fontRef idx="minor">
+            <a:schemeClr val="lt1"/>
+          </a:fontRef>
+        </p:style>
+        <p:txBody>
+          <a:bodyPr rtlCol="0" anchor="ctr" lIns="216000" rIns="216000" tIns="216000"/>
+          <a:lstStyle/>
+          <a:p>
+            <a:pPr algn="ctr"/>
+            <a:r>
+              <a:rPr sz="2200" b="1">
+                <a:solidFill>
+                  <a:srgbClr val="FFFFFF"/>
+                </a:solidFill>
+                <a:ea typeface="Malgun Gothic"/>
+                <a:latin typeface="Malgun Gothic"/>
+              </a:rPr>
+              <a:t>예측 성능</a:t>
+            </a:r>
+          </a:p>
+          <a:p>
+            <a:pPr algn="ctr"/>
+            <a:r>
+              <a:rPr sz="1200" b="0">
+                <a:solidFill>
+                  <a:srgbClr val="FFFFFF"/>
+                </a:solidFill>
+                <a:ea typeface="Malgun Gothic"/>
+                <a:latin typeface="Malgun Gothic"/>
+              </a:rPr>
+              <a:t>
+XGBoost 0.7587
+→ 0.7755
+(Step 3-B aux, +2.22%)
+TabNet 어텐션
+융합 컨텍스트에 통합</a:t>
+            </a:r>
+          </a:p>
+        </p:txBody>
+      </p:sp>
+      <p:sp>
+        <p:nvSpPr>
+          <p:cNvPr id="7" name="Rounded Rectangle 6"/>
+          <p:cNvSpPr/>
+          <p:nvPr/>
+        </p:nvSpPr>
+        <p:spPr>
+          <a:xfrm>
+            <a:off x="2837847" y="1260000"/>
+            <a:ext cx="2052000" cy="3060000"/>
+          </a:xfrm>
+          <a:prstGeom prst="roundRect">
+            <a:avLst/>
+          </a:prstGeom>
+          <a:solidFill>
+            <a:srgbClr val="55A868"/>
+          </a:solidFill>
+          <a:ln>
+            <a:noFill/>
+          </a:ln>
+        </p:spPr>
+        <p:style>
+          <a:lnRef idx="1">
+            <a:schemeClr val="accent1"/>
+          </a:lnRef>
+          <a:fillRef idx="3">
+            <a:schemeClr val="accent1"/>
+          </a:fillRef>
+          <a:effectRef idx="2">
+            <a:schemeClr val="accent1"/>
+          </a:effectRef>
+          <a:fontRef idx="minor">
+            <a:schemeClr val="lt1"/>
+          </a:fontRef>
+        </p:style>
+        <p:txBody>
+          <a:bodyPr rtlCol="0" anchor="ctr" lIns="216000" rIns="216000" tIns="216000"/>
+          <a:lstStyle/>
+          <a:p>
+            <a:pPr algn="ctr"/>
+            <a:r>
+              <a:rPr sz="2200" b="1">
+                <a:solidFill>
+                  <a:srgbClr val="FFFFFF"/>
+                </a:solidFill>
+                <a:ea typeface="Malgun Gothic"/>
+                <a:latin typeface="Malgun Gothic"/>
+              </a:rPr>
+              <a:t>해석 융합</a:t>
+            </a:r>
+          </a:p>
+          <a:p>
+            <a:pPr algn="ctr"/>
+            <a:r>
+              <a:rPr sz="1200" b="0">
+                <a:solidFill>
+                  <a:srgbClr val="FFFFFF"/>
+                </a:solidFill>
+                <a:ea typeface="Malgun Gothic"/>
+                <a:latin typeface="Malgun Gothic"/>
+              </a:rPr>
+              <a:t>
+ρ=0.117 부분 일관
++ instance-level
+3+ 동의 22% / 4+ 동의 0%
+agreement-aware
+컨텍스트로 LLM에
+의미 라벨 전달</a:t>
+            </a:r>
+          </a:p>
+        </p:txBody>
+      </p:sp>
+      <p:sp>
+        <p:nvSpPr>
+          <p:cNvPr id="8" name="Rounded Rectangle 7"/>
+          <p:cNvSpPr/>
+          <p:nvPr/>
+        </p:nvSpPr>
+        <p:spPr>
+          <a:xfrm>
+            <a:off x="5069847" y="1260000"/>
+            <a:ext cx="2052000" cy="3060000"/>
+          </a:xfrm>
+          <a:prstGeom prst="roundRect">
+            <a:avLst/>
+          </a:prstGeom>
+          <a:solidFill>
+            <a:srgbClr val="C44E52"/>
+          </a:solidFill>
+          <a:ln>
+            <a:noFill/>
+          </a:ln>
+        </p:spPr>
+        <p:style>
+          <a:lnRef idx="1">
+            <a:schemeClr val="accent1"/>
+          </a:lnRef>
+          <a:fillRef idx="3">
+            <a:schemeClr val="accent1"/>
+          </a:fillRef>
+          <a:effectRef idx="2">
+            <a:schemeClr val="accent1"/>
+          </a:effectRef>
+          <a:fontRef idx="minor">
+            <a:schemeClr val="lt1"/>
+          </a:fontRef>
+        </p:style>
+        <p:txBody>
+          <a:bodyPr rtlCol="0" anchor="ctr" lIns="216000" rIns="216000" tIns="216000"/>
+          <a:lstStyle/>
+          <a:p>
+            <a:pPr algn="ctr"/>
+            <a:r>
+              <a:rPr sz="2200" b="1">
+                <a:solidFill>
+                  <a:srgbClr val="FFFFFF"/>
+                </a:solidFill>
+                <a:ea typeface="Malgun Gothic"/>
+                <a:latin typeface="Malgun Gothic"/>
+              </a:rPr>
+              <a:t>환각 차단</a:t>
+            </a:r>
+          </a:p>
+          <a:p>
+            <a:pPr algn="ctr"/>
+            <a:r>
+              <a:rPr sz="1200" b="0">
+                <a:solidFill>
+                  <a:srgbClr val="FFFFFF"/>
+                </a:solidFill>
+                <a:ea typeface="Malgun Gothic"/>
+                <a:latin typeface="Malgun Gothic"/>
+              </a:rPr>
+              <a:t>
+Halluc 0/100
+(Step 1/2-A) →
+0/30 (3-C-1)
+Generic RAG도 0%
+(5-B, hard constraints
+효과 입증)
+NLI contradiction
+−0.14~−0.18</a:t>
+            </a:r>
+          </a:p>
+        </p:txBody>
+      </p:sp>
+      <p:sp>
+        <p:nvSpPr>
+          <p:cNvPr id="9" name="Rounded Rectangle 8"/>
+          <p:cNvSpPr/>
+          <p:nvPr/>
+        </p:nvSpPr>
+        <p:spPr>
+          <a:xfrm>
+            <a:off x="7301847" y="1260000"/>
+            <a:ext cx="2052000" cy="3060000"/>
+          </a:xfrm>
+          <a:prstGeom prst="roundRect">
+            <a:avLst/>
+          </a:prstGeom>
+          <a:solidFill>
+            <a:srgbClr val="DD8552"/>
+          </a:solidFill>
+          <a:ln>
+            <a:noFill/>
+          </a:ln>
+        </p:spPr>
+        <p:style>
+          <a:lnRef idx="1">
+            <a:schemeClr val="accent1"/>
+          </a:lnRef>
+          <a:fillRef idx="3">
+            <a:schemeClr val="accent1"/>
+          </a:fillRef>
+          <a:effectRef idx="2">
+            <a:schemeClr val="accent1"/>
+          </a:effectRef>
+          <a:fontRef idx="minor">
+            <a:schemeClr val="lt1"/>
+          </a:fontRef>
+        </p:style>
+        <p:txBody>
+          <a:bodyPr rtlCol="0" anchor="ctr" lIns="216000" rIns="216000" tIns="216000"/>
+          <a:lstStyle/>
+          <a:p>
+            <a:pPr algn="ctr"/>
+            <a:r>
+              <a:rPr sz="2200" b="1">
+                <a:solidFill>
+                  <a:srgbClr val="FFFFFF"/>
+                </a:solidFill>
+                <a:ea typeface="Malgun Gothic"/>
+                <a:latin typeface="Malgun Gothic"/>
+              </a:rPr>
+              <a:t>완결성·충실성</a:t>
+            </a:r>
+          </a:p>
+          <a:p>
+            <a:pPr algn="ctr"/>
+            <a:r>
+              <a:rPr sz="1200" b="0">
+                <a:solidFill>
+                  <a:srgbClr val="FFFFFF"/>
+                </a:solidFill>
+                <a:ea typeface="Malgun Gothic"/>
+                <a:latin typeface="Malgun Gothic"/>
+              </a:rPr>
+              <a:t>
+G-Eval Compl.
+Claude +0.67~+0.80
+Gemini +0.90~+1.10
+NLI Entailment 4단계:
+.27→.37→.51→.62
+(no→gen→shap→fus)
+★ fusion이 압도</a:t>
+            </a:r>
+          </a:p>
+        </p:txBody>
+      </p:sp>
+      <p:sp>
+        <p:nvSpPr>
+          <p:cNvPr id="10" name="Rounded Rectangle 9"/>
+          <p:cNvSpPr/>
+          <p:nvPr/>
+        </p:nvSpPr>
+        <p:spPr>
+          <a:xfrm>
+            <a:off x="9533847" y="1260000"/>
+            <a:ext cx="2052000" cy="3060000"/>
+          </a:xfrm>
+          <a:prstGeom prst="roundRect">
+            <a:avLst/>
+          </a:prstGeom>
+          <a:solidFill>
+            <a:srgbClr val="8C71B7"/>
+          </a:solidFill>
+          <a:ln>
+            <a:noFill/>
+          </a:ln>
+        </p:spPr>
+        <p:style>
+          <a:lnRef idx="1">
+            <a:schemeClr val="accent1"/>
+          </a:lnRef>
+          <a:fillRef idx="3">
+            <a:schemeClr val="accent1"/>
+          </a:fillRef>
+          <a:effectRef idx="2">
+            <a:schemeClr val="accent1"/>
+          </a:effectRef>
+          <a:fontRef idx="minor">
+            <a:schemeClr val="lt1"/>
+          </a:fontRef>
+        </p:style>
+        <p:txBody>
+          <a:bodyPr rtlCol="0" anchor="ctr" lIns="216000" rIns="216000" tIns="216000"/>
+          <a:lstStyle/>
+          <a:p>
+            <a:pPr algn="ctr"/>
+            <a:r>
+              <a:rPr sz="2200" b="1">
+                <a:solidFill>
+                  <a:srgbClr val="FFFFFF"/>
+                </a:solidFill>
+                <a:ea typeface="Malgun Gothic"/>
+                <a:latin typeface="Malgun Gothic"/>
+              </a:rPr>
+              <a:t>공정성 mitigation</a:t>
+            </a:r>
+          </a:p>
+          <a:p>
+            <a:pPr algn="ctr"/>
+            <a:r>
+              <a:rPr sz="1200" b="0">
+                <a:solidFill>
+                  <a:srgbClr val="FFFFFF"/>
+                </a:solidFill>
+                <a:ea typeface="Malgun Gothic"/>
+                <a:latin typeface="Malgun Gothic"/>
+              </a:rPr>
+              <a:t>
+Day 5: 8/8 4/5 rule
+위반 진단
+Reweighing:
+4/4 케이스 통과 ✅
+aux 데이터 trade-off
+사라짐 (+0.003 AUROC)</a:t>
+            </a:r>
+          </a:p>
+        </p:txBody>
+      </p:sp>
+      <p:sp>
+        <p:nvSpPr>
+          <p:cNvPr id="11" name="TextBox 10"/>
           <p:cNvSpPr txBox="1"/>
           <p:nvPr/>
         </p:nvSpPr>
         <p:spPr>
           <a:xfrm>
-            <a:off x="360000" y="1080000"/>
-            <a:ext cx="5400000" cy="360000"/>
+            <a:off x="360000" y="4680000"/>
+            <a:ext cx="11160000" cy="540000"/>
           </a:xfrm>
           <a:prstGeom prst="rect">
             <a:avLst/>
@@ -10439,29 +10625,30 @@
           </a:bodyPr>
           <a:lstStyle/>
           <a:p>
+            <a:pPr algn="ctr"/>
             <a:r>
               <a:rPr sz="1600" b="1">
                 <a:solidFill>
-                  <a:srgbClr val="C44E52"/>
-                </a:solidFill>
-                <a:ea typeface="Malgun Gothic"/>
-                <a:latin typeface="Malgun Gothic"/>
-              </a:rPr>
-              <a:t>현재 한계 / 진행 중</a:t>
-            </a:r>
-          </a:p>
-        </p:txBody>
-      </p:sp>
-      <p:sp>
-        <p:nvSpPr>
-          <p:cNvPr id="7" name="TextBox 6"/>
+                  <a:srgbClr val="1F3A68"/>
+                </a:solidFill>
+                <a:ea typeface="Malgun Gothic"/>
+                <a:latin typeface="Malgun Gothic"/>
+              </a:rPr>
+              <a:t>한 줄 메시지</a:t>
+            </a:r>
+          </a:p>
+        </p:txBody>
+      </p:sp>
+      <p:sp>
+        <p:nvSpPr>
+          <p:cNvPr id="12" name="TextBox 11"/>
           <p:cNvSpPr txBox="1"/>
           <p:nvPr/>
         </p:nvSpPr>
         <p:spPr>
           <a:xfrm>
-            <a:off x="540000" y="1440000"/>
-            <a:ext cx="5400000" cy="4680000"/>
+            <a:off x="360000" y="5220000"/>
+            <a:ext cx="11160000" cy="720000"/>
           </a:xfrm>
           <a:prstGeom prst="rect">
             <a:avLst/>
@@ -10474,201 +10661,17 @@
           </a:bodyPr>
           <a:lstStyle/>
           <a:p>
-            <a:pPr algn="l"/>
-            <a:r>
-              <a:rPr sz="1300" b="0">
-                <a:ea typeface="Malgun Gothic"/>
-                <a:latin typeface="Malgun Gothic"/>
-              </a:rPr>
-              <a:t>•  Fusion 평가 표본 30명 — 100명+ 확장 검토</a:t>
-            </a:r>
-          </a:p>
-          <a:p>
-            <a:pPr algn="l"/>
-            <a:r>
-              <a:rPr sz="1300" b="0">
-                <a:ea typeface="Malgun Gothic"/>
-                <a:latin typeface="Malgun Gothic"/>
-              </a:rPr>
-              <a:t>•  인간평가 (Plausibility) 미수행 — IRB 절차 필요 ★ 1순위</a:t>
-            </a:r>
-          </a:p>
-          <a:p>
-            <a:pPr algn="l"/>
-            <a:r>
-              <a:rPr sz="1300" b="0">
-                <a:ea typeface="Malgun Gothic"/>
-                <a:latin typeface="Malgun Gothic"/>
-              </a:rPr>
-              <a:t>•  Generic RAG baseline 미비교 — Counterfactual 정당성 보강 ★ 2순위</a:t>
-            </a:r>
-          </a:p>
-          <a:p>
-            <a:pPr algn="l"/>
-            <a:r>
-              <a:rPr sz="1300" b="0">
-                <a:ea typeface="Malgun Gothic"/>
-                <a:latin typeface="Malgun Gothic"/>
-              </a:rPr>
-              <a:t>•  보조 테이블 2/6개 활용 (Step 3-B) — 4개 잔여</a:t>
-            </a:r>
-          </a:p>
-          <a:p>
-            <a:pPr algn="l"/>
-            <a:r>
-              <a:rPr sz="1300" b="0">
-                <a:ea typeface="Malgun Gothic"/>
-                <a:latin typeface="Malgun Gothic"/>
-              </a:rPr>
-              <a:t>•  Bureau의 SHAP 미진입 — EXT_SOURCE 응축 가설 검증 필요</a:t>
-            </a:r>
-          </a:p>
-          <a:p>
-            <a:pPr algn="l"/>
-            <a:r>
-              <a:rPr sz="1300" b="0">
-                <a:ea typeface="Malgun Gothic"/>
-                <a:latin typeface="Malgun Gothic"/>
-              </a:rPr>
-              <a:t>•  TabNet-only 컨텍스트 ablation 미수행 (3-way)</a:t>
-            </a:r>
-          </a:p>
-          <a:p>
-            <a:pPr algn="l"/>
-            <a:r>
-              <a:rPr sz="1300" b="0">
-                <a:ea typeface="Malgun Gothic"/>
-                <a:latin typeface="Malgun Gothic"/>
-              </a:rPr>
-              <a:t>•  데이터 단일 (Home Credit) — UCI German Credit 미검증</a:t>
-            </a:r>
-          </a:p>
-        </p:txBody>
-      </p:sp>
-      <p:sp>
-        <p:nvSpPr>
-          <p:cNvPr id="8" name="TextBox 7"/>
-          <p:cNvSpPr txBox="1"/>
-          <p:nvPr/>
-        </p:nvSpPr>
-        <p:spPr>
-          <a:xfrm>
-            <a:off x="6120000" y="1080000"/>
-            <a:ext cx="5400000" cy="360000"/>
-          </a:xfrm>
-          <a:prstGeom prst="rect">
-            <a:avLst/>
-          </a:prstGeom>
-          <a:noFill/>
-        </p:spPr>
-        <p:txBody>
-          <a:bodyPr wrap="square">
-            <a:spAutoFit/>
-          </a:bodyPr>
-          <a:lstStyle/>
-          <a:p>
-            <a:r>
-              <a:rPr sz="1600" b="1">
-                <a:solidFill>
-                  <a:srgbClr val="55A868"/>
-                </a:solidFill>
-                <a:ea typeface="Malgun Gothic"/>
-                <a:latin typeface="Malgun Gothic"/>
-              </a:rPr>
-              <a:t>향후 계획</a:t>
-            </a:r>
-          </a:p>
-        </p:txBody>
-      </p:sp>
-      <p:sp>
-        <p:nvSpPr>
-          <p:cNvPr id="9" name="TextBox 8"/>
-          <p:cNvSpPr txBox="1"/>
-          <p:nvPr/>
-        </p:nvSpPr>
-        <p:spPr>
-          <a:xfrm>
-            <a:off x="6300000" y="1440000"/>
-            <a:ext cx="5400000" cy="4680000"/>
-          </a:xfrm>
-          <a:prstGeom prst="rect">
-            <a:avLst/>
-          </a:prstGeom>
-          <a:noFill/>
-        </p:spPr>
-        <p:txBody>
-          <a:bodyPr wrap="square">
-            <a:spAutoFit/>
-          </a:bodyPr>
-          <a:lstStyle/>
-          <a:p>
-            <a:pPr algn="l"/>
-            <a:r>
-              <a:rPr sz="1300" b="0">
-                <a:ea typeface="Malgun Gothic"/>
-                <a:latin typeface="Malgun Gothic"/>
-              </a:rPr>
-              <a:t>•  인간 평가 (Plausibility) — IRB + 5점 척도, Cohen's κ ★ 1순위</a:t>
-            </a:r>
-          </a:p>
-          <a:p>
-            <a:pPr algn="l"/>
-            <a:r>
-              <a:rPr sz="1300" b="0">
-                <a:ea typeface="Malgun Gothic"/>
-                <a:latin typeface="Malgun Gothic"/>
-              </a:rPr>
-              <a:t>•  Generic RAG baseline (도메인 일반 지식) ★ 2순위</a:t>
-            </a:r>
-          </a:p>
-          <a:p>
-            <a:pPr algn="l"/>
-            <a:r>
-              <a:rPr sz="1300" b="0">
-                <a:ea typeface="Malgun Gothic"/>
-                <a:latin typeface="Malgun Gothic"/>
-              </a:rPr>
-              <a:t>•  UCI German Credit 일반화</a:t>
-            </a:r>
-          </a:p>
-          <a:p>
-            <a:pPr algn="l"/>
-            <a:r>
-              <a:rPr sz="1300" b="0">
-                <a:ea typeface="Malgun Gothic"/>
-                <a:latin typeface="Malgun Gothic"/>
-              </a:rPr>
-              <a:t>•  Fusion 표본 100명 확장 + counterfactual 결합</a:t>
-            </a:r>
-          </a:p>
-          <a:p>
-            <a:pPr algn="l"/>
-            <a:r>
-              <a:rPr sz="1300" b="0">
-                <a:ea typeface="Malgun Gothic"/>
-                <a:latin typeface="Malgun Gothic"/>
-              </a:rPr>
-              <a:t>•  3-way ablation: SHAP-only / Attn-only / Fusion</a:t>
-            </a:r>
-          </a:p>
-          <a:p>
-            <a:pPr algn="l"/>
-            <a:r>
-              <a:rPr sz="1300" b="0">
-                <a:ea typeface="Malgun Gothic"/>
-                <a:latin typeface="Malgun Gothic"/>
-              </a:rPr>
-              <a:t>•  잔여 보조 테이블 4개로 AUROC 0.78+</a:t>
-            </a:r>
-          </a:p>
-          <a:p>
-            <a:pPr algn="l"/>
-            <a:r>
-              <a:rPr sz="1300" b="0">
-                <a:ea typeface="Malgun Gothic"/>
-                <a:latin typeface="Malgun Gothic"/>
-              </a:rPr>
-              <a:t>•  Adversarial Debiasing (TabNet head) — Reweighing 보완</a:t>
+            <a:pPr algn="ctr"/>
+            <a:r>
+              <a:rPr sz="1800" b="1">
+                <a:solidFill>
+                  <a:srgbClr val="222222"/>
+                </a:solidFill>
+                <a:ea typeface="Malgun Gothic"/>
+                <a:latin typeface="Malgun Gothic"/>
+              </a:rPr>
+              <a:t>"SHAP 컨텍스트를 LLM의 검색된 근거로 재정의하면,
+LLM 종속성 없이 환각이 0이 되는 자연어 설명을 생성할 수 있다."</a:t>
             </a:r>
           </a:p>
         </p:txBody>
@@ -10682,6 +10685,436 @@
 </file>
 
 <file path=ppt/slides/slide21.xml><?xml version="1.0" encoding="utf-8"?>
+<p:sld xmlns:a="http://schemas.openxmlformats.org/drawingml/2006/main" xmlns:p="http://schemas.openxmlformats.org/presentationml/2006/main" xmlns:r="http://schemas.openxmlformats.org/officeDocument/2006/relationships">
+  <p:cSld>
+    <p:spTree>
+      <p:nvGrpSpPr>
+        <p:cNvPr id="1" name=""/>
+        <p:cNvGrpSpPr/>
+        <p:nvPr/>
+      </p:nvGrpSpPr>
+      <p:grpSpPr/>
+      <p:sp>
+        <p:nvSpPr>
+          <p:cNvPr id="2" name="Rectangle 1"/>
+          <p:cNvSpPr/>
+          <p:nvPr/>
+        </p:nvSpPr>
+        <p:spPr>
+          <a:xfrm>
+            <a:off x="0" y="0"/>
+            <a:ext cx="180000" cy="720000"/>
+          </a:xfrm>
+          <a:prstGeom prst="rect">
+            <a:avLst/>
+          </a:prstGeom>
+          <a:solidFill>
+            <a:srgbClr val="1F3A68"/>
+          </a:solidFill>
+          <a:ln>
+            <a:noFill/>
+          </a:ln>
+        </p:spPr>
+        <p:style>
+          <a:lnRef idx="1">
+            <a:schemeClr val="accent1"/>
+          </a:lnRef>
+          <a:fillRef idx="3">
+            <a:schemeClr val="accent1"/>
+          </a:fillRef>
+          <a:effectRef idx="2">
+            <a:schemeClr val="accent1"/>
+          </a:effectRef>
+          <a:fontRef idx="minor">
+            <a:schemeClr val="lt1"/>
+          </a:fontRef>
+        </p:style>
+        <p:txBody>
+          <a:bodyPr rtlCol="0" anchor="ctr"/>
+          <a:lstStyle/>
+          <a:p>
+            <a:pPr algn="ctr"/>
+          </a:p>
+        </p:txBody>
+      </p:sp>
+      <p:sp>
+        <p:nvSpPr>
+          <p:cNvPr id="3" name="TextBox 2"/>
+          <p:cNvSpPr txBox="1"/>
+          <p:nvPr/>
+        </p:nvSpPr>
+        <p:spPr>
+          <a:xfrm>
+            <a:off x="360000" y="144000"/>
+            <a:ext cx="10800000" cy="360000"/>
+          </a:xfrm>
+          <a:prstGeom prst="rect">
+            <a:avLst/>
+          </a:prstGeom>
+          <a:noFill/>
+        </p:spPr>
+        <p:txBody>
+          <a:bodyPr wrap="square">
+            <a:spAutoFit/>
+          </a:bodyPr>
+          <a:lstStyle/>
+          <a:p>
+            <a:r>
+              <a:rPr sz="2400" b="1">
+                <a:solidFill>
+                  <a:srgbClr val="1F3A68"/>
+                </a:solidFill>
+                <a:ea typeface="Malgun Gothic"/>
+                <a:latin typeface="Malgun Gothic"/>
+              </a:rPr>
+              <a:t>20. 한계와 향후 계획</a:t>
+            </a:r>
+          </a:p>
+        </p:txBody>
+      </p:sp>
+      <p:sp>
+        <p:nvSpPr>
+          <p:cNvPr id="4" name="TextBox 3"/>
+          <p:cNvSpPr txBox="1"/>
+          <p:nvPr/>
+        </p:nvSpPr>
+        <p:spPr>
+          <a:xfrm>
+            <a:off x="360000" y="503999"/>
+            <a:ext cx="10800000" cy="288000"/>
+          </a:xfrm>
+          <a:prstGeom prst="rect">
+            <a:avLst/>
+          </a:prstGeom>
+          <a:noFill/>
+        </p:spPr>
+        <p:txBody>
+          <a:bodyPr wrap="square">
+            <a:spAutoFit/>
+          </a:bodyPr>
+          <a:lstStyle/>
+          <a:p>
+            <a:r>
+              <a:rPr sz="1200" b="0">
+                <a:solidFill>
+                  <a:srgbClr val="555555"/>
+                </a:solidFill>
+                <a:ea typeface="Malgun Gothic"/>
+                <a:latin typeface="Malgun Gothic"/>
+              </a:rPr>
+              <a:t>Step 3-B/3-C/5-A/5-B 완료 / 잔여는 본 논문 확장</a:t>
+            </a:r>
+          </a:p>
+        </p:txBody>
+      </p:sp>
+      <p:sp>
+        <p:nvSpPr>
+          <p:cNvPr id="5" name="Rectangle 4"/>
+          <p:cNvSpPr/>
+          <p:nvPr/>
+        </p:nvSpPr>
+        <p:spPr>
+          <a:xfrm>
+            <a:off x="360000" y="864000"/>
+            <a:ext cx="11340000" cy="18000"/>
+          </a:xfrm>
+          <a:prstGeom prst="rect">
+            <a:avLst/>
+          </a:prstGeom>
+          <a:solidFill>
+            <a:srgbClr val="CCCCCC"/>
+          </a:solidFill>
+          <a:ln>
+            <a:noFill/>
+          </a:ln>
+        </p:spPr>
+        <p:style>
+          <a:lnRef idx="1">
+            <a:schemeClr val="accent1"/>
+          </a:lnRef>
+          <a:fillRef idx="3">
+            <a:schemeClr val="accent1"/>
+          </a:fillRef>
+          <a:effectRef idx="2">
+            <a:schemeClr val="accent1"/>
+          </a:effectRef>
+          <a:fontRef idx="minor">
+            <a:schemeClr val="lt1"/>
+          </a:fontRef>
+        </p:style>
+        <p:txBody>
+          <a:bodyPr rtlCol="0" anchor="ctr"/>
+          <a:lstStyle/>
+          <a:p>
+            <a:pPr algn="ctr"/>
+          </a:p>
+        </p:txBody>
+      </p:sp>
+      <p:sp>
+        <p:nvSpPr>
+          <p:cNvPr id="6" name="TextBox 5"/>
+          <p:cNvSpPr txBox="1"/>
+          <p:nvPr/>
+        </p:nvSpPr>
+        <p:spPr>
+          <a:xfrm>
+            <a:off x="360000" y="1080000"/>
+            <a:ext cx="5400000" cy="360000"/>
+          </a:xfrm>
+          <a:prstGeom prst="rect">
+            <a:avLst/>
+          </a:prstGeom>
+          <a:noFill/>
+        </p:spPr>
+        <p:txBody>
+          <a:bodyPr wrap="square">
+            <a:spAutoFit/>
+          </a:bodyPr>
+          <a:lstStyle/>
+          <a:p>
+            <a:r>
+              <a:rPr sz="1600" b="1">
+                <a:solidFill>
+                  <a:srgbClr val="C44E52"/>
+                </a:solidFill>
+                <a:ea typeface="Malgun Gothic"/>
+                <a:latin typeface="Malgun Gothic"/>
+              </a:rPr>
+              <a:t>현재 한계 / 진행 중</a:t>
+            </a:r>
+          </a:p>
+        </p:txBody>
+      </p:sp>
+      <p:sp>
+        <p:nvSpPr>
+          <p:cNvPr id="7" name="TextBox 6"/>
+          <p:cNvSpPr txBox="1"/>
+          <p:nvPr/>
+        </p:nvSpPr>
+        <p:spPr>
+          <a:xfrm>
+            <a:off x="540000" y="1440000"/>
+            <a:ext cx="5400000" cy="4680000"/>
+          </a:xfrm>
+          <a:prstGeom prst="rect">
+            <a:avLst/>
+          </a:prstGeom>
+          <a:noFill/>
+        </p:spPr>
+        <p:txBody>
+          <a:bodyPr wrap="square">
+            <a:spAutoFit/>
+          </a:bodyPr>
+          <a:lstStyle/>
+          <a:p>
+            <a:pPr algn="l"/>
+            <a:r>
+              <a:rPr sz="1300" b="0">
+                <a:ea typeface="Malgun Gothic"/>
+                <a:latin typeface="Malgun Gothic"/>
+              </a:rPr>
+              <a:t>•  Fusion 평가 표본 30명 — 100명+ 확장 검토</a:t>
+            </a:r>
+          </a:p>
+          <a:p>
+            <a:pPr algn="l"/>
+            <a:r>
+              <a:rPr sz="1300" b="0">
+                <a:ea typeface="Malgun Gothic"/>
+                <a:latin typeface="Malgun Gothic"/>
+              </a:rPr>
+              <a:t>•  인간평가 (Plausibility) 미수행 — IRB 절차 필요 ★ 1순위</a:t>
+            </a:r>
+          </a:p>
+          <a:p>
+            <a:pPr algn="l"/>
+            <a:r>
+              <a:rPr sz="1300" b="0">
+                <a:ea typeface="Malgun Gothic"/>
+                <a:latin typeface="Malgun Gothic"/>
+              </a:rPr>
+              <a:t>•  데이터 단일 (Home Credit) — UCI German Credit 미검증 ★ 2순위</a:t>
+            </a:r>
+          </a:p>
+          <a:p>
+            <a:pPr algn="l"/>
+            <a:r>
+              <a:rPr sz="1300" b="0">
+                <a:ea typeface="Malgun Gothic"/>
+                <a:latin typeface="Malgun Gothic"/>
+              </a:rPr>
+              <a:t>•  보조 테이블 2/6개 활용 (Step 3-B) — 4개 잔여</a:t>
+            </a:r>
+          </a:p>
+          <a:p>
+            <a:pPr algn="l"/>
+            <a:r>
+              <a:rPr sz="1300" b="0">
+                <a:ea typeface="Malgun Gothic"/>
+                <a:latin typeface="Malgun Gothic"/>
+              </a:rPr>
+              <a:t>•  Bureau의 SHAP 미진입 — EXT_SOURCE 응축 가설 검증 필요</a:t>
+            </a:r>
+          </a:p>
+          <a:p>
+            <a:pPr algn="l"/>
+            <a:r>
+              <a:rPr sz="1300" b="0">
+                <a:ea typeface="Malgun Gothic"/>
+                <a:latin typeface="Malgun Gothic"/>
+              </a:rPr>
+              <a:t>•  TabNet-only 컨텍스트 ablation 미수행 (3-way)</a:t>
+            </a:r>
+          </a:p>
+          <a:p>
+            <a:pPr algn="l"/>
+            <a:r>
+              <a:rPr sz="1300" b="0">
+                <a:ea typeface="Malgun Gothic"/>
+                <a:latin typeface="Malgun Gothic"/>
+              </a:rPr>
+              <a:t>•  no_shap 표본 작음 (n=2 in 30 idx) — 표본 확장 필요</a:t>
+            </a:r>
+          </a:p>
+        </p:txBody>
+      </p:sp>
+      <p:sp>
+        <p:nvSpPr>
+          <p:cNvPr id="8" name="TextBox 7"/>
+          <p:cNvSpPr txBox="1"/>
+          <p:nvPr/>
+        </p:nvSpPr>
+        <p:spPr>
+          <a:xfrm>
+            <a:off x="6120000" y="1080000"/>
+            <a:ext cx="5400000" cy="360000"/>
+          </a:xfrm>
+          <a:prstGeom prst="rect">
+            <a:avLst/>
+          </a:prstGeom>
+          <a:noFill/>
+        </p:spPr>
+        <p:txBody>
+          <a:bodyPr wrap="square">
+            <a:spAutoFit/>
+          </a:bodyPr>
+          <a:lstStyle/>
+          <a:p>
+            <a:r>
+              <a:rPr sz="1600" b="1">
+                <a:solidFill>
+                  <a:srgbClr val="55A868"/>
+                </a:solidFill>
+                <a:ea typeface="Malgun Gothic"/>
+                <a:latin typeface="Malgun Gothic"/>
+              </a:rPr>
+              <a:t>향후 계획</a:t>
+            </a:r>
+          </a:p>
+        </p:txBody>
+      </p:sp>
+      <p:sp>
+        <p:nvSpPr>
+          <p:cNvPr id="9" name="TextBox 8"/>
+          <p:cNvSpPr txBox="1"/>
+          <p:nvPr/>
+        </p:nvSpPr>
+        <p:spPr>
+          <a:xfrm>
+            <a:off x="6300000" y="1440000"/>
+            <a:ext cx="5400000" cy="4680000"/>
+          </a:xfrm>
+          <a:prstGeom prst="rect">
+            <a:avLst/>
+          </a:prstGeom>
+          <a:noFill/>
+        </p:spPr>
+        <p:txBody>
+          <a:bodyPr wrap="square">
+            <a:spAutoFit/>
+          </a:bodyPr>
+          <a:lstStyle/>
+          <a:p>
+            <a:pPr algn="l"/>
+            <a:r>
+              <a:rPr sz="1300" b="0">
+                <a:ea typeface="Malgun Gothic"/>
+                <a:latin typeface="Malgun Gothic"/>
+              </a:rPr>
+              <a:t>•  인간 평가 (Plausibility) — IRB + 5점 척도, Cohen's κ ★ 1순위</a:t>
+            </a:r>
+          </a:p>
+          <a:p>
+            <a:pPr algn="l"/>
+            <a:r>
+              <a:rPr sz="1300" b="0">
+                <a:ea typeface="Malgun Gothic"/>
+                <a:latin typeface="Malgun Gothic"/>
+              </a:rPr>
+              <a:t>•  UCI German Credit 일반화 ★ 2순위</a:t>
+            </a:r>
+          </a:p>
+          <a:p>
+            <a:pPr algn="l"/>
+            <a:r>
+              <a:rPr sz="1300" b="0">
+                <a:ea typeface="Malgun Gothic"/>
+                <a:latin typeface="Malgun Gothic"/>
+              </a:rPr>
+              <a:t>•  3-way ablation: SHAP-only / Attn-only / Fusion ★ 3순위</a:t>
+            </a:r>
+          </a:p>
+          <a:p>
+            <a:pPr algn="l"/>
+            <a:r>
+              <a:rPr sz="1300" b="0">
+                <a:ea typeface="Malgun Gothic"/>
+                <a:latin typeface="Malgun Gothic"/>
+              </a:rPr>
+              <a:t>•  Bureau ablation — EXT_SOURCE 응축 가설 검증</a:t>
+            </a:r>
+          </a:p>
+          <a:p>
+            <a:pPr algn="l"/>
+            <a:r>
+              <a:rPr sz="1300" b="0">
+                <a:ea typeface="Malgun Gothic"/>
+                <a:latin typeface="Malgun Gothic"/>
+              </a:rPr>
+              <a:t>•  Fusion 표본 100명 확장 + counterfactual 결합</a:t>
+            </a:r>
+          </a:p>
+          <a:p>
+            <a:pPr algn="l"/>
+            <a:r>
+              <a:rPr sz="1300" b="0">
+                <a:ea typeface="Malgun Gothic"/>
+                <a:latin typeface="Malgun Gothic"/>
+              </a:rPr>
+              <a:t>•  잔여 보조 테이블 4개로 AUROC 0.78+</a:t>
+            </a:r>
+          </a:p>
+          <a:p>
+            <a:pPr algn="l"/>
+            <a:r>
+              <a:rPr sz="1300" b="0">
+                <a:ea typeface="Malgun Gothic"/>
+                <a:latin typeface="Malgun Gothic"/>
+              </a:rPr>
+              <a:t>•  Adversarial Debiasing (TabNet head) — Reweighing 보완</a:t>
+            </a:r>
+          </a:p>
+        </p:txBody>
+      </p:sp>
+    </p:spTree>
+  </p:cSld>
+  <p:clrMapOvr>
+    <a:masterClrMapping/>
+  </p:clrMapOvr>
+</p:sld>
+</file>
+
+<file path=ppt/slides/slide22.xml><?xml version="1.0" encoding="utf-8"?>
 <p:sld xmlns:a="http://schemas.openxmlformats.org/drawingml/2006/main" xmlns:p="http://schemas.openxmlformats.org/presentationml/2006/main" xmlns:r="http://schemas.openxmlformats.org/officeDocument/2006/relationships">
   <p:cSld>
     <p:spTree>

--- a/paper/midterm_slides.pptx
+++ b/paper/midterm_slides.pptx
@@ -27,6 +27,7 @@
     <p:sldId id="275" r:id="rId26"/>
     <p:sldId id="276" r:id="rId27"/>
     <p:sldId id="277" r:id="rId28"/>
+    <p:sldId id="278" r:id="rId29"/>
   </p:sldIdLst>
   <p:sldSz cx="12191695" cy="6858000" type="screen4x3"/>
   <p:notesSz cx="6858000" cy="9144000"/>
@@ -10158,7 +10159,7 @@
                 <a:ea typeface="Malgun Gothic"/>
                 <a:latin typeface="Malgun Gothic"/>
               </a:rPr>
-              <a:t>19. 종합 — 본 연구의 가치 6가지</a:t>
+              <a:t>19. ★ Step 5-C — Pilot Human-Proxy Evaluation</a:t>
             </a:r>
           </a:p>
         </p:txBody>
@@ -10193,7 +10194,7 @@
                 <a:ea typeface="Malgun Gothic"/>
                 <a:latin typeface="Malgun Gothic"/>
               </a:rPr>
-              <a:t>Step 1 + 2-A + 3-B + 3-C + 5-A + 5-B 마무리</a:t>
+              <a:t>3 personas pilot — 사실성 vs 친근함 trade-off 정량 발견</a:t>
             </a:r>
           </a:p>
         </p:txBody>
@@ -10241,378 +10242,40 @@
           </a:p>
         </p:txBody>
       </p:sp>
-      <p:sp>
-        <p:nvSpPr>
-          <p:cNvPr id="6" name="Rounded Rectangle 5"/>
-          <p:cNvSpPr/>
-          <p:nvPr/>
-        </p:nvSpPr>
-        <p:spPr>
-          <a:xfrm>
-            <a:off x="605847" y="1260000"/>
-            <a:ext cx="2052000" cy="3060000"/>
-          </a:xfrm>
-          <a:prstGeom prst="roundRect">
-            <a:avLst/>
-          </a:prstGeom>
-          <a:solidFill>
-            <a:srgbClr val="4C72B0"/>
-          </a:solidFill>
-          <a:ln>
-            <a:noFill/>
-          </a:ln>
-        </p:spPr>
-        <p:style>
-          <a:lnRef idx="1">
-            <a:schemeClr val="accent1"/>
-          </a:lnRef>
-          <a:fillRef idx="3">
-            <a:schemeClr val="accent1"/>
-          </a:fillRef>
-          <a:effectRef idx="2">
-            <a:schemeClr val="accent1"/>
-          </a:effectRef>
-          <a:fontRef idx="minor">
-            <a:schemeClr val="lt1"/>
-          </a:fontRef>
-        </p:style>
-        <p:txBody>
-          <a:bodyPr rtlCol="0" anchor="ctr" lIns="216000" rIns="216000" tIns="216000"/>
-          <a:lstStyle/>
-          <a:p>
-            <a:pPr algn="ctr"/>
-            <a:r>
-              <a:rPr sz="2200" b="1">
-                <a:solidFill>
-                  <a:srgbClr val="FFFFFF"/>
-                </a:solidFill>
-                <a:ea typeface="Malgun Gothic"/>
-                <a:latin typeface="Malgun Gothic"/>
-              </a:rPr>
-              <a:t>예측 성능</a:t>
-            </a:r>
-          </a:p>
-          <a:p>
-            <a:pPr algn="ctr"/>
-            <a:r>
-              <a:rPr sz="1200" b="0">
-                <a:solidFill>
-                  <a:srgbClr val="FFFFFF"/>
-                </a:solidFill>
-                <a:ea typeface="Malgun Gothic"/>
-                <a:latin typeface="Malgun Gothic"/>
-              </a:rPr>
-              <a:t>
-XGBoost 0.7587
-→ 0.7755
-(Step 3-B aux, +2.22%)
-TabNet 어텐션
-융합 컨텍스트에 통합</a:t>
-            </a:r>
-          </a:p>
-        </p:txBody>
-      </p:sp>
-      <p:sp>
-        <p:nvSpPr>
-          <p:cNvPr id="7" name="Rounded Rectangle 6"/>
-          <p:cNvSpPr/>
-          <p:nvPr/>
-        </p:nvSpPr>
-        <p:spPr>
-          <a:xfrm>
-            <a:off x="2837847" y="1260000"/>
-            <a:ext cx="2052000" cy="3060000"/>
-          </a:xfrm>
-          <a:prstGeom prst="roundRect">
-            <a:avLst/>
-          </a:prstGeom>
-          <a:solidFill>
-            <a:srgbClr val="55A868"/>
-          </a:solidFill>
-          <a:ln>
-            <a:noFill/>
-          </a:ln>
-        </p:spPr>
-        <p:style>
-          <a:lnRef idx="1">
-            <a:schemeClr val="accent1"/>
-          </a:lnRef>
-          <a:fillRef idx="3">
-            <a:schemeClr val="accent1"/>
-          </a:fillRef>
-          <a:effectRef idx="2">
-            <a:schemeClr val="accent1"/>
-          </a:effectRef>
-          <a:fontRef idx="minor">
-            <a:schemeClr val="lt1"/>
-          </a:fontRef>
-        </p:style>
-        <p:txBody>
-          <a:bodyPr rtlCol="0" anchor="ctr" lIns="216000" rIns="216000" tIns="216000"/>
-          <a:lstStyle/>
-          <a:p>
-            <a:pPr algn="ctr"/>
-            <a:r>
-              <a:rPr sz="2200" b="1">
-                <a:solidFill>
-                  <a:srgbClr val="FFFFFF"/>
-                </a:solidFill>
-                <a:ea typeface="Malgun Gothic"/>
-                <a:latin typeface="Malgun Gothic"/>
-              </a:rPr>
-              <a:t>해석 융합</a:t>
-            </a:r>
-          </a:p>
-          <a:p>
-            <a:pPr algn="ctr"/>
-            <a:r>
-              <a:rPr sz="1200" b="0">
-                <a:solidFill>
-                  <a:srgbClr val="FFFFFF"/>
-                </a:solidFill>
-                <a:ea typeface="Malgun Gothic"/>
-                <a:latin typeface="Malgun Gothic"/>
-              </a:rPr>
-              <a:t>
-ρ=0.117 부분 일관
-+ instance-level
-3+ 동의 22% / 4+ 동의 0%
-agreement-aware
-컨텍스트로 LLM에
-의미 라벨 전달</a:t>
-            </a:r>
-          </a:p>
-        </p:txBody>
-      </p:sp>
-      <p:sp>
-        <p:nvSpPr>
-          <p:cNvPr id="8" name="Rounded Rectangle 7"/>
-          <p:cNvSpPr/>
-          <p:nvPr/>
-        </p:nvSpPr>
-        <p:spPr>
-          <a:xfrm>
-            <a:off x="5069847" y="1260000"/>
-            <a:ext cx="2052000" cy="3060000"/>
-          </a:xfrm>
-          <a:prstGeom prst="roundRect">
-            <a:avLst/>
-          </a:prstGeom>
-          <a:solidFill>
-            <a:srgbClr val="C44E52"/>
-          </a:solidFill>
-          <a:ln>
-            <a:noFill/>
-          </a:ln>
-        </p:spPr>
-        <p:style>
-          <a:lnRef idx="1">
-            <a:schemeClr val="accent1"/>
-          </a:lnRef>
-          <a:fillRef idx="3">
-            <a:schemeClr val="accent1"/>
-          </a:fillRef>
-          <a:effectRef idx="2">
-            <a:schemeClr val="accent1"/>
-          </a:effectRef>
-          <a:fontRef idx="minor">
-            <a:schemeClr val="lt1"/>
-          </a:fontRef>
-        </p:style>
-        <p:txBody>
-          <a:bodyPr rtlCol="0" anchor="ctr" lIns="216000" rIns="216000" tIns="216000"/>
-          <a:lstStyle/>
-          <a:p>
-            <a:pPr algn="ctr"/>
-            <a:r>
-              <a:rPr sz="2200" b="1">
-                <a:solidFill>
-                  <a:srgbClr val="FFFFFF"/>
-                </a:solidFill>
-                <a:ea typeface="Malgun Gothic"/>
-                <a:latin typeface="Malgun Gothic"/>
-              </a:rPr>
-              <a:t>환각 차단</a:t>
-            </a:r>
-          </a:p>
-          <a:p>
-            <a:pPr algn="ctr"/>
-            <a:r>
-              <a:rPr sz="1200" b="0">
-                <a:solidFill>
-                  <a:srgbClr val="FFFFFF"/>
-                </a:solidFill>
-                <a:ea typeface="Malgun Gothic"/>
-                <a:latin typeface="Malgun Gothic"/>
-              </a:rPr>
-              <a:t>
-Halluc 0/100
-(Step 1/2-A) →
-0/30 (3-C-1)
-Generic RAG도 0%
-(5-B, hard constraints
-효과 입증)
-NLI contradiction
-−0.14~−0.18</a:t>
-            </a:r>
-          </a:p>
-        </p:txBody>
-      </p:sp>
-      <p:sp>
-        <p:nvSpPr>
-          <p:cNvPr id="9" name="Rounded Rectangle 8"/>
-          <p:cNvSpPr/>
-          <p:nvPr/>
-        </p:nvSpPr>
-        <p:spPr>
-          <a:xfrm>
-            <a:off x="7301847" y="1260000"/>
-            <a:ext cx="2052000" cy="3060000"/>
-          </a:xfrm>
-          <a:prstGeom prst="roundRect">
-            <a:avLst/>
-          </a:prstGeom>
-          <a:solidFill>
-            <a:srgbClr val="DD8552"/>
-          </a:solidFill>
-          <a:ln>
-            <a:noFill/>
-          </a:ln>
-        </p:spPr>
-        <p:style>
-          <a:lnRef idx="1">
-            <a:schemeClr val="accent1"/>
-          </a:lnRef>
-          <a:fillRef idx="3">
-            <a:schemeClr val="accent1"/>
-          </a:fillRef>
-          <a:effectRef idx="2">
-            <a:schemeClr val="accent1"/>
-          </a:effectRef>
-          <a:fontRef idx="minor">
-            <a:schemeClr val="lt1"/>
-          </a:fontRef>
-        </p:style>
-        <p:txBody>
-          <a:bodyPr rtlCol="0" anchor="ctr" lIns="216000" rIns="216000" tIns="216000"/>
-          <a:lstStyle/>
-          <a:p>
-            <a:pPr algn="ctr"/>
-            <a:r>
-              <a:rPr sz="2200" b="1">
-                <a:solidFill>
-                  <a:srgbClr val="FFFFFF"/>
-                </a:solidFill>
-                <a:ea typeface="Malgun Gothic"/>
-                <a:latin typeface="Malgun Gothic"/>
-              </a:rPr>
-              <a:t>완결성·충실성</a:t>
-            </a:r>
-          </a:p>
-          <a:p>
-            <a:pPr algn="ctr"/>
-            <a:r>
-              <a:rPr sz="1200" b="0">
-                <a:solidFill>
-                  <a:srgbClr val="FFFFFF"/>
-                </a:solidFill>
-                <a:ea typeface="Malgun Gothic"/>
-                <a:latin typeface="Malgun Gothic"/>
-              </a:rPr>
-              <a:t>
-G-Eval Compl.
-Claude +0.67~+0.80
-Gemini +0.90~+1.10
-NLI Entailment 4단계:
-.27→.37→.51→.62
-(no→gen→shap→fus)
-★ fusion이 압도</a:t>
-            </a:r>
-          </a:p>
-        </p:txBody>
-      </p:sp>
-      <p:sp>
-        <p:nvSpPr>
-          <p:cNvPr id="10" name="Rounded Rectangle 9"/>
-          <p:cNvSpPr/>
-          <p:nvPr/>
-        </p:nvSpPr>
-        <p:spPr>
-          <a:xfrm>
-            <a:off x="9533847" y="1260000"/>
-            <a:ext cx="2052000" cy="3060000"/>
-          </a:xfrm>
-          <a:prstGeom prst="roundRect">
-            <a:avLst/>
-          </a:prstGeom>
-          <a:solidFill>
-            <a:srgbClr val="8C71B7"/>
-          </a:solidFill>
-          <a:ln>
-            <a:noFill/>
-          </a:ln>
-        </p:spPr>
-        <p:style>
-          <a:lnRef idx="1">
-            <a:schemeClr val="accent1"/>
-          </a:lnRef>
-          <a:fillRef idx="3">
-            <a:schemeClr val="accent1"/>
-          </a:fillRef>
-          <a:effectRef idx="2">
-            <a:schemeClr val="accent1"/>
-          </a:effectRef>
-          <a:fontRef idx="minor">
-            <a:schemeClr val="lt1"/>
-          </a:fontRef>
-        </p:style>
-        <p:txBody>
-          <a:bodyPr rtlCol="0" anchor="ctr" lIns="216000" rIns="216000" tIns="216000"/>
-          <a:lstStyle/>
-          <a:p>
-            <a:pPr algn="ctr"/>
-            <a:r>
-              <a:rPr sz="2200" b="1">
-                <a:solidFill>
-                  <a:srgbClr val="FFFFFF"/>
-                </a:solidFill>
-                <a:ea typeface="Malgun Gothic"/>
-                <a:latin typeface="Malgun Gothic"/>
-              </a:rPr>
-              <a:t>공정성 mitigation</a:t>
-            </a:r>
-          </a:p>
-          <a:p>
-            <a:pPr algn="ctr"/>
-            <a:r>
-              <a:rPr sz="1200" b="0">
-                <a:solidFill>
-                  <a:srgbClr val="FFFFFF"/>
-                </a:solidFill>
-                <a:ea typeface="Malgun Gothic"/>
-                <a:latin typeface="Malgun Gothic"/>
-              </a:rPr>
-              <a:t>
-Day 5: 8/8 4/5 rule
-위반 진단
-Reweighing:
-4/4 케이스 통과 ✅
-aux 데이터 trade-off
-사라짐 (+0.003 AUROC)</a:t>
-            </a:r>
-          </a:p>
-        </p:txBody>
-      </p:sp>
-      <p:sp>
-        <p:nvSpPr>
-          <p:cNvPr id="11" name="TextBox 10"/>
+      <p:pic>
+        <p:nvPicPr>
+          <p:cNvPr id="6" name="Picture 5" descr="36_human_proxy_personas.png"/>
+          <p:cNvPicPr>
+            <a:picLocks noChangeAspect="1"/>
+          </p:cNvPicPr>
+          <p:nvPr/>
+        </p:nvPicPr>
+        <p:blipFill>
+          <a:blip r:embed="rId2"/>
+          <a:stretch>
+            <a:fillRect/>
+          </a:stretch>
+        </p:blipFill>
+        <p:spPr>
+          <a:xfrm>
+            <a:off x="216000" y="1080000"/>
+            <a:ext cx="6840000" cy="4680000"/>
+          </a:xfrm>
+          <a:prstGeom prst="rect">
+            <a:avLst/>
+          </a:prstGeom>
+        </p:spPr>
+      </p:pic>
+      <p:sp>
+        <p:nvSpPr>
+          <p:cNvPr id="7" name="TextBox 6"/>
           <p:cNvSpPr txBox="1"/>
           <p:nvPr/>
         </p:nvSpPr>
         <p:spPr>
           <a:xfrm>
-            <a:off x="360000" y="4680000"/>
-            <a:ext cx="11160000" cy="540000"/>
+            <a:off x="7380000" y="1080000"/>
+            <a:ext cx="4680000" cy="360000"/>
           </a:xfrm>
           <a:prstGeom prst="rect">
             <a:avLst/>
@@ -10625,30 +10288,29 @@
           </a:bodyPr>
           <a:lstStyle/>
           <a:p>
-            <a:pPr algn="ctr"/>
-            <a:r>
-              <a:rPr sz="1600" b="1">
+            <a:r>
+              <a:rPr sz="1400" b="1">
                 <a:solidFill>
                   <a:srgbClr val="1F3A68"/>
                 </a:solidFill>
                 <a:ea typeface="Malgun Gothic"/>
                 <a:latin typeface="Malgun Gothic"/>
               </a:rPr>
-              <a:t>한 줄 메시지</a:t>
-            </a:r>
-          </a:p>
-        </p:txBody>
-      </p:sp>
-      <p:sp>
-        <p:nvSpPr>
-          <p:cNvPr id="12" name="TextBox 11"/>
+              <a:t>Pilot 설계 (정식 IRB 대안)</a:t>
+            </a:r>
+          </a:p>
+        </p:txBody>
+      </p:sp>
+      <p:sp>
+        <p:nvSpPr>
+          <p:cNvPr id="8" name="TextBox 7"/>
           <p:cNvSpPr txBox="1"/>
           <p:nvPr/>
         </p:nvSpPr>
         <p:spPr>
           <a:xfrm>
-            <a:off x="360000" y="5220000"/>
-            <a:ext cx="11160000" cy="720000"/>
+            <a:off x="7452000" y="1440000"/>
+            <a:ext cx="4680000" cy="1260000"/>
           </a:xfrm>
           <a:prstGeom prst="rect">
             <a:avLst/>
@@ -10661,17 +10323,187 @@
           </a:bodyPr>
           <a:lstStyle/>
           <a:p>
-            <a:pPr algn="ctr"/>
-            <a:r>
-              <a:rPr sz="1800" b="1">
-                <a:solidFill>
-                  <a:srgbClr val="222222"/>
-                </a:solidFill>
-                <a:ea typeface="Malgun Gothic"/>
-                <a:latin typeface="Malgun Gothic"/>
-              </a:rPr>
-              <a:t>"SHAP 컨텍스트를 LLM의 검색된 근거로 재정의하면,
-LLM 종속성 없이 환각이 0이 되는 자연어 설명을 생성할 수 있다."</a:t>
+            <a:pPr algn="l"/>
+            <a:r>
+              <a:rPr sz="1100" b="0">
+                <a:ea typeface="Malgun Gothic"/>
+                <a:latin typeface="Malgun Gothic"/>
+              </a:rPr>
+              <a:t>•  3 personas: Credit Expert / Customer / Regulator</a:t>
+            </a:r>
+          </a:p>
+          <a:p>
+            <a:pPr algn="l"/>
+            <a:r>
+              <a:rPr sz="1100" b="0">
+                <a:ea typeface="Malgun Gothic"/>
+                <a:latin typeface="Malgun Gothic"/>
+              </a:rPr>
+              <a:t>•  3 metrics × 4 modes × 2 LLM × 15 inst = 360 평가</a:t>
+            </a:r>
+          </a:p>
+          <a:p>
+            <a:pPr algn="l"/>
+            <a:r>
+              <a:rPr sz="1100" b="0">
+                <a:ea typeface="Malgun Gothic"/>
+                <a:latin typeface="Malgun Gothic"/>
+              </a:rPr>
+              <a:t>•  5점 척도: trustworthiness / clarity / actionability</a:t>
+            </a:r>
+          </a:p>
+          <a:p>
+            <a:pPr algn="l"/>
+            <a:r>
+              <a:rPr sz="1100" b="0">
+                <a:ea typeface="Malgun Gothic"/>
+                <a:latin typeface="Malgun Gothic"/>
+              </a:rPr>
+              <a:t>•  Judge: Claude (안정성 검증됨)</a:t>
+            </a:r>
+          </a:p>
+        </p:txBody>
+      </p:sp>
+      <p:sp>
+        <p:nvSpPr>
+          <p:cNvPr id="9" name="TextBox 8"/>
+          <p:cNvSpPr txBox="1"/>
+          <p:nvPr/>
+        </p:nvSpPr>
+        <p:spPr>
+          <a:xfrm>
+            <a:off x="7380000" y="2880000"/>
+            <a:ext cx="4680000" cy="360000"/>
+          </a:xfrm>
+          <a:prstGeom prst="rect">
+            <a:avLst/>
+          </a:prstGeom>
+          <a:noFill/>
+        </p:spPr>
+        <p:txBody>
+          <a:bodyPr wrap="square">
+            <a:spAutoFit/>
+          </a:bodyPr>
+          <a:lstStyle/>
+          <a:p>
+            <a:r>
+              <a:rPr sz="1400" b="1">
+                <a:solidFill>
+                  <a:srgbClr val="C44E52"/>
+                </a:solidFill>
+                <a:ea typeface="Malgun Gothic"/>
+                <a:latin typeface="Malgun Gothic"/>
+              </a:rPr>
+              <a:t>★ 충격적 발견 — Trade-off 명확</a:t>
+            </a:r>
+          </a:p>
+        </p:txBody>
+      </p:sp>
+      <p:sp>
+        <p:nvSpPr>
+          <p:cNvPr id="10" name="TextBox 9"/>
+          <p:cNvSpPr txBox="1"/>
+          <p:nvPr/>
+        </p:nvSpPr>
+        <p:spPr>
+          <a:xfrm>
+            <a:off x="7452000" y="3240000"/>
+            <a:ext cx="4680000" cy="1980000"/>
+          </a:xfrm>
+          <a:prstGeom prst="rect">
+            <a:avLst/>
+          </a:prstGeom>
+          <a:noFill/>
+        </p:spPr>
+        <p:txBody>
+          <a:bodyPr wrap="square">
+            <a:spAutoFit/>
+          </a:bodyPr>
+          <a:lstStyle/>
+          <a:p>
+            <a:pPr algn="l"/>
+            <a:r>
+              <a:rPr sz="1100" b="0">
+                <a:ea typeface="Malgun Gothic"/>
+                <a:latin typeface="Malgun Gothic"/>
+              </a:rPr>
+              <a:t>•  Persona 관점: generic_rag(4.91) &gt; fusion(4.31) &gt; shaponly(4.13)</a:t>
+            </a:r>
+          </a:p>
+          <a:p>
+            <a:pPr algn="l"/>
+            <a:r>
+              <a:rPr sz="1100" b="0">
+                <a:ea typeface="Malgun Gothic"/>
+                <a:latin typeface="Malgun Gothic"/>
+              </a:rPr>
+              <a:t>•  Customer clarity: SHAP-RAG/Fusion 2.67~2.80 ⚠️</a:t>
+            </a:r>
+          </a:p>
+          <a:p>
+            <a:pPr algn="l"/>
+            <a:r>
+              <a:rPr sz="1100" b="0">
+                <a:ea typeface="Malgun Gothic"/>
+                <a:latin typeface="Malgun Gothic"/>
+              </a:rPr>
+              <a:t>•  → SHAP 부호·agreement 라벨이 일반 고객에 어려움</a:t>
+            </a:r>
+          </a:p>
+          <a:p>
+            <a:pPr algn="l"/>
+            <a:r>
+              <a:rPr sz="1100" b="0">
+                <a:ea typeface="Malgun Gothic"/>
+                <a:latin typeface="Malgun Gothic"/>
+              </a:rPr>
+              <a:t>•  NLI/G-Eval: fusion 1위 / Persona: generic 1위</a:t>
+            </a:r>
+          </a:p>
+          <a:p>
+            <a:pPr algn="l"/>
+            <a:r>
+              <a:rPr sz="1100" b="0">
+                <a:ea typeface="Malgun Gothic"/>
+                <a:latin typeface="Malgun Gothic"/>
+              </a:rPr>
+              <a:t>•  ★ 응용에 따른 mode 선택 trade-off 정량 입증</a:t>
+            </a:r>
+          </a:p>
+        </p:txBody>
+      </p:sp>
+      <p:sp>
+        <p:nvSpPr>
+          <p:cNvPr id="11" name="TextBox 10"/>
+          <p:cNvSpPr txBox="1"/>
+          <p:nvPr/>
+        </p:nvSpPr>
+        <p:spPr>
+          <a:xfrm>
+            <a:off x="7380000" y="5400000"/>
+            <a:ext cx="4680000" cy="720000"/>
+          </a:xfrm>
+          <a:prstGeom prst="rect">
+            <a:avLst/>
+          </a:prstGeom>
+          <a:noFill/>
+        </p:spPr>
+        <p:txBody>
+          <a:bodyPr wrap="square">
+            <a:spAutoFit/>
+          </a:bodyPr>
+          <a:lstStyle/>
+          <a:p>
+            <a:r>
+              <a:rPr sz="1100" b="0">
+                <a:solidFill>
+                  <a:srgbClr val="55A868"/>
+                </a:solidFill>
+                <a:ea typeface="Malgun Gothic"/>
+                <a:latin typeface="Malgun Gothic"/>
+              </a:rPr>
+              <a:t>★ 약점 #2 부분 해소 (정식 IRB는 future work)
+★ 본 연구 메시지 정교화 — 단순 우월 X, trade-off 정량</a:t>
             </a:r>
           </a:p>
         </p:txBody>
@@ -10767,7 +10599,7 @@
                 <a:ea typeface="Malgun Gothic"/>
                 <a:latin typeface="Malgun Gothic"/>
               </a:rPr>
-              <a:t>20. 한계와 향후 계획</a:t>
+              <a:t>20. 종합 — 본 연구의 가치 6가지 + Trade-off</a:t>
             </a:r>
           </a:p>
         </p:txBody>
@@ -10802,7 +10634,7 @@
                 <a:ea typeface="Malgun Gothic"/>
                 <a:latin typeface="Malgun Gothic"/>
               </a:rPr>
-              <a:t>Step 3-B/3-C/5-A/5-B 완료 / 잔여는 본 논문 확장</a:t>
+              <a:t>Step 1 + 2-A + 3-B + 3-C + 5-A + 5-B + 5-C 마무리</a:t>
             </a:r>
           </a:p>
         </p:txBody>
@@ -10852,14 +10684,376 @@
       </p:sp>
       <p:sp>
         <p:nvSpPr>
-          <p:cNvPr id="6" name="TextBox 5"/>
+          <p:cNvPr id="6" name="Rounded Rectangle 5"/>
+          <p:cNvSpPr/>
+          <p:nvPr/>
+        </p:nvSpPr>
+        <p:spPr>
+          <a:xfrm>
+            <a:off x="605847" y="1260000"/>
+            <a:ext cx="2052000" cy="3060000"/>
+          </a:xfrm>
+          <a:prstGeom prst="roundRect">
+            <a:avLst/>
+          </a:prstGeom>
+          <a:solidFill>
+            <a:srgbClr val="4C72B0"/>
+          </a:solidFill>
+          <a:ln>
+            <a:noFill/>
+          </a:ln>
+        </p:spPr>
+        <p:style>
+          <a:lnRef idx="1">
+            <a:schemeClr val="accent1"/>
+          </a:lnRef>
+          <a:fillRef idx="3">
+            <a:schemeClr val="accent1"/>
+          </a:fillRef>
+          <a:effectRef idx="2">
+            <a:schemeClr val="accent1"/>
+          </a:effectRef>
+          <a:fontRef idx="minor">
+            <a:schemeClr val="lt1"/>
+          </a:fontRef>
+        </p:style>
+        <p:txBody>
+          <a:bodyPr rtlCol="0" anchor="ctr" lIns="216000" rIns="216000" tIns="216000"/>
+          <a:lstStyle/>
+          <a:p>
+            <a:pPr algn="ctr"/>
+            <a:r>
+              <a:rPr sz="2200" b="1">
+                <a:solidFill>
+                  <a:srgbClr val="FFFFFF"/>
+                </a:solidFill>
+                <a:ea typeface="Malgun Gothic"/>
+                <a:latin typeface="Malgun Gothic"/>
+              </a:rPr>
+              <a:t>예측 성능</a:t>
+            </a:r>
+          </a:p>
+          <a:p>
+            <a:pPr algn="ctr"/>
+            <a:r>
+              <a:rPr sz="1200" b="0">
+                <a:solidFill>
+                  <a:srgbClr val="FFFFFF"/>
+                </a:solidFill>
+                <a:ea typeface="Malgun Gothic"/>
+                <a:latin typeface="Malgun Gothic"/>
+              </a:rPr>
+              <a:t>
+XGBoost 0.7587
+→ 0.7755
+(Step 3-B aux, +2.22%)
+TabNet 어텐션
+융합 컨텍스트에 통합</a:t>
+            </a:r>
+          </a:p>
+        </p:txBody>
+      </p:sp>
+      <p:sp>
+        <p:nvSpPr>
+          <p:cNvPr id="7" name="Rounded Rectangle 6"/>
+          <p:cNvSpPr/>
+          <p:nvPr/>
+        </p:nvSpPr>
+        <p:spPr>
+          <a:xfrm>
+            <a:off x="2837847" y="1260000"/>
+            <a:ext cx="2052000" cy="3060000"/>
+          </a:xfrm>
+          <a:prstGeom prst="roundRect">
+            <a:avLst/>
+          </a:prstGeom>
+          <a:solidFill>
+            <a:srgbClr val="55A868"/>
+          </a:solidFill>
+          <a:ln>
+            <a:noFill/>
+          </a:ln>
+        </p:spPr>
+        <p:style>
+          <a:lnRef idx="1">
+            <a:schemeClr val="accent1"/>
+          </a:lnRef>
+          <a:fillRef idx="3">
+            <a:schemeClr val="accent1"/>
+          </a:fillRef>
+          <a:effectRef idx="2">
+            <a:schemeClr val="accent1"/>
+          </a:effectRef>
+          <a:fontRef idx="minor">
+            <a:schemeClr val="lt1"/>
+          </a:fontRef>
+        </p:style>
+        <p:txBody>
+          <a:bodyPr rtlCol="0" anchor="ctr" lIns="216000" rIns="216000" tIns="216000"/>
+          <a:lstStyle/>
+          <a:p>
+            <a:pPr algn="ctr"/>
+            <a:r>
+              <a:rPr sz="2200" b="1">
+                <a:solidFill>
+                  <a:srgbClr val="FFFFFF"/>
+                </a:solidFill>
+                <a:ea typeface="Malgun Gothic"/>
+                <a:latin typeface="Malgun Gothic"/>
+              </a:rPr>
+              <a:t>해석 융합</a:t>
+            </a:r>
+          </a:p>
+          <a:p>
+            <a:pPr algn="ctr"/>
+            <a:r>
+              <a:rPr sz="1200" b="0">
+                <a:solidFill>
+                  <a:srgbClr val="FFFFFF"/>
+                </a:solidFill>
+                <a:ea typeface="Malgun Gothic"/>
+                <a:latin typeface="Malgun Gothic"/>
+              </a:rPr>
+              <a:t>
+ρ=0.117 부분 일관
++ instance-level
+3+ 동의 22% / 4+ 동의 0%
+agreement-aware
+컨텍스트로 LLM에
+의미 라벨 전달</a:t>
+            </a:r>
+          </a:p>
+        </p:txBody>
+      </p:sp>
+      <p:sp>
+        <p:nvSpPr>
+          <p:cNvPr id="8" name="Rounded Rectangle 7"/>
+          <p:cNvSpPr/>
+          <p:nvPr/>
+        </p:nvSpPr>
+        <p:spPr>
+          <a:xfrm>
+            <a:off x="5069847" y="1260000"/>
+            <a:ext cx="2052000" cy="3060000"/>
+          </a:xfrm>
+          <a:prstGeom prst="roundRect">
+            <a:avLst/>
+          </a:prstGeom>
+          <a:solidFill>
+            <a:srgbClr val="C44E52"/>
+          </a:solidFill>
+          <a:ln>
+            <a:noFill/>
+          </a:ln>
+        </p:spPr>
+        <p:style>
+          <a:lnRef idx="1">
+            <a:schemeClr val="accent1"/>
+          </a:lnRef>
+          <a:fillRef idx="3">
+            <a:schemeClr val="accent1"/>
+          </a:fillRef>
+          <a:effectRef idx="2">
+            <a:schemeClr val="accent1"/>
+          </a:effectRef>
+          <a:fontRef idx="minor">
+            <a:schemeClr val="lt1"/>
+          </a:fontRef>
+        </p:style>
+        <p:txBody>
+          <a:bodyPr rtlCol="0" anchor="ctr" lIns="216000" rIns="216000" tIns="216000"/>
+          <a:lstStyle/>
+          <a:p>
+            <a:pPr algn="ctr"/>
+            <a:r>
+              <a:rPr sz="2200" b="1">
+                <a:solidFill>
+                  <a:srgbClr val="FFFFFF"/>
+                </a:solidFill>
+                <a:ea typeface="Malgun Gothic"/>
+                <a:latin typeface="Malgun Gothic"/>
+              </a:rPr>
+              <a:t>환각 차단</a:t>
+            </a:r>
+          </a:p>
+          <a:p>
+            <a:pPr algn="ctr"/>
+            <a:r>
+              <a:rPr sz="1200" b="0">
+                <a:solidFill>
+                  <a:srgbClr val="FFFFFF"/>
+                </a:solidFill>
+                <a:ea typeface="Malgun Gothic"/>
+                <a:latin typeface="Malgun Gothic"/>
+              </a:rPr>
+              <a:t>
+Halluc 0/100
+(Step 1/2-A) →
+0/30 (3-C-1)
+Generic RAG도 0%
+(5-B, hard constraints
+효과 입증)
+NLI contradiction
+−0.14~−0.18</a:t>
+            </a:r>
+          </a:p>
+        </p:txBody>
+      </p:sp>
+      <p:sp>
+        <p:nvSpPr>
+          <p:cNvPr id="9" name="Rounded Rectangle 8"/>
+          <p:cNvSpPr/>
+          <p:nvPr/>
+        </p:nvSpPr>
+        <p:spPr>
+          <a:xfrm>
+            <a:off x="7301847" y="1260000"/>
+            <a:ext cx="2052000" cy="3060000"/>
+          </a:xfrm>
+          <a:prstGeom prst="roundRect">
+            <a:avLst/>
+          </a:prstGeom>
+          <a:solidFill>
+            <a:srgbClr val="DD8552"/>
+          </a:solidFill>
+          <a:ln>
+            <a:noFill/>
+          </a:ln>
+        </p:spPr>
+        <p:style>
+          <a:lnRef idx="1">
+            <a:schemeClr val="accent1"/>
+          </a:lnRef>
+          <a:fillRef idx="3">
+            <a:schemeClr val="accent1"/>
+          </a:fillRef>
+          <a:effectRef idx="2">
+            <a:schemeClr val="accent1"/>
+          </a:effectRef>
+          <a:fontRef idx="minor">
+            <a:schemeClr val="lt1"/>
+          </a:fontRef>
+        </p:style>
+        <p:txBody>
+          <a:bodyPr rtlCol="0" anchor="ctr" lIns="216000" rIns="216000" tIns="216000"/>
+          <a:lstStyle/>
+          <a:p>
+            <a:pPr algn="ctr"/>
+            <a:r>
+              <a:rPr sz="2200" b="1">
+                <a:solidFill>
+                  <a:srgbClr val="FFFFFF"/>
+                </a:solidFill>
+                <a:ea typeface="Malgun Gothic"/>
+                <a:latin typeface="Malgun Gothic"/>
+              </a:rPr>
+              <a:t>완결성·충실성</a:t>
+            </a:r>
+          </a:p>
+          <a:p>
+            <a:pPr algn="ctr"/>
+            <a:r>
+              <a:rPr sz="1200" b="0">
+                <a:solidFill>
+                  <a:srgbClr val="FFFFFF"/>
+                </a:solidFill>
+                <a:ea typeface="Malgun Gothic"/>
+                <a:latin typeface="Malgun Gothic"/>
+              </a:rPr>
+              <a:t>
+G-Eval Compl.
+Claude +0.67~+0.80
+Gemini +0.90~+1.10
+NLI Entailment 4단계:
+.27→.37→.51→.62
+(no→gen→shap→fus)
+★ fusion이 압도</a:t>
+            </a:r>
+          </a:p>
+        </p:txBody>
+      </p:sp>
+      <p:sp>
+        <p:nvSpPr>
+          <p:cNvPr id="10" name="Rounded Rectangle 9"/>
+          <p:cNvSpPr/>
+          <p:nvPr/>
+        </p:nvSpPr>
+        <p:spPr>
+          <a:xfrm>
+            <a:off x="9533847" y="1260000"/>
+            <a:ext cx="2052000" cy="3060000"/>
+          </a:xfrm>
+          <a:prstGeom prst="roundRect">
+            <a:avLst/>
+          </a:prstGeom>
+          <a:solidFill>
+            <a:srgbClr val="8C71B7"/>
+          </a:solidFill>
+          <a:ln>
+            <a:noFill/>
+          </a:ln>
+        </p:spPr>
+        <p:style>
+          <a:lnRef idx="1">
+            <a:schemeClr val="accent1"/>
+          </a:lnRef>
+          <a:fillRef idx="3">
+            <a:schemeClr val="accent1"/>
+          </a:fillRef>
+          <a:effectRef idx="2">
+            <a:schemeClr val="accent1"/>
+          </a:effectRef>
+          <a:fontRef idx="minor">
+            <a:schemeClr val="lt1"/>
+          </a:fontRef>
+        </p:style>
+        <p:txBody>
+          <a:bodyPr rtlCol="0" anchor="ctr" lIns="216000" rIns="216000" tIns="216000"/>
+          <a:lstStyle/>
+          <a:p>
+            <a:pPr algn="ctr"/>
+            <a:r>
+              <a:rPr sz="2200" b="1">
+                <a:solidFill>
+                  <a:srgbClr val="FFFFFF"/>
+                </a:solidFill>
+                <a:ea typeface="Malgun Gothic"/>
+                <a:latin typeface="Malgun Gothic"/>
+              </a:rPr>
+              <a:t>공정성 mitigation</a:t>
+            </a:r>
+          </a:p>
+          <a:p>
+            <a:pPr algn="ctr"/>
+            <a:r>
+              <a:rPr sz="1200" b="0">
+                <a:solidFill>
+                  <a:srgbClr val="FFFFFF"/>
+                </a:solidFill>
+                <a:ea typeface="Malgun Gothic"/>
+                <a:latin typeface="Malgun Gothic"/>
+              </a:rPr>
+              <a:t>
+Day 5: 8/8 4/5 rule
+위반 진단
+Reweighing:
+4/4 케이스 통과 ✅
+aux 데이터 trade-off
+사라짐 (+0.003 AUROC)</a:t>
+            </a:r>
+          </a:p>
+        </p:txBody>
+      </p:sp>
+      <p:sp>
+        <p:nvSpPr>
+          <p:cNvPr id="11" name="TextBox 10"/>
           <p:cNvSpPr txBox="1"/>
           <p:nvPr/>
         </p:nvSpPr>
         <p:spPr>
           <a:xfrm>
-            <a:off x="360000" y="1080000"/>
-            <a:ext cx="5400000" cy="360000"/>
+            <a:off x="360000" y="4680000"/>
+            <a:ext cx="11160000" cy="540000"/>
           </a:xfrm>
           <a:prstGeom prst="rect">
             <a:avLst/>
@@ -10872,29 +11066,30 @@
           </a:bodyPr>
           <a:lstStyle/>
           <a:p>
+            <a:pPr algn="ctr"/>
             <a:r>
               <a:rPr sz="1600" b="1">
                 <a:solidFill>
-                  <a:srgbClr val="C44E52"/>
-                </a:solidFill>
-                <a:ea typeface="Malgun Gothic"/>
-                <a:latin typeface="Malgun Gothic"/>
-              </a:rPr>
-              <a:t>현재 한계 / 진행 중</a:t>
-            </a:r>
-          </a:p>
-        </p:txBody>
-      </p:sp>
-      <p:sp>
-        <p:nvSpPr>
-          <p:cNvPr id="7" name="TextBox 6"/>
+                  <a:srgbClr val="1F3A68"/>
+                </a:solidFill>
+                <a:ea typeface="Malgun Gothic"/>
+                <a:latin typeface="Malgun Gothic"/>
+              </a:rPr>
+              <a:t>한 줄 메시지</a:t>
+            </a:r>
+          </a:p>
+        </p:txBody>
+      </p:sp>
+      <p:sp>
+        <p:nvSpPr>
+          <p:cNvPr id="12" name="TextBox 11"/>
           <p:cNvSpPr txBox="1"/>
           <p:nvPr/>
         </p:nvSpPr>
         <p:spPr>
           <a:xfrm>
-            <a:off x="540000" y="1440000"/>
-            <a:ext cx="5400000" cy="4680000"/>
+            <a:off x="360000" y="5220000"/>
+            <a:ext cx="11160000" cy="720000"/>
           </a:xfrm>
           <a:prstGeom prst="rect">
             <a:avLst/>
@@ -10907,201 +11102,17 @@
           </a:bodyPr>
           <a:lstStyle/>
           <a:p>
-            <a:pPr algn="l"/>
-            <a:r>
-              <a:rPr sz="1300" b="0">
-                <a:ea typeface="Malgun Gothic"/>
-                <a:latin typeface="Malgun Gothic"/>
-              </a:rPr>
-              <a:t>•  Fusion 평가 표본 30명 — 100명+ 확장 검토</a:t>
-            </a:r>
-          </a:p>
-          <a:p>
-            <a:pPr algn="l"/>
-            <a:r>
-              <a:rPr sz="1300" b="0">
-                <a:ea typeface="Malgun Gothic"/>
-                <a:latin typeface="Malgun Gothic"/>
-              </a:rPr>
-              <a:t>•  인간평가 (Plausibility) 미수행 — IRB 절차 필요 ★ 1순위</a:t>
-            </a:r>
-          </a:p>
-          <a:p>
-            <a:pPr algn="l"/>
-            <a:r>
-              <a:rPr sz="1300" b="0">
-                <a:ea typeface="Malgun Gothic"/>
-                <a:latin typeface="Malgun Gothic"/>
-              </a:rPr>
-              <a:t>•  데이터 단일 (Home Credit) — UCI German Credit 미검증 ★ 2순위</a:t>
-            </a:r>
-          </a:p>
-          <a:p>
-            <a:pPr algn="l"/>
-            <a:r>
-              <a:rPr sz="1300" b="0">
-                <a:ea typeface="Malgun Gothic"/>
-                <a:latin typeface="Malgun Gothic"/>
-              </a:rPr>
-              <a:t>•  보조 테이블 2/6개 활용 (Step 3-B) — 4개 잔여</a:t>
-            </a:r>
-          </a:p>
-          <a:p>
-            <a:pPr algn="l"/>
-            <a:r>
-              <a:rPr sz="1300" b="0">
-                <a:ea typeface="Malgun Gothic"/>
-                <a:latin typeface="Malgun Gothic"/>
-              </a:rPr>
-              <a:t>•  Bureau의 SHAP 미진입 — EXT_SOURCE 응축 가설 검증 필요</a:t>
-            </a:r>
-          </a:p>
-          <a:p>
-            <a:pPr algn="l"/>
-            <a:r>
-              <a:rPr sz="1300" b="0">
-                <a:ea typeface="Malgun Gothic"/>
-                <a:latin typeface="Malgun Gothic"/>
-              </a:rPr>
-              <a:t>•  TabNet-only 컨텍스트 ablation 미수행 (3-way)</a:t>
-            </a:r>
-          </a:p>
-          <a:p>
-            <a:pPr algn="l"/>
-            <a:r>
-              <a:rPr sz="1300" b="0">
-                <a:ea typeface="Malgun Gothic"/>
-                <a:latin typeface="Malgun Gothic"/>
-              </a:rPr>
-              <a:t>•  no_shap 표본 작음 (n=2 in 30 idx) — 표본 확장 필요</a:t>
-            </a:r>
-          </a:p>
-        </p:txBody>
-      </p:sp>
-      <p:sp>
-        <p:nvSpPr>
-          <p:cNvPr id="8" name="TextBox 7"/>
-          <p:cNvSpPr txBox="1"/>
-          <p:nvPr/>
-        </p:nvSpPr>
-        <p:spPr>
-          <a:xfrm>
-            <a:off x="6120000" y="1080000"/>
-            <a:ext cx="5400000" cy="360000"/>
-          </a:xfrm>
-          <a:prstGeom prst="rect">
-            <a:avLst/>
-          </a:prstGeom>
-          <a:noFill/>
-        </p:spPr>
-        <p:txBody>
-          <a:bodyPr wrap="square">
-            <a:spAutoFit/>
-          </a:bodyPr>
-          <a:lstStyle/>
-          <a:p>
-            <a:r>
-              <a:rPr sz="1600" b="1">
-                <a:solidFill>
-                  <a:srgbClr val="55A868"/>
-                </a:solidFill>
-                <a:ea typeface="Malgun Gothic"/>
-                <a:latin typeface="Malgun Gothic"/>
-              </a:rPr>
-              <a:t>향후 계획</a:t>
-            </a:r>
-          </a:p>
-        </p:txBody>
-      </p:sp>
-      <p:sp>
-        <p:nvSpPr>
-          <p:cNvPr id="9" name="TextBox 8"/>
-          <p:cNvSpPr txBox="1"/>
-          <p:nvPr/>
-        </p:nvSpPr>
-        <p:spPr>
-          <a:xfrm>
-            <a:off x="6300000" y="1440000"/>
-            <a:ext cx="5400000" cy="4680000"/>
-          </a:xfrm>
-          <a:prstGeom prst="rect">
-            <a:avLst/>
-          </a:prstGeom>
-          <a:noFill/>
-        </p:spPr>
-        <p:txBody>
-          <a:bodyPr wrap="square">
-            <a:spAutoFit/>
-          </a:bodyPr>
-          <a:lstStyle/>
-          <a:p>
-            <a:pPr algn="l"/>
-            <a:r>
-              <a:rPr sz="1300" b="0">
-                <a:ea typeface="Malgun Gothic"/>
-                <a:latin typeface="Malgun Gothic"/>
-              </a:rPr>
-              <a:t>•  인간 평가 (Plausibility) — IRB + 5점 척도, Cohen's κ ★ 1순위</a:t>
-            </a:r>
-          </a:p>
-          <a:p>
-            <a:pPr algn="l"/>
-            <a:r>
-              <a:rPr sz="1300" b="0">
-                <a:ea typeface="Malgun Gothic"/>
-                <a:latin typeface="Malgun Gothic"/>
-              </a:rPr>
-              <a:t>•  UCI German Credit 일반화 ★ 2순위</a:t>
-            </a:r>
-          </a:p>
-          <a:p>
-            <a:pPr algn="l"/>
-            <a:r>
-              <a:rPr sz="1300" b="0">
-                <a:ea typeface="Malgun Gothic"/>
-                <a:latin typeface="Malgun Gothic"/>
-              </a:rPr>
-              <a:t>•  3-way ablation: SHAP-only / Attn-only / Fusion ★ 3순위</a:t>
-            </a:r>
-          </a:p>
-          <a:p>
-            <a:pPr algn="l"/>
-            <a:r>
-              <a:rPr sz="1300" b="0">
-                <a:ea typeface="Malgun Gothic"/>
-                <a:latin typeface="Malgun Gothic"/>
-              </a:rPr>
-              <a:t>•  Bureau ablation — EXT_SOURCE 응축 가설 검증</a:t>
-            </a:r>
-          </a:p>
-          <a:p>
-            <a:pPr algn="l"/>
-            <a:r>
-              <a:rPr sz="1300" b="0">
-                <a:ea typeface="Malgun Gothic"/>
-                <a:latin typeface="Malgun Gothic"/>
-              </a:rPr>
-              <a:t>•  Fusion 표본 100명 확장 + counterfactual 결합</a:t>
-            </a:r>
-          </a:p>
-          <a:p>
-            <a:pPr algn="l"/>
-            <a:r>
-              <a:rPr sz="1300" b="0">
-                <a:ea typeface="Malgun Gothic"/>
-                <a:latin typeface="Malgun Gothic"/>
-              </a:rPr>
-              <a:t>•  잔여 보조 테이블 4개로 AUROC 0.78+</a:t>
-            </a:r>
-          </a:p>
-          <a:p>
-            <a:pPr algn="l"/>
-            <a:r>
-              <a:rPr sz="1300" b="0">
-                <a:ea typeface="Malgun Gothic"/>
-                <a:latin typeface="Malgun Gothic"/>
-              </a:rPr>
-              <a:t>•  Adversarial Debiasing (TabNet head) — Reweighing 보완</a:t>
+            <a:pPr algn="ctr"/>
+            <a:r>
+              <a:rPr sz="1800" b="1">
+                <a:solidFill>
+                  <a:srgbClr val="222222"/>
+                </a:solidFill>
+                <a:ea typeface="Malgun Gothic"/>
+                <a:latin typeface="Malgun Gothic"/>
+              </a:rPr>
+              <a:t>"SHAP 컨텍스트를 LLM의 검색된 근거로 재정의하면,
+LLM 종속성 없이 환각이 0이 되는 자연어 설명을 생성할 수 있다."</a:t>
             </a:r>
           </a:p>
         </p:txBody>
@@ -11115,6 +11126,436 @@
 </file>
 
 <file path=ppt/slides/slide22.xml><?xml version="1.0" encoding="utf-8"?>
+<p:sld xmlns:a="http://schemas.openxmlformats.org/drawingml/2006/main" xmlns:p="http://schemas.openxmlformats.org/presentationml/2006/main" xmlns:r="http://schemas.openxmlformats.org/officeDocument/2006/relationships">
+  <p:cSld>
+    <p:spTree>
+      <p:nvGrpSpPr>
+        <p:cNvPr id="1" name=""/>
+        <p:cNvGrpSpPr/>
+        <p:nvPr/>
+      </p:nvGrpSpPr>
+      <p:grpSpPr/>
+      <p:sp>
+        <p:nvSpPr>
+          <p:cNvPr id="2" name="Rectangle 1"/>
+          <p:cNvSpPr/>
+          <p:nvPr/>
+        </p:nvSpPr>
+        <p:spPr>
+          <a:xfrm>
+            <a:off x="0" y="0"/>
+            <a:ext cx="180000" cy="720000"/>
+          </a:xfrm>
+          <a:prstGeom prst="rect">
+            <a:avLst/>
+          </a:prstGeom>
+          <a:solidFill>
+            <a:srgbClr val="1F3A68"/>
+          </a:solidFill>
+          <a:ln>
+            <a:noFill/>
+          </a:ln>
+        </p:spPr>
+        <p:style>
+          <a:lnRef idx="1">
+            <a:schemeClr val="accent1"/>
+          </a:lnRef>
+          <a:fillRef idx="3">
+            <a:schemeClr val="accent1"/>
+          </a:fillRef>
+          <a:effectRef idx="2">
+            <a:schemeClr val="accent1"/>
+          </a:effectRef>
+          <a:fontRef idx="minor">
+            <a:schemeClr val="lt1"/>
+          </a:fontRef>
+        </p:style>
+        <p:txBody>
+          <a:bodyPr rtlCol="0" anchor="ctr"/>
+          <a:lstStyle/>
+          <a:p>
+            <a:pPr algn="ctr"/>
+          </a:p>
+        </p:txBody>
+      </p:sp>
+      <p:sp>
+        <p:nvSpPr>
+          <p:cNvPr id="3" name="TextBox 2"/>
+          <p:cNvSpPr txBox="1"/>
+          <p:nvPr/>
+        </p:nvSpPr>
+        <p:spPr>
+          <a:xfrm>
+            <a:off x="360000" y="144000"/>
+            <a:ext cx="10800000" cy="360000"/>
+          </a:xfrm>
+          <a:prstGeom prst="rect">
+            <a:avLst/>
+          </a:prstGeom>
+          <a:noFill/>
+        </p:spPr>
+        <p:txBody>
+          <a:bodyPr wrap="square">
+            <a:spAutoFit/>
+          </a:bodyPr>
+          <a:lstStyle/>
+          <a:p>
+            <a:r>
+              <a:rPr sz="2400" b="1">
+                <a:solidFill>
+                  <a:srgbClr val="1F3A68"/>
+                </a:solidFill>
+                <a:ea typeface="Malgun Gothic"/>
+                <a:latin typeface="Malgun Gothic"/>
+              </a:rPr>
+              <a:t>21. 한계와 향후 계획</a:t>
+            </a:r>
+          </a:p>
+        </p:txBody>
+      </p:sp>
+      <p:sp>
+        <p:nvSpPr>
+          <p:cNvPr id="4" name="TextBox 3"/>
+          <p:cNvSpPr txBox="1"/>
+          <p:nvPr/>
+        </p:nvSpPr>
+        <p:spPr>
+          <a:xfrm>
+            <a:off x="360000" y="503999"/>
+            <a:ext cx="10800000" cy="288000"/>
+          </a:xfrm>
+          <a:prstGeom prst="rect">
+            <a:avLst/>
+          </a:prstGeom>
+          <a:noFill/>
+        </p:spPr>
+        <p:txBody>
+          <a:bodyPr wrap="square">
+            <a:spAutoFit/>
+          </a:bodyPr>
+          <a:lstStyle/>
+          <a:p>
+            <a:r>
+              <a:rPr sz="1200" b="0">
+                <a:solidFill>
+                  <a:srgbClr val="555555"/>
+                </a:solidFill>
+                <a:ea typeface="Malgun Gothic"/>
+                <a:latin typeface="Malgun Gothic"/>
+              </a:rPr>
+              <a:t>Step 3-B/3-C/5-A/5-B/5-C 완료 / 잔여는 본 논문 확장</a:t>
+            </a:r>
+          </a:p>
+        </p:txBody>
+      </p:sp>
+      <p:sp>
+        <p:nvSpPr>
+          <p:cNvPr id="5" name="Rectangle 4"/>
+          <p:cNvSpPr/>
+          <p:nvPr/>
+        </p:nvSpPr>
+        <p:spPr>
+          <a:xfrm>
+            <a:off x="360000" y="864000"/>
+            <a:ext cx="11340000" cy="18000"/>
+          </a:xfrm>
+          <a:prstGeom prst="rect">
+            <a:avLst/>
+          </a:prstGeom>
+          <a:solidFill>
+            <a:srgbClr val="CCCCCC"/>
+          </a:solidFill>
+          <a:ln>
+            <a:noFill/>
+          </a:ln>
+        </p:spPr>
+        <p:style>
+          <a:lnRef idx="1">
+            <a:schemeClr val="accent1"/>
+          </a:lnRef>
+          <a:fillRef idx="3">
+            <a:schemeClr val="accent1"/>
+          </a:fillRef>
+          <a:effectRef idx="2">
+            <a:schemeClr val="accent1"/>
+          </a:effectRef>
+          <a:fontRef idx="minor">
+            <a:schemeClr val="lt1"/>
+          </a:fontRef>
+        </p:style>
+        <p:txBody>
+          <a:bodyPr rtlCol="0" anchor="ctr"/>
+          <a:lstStyle/>
+          <a:p>
+            <a:pPr algn="ctr"/>
+          </a:p>
+        </p:txBody>
+      </p:sp>
+      <p:sp>
+        <p:nvSpPr>
+          <p:cNvPr id="6" name="TextBox 5"/>
+          <p:cNvSpPr txBox="1"/>
+          <p:nvPr/>
+        </p:nvSpPr>
+        <p:spPr>
+          <a:xfrm>
+            <a:off x="360000" y="1080000"/>
+            <a:ext cx="5400000" cy="360000"/>
+          </a:xfrm>
+          <a:prstGeom prst="rect">
+            <a:avLst/>
+          </a:prstGeom>
+          <a:noFill/>
+        </p:spPr>
+        <p:txBody>
+          <a:bodyPr wrap="square">
+            <a:spAutoFit/>
+          </a:bodyPr>
+          <a:lstStyle/>
+          <a:p>
+            <a:r>
+              <a:rPr sz="1600" b="1">
+                <a:solidFill>
+                  <a:srgbClr val="C44E52"/>
+                </a:solidFill>
+                <a:ea typeface="Malgun Gothic"/>
+                <a:latin typeface="Malgun Gothic"/>
+              </a:rPr>
+              <a:t>현재 한계 / 진행 중</a:t>
+            </a:r>
+          </a:p>
+        </p:txBody>
+      </p:sp>
+      <p:sp>
+        <p:nvSpPr>
+          <p:cNvPr id="7" name="TextBox 6"/>
+          <p:cNvSpPr txBox="1"/>
+          <p:nvPr/>
+        </p:nvSpPr>
+        <p:spPr>
+          <a:xfrm>
+            <a:off x="540000" y="1440000"/>
+            <a:ext cx="5400000" cy="4680000"/>
+          </a:xfrm>
+          <a:prstGeom prst="rect">
+            <a:avLst/>
+          </a:prstGeom>
+          <a:noFill/>
+        </p:spPr>
+        <p:txBody>
+          <a:bodyPr wrap="square">
+            <a:spAutoFit/>
+          </a:bodyPr>
+          <a:lstStyle/>
+          <a:p>
+            <a:pPr algn="l"/>
+            <a:r>
+              <a:rPr sz="1300" b="0">
+                <a:ea typeface="Malgun Gothic"/>
+                <a:latin typeface="Malgun Gothic"/>
+              </a:rPr>
+              <a:t>•  ★ Customer clarity 약점 (SHAP-RAG/Fusion 2.67~2.80) — 표현 정제 필요</a:t>
+            </a:r>
+          </a:p>
+          <a:p>
+            <a:pPr algn="l"/>
+            <a:r>
+              <a:rPr sz="1300" b="0">
+                <a:ea typeface="Malgun Gothic"/>
+                <a:latin typeface="Malgun Gothic"/>
+              </a:rPr>
+              <a:t>•  정식 IRB 인간평가 미수행 (pilot human-proxy로 부분 해소) ★ 1순위 (장기)</a:t>
+            </a:r>
+          </a:p>
+          <a:p>
+            <a:pPr algn="l"/>
+            <a:r>
+              <a:rPr sz="1300" b="0">
+                <a:ea typeface="Malgun Gothic"/>
+                <a:latin typeface="Malgun Gothic"/>
+              </a:rPr>
+              <a:t>•  데이터 단일 (Home Credit) — UCI German Credit 미검증 ★ 2순위</a:t>
+            </a:r>
+          </a:p>
+          <a:p>
+            <a:pPr algn="l"/>
+            <a:r>
+              <a:rPr sz="1300" b="0">
+                <a:ea typeface="Malgun Gothic"/>
+                <a:latin typeface="Malgun Gothic"/>
+              </a:rPr>
+              <a:t>•  Fusion 평가 표본 30명 — 100명+ 확장 검토</a:t>
+            </a:r>
+          </a:p>
+          <a:p>
+            <a:pPr algn="l"/>
+            <a:r>
+              <a:rPr sz="1300" b="0">
+                <a:ea typeface="Malgun Gothic"/>
+                <a:latin typeface="Malgun Gothic"/>
+              </a:rPr>
+              <a:t>•  보조 테이블 2/6개 활용 — 4개 잔여</a:t>
+            </a:r>
+          </a:p>
+          <a:p>
+            <a:pPr algn="l"/>
+            <a:r>
+              <a:rPr sz="1300" b="0">
+                <a:ea typeface="Malgun Gothic"/>
+                <a:latin typeface="Malgun Gothic"/>
+              </a:rPr>
+              <a:t>•  Bureau의 SHAP 미진입 — EXT_SOURCE 응축 가설 검증</a:t>
+            </a:r>
+          </a:p>
+          <a:p>
+            <a:pPr algn="l"/>
+            <a:r>
+              <a:rPr sz="1300" b="0">
+                <a:ea typeface="Malgun Gothic"/>
+                <a:latin typeface="Malgun Gothic"/>
+              </a:rPr>
+              <a:t>•  TabNet-only 컨텍스트 ablation 미수행 (3-way)</a:t>
+            </a:r>
+          </a:p>
+        </p:txBody>
+      </p:sp>
+      <p:sp>
+        <p:nvSpPr>
+          <p:cNvPr id="8" name="TextBox 7"/>
+          <p:cNvSpPr txBox="1"/>
+          <p:nvPr/>
+        </p:nvSpPr>
+        <p:spPr>
+          <a:xfrm>
+            <a:off x="6120000" y="1080000"/>
+            <a:ext cx="5400000" cy="360000"/>
+          </a:xfrm>
+          <a:prstGeom prst="rect">
+            <a:avLst/>
+          </a:prstGeom>
+          <a:noFill/>
+        </p:spPr>
+        <p:txBody>
+          <a:bodyPr wrap="square">
+            <a:spAutoFit/>
+          </a:bodyPr>
+          <a:lstStyle/>
+          <a:p>
+            <a:r>
+              <a:rPr sz="1600" b="1">
+                <a:solidFill>
+                  <a:srgbClr val="55A868"/>
+                </a:solidFill>
+                <a:ea typeface="Malgun Gothic"/>
+                <a:latin typeface="Malgun Gothic"/>
+              </a:rPr>
+              <a:t>향후 계획</a:t>
+            </a:r>
+          </a:p>
+        </p:txBody>
+      </p:sp>
+      <p:sp>
+        <p:nvSpPr>
+          <p:cNvPr id="9" name="TextBox 8"/>
+          <p:cNvSpPr txBox="1"/>
+          <p:nvPr/>
+        </p:nvSpPr>
+        <p:spPr>
+          <a:xfrm>
+            <a:off x="6300000" y="1440000"/>
+            <a:ext cx="5400000" cy="4680000"/>
+          </a:xfrm>
+          <a:prstGeom prst="rect">
+            <a:avLst/>
+          </a:prstGeom>
+          <a:noFill/>
+        </p:spPr>
+        <p:txBody>
+          <a:bodyPr wrap="square">
+            <a:spAutoFit/>
+          </a:bodyPr>
+          <a:lstStyle/>
+          <a:p>
+            <a:pPr algn="l"/>
+            <a:r>
+              <a:rPr sz="1300" b="0">
+                <a:ea typeface="Malgun Gothic"/>
+                <a:latin typeface="Malgun Gothic"/>
+              </a:rPr>
+              <a:t>•  UCI German Credit 일반화 ★ 1순위</a:t>
+            </a:r>
+          </a:p>
+          <a:p>
+            <a:pPr algn="l"/>
+            <a:r>
+              <a:rPr sz="1300" b="0">
+                <a:ea typeface="Malgun Gothic"/>
+                <a:latin typeface="Malgun Gothic"/>
+              </a:rPr>
+              <a:t>•  Customer-friendly 표현 정제 — Step 5-C 발견 대응</a:t>
+            </a:r>
+          </a:p>
+          <a:p>
+            <a:pPr algn="l"/>
+            <a:r>
+              <a:rPr sz="1300" b="0">
+                <a:ea typeface="Malgun Gothic"/>
+                <a:latin typeface="Malgun Gothic"/>
+              </a:rPr>
+              <a:t>•  정식 IRB 인간평가 (Cohen's κ + 다수 평가자)</a:t>
+            </a:r>
+          </a:p>
+          <a:p>
+            <a:pPr algn="l"/>
+            <a:r>
+              <a:rPr sz="1300" b="0">
+                <a:ea typeface="Malgun Gothic"/>
+                <a:latin typeface="Malgun Gothic"/>
+              </a:rPr>
+              <a:t>•  3-way ablation: SHAP-only / Attn-only / Fusion</a:t>
+            </a:r>
+          </a:p>
+          <a:p>
+            <a:pPr algn="l"/>
+            <a:r>
+              <a:rPr sz="1300" b="0">
+                <a:ea typeface="Malgun Gothic"/>
+                <a:latin typeface="Malgun Gothic"/>
+              </a:rPr>
+              <a:t>•  Bureau ablation + 잔여 보조 테이블 4개</a:t>
+            </a:r>
+          </a:p>
+          <a:p>
+            <a:pPr algn="l"/>
+            <a:r>
+              <a:rPr sz="1300" b="0">
+                <a:ea typeface="Malgun Gothic"/>
+                <a:latin typeface="Malgun Gothic"/>
+              </a:rPr>
+              <a:t>•  Fusion 표본 100명 확장</a:t>
+            </a:r>
+          </a:p>
+          <a:p>
+            <a:pPr algn="l"/>
+            <a:r>
+              <a:rPr sz="1300" b="0">
+                <a:ea typeface="Malgun Gothic"/>
+                <a:latin typeface="Malgun Gothic"/>
+              </a:rPr>
+              <a:t>•  Adversarial Debiasing (TabNet head)</a:t>
+            </a:r>
+          </a:p>
+        </p:txBody>
+      </p:sp>
+    </p:spTree>
+  </p:cSld>
+  <p:clrMapOvr>
+    <a:masterClrMapping/>
+  </p:clrMapOvr>
+</p:sld>
+</file>
+
+<file path=ppt/slides/slide23.xml><?xml version="1.0" encoding="utf-8"?>
 <p:sld xmlns:a="http://schemas.openxmlformats.org/drawingml/2006/main" xmlns:p="http://schemas.openxmlformats.org/presentationml/2006/main" xmlns:r="http://schemas.openxmlformats.org/officeDocument/2006/relationships">
   <p:cSld>
     <p:spTree>
